--- a/Final/Figures/A_C_longitudinal.pptx
+++ b/Final/Figures/A_C_longitudinal.pptx
@@ -6,6 +6,7 @@
   </p:sldMasterIdLst>
   <p:sldIdLst>
     <p:sldId id="256" r:id="rId2"/>
+    <p:sldId id="257" r:id="rId3"/>
   </p:sldIdLst>
   <p:sldSz cx="9906000" cy="6119813"/>
   <p:notesSz cx="6858000" cy="9144000"/>
@@ -243,7 +244,7 @@
           <a:p>
             <a:fld id="{CC6FB895-B65F-4EA9-9907-69D32227E72B}" type="datetimeFigureOut">
               <a:rPr lang="zh-TW" altLang="en-US" smtClean="0"/>
-              <a:t>2026/6/18</a:t>
+              <a:t>2026/7/2</a:t>
             </a:fld>
             <a:endParaRPr lang="zh-TW" altLang="en-US"/>
           </a:p>
@@ -413,7 +414,7 @@
           <a:p>
             <a:fld id="{CC6FB895-B65F-4EA9-9907-69D32227E72B}" type="datetimeFigureOut">
               <a:rPr lang="zh-TW" altLang="en-US" smtClean="0"/>
-              <a:t>2026/6/18</a:t>
+              <a:t>2026/7/2</a:t>
             </a:fld>
             <a:endParaRPr lang="zh-TW" altLang="en-US"/>
           </a:p>
@@ -593,7 +594,7 @@
           <a:p>
             <a:fld id="{CC6FB895-B65F-4EA9-9907-69D32227E72B}" type="datetimeFigureOut">
               <a:rPr lang="zh-TW" altLang="en-US" smtClean="0"/>
-              <a:t>2026/6/18</a:t>
+              <a:t>2026/7/2</a:t>
             </a:fld>
             <a:endParaRPr lang="zh-TW" altLang="en-US"/>
           </a:p>
@@ -763,7 +764,7 @@
           <a:p>
             <a:fld id="{CC6FB895-B65F-4EA9-9907-69D32227E72B}" type="datetimeFigureOut">
               <a:rPr lang="zh-TW" altLang="en-US" smtClean="0"/>
-              <a:t>2026/6/18</a:t>
+              <a:t>2026/7/2</a:t>
             </a:fld>
             <a:endParaRPr lang="zh-TW" altLang="en-US"/>
           </a:p>
@@ -1009,7 +1010,7 @@
           <a:p>
             <a:fld id="{CC6FB895-B65F-4EA9-9907-69D32227E72B}" type="datetimeFigureOut">
               <a:rPr lang="zh-TW" altLang="en-US" smtClean="0"/>
-              <a:t>2026/6/18</a:t>
+              <a:t>2026/7/2</a:t>
             </a:fld>
             <a:endParaRPr lang="zh-TW" altLang="en-US"/>
           </a:p>
@@ -1241,7 +1242,7 @@
           <a:p>
             <a:fld id="{CC6FB895-B65F-4EA9-9907-69D32227E72B}" type="datetimeFigureOut">
               <a:rPr lang="zh-TW" altLang="en-US" smtClean="0"/>
-              <a:t>2026/6/18</a:t>
+              <a:t>2026/7/2</a:t>
             </a:fld>
             <a:endParaRPr lang="zh-TW" altLang="en-US"/>
           </a:p>
@@ -1608,7 +1609,7 @@
           <a:p>
             <a:fld id="{CC6FB895-B65F-4EA9-9907-69D32227E72B}" type="datetimeFigureOut">
               <a:rPr lang="zh-TW" altLang="en-US" smtClean="0"/>
-              <a:t>2026/6/18</a:t>
+              <a:t>2026/7/2</a:t>
             </a:fld>
             <a:endParaRPr lang="zh-TW" altLang="en-US"/>
           </a:p>
@@ -1726,7 +1727,7 @@
           <a:p>
             <a:fld id="{CC6FB895-B65F-4EA9-9907-69D32227E72B}" type="datetimeFigureOut">
               <a:rPr lang="zh-TW" altLang="en-US" smtClean="0"/>
-              <a:t>2026/6/18</a:t>
+              <a:t>2026/7/2</a:t>
             </a:fld>
             <a:endParaRPr lang="zh-TW" altLang="en-US"/>
           </a:p>
@@ -1821,7 +1822,7 @@
           <a:p>
             <a:fld id="{CC6FB895-B65F-4EA9-9907-69D32227E72B}" type="datetimeFigureOut">
               <a:rPr lang="zh-TW" altLang="en-US" smtClean="0"/>
-              <a:t>2026/6/18</a:t>
+              <a:t>2026/7/2</a:t>
             </a:fld>
             <a:endParaRPr lang="zh-TW" altLang="en-US"/>
           </a:p>
@@ -2098,7 +2099,7 @@
           <a:p>
             <a:fld id="{CC6FB895-B65F-4EA9-9907-69D32227E72B}" type="datetimeFigureOut">
               <a:rPr lang="zh-TW" altLang="en-US" smtClean="0"/>
-              <a:t>2026/6/18</a:t>
+              <a:t>2026/7/2</a:t>
             </a:fld>
             <a:endParaRPr lang="zh-TW" altLang="en-US"/>
           </a:p>
@@ -2355,7 +2356,7 @@
           <a:p>
             <a:fld id="{CC6FB895-B65F-4EA9-9907-69D32227E72B}" type="datetimeFigureOut">
               <a:rPr lang="zh-TW" altLang="en-US" smtClean="0"/>
-              <a:t>2026/6/18</a:t>
+              <a:t>2026/7/2</a:t>
             </a:fld>
             <a:endParaRPr lang="zh-TW" altLang="en-US"/>
           </a:p>
@@ -2568,7 +2569,7 @@
           <a:p>
             <a:fld id="{CC6FB895-B65F-4EA9-9907-69D32227E72B}" type="datetimeFigureOut">
               <a:rPr lang="zh-TW" altLang="en-US" smtClean="0"/>
-              <a:t>2026/6/18</a:t>
+              <a:t>2026/7/2</a:t>
             </a:fld>
             <a:endParaRPr lang="zh-TW" altLang="en-US"/>
           </a:p>
@@ -3301,8 +3302,8 @@
             </a:p>
           </p:txBody>
         </p:sp>
-        <mc:AlternateContent xmlns:mc="http://schemas.openxmlformats.org/markup-compatibility/2006">
-          <mc:Choice xmlns:a14="http://schemas.microsoft.com/office/drawing/2010/main" Requires="a14">
+        <mc:AlternateContent xmlns:mc="http://schemas.openxmlformats.org/markup-compatibility/2006" xmlns:a14="http://schemas.microsoft.com/office/drawing/2010/main">
+          <mc:Choice Requires="a14">
             <p:sp>
               <p:nvSpPr>
                 <p:cNvPr id="253" name="矩形 252">
@@ -3379,7 +3380,7 @@
               </p:txBody>
             </p:sp>
           </mc:Choice>
-          <mc:Fallback>
+          <mc:Fallback xmlns="">
             <p:sp>
               <p:nvSpPr>
                 <p:cNvPr id="253" name="矩形 252">
@@ -3470,7 +3471,7 @@
                           <a:rPr lang="en-US" altLang="zh-TW" sz="1630" i="1">
                             <a:latin typeface="Cambria Math" panose="02040503050406030204" pitchFamily="18" charset="0"/>
                           </a:rPr>
-                          <m:t>1</m:t>
+                          <m:t>2</m:t>
                         </m:r>
                       </m:oMath>
                     </m:oMathPara>
@@ -3632,8 +3633,8 @@
             </p:sp>
           </mc:Fallback>
         </mc:AlternateContent>
-        <mc:AlternateContent xmlns:mc="http://schemas.openxmlformats.org/markup-compatibility/2006">
-          <mc:Choice xmlns:a14="http://schemas.microsoft.com/office/drawing/2010/main" Requires="a14">
+        <mc:AlternateContent xmlns:mc="http://schemas.openxmlformats.org/markup-compatibility/2006" xmlns:a14="http://schemas.microsoft.com/office/drawing/2010/main">
+          <mc:Choice Requires="a14">
             <p:sp>
               <p:nvSpPr>
                 <p:cNvPr id="256" name="矩形 255">
@@ -3685,7 +3686,7 @@
               </p:txBody>
             </p:sp>
           </mc:Choice>
-          <mc:Fallback>
+          <mc:Fallback xmlns="">
             <p:sp>
               <p:nvSpPr>
                 <p:cNvPr id="256" name="矩形 255">
@@ -3730,8 +3731,8 @@
             </p:sp>
           </mc:Fallback>
         </mc:AlternateContent>
-        <mc:AlternateContent xmlns:mc="http://schemas.openxmlformats.org/markup-compatibility/2006">
-          <mc:Choice xmlns:a14="http://schemas.microsoft.com/office/drawing/2010/main" Requires="a14">
+        <mc:AlternateContent xmlns:mc="http://schemas.openxmlformats.org/markup-compatibility/2006" xmlns:a14="http://schemas.microsoft.com/office/drawing/2010/main">
+          <mc:Choice Requires="a14">
             <p:sp>
               <p:nvSpPr>
                 <p:cNvPr id="257" name="矩形 256">
@@ -3783,7 +3784,7 @@
               </p:txBody>
             </p:sp>
           </mc:Choice>
-          <mc:Fallback>
+          <mc:Fallback xmlns="">
             <p:sp>
               <p:nvSpPr>
                 <p:cNvPr id="257" name="矩形 256">
@@ -3828,8 +3829,8 @@
             </p:sp>
           </mc:Fallback>
         </mc:AlternateContent>
-        <mc:AlternateContent xmlns:mc="http://schemas.openxmlformats.org/markup-compatibility/2006">
-          <mc:Choice xmlns:a14="http://schemas.microsoft.com/office/drawing/2010/main" Requires="a14">
+        <mc:AlternateContent xmlns:mc="http://schemas.openxmlformats.org/markup-compatibility/2006" xmlns:a14="http://schemas.microsoft.com/office/drawing/2010/main">
+          <mc:Choice Requires="a14">
             <p:sp>
               <p:nvSpPr>
                 <p:cNvPr id="258" name="矩形 257">
@@ -3881,7 +3882,7 @@
               </p:txBody>
             </p:sp>
           </mc:Choice>
-          <mc:Fallback>
+          <mc:Fallback xmlns="">
             <p:sp>
               <p:nvSpPr>
                 <p:cNvPr id="258" name="矩形 257">
@@ -3926,8 +3927,8 @@
             </p:sp>
           </mc:Fallback>
         </mc:AlternateContent>
-        <mc:AlternateContent xmlns:mc="http://schemas.openxmlformats.org/markup-compatibility/2006">
-          <mc:Choice xmlns:a14="http://schemas.microsoft.com/office/drawing/2010/main" Requires="a14">
+        <mc:AlternateContent xmlns:mc="http://schemas.openxmlformats.org/markup-compatibility/2006" xmlns:a14="http://schemas.microsoft.com/office/drawing/2010/main">
+          <mc:Choice Requires="a14">
             <p:sp>
               <p:nvSpPr>
                 <p:cNvPr id="259" name="矩形 258">
@@ -4004,7 +4005,7 @@
               </p:txBody>
             </p:sp>
           </mc:Choice>
-          <mc:Fallback>
+          <mc:Fallback xmlns="">
             <p:sp>
               <p:nvSpPr>
                 <p:cNvPr id="259" name="矩形 258">
@@ -4049,8 +4050,8 @@
             </p:sp>
           </mc:Fallback>
         </mc:AlternateContent>
-        <mc:AlternateContent xmlns:mc="http://schemas.openxmlformats.org/markup-compatibility/2006">
-          <mc:Choice xmlns:a14="http://schemas.microsoft.com/office/drawing/2010/main" Requires="a14">
+        <mc:AlternateContent xmlns:mc="http://schemas.openxmlformats.org/markup-compatibility/2006" xmlns:a14="http://schemas.microsoft.com/office/drawing/2010/main">
+          <mc:Choice Requires="a14">
             <p:sp>
               <p:nvSpPr>
                 <p:cNvPr id="260" name="矩形 259">
@@ -4102,7 +4103,7 @@
               </p:txBody>
             </p:sp>
           </mc:Choice>
-          <mc:Fallback>
+          <mc:Fallback xmlns="">
             <p:sp>
               <p:nvSpPr>
                 <p:cNvPr id="260" name="矩形 259">
@@ -4147,8 +4148,8 @@
             </p:sp>
           </mc:Fallback>
         </mc:AlternateContent>
-        <mc:AlternateContent xmlns:mc="http://schemas.openxmlformats.org/markup-compatibility/2006">
-          <mc:Choice xmlns:a14="http://schemas.microsoft.com/office/drawing/2010/main" Requires="a14">
+        <mc:AlternateContent xmlns:mc="http://schemas.openxmlformats.org/markup-compatibility/2006" xmlns:a14="http://schemas.microsoft.com/office/drawing/2010/main">
+          <mc:Choice Requires="a14">
             <p:sp>
               <p:nvSpPr>
                 <p:cNvPr id="261" name="矩形 260">
@@ -4200,7 +4201,7 @@
               </p:txBody>
             </p:sp>
           </mc:Choice>
-          <mc:Fallback>
+          <mc:Fallback xmlns="">
             <p:sp>
               <p:nvSpPr>
                 <p:cNvPr id="261" name="矩形 260">
@@ -4245,8 +4246,8 @@
             </p:sp>
           </mc:Fallback>
         </mc:AlternateContent>
-        <mc:AlternateContent xmlns:mc="http://schemas.openxmlformats.org/markup-compatibility/2006">
-          <mc:Choice xmlns:a14="http://schemas.microsoft.com/office/drawing/2010/main" Requires="a14">
+        <mc:AlternateContent xmlns:mc="http://schemas.openxmlformats.org/markup-compatibility/2006" xmlns:a14="http://schemas.microsoft.com/office/drawing/2010/main">
+          <mc:Choice Requires="a14">
             <p:sp>
               <p:nvSpPr>
                 <p:cNvPr id="262" name="矩形 261">
@@ -4298,7 +4299,7 @@
               </p:txBody>
             </p:sp>
           </mc:Choice>
-          <mc:Fallback>
+          <mc:Fallback xmlns="">
             <p:sp>
               <p:nvSpPr>
                 <p:cNvPr id="262" name="矩形 261">
@@ -4343,8 +4344,8 @@
             </p:sp>
           </mc:Fallback>
         </mc:AlternateContent>
-        <mc:AlternateContent xmlns:mc="http://schemas.openxmlformats.org/markup-compatibility/2006">
-          <mc:Choice xmlns:a14="http://schemas.microsoft.com/office/drawing/2010/main" Requires="a14">
+        <mc:AlternateContent xmlns:mc="http://schemas.openxmlformats.org/markup-compatibility/2006" xmlns:a14="http://schemas.microsoft.com/office/drawing/2010/main">
+          <mc:Choice Requires="a14">
             <p:sp>
               <p:nvSpPr>
                 <p:cNvPr id="263" name="矩形 262">
@@ -4396,7 +4397,7 @@
               </p:txBody>
             </p:sp>
           </mc:Choice>
-          <mc:Fallback>
+          <mc:Fallback xmlns="">
             <p:sp>
               <p:nvSpPr>
                 <p:cNvPr id="263" name="矩形 262">
@@ -4441,8 +4442,8 @@
             </p:sp>
           </mc:Fallback>
         </mc:AlternateContent>
-        <mc:AlternateContent xmlns:mc="http://schemas.openxmlformats.org/markup-compatibility/2006">
-          <mc:Choice xmlns:a14="http://schemas.microsoft.com/office/drawing/2010/main" Requires="a14">
+        <mc:AlternateContent xmlns:mc="http://schemas.openxmlformats.org/markup-compatibility/2006" xmlns:a14="http://schemas.microsoft.com/office/drawing/2010/main">
+          <mc:Choice Requires="a14">
             <p:sp>
               <p:nvSpPr>
                 <p:cNvPr id="264" name="矩形 263">
@@ -4494,7 +4495,7 @@
               </p:txBody>
             </p:sp>
           </mc:Choice>
-          <mc:Fallback>
+          <mc:Fallback xmlns="">
             <p:sp>
               <p:nvSpPr>
                 <p:cNvPr id="264" name="矩形 263">
@@ -4641,8 +4642,8 @@
               <a:chExt cx="645259" cy="576699"/>
             </a:xfrm>
           </p:grpSpPr>
-          <mc:AlternateContent xmlns:mc="http://schemas.openxmlformats.org/markup-compatibility/2006">
-            <mc:Choice xmlns:a14="http://schemas.microsoft.com/office/drawing/2010/main" Requires="a14">
+          <mc:AlternateContent xmlns:mc="http://schemas.openxmlformats.org/markup-compatibility/2006" xmlns:a14="http://schemas.microsoft.com/office/drawing/2010/main">
+            <mc:Choice Requires="a14">
               <p:sp>
                 <p:nvSpPr>
                   <p:cNvPr id="278" name="文字方塊 277">
@@ -4714,7 +4715,7 @@
                 </p:txBody>
               </p:sp>
             </mc:Choice>
-            <mc:Fallback>
+            <mc:Fallback xmlns="">
               <p:sp>
                 <p:nvSpPr>
                   <p:cNvPr id="278" name="文字方塊 277">
@@ -4759,8 +4760,8 @@
               </p:sp>
             </mc:Fallback>
           </mc:AlternateContent>
-          <mc:AlternateContent xmlns:mc="http://schemas.openxmlformats.org/markup-compatibility/2006">
-            <mc:Choice xmlns:a14="http://schemas.microsoft.com/office/drawing/2010/main" Requires="a14">
+          <mc:AlternateContent xmlns:mc="http://schemas.openxmlformats.org/markup-compatibility/2006" xmlns:a14="http://schemas.microsoft.com/office/drawing/2010/main">
+            <mc:Choice Requires="a14">
               <p:sp>
                 <p:nvSpPr>
                   <p:cNvPr id="279" name="文字方塊 278">
@@ -4832,7 +4833,7 @@
                 </p:txBody>
               </p:sp>
             </mc:Choice>
-            <mc:Fallback>
+            <mc:Fallback xmlns="">
               <p:sp>
                 <p:nvSpPr>
                   <p:cNvPr id="279" name="文字方塊 278">
@@ -5024,8 +5025,8 @@
               <a:chExt cx="630972" cy="573523"/>
             </a:xfrm>
           </p:grpSpPr>
-          <mc:AlternateContent xmlns:mc="http://schemas.openxmlformats.org/markup-compatibility/2006">
-            <mc:Choice xmlns:a14="http://schemas.microsoft.com/office/drawing/2010/main" Requires="a14">
+          <mc:AlternateContent xmlns:mc="http://schemas.openxmlformats.org/markup-compatibility/2006" xmlns:a14="http://schemas.microsoft.com/office/drawing/2010/main">
+            <mc:Choice Requires="a14">
               <p:sp>
                 <p:nvSpPr>
                   <p:cNvPr id="274" name="文字方塊 273">
@@ -5097,7 +5098,7 @@
                 </p:txBody>
               </p:sp>
             </mc:Choice>
-            <mc:Fallback>
+            <mc:Fallback xmlns="">
               <p:sp>
                 <p:nvSpPr>
                   <p:cNvPr id="274" name="文字方塊 273">
@@ -5142,8 +5143,8 @@
               </p:sp>
             </mc:Fallback>
           </mc:AlternateContent>
-          <mc:AlternateContent xmlns:mc="http://schemas.openxmlformats.org/markup-compatibility/2006">
-            <mc:Choice xmlns:a14="http://schemas.microsoft.com/office/drawing/2010/main" Requires="a14">
+          <mc:AlternateContent xmlns:mc="http://schemas.openxmlformats.org/markup-compatibility/2006" xmlns:a14="http://schemas.microsoft.com/office/drawing/2010/main">
+            <mc:Choice Requires="a14">
               <p:sp>
                 <p:nvSpPr>
                   <p:cNvPr id="275" name="文字方塊 274">
@@ -5215,7 +5216,7 @@
                 </p:txBody>
               </p:sp>
             </mc:Choice>
-            <mc:Fallback>
+            <mc:Fallback xmlns="">
               <p:sp>
                 <p:nvSpPr>
                   <p:cNvPr id="275" name="文字方塊 274">
@@ -5606,6 +5607,3343 @@
 </p:sld>
 </file>
 
+<file path=ppt/slides/slide2.xml><?xml version="1.0" encoding="utf-8"?>
+<p:sld xmlns:a="http://schemas.openxmlformats.org/drawingml/2006/main" xmlns:r="http://schemas.openxmlformats.org/officeDocument/2006/relationships" xmlns:p="http://schemas.openxmlformats.org/presentationml/2006/main" show="0">
+  <p:cSld>
+    <p:spTree>
+      <p:nvGrpSpPr>
+        <p:cNvPr id="1" name=""/>
+        <p:cNvGrpSpPr/>
+        <p:nvPr/>
+      </p:nvGrpSpPr>
+      <p:grpSpPr>
+        <a:xfrm>
+          <a:off x="0" y="0"/>
+          <a:ext cx="0" cy="0"/>
+          <a:chOff x="0" y="0"/>
+          <a:chExt cx="0" cy="0"/>
+        </a:xfrm>
+      </p:grpSpPr>
+      <p:grpSp>
+        <p:nvGrpSpPr>
+          <p:cNvPr id="2" name="群組 1">
+            <a:extLst>
+              <a:ext uri="{FF2B5EF4-FFF2-40B4-BE49-F238E27FC236}">
+                <a16:creationId xmlns:a16="http://schemas.microsoft.com/office/drawing/2014/main" id="{D7FAB985-2800-412E-B39D-72E9F4CB610E}"/>
+              </a:ext>
+            </a:extLst>
+          </p:cNvPr>
+          <p:cNvGrpSpPr/>
+          <p:nvPr/>
+        </p:nvGrpSpPr>
+        <p:grpSpPr>
+          <a:xfrm>
+            <a:off x="1175986" y="189428"/>
+            <a:ext cx="7554029" cy="5740956"/>
+            <a:chOff x="512344" y="173188"/>
+            <a:chExt cx="7554029" cy="5740956"/>
+          </a:xfrm>
+        </p:grpSpPr>
+        <p:pic>
+          <p:nvPicPr>
+            <p:cNvPr id="270" name="圖片 269">
+              <a:extLst>
+                <a:ext uri="{FF2B5EF4-FFF2-40B4-BE49-F238E27FC236}">
+                  <a16:creationId xmlns:a16="http://schemas.microsoft.com/office/drawing/2014/main" id="{F157FA9A-98EF-4516-AE35-187962CFDA60}"/>
+                </a:ext>
+              </a:extLst>
+            </p:cNvPr>
+            <p:cNvPicPr>
+              <a:picLocks noChangeAspect="1"/>
+            </p:cNvPicPr>
+            <p:nvPr/>
+          </p:nvPicPr>
+          <p:blipFill rotWithShape="1">
+            <a:blip r:embed="rId2">
+              <a:clrChange>
+                <a:clrFrom>
+                  <a:srgbClr val="FFFFFF"/>
+                </a:clrFrom>
+                <a:clrTo>
+                  <a:srgbClr val="FFFFFF">
+                    <a:alpha val="0"/>
+                  </a:srgbClr>
+                </a:clrTo>
+              </a:clrChange>
+            </a:blip>
+            <a:srcRect r="72281"/>
+            <a:stretch/>
+          </p:blipFill>
+          <p:spPr>
+            <a:xfrm>
+              <a:off x="689215" y="173188"/>
+              <a:ext cx="907359" cy="448871"/>
+            </a:xfrm>
+            <a:prstGeom prst="rect">
+              <a:avLst/>
+            </a:prstGeom>
+          </p:spPr>
+        </p:pic>
+        <p:pic>
+          <p:nvPicPr>
+            <p:cNvPr id="271" name="圖片 270">
+              <a:extLst>
+                <a:ext uri="{FF2B5EF4-FFF2-40B4-BE49-F238E27FC236}">
+                  <a16:creationId xmlns:a16="http://schemas.microsoft.com/office/drawing/2014/main" id="{53AF8546-BA0D-431B-9720-D4AA06DC8EE2}"/>
+                </a:ext>
+              </a:extLst>
+            </p:cNvPr>
+            <p:cNvPicPr>
+              <a:picLocks noChangeAspect="1"/>
+            </p:cNvPicPr>
+            <p:nvPr/>
+          </p:nvPicPr>
+          <p:blipFill rotWithShape="1">
+            <a:blip r:embed="rId2">
+              <a:clrChange>
+                <a:clrFrom>
+                  <a:srgbClr val="FFFFFF"/>
+                </a:clrFrom>
+                <a:clrTo>
+                  <a:srgbClr val="FFFFFF">
+                    <a:alpha val="0"/>
+                  </a:srgbClr>
+                </a:clrTo>
+              </a:clrChange>
+            </a:blip>
+            <a:srcRect l="28538" r="36079"/>
+            <a:stretch/>
+          </p:blipFill>
+          <p:spPr>
+            <a:xfrm>
+              <a:off x="689215" y="2111353"/>
+              <a:ext cx="1158240" cy="448871"/>
+            </a:xfrm>
+            <a:prstGeom prst="rect">
+              <a:avLst/>
+            </a:prstGeom>
+          </p:spPr>
+        </p:pic>
+        <p:pic>
+          <p:nvPicPr>
+            <p:cNvPr id="247" name="圖片 246">
+              <a:extLst>
+                <a:ext uri="{FF2B5EF4-FFF2-40B4-BE49-F238E27FC236}">
+                  <a16:creationId xmlns:a16="http://schemas.microsoft.com/office/drawing/2014/main" id="{C560BE30-6DE3-4B0F-9DD0-7A175D4742EA}"/>
+                </a:ext>
+              </a:extLst>
+            </p:cNvPr>
+            <p:cNvPicPr>
+              <a:picLocks noChangeAspect="1"/>
+            </p:cNvPicPr>
+            <p:nvPr/>
+          </p:nvPicPr>
+          <p:blipFill rotWithShape="1">
+            <a:blip r:embed="rId3">
+              <a:clrChange>
+                <a:clrFrom>
+                  <a:srgbClr val="FFFFFF"/>
+                </a:clrFrom>
+                <a:clrTo>
+                  <a:srgbClr val="FFFFFF">
+                    <a:alpha val="0"/>
+                  </a:srgbClr>
+                </a:clrTo>
+              </a:clrChange>
+              <a:extLst>
+                <a:ext uri="{28A0092B-C50C-407E-A947-70E740481C1C}">
+                  <a14:useLocalDpi xmlns:a14="http://schemas.microsoft.com/office/drawing/2010/main" val="0"/>
+                </a:ext>
+              </a:extLst>
+            </a:blip>
+            <a:srcRect r="84682"/>
+            <a:stretch/>
+          </p:blipFill>
+          <p:spPr>
+            <a:xfrm>
+              <a:off x="512344" y="563411"/>
+              <a:ext cx="1525256" cy="1659600"/>
+            </a:xfrm>
+            <a:prstGeom prst="rect">
+              <a:avLst/>
+            </a:prstGeom>
+          </p:spPr>
+        </p:pic>
+        <p:pic>
+          <p:nvPicPr>
+            <p:cNvPr id="249" name="圖片 248">
+              <a:extLst>
+                <a:ext uri="{FF2B5EF4-FFF2-40B4-BE49-F238E27FC236}">
+                  <a16:creationId xmlns:a16="http://schemas.microsoft.com/office/drawing/2014/main" id="{9990BC9F-C16F-4F14-A974-AB4E840835BC}"/>
+                </a:ext>
+              </a:extLst>
+            </p:cNvPr>
+            <p:cNvPicPr>
+              <a:picLocks noChangeAspect="1"/>
+            </p:cNvPicPr>
+            <p:nvPr/>
+          </p:nvPicPr>
+          <p:blipFill rotWithShape="1">
+            <a:blip r:embed="rId4">
+              <a:clrChange>
+                <a:clrFrom>
+                  <a:srgbClr val="FFFFFF"/>
+                </a:clrFrom>
+                <a:clrTo>
+                  <a:srgbClr val="FFFFFF">
+                    <a:alpha val="0"/>
+                  </a:srgbClr>
+                </a:clrTo>
+              </a:clrChange>
+              <a:extLst>
+                <a:ext uri="{28A0092B-C50C-407E-A947-70E740481C1C}">
+                  <a14:useLocalDpi xmlns:a14="http://schemas.microsoft.com/office/drawing/2010/main" val="0"/>
+                </a:ext>
+              </a:extLst>
+            </a:blip>
+            <a:srcRect r="84222"/>
+            <a:stretch/>
+          </p:blipFill>
+          <p:spPr>
+            <a:xfrm>
+              <a:off x="551636" y="4275785"/>
+              <a:ext cx="1499480" cy="1584000"/>
+            </a:xfrm>
+            <a:prstGeom prst="rect">
+              <a:avLst/>
+            </a:prstGeom>
+          </p:spPr>
+        </p:pic>
+        <mc:AlternateContent xmlns:mc="http://schemas.openxmlformats.org/markup-compatibility/2006">
+          <mc:Choice xmlns:a14="http://schemas.microsoft.com/office/drawing/2010/main" Requires="a14">
+            <p:sp>
+              <p:nvSpPr>
+                <p:cNvPr id="253" name="矩形 252">
+                  <a:extLst>
+                    <a:ext uri="{FF2B5EF4-FFF2-40B4-BE49-F238E27FC236}">
+                      <a16:creationId xmlns:a16="http://schemas.microsoft.com/office/drawing/2014/main" id="{86848877-0BCF-4F05-B932-A3B27CCC542F}"/>
+                    </a:ext>
+                  </a:extLst>
+                </p:cNvPr>
+                <p:cNvSpPr/>
+                <p:nvPr/>
+              </p:nvSpPr>
+              <p:spPr>
+                <a:xfrm>
+                  <a:off x="802265" y="1705353"/>
+                  <a:ext cx="783035" cy="343171"/>
+                </a:xfrm>
+                <a:prstGeom prst="rect">
+                  <a:avLst/>
+                </a:prstGeom>
+              </p:spPr>
+              <p:txBody>
+                <a:bodyPr wrap="none">
+                  <a:spAutoFit/>
+                </a:bodyPr>
+                <a:lstStyle/>
+                <a:p>
+                  <a:pPr/>
+                  <a14:m>
+                    <m:oMathPara xmlns:m="http://schemas.openxmlformats.org/officeDocument/2006/math">
+                      <m:oMathParaPr>
+                        <m:jc m:val="centerGroup"/>
+                      </m:oMathParaPr>
+                      <m:oMath xmlns:m="http://schemas.openxmlformats.org/officeDocument/2006/math">
+                        <m:r>
+                          <a:rPr lang="en-US" altLang="zh-TW" sz="1630" i="1">
+                            <a:latin typeface="Cambria Math" panose="02040503050406030204" pitchFamily="18" charset="0"/>
+                          </a:rPr>
+                          <m:t>0.1 </m:t>
+                        </m:r>
+                        <m:sSub>
+                          <m:sSubPr>
+                            <m:ctrlPr>
+                              <a:rPr lang="en-US" altLang="zh-TW" sz="1630" i="1">
+                                <a:latin typeface="Cambria Math" panose="02040503050406030204" pitchFamily="18" charset="0"/>
+                              </a:rPr>
+                            </m:ctrlPr>
+                          </m:sSubPr>
+                          <m:e>
+                            <m:r>
+                              <a:rPr lang="en-US" altLang="zh-TW" sz="1630" i="1">
+                                <a:latin typeface="Cambria Math" panose="02040503050406030204" pitchFamily="18" charset="0"/>
+                              </a:rPr>
+                              <m:t>𝑄</m:t>
+                            </m:r>
+                          </m:e>
+                          <m:sub>
+                            <m:r>
+                              <a:rPr lang="en-US" altLang="zh-TW" sz="1630" i="1">
+                                <a:latin typeface="Cambria Math" panose="02040503050406030204" pitchFamily="18" charset="0"/>
+                              </a:rPr>
+                              <m:t>𝑐</m:t>
+                            </m:r>
+                          </m:sub>
+                        </m:sSub>
+                      </m:oMath>
+                    </m:oMathPara>
+                  </a14:m>
+                  <a:endParaRPr lang="zh-TW" altLang="en-US" sz="1630" dirty="0">
+                    <a:latin typeface="Times New Roman" panose="02020603050405020304" pitchFamily="18" charset="0"/>
+                    <a:cs typeface="Times New Roman" panose="02020603050405020304" pitchFamily="18" charset="0"/>
+                  </a:endParaRPr>
+                </a:p>
+              </p:txBody>
+            </p:sp>
+          </mc:Choice>
+          <mc:Fallback>
+            <p:sp>
+              <p:nvSpPr>
+                <p:cNvPr id="253" name="矩形 252">
+                  <a:extLst>
+                    <a:ext uri="{FF2B5EF4-FFF2-40B4-BE49-F238E27FC236}">
+                      <a16:creationId xmlns:a16="http://schemas.microsoft.com/office/drawing/2014/main" id="{86848877-0BCF-4F05-B932-A3B27CCC542F}"/>
+                    </a:ext>
+                  </a:extLst>
+                </p:cNvPr>
+                <p:cNvSpPr>
+                  <a:spLocks noRot="1" noChangeAspect="1" noMove="1" noResize="1" noEditPoints="1" noAdjustHandles="1" noChangeArrowheads="1" noChangeShapeType="1" noTextEdit="1"/>
+                </p:cNvSpPr>
+                <p:nvPr/>
+              </p:nvSpPr>
+              <p:spPr>
+                <a:xfrm>
+                  <a:off x="802265" y="1705353"/>
+                  <a:ext cx="783035" cy="343171"/>
+                </a:xfrm>
+                <a:prstGeom prst="rect">
+                  <a:avLst/>
+                </a:prstGeom>
+                <a:blipFill>
+                  <a:blip r:embed="rId5"/>
+                  <a:stretch>
+                    <a:fillRect b="-8772"/>
+                  </a:stretch>
+                </a:blipFill>
+              </p:spPr>
+              <p:txBody>
+                <a:bodyPr/>
+                <a:lstStyle/>
+                <a:p>
+                  <a:r>
+                    <a:rPr lang="zh-TW" altLang="en-US">
+                      <a:noFill/>
+                    </a:rPr>
+                    <a:t> </a:t>
+                  </a:r>
+                </a:p>
+              </p:txBody>
+            </p:sp>
+          </mc:Fallback>
+        </mc:AlternateContent>
+        <mc:AlternateContent xmlns:mc="http://schemas.openxmlformats.org/markup-compatibility/2006">
+          <mc:Choice xmlns:a14="http://schemas.microsoft.com/office/drawing/2010/main" Requires="a14">
+            <p:sp>
+              <p:nvSpPr>
+                <p:cNvPr id="259" name="矩形 258">
+                  <a:extLst>
+                    <a:ext uri="{FF2B5EF4-FFF2-40B4-BE49-F238E27FC236}">
+                      <a16:creationId xmlns:a16="http://schemas.microsoft.com/office/drawing/2014/main" id="{79BCCC95-FE7A-4A13-BC1B-2E9839597C7F}"/>
+                    </a:ext>
+                  </a:extLst>
+                </p:cNvPr>
+                <p:cNvSpPr/>
+                <p:nvPr/>
+              </p:nvSpPr>
+              <p:spPr>
+                <a:xfrm>
+                  <a:off x="837276" y="5431320"/>
+                  <a:ext cx="783035" cy="343171"/>
+                </a:xfrm>
+                <a:prstGeom prst="rect">
+                  <a:avLst/>
+                </a:prstGeom>
+              </p:spPr>
+              <p:txBody>
+                <a:bodyPr wrap="none">
+                  <a:spAutoFit/>
+                </a:bodyPr>
+                <a:lstStyle/>
+                <a:p>
+                  <a:pPr/>
+                  <a14:m>
+                    <m:oMathPara xmlns:m="http://schemas.openxmlformats.org/officeDocument/2006/math">
+                      <m:oMathParaPr>
+                        <m:jc m:val="centerGroup"/>
+                      </m:oMathParaPr>
+                      <m:oMath xmlns:m="http://schemas.openxmlformats.org/officeDocument/2006/math">
+                        <m:r>
+                          <a:rPr lang="en-US" altLang="zh-TW" sz="1630" i="1">
+                            <a:latin typeface="Cambria Math" panose="02040503050406030204" pitchFamily="18" charset="0"/>
+                          </a:rPr>
+                          <m:t>0.1 </m:t>
+                        </m:r>
+                        <m:sSub>
+                          <m:sSubPr>
+                            <m:ctrlPr>
+                              <a:rPr lang="en-US" altLang="zh-TW" sz="1630" i="1">
+                                <a:latin typeface="Cambria Math" panose="02040503050406030204" pitchFamily="18" charset="0"/>
+                              </a:rPr>
+                            </m:ctrlPr>
+                          </m:sSubPr>
+                          <m:e>
+                            <m:r>
+                              <a:rPr lang="en-US" altLang="zh-TW" sz="1630" i="1">
+                                <a:latin typeface="Cambria Math" panose="02040503050406030204" pitchFamily="18" charset="0"/>
+                              </a:rPr>
+                              <m:t>𝑄</m:t>
+                            </m:r>
+                          </m:e>
+                          <m:sub>
+                            <m:r>
+                              <a:rPr lang="en-US" altLang="zh-TW" sz="1630" i="1">
+                                <a:latin typeface="Cambria Math" panose="02040503050406030204" pitchFamily="18" charset="0"/>
+                              </a:rPr>
+                              <m:t>𝑐</m:t>
+                            </m:r>
+                          </m:sub>
+                        </m:sSub>
+                      </m:oMath>
+                    </m:oMathPara>
+                  </a14:m>
+                  <a:endParaRPr lang="zh-TW" altLang="en-US" sz="1630" dirty="0">
+                    <a:latin typeface="Times New Roman" panose="02020603050405020304" pitchFamily="18" charset="0"/>
+                    <a:cs typeface="Times New Roman" panose="02020603050405020304" pitchFamily="18" charset="0"/>
+                  </a:endParaRPr>
+                </a:p>
+              </p:txBody>
+            </p:sp>
+          </mc:Choice>
+          <mc:Fallback>
+            <p:sp>
+              <p:nvSpPr>
+                <p:cNvPr id="259" name="矩形 258">
+                  <a:extLst>
+                    <a:ext uri="{FF2B5EF4-FFF2-40B4-BE49-F238E27FC236}">
+                      <a16:creationId xmlns:a16="http://schemas.microsoft.com/office/drawing/2014/main" id="{79BCCC95-FE7A-4A13-BC1B-2E9839597C7F}"/>
+                    </a:ext>
+                  </a:extLst>
+                </p:cNvPr>
+                <p:cNvSpPr>
+                  <a:spLocks noRot="1" noChangeAspect="1" noMove="1" noResize="1" noEditPoints="1" noAdjustHandles="1" noChangeArrowheads="1" noChangeShapeType="1" noTextEdit="1"/>
+                </p:cNvSpPr>
+                <p:nvPr/>
+              </p:nvSpPr>
+              <p:spPr>
+                <a:xfrm>
+                  <a:off x="837276" y="5431320"/>
+                  <a:ext cx="783035" cy="343171"/>
+                </a:xfrm>
+                <a:prstGeom prst="rect">
+                  <a:avLst/>
+                </a:prstGeom>
+                <a:blipFill>
+                  <a:blip r:embed="rId6"/>
+                  <a:stretch>
+                    <a:fillRect b="-8929"/>
+                  </a:stretch>
+                </a:blipFill>
+              </p:spPr>
+              <p:txBody>
+                <a:bodyPr/>
+                <a:lstStyle/>
+                <a:p>
+                  <a:r>
+                    <a:rPr lang="zh-TW" altLang="en-US">
+                      <a:noFill/>
+                    </a:rPr>
+                    <a:t> </a:t>
+                  </a:r>
+                </a:p>
+              </p:txBody>
+            </p:sp>
+          </mc:Fallback>
+        </mc:AlternateContent>
+        <p:grpSp>
+          <p:nvGrpSpPr>
+            <p:cNvPr id="267" name="群組 266">
+              <a:extLst>
+                <a:ext uri="{FF2B5EF4-FFF2-40B4-BE49-F238E27FC236}">
+                  <a16:creationId xmlns:a16="http://schemas.microsoft.com/office/drawing/2014/main" id="{DA4B229F-6242-4A27-9F3E-C3CBA9E27020}"/>
+                </a:ext>
+              </a:extLst>
+            </p:cNvPr>
+            <p:cNvGrpSpPr/>
+            <p:nvPr/>
+          </p:nvGrpSpPr>
+          <p:grpSpPr>
+            <a:xfrm>
+              <a:off x="1129865" y="955179"/>
+              <a:ext cx="642040" cy="567243"/>
+              <a:chOff x="-994837" y="983411"/>
+              <a:chExt cx="588508" cy="519948"/>
+            </a:xfrm>
+          </p:grpSpPr>
+          <mc:AlternateContent xmlns:mc="http://schemas.openxmlformats.org/markup-compatibility/2006">
+            <mc:Choice xmlns:a14="http://schemas.microsoft.com/office/drawing/2010/main" Requires="a14">
+              <p:sp>
+                <p:nvSpPr>
+                  <p:cNvPr id="278" name="文字方塊 277">
+                    <a:extLst>
+                      <a:ext uri="{FF2B5EF4-FFF2-40B4-BE49-F238E27FC236}">
+                        <a16:creationId xmlns:a16="http://schemas.microsoft.com/office/drawing/2014/main" id="{1DCA7ED1-C6DF-4238-A6EA-89995713FD97}"/>
+                      </a:ext>
+                    </a:extLst>
+                  </p:cNvPr>
+                  <p:cNvSpPr txBox="1"/>
+                  <p:nvPr/>
+                </p:nvSpPr>
+                <p:spPr>
+                  <a:xfrm>
+                    <a:off x="-994837" y="983411"/>
+                    <a:ext cx="323387" cy="335658"/>
+                  </a:xfrm>
+                  <a:prstGeom prst="rect">
+                    <a:avLst/>
+                  </a:prstGeom>
+                  <a:noFill/>
+                </p:spPr>
+                <p:txBody>
+                  <a:bodyPr wrap="square" rtlCol="0">
+                    <a:spAutoFit/>
+                  </a:bodyPr>
+                  <a:lstStyle/>
+                  <a:p>
+                    <a:pPr/>
+                    <a14:m>
+                      <m:oMathPara xmlns:m="http://schemas.openxmlformats.org/officeDocument/2006/math">
+                        <m:oMathParaPr>
+                          <m:jc m:val="centerGroup"/>
+                        </m:oMathParaPr>
+                        <m:oMath xmlns:m="http://schemas.openxmlformats.org/officeDocument/2006/math">
+                          <m:sSub>
+                            <m:sSubPr>
+                              <m:ctrlPr>
+                                <a:rPr lang="en-US" altLang="zh-TW" sz="1630" b="1" i="1">
+                                  <a:latin typeface="Cambria Math" panose="02040503050406030204" pitchFamily="18" charset="0"/>
+                                </a:rPr>
+                              </m:ctrlPr>
+                            </m:sSubPr>
+                            <m:e>
+                              <m:r>
+                                <a:rPr lang="en-US" altLang="zh-TW" sz="1630" b="1" i="1">
+                                  <a:latin typeface="Cambria Math" panose="02040503050406030204" pitchFamily="18" charset="0"/>
+                                </a:rPr>
+                                <m:t>𝒒</m:t>
+                              </m:r>
+                            </m:e>
+                            <m:sub>
+                              <m:r>
+                                <a:rPr lang="en-US" altLang="zh-TW" sz="1630" b="1" i="1">
+                                  <a:latin typeface="Cambria Math" panose="02040503050406030204" pitchFamily="18" charset="0"/>
+                                </a:rPr>
+                                <m:t>𝒚</m:t>
+                              </m:r>
+                            </m:sub>
+                          </m:sSub>
+                        </m:oMath>
+                      </m:oMathPara>
+                    </a14:m>
+                    <a:endParaRPr lang="en-US" altLang="zh-TW" sz="1630" dirty="0">
+                      <a:latin typeface="Times New Roman" panose="02020603050405020304" pitchFamily="18" charset="0"/>
+                      <a:cs typeface="Times New Roman" panose="02020603050405020304" pitchFamily="18" charset="0"/>
+                    </a:endParaRPr>
+                  </a:p>
+                </p:txBody>
+              </p:sp>
+            </mc:Choice>
+            <mc:Fallback>
+              <p:sp>
+                <p:nvSpPr>
+                  <p:cNvPr id="278" name="文字方塊 277">
+                    <a:extLst>
+                      <a:ext uri="{FF2B5EF4-FFF2-40B4-BE49-F238E27FC236}">
+                        <a16:creationId xmlns:a16="http://schemas.microsoft.com/office/drawing/2014/main" id="{1DCA7ED1-C6DF-4238-A6EA-89995713FD97}"/>
+                      </a:ext>
+                    </a:extLst>
+                  </p:cNvPr>
+                  <p:cNvSpPr txBox="1">
+                    <a:spLocks noRot="1" noChangeAspect="1" noMove="1" noResize="1" noEditPoints="1" noAdjustHandles="1" noChangeArrowheads="1" noChangeShapeType="1" noTextEdit="1"/>
+                  </p:cNvSpPr>
+                  <p:nvPr/>
+                </p:nvSpPr>
+                <p:spPr>
+                  <a:xfrm>
+                    <a:off x="-994837" y="983411"/>
+                    <a:ext cx="323387" cy="335658"/>
+                  </a:xfrm>
+                  <a:prstGeom prst="rect">
+                    <a:avLst/>
+                  </a:prstGeom>
+                  <a:blipFill>
+                    <a:blip r:embed="rId7"/>
+                    <a:stretch>
+                      <a:fillRect r="-3448" b="-1667"/>
+                    </a:stretch>
+                  </a:blipFill>
+                </p:spPr>
+                <p:txBody>
+                  <a:bodyPr/>
+                  <a:lstStyle/>
+                  <a:p>
+                    <a:r>
+                      <a:rPr lang="zh-TW" altLang="en-US">
+                        <a:noFill/>
+                      </a:rPr>
+                      <a:t> </a:t>
+                    </a:r>
+                  </a:p>
+                </p:txBody>
+              </p:sp>
+            </mc:Fallback>
+          </mc:AlternateContent>
+          <mc:AlternateContent xmlns:mc="http://schemas.openxmlformats.org/markup-compatibility/2006" xmlns:a14="http://schemas.microsoft.com/office/drawing/2010/main">
+            <mc:Choice Requires="a14">
+              <p:sp>
+                <p:nvSpPr>
+                  <p:cNvPr id="279" name="文字方塊 278">
+                    <a:extLst>
+                      <a:ext uri="{FF2B5EF4-FFF2-40B4-BE49-F238E27FC236}">
+                        <a16:creationId xmlns:a16="http://schemas.microsoft.com/office/drawing/2014/main" id="{81975D7E-C0BD-4713-84BE-05259DAF8C12}"/>
+                      </a:ext>
+                    </a:extLst>
+                  </p:cNvPr>
+                  <p:cNvSpPr txBox="1"/>
+                  <p:nvPr/>
+                </p:nvSpPr>
+                <p:spPr>
+                  <a:xfrm>
+                    <a:off x="-813248" y="1188801"/>
+                    <a:ext cx="406919" cy="314558"/>
+                  </a:xfrm>
+                  <a:prstGeom prst="rect">
+                    <a:avLst/>
+                  </a:prstGeom>
+                  <a:noFill/>
+                </p:spPr>
+                <p:txBody>
+                  <a:bodyPr wrap="square" rtlCol="0">
+                    <a:spAutoFit/>
+                  </a:bodyPr>
+                  <a:lstStyle/>
+                  <a:p>
+                    <a:pPr/>
+                    <a14:m>
+                      <m:oMathPara xmlns:m="http://schemas.openxmlformats.org/officeDocument/2006/math">
+                        <m:oMathParaPr>
+                          <m:jc m:val="centerGroup"/>
+                        </m:oMathParaPr>
+                        <m:oMath xmlns:m="http://schemas.openxmlformats.org/officeDocument/2006/math">
+                          <m:sSub>
+                            <m:sSubPr>
+                              <m:ctrlPr>
+                                <a:rPr lang="en-US" altLang="zh-TW" sz="1630" b="1" i="1">
+                                  <a:latin typeface="Cambria Math" panose="02040503050406030204" pitchFamily="18" charset="0"/>
+                                </a:rPr>
+                              </m:ctrlPr>
+                            </m:sSubPr>
+                            <m:e>
+                              <m:r>
+                                <a:rPr lang="en-US" altLang="zh-TW" sz="1630" b="1" i="1">
+                                  <a:latin typeface="Cambria Math" panose="02040503050406030204" pitchFamily="18" charset="0"/>
+                                </a:rPr>
+                                <m:t>𝒒</m:t>
+                              </m:r>
+                            </m:e>
+                            <m:sub>
+                              <m:r>
+                                <a:rPr lang="en-US" altLang="zh-TW" sz="1630" b="1" i="1">
+                                  <a:latin typeface="Cambria Math" panose="02040503050406030204" pitchFamily="18" charset="0"/>
+                                </a:rPr>
+                                <m:t>𝒙</m:t>
+                              </m:r>
+                            </m:sub>
+                          </m:sSub>
+                        </m:oMath>
+                      </m:oMathPara>
+                    </a14:m>
+                    <a:endParaRPr lang="en-US" altLang="zh-TW" sz="1630" dirty="0">
+                      <a:latin typeface="Times New Roman" panose="02020603050405020304" pitchFamily="18" charset="0"/>
+                      <a:cs typeface="Times New Roman" panose="02020603050405020304" pitchFamily="18" charset="0"/>
+                    </a:endParaRPr>
+                  </a:p>
+                </p:txBody>
+              </p:sp>
+            </mc:Choice>
+            <mc:Fallback xmlns="">
+              <p:sp>
+                <p:nvSpPr>
+                  <p:cNvPr id="279" name="文字方塊 278">
+                    <a:extLst>
+                      <a:ext uri="{FF2B5EF4-FFF2-40B4-BE49-F238E27FC236}">
+                        <a16:creationId xmlns:a16="http://schemas.microsoft.com/office/drawing/2014/main" id="{81975D7E-C0BD-4713-84BE-05259DAF8C12}"/>
+                      </a:ext>
+                    </a:extLst>
+                  </p:cNvPr>
+                  <p:cNvSpPr txBox="1">
+                    <a:spLocks noRot="1" noChangeAspect="1" noMove="1" noResize="1" noEditPoints="1" noAdjustHandles="1" noChangeArrowheads="1" noChangeShapeType="1" noTextEdit="1"/>
+                  </p:cNvSpPr>
+                  <p:nvPr/>
+                </p:nvSpPr>
+                <p:spPr>
+                  <a:xfrm>
+                    <a:off x="-813248" y="1188801"/>
+                    <a:ext cx="406919" cy="314558"/>
+                  </a:xfrm>
+                  <a:prstGeom prst="rect">
+                    <a:avLst/>
+                  </a:prstGeom>
+                  <a:blipFill>
+                    <a:blip r:embed="rId19"/>
+                    <a:stretch>
+                      <a:fillRect b="-5263"/>
+                    </a:stretch>
+                  </a:blipFill>
+                </p:spPr>
+                <p:txBody>
+                  <a:bodyPr/>
+                  <a:lstStyle/>
+                  <a:p>
+                    <a:r>
+                      <a:rPr lang="zh-TW" altLang="en-US">
+                        <a:noFill/>
+                      </a:rPr>
+                      <a:t> </a:t>
+                    </a:r>
+                  </a:p>
+                </p:txBody>
+              </p:sp>
+            </mc:Fallback>
+          </mc:AlternateContent>
+          <p:sp>
+            <p:nvSpPr>
+              <p:cNvPr id="280" name="箭號: 向右 279">
+                <a:extLst>
+                  <a:ext uri="{FF2B5EF4-FFF2-40B4-BE49-F238E27FC236}">
+                    <a16:creationId xmlns:a16="http://schemas.microsoft.com/office/drawing/2014/main" id="{A8A6788E-178E-4359-A5E5-749475B64C5C}"/>
+                  </a:ext>
+                </a:extLst>
+              </p:cNvPr>
+              <p:cNvSpPr/>
+              <p:nvPr/>
+            </p:nvSpPr>
+            <p:spPr>
+              <a:xfrm>
+                <a:off x="-837092" y="1356364"/>
+                <a:ext cx="92654" cy="27541"/>
+              </a:xfrm>
+              <a:prstGeom prst="rightArrow">
+                <a:avLst>
+                  <a:gd name="adj1" fmla="val 50000"/>
+                  <a:gd name="adj2" fmla="val 99023"/>
+                </a:avLst>
+              </a:prstGeom>
+              <a:solidFill>
+                <a:schemeClr val="tx1"/>
+              </a:solidFill>
+              <a:ln>
+                <a:solidFill>
+                  <a:schemeClr val="tx1"/>
+                </a:solidFill>
+              </a:ln>
+            </p:spPr>
+            <p:style>
+              <a:lnRef idx="2">
+                <a:schemeClr val="dk1">
+                  <a:shade val="50000"/>
+                </a:schemeClr>
+              </a:lnRef>
+              <a:fillRef idx="1">
+                <a:schemeClr val="dk1"/>
+              </a:fillRef>
+              <a:effectRef idx="0">
+                <a:schemeClr val="dk1"/>
+              </a:effectRef>
+              <a:fontRef idx="minor">
+                <a:schemeClr val="lt1"/>
+              </a:fontRef>
+            </p:style>
+            <p:txBody>
+              <a:bodyPr rtlCol="0" anchor="ctr"/>
+              <a:lstStyle/>
+              <a:p>
+                <a:pPr algn="ctr"/>
+                <a:endParaRPr lang="zh-TW" altLang="en-US" sz="1630">
+                  <a:solidFill>
+                    <a:schemeClr val="tx1"/>
+                  </a:solidFill>
+                  <a:latin typeface="Times New Roman" panose="02020603050405020304" pitchFamily="18" charset="0"/>
+                  <a:cs typeface="Times New Roman" panose="02020603050405020304" pitchFamily="18" charset="0"/>
+                </a:endParaRPr>
+              </a:p>
+            </p:txBody>
+          </p:sp>
+          <p:sp>
+            <p:nvSpPr>
+              <p:cNvPr id="281" name="箭號: 向右 280">
+                <a:extLst>
+                  <a:ext uri="{FF2B5EF4-FFF2-40B4-BE49-F238E27FC236}">
+                    <a16:creationId xmlns:a16="http://schemas.microsoft.com/office/drawing/2014/main" id="{FEED7821-B0D8-4E8F-AA25-5D1DEA18901C}"/>
+                  </a:ext>
+                </a:extLst>
+              </p:cNvPr>
+              <p:cNvSpPr/>
+              <p:nvPr/>
+            </p:nvSpPr>
+            <p:spPr>
+              <a:xfrm rot="16200000">
+                <a:off x="-877012" y="1316853"/>
+                <a:ext cx="91764" cy="27808"/>
+              </a:xfrm>
+              <a:prstGeom prst="rightArrow">
+                <a:avLst>
+                  <a:gd name="adj1" fmla="val 50000"/>
+                  <a:gd name="adj2" fmla="val 99023"/>
+                </a:avLst>
+              </a:prstGeom>
+              <a:solidFill>
+                <a:schemeClr val="tx1"/>
+              </a:solidFill>
+              <a:ln>
+                <a:solidFill>
+                  <a:schemeClr val="tx1"/>
+                </a:solidFill>
+              </a:ln>
+            </p:spPr>
+            <p:style>
+              <a:lnRef idx="2">
+                <a:schemeClr val="dk1">
+                  <a:shade val="50000"/>
+                </a:schemeClr>
+              </a:lnRef>
+              <a:fillRef idx="1">
+                <a:schemeClr val="dk1"/>
+              </a:fillRef>
+              <a:effectRef idx="0">
+                <a:schemeClr val="dk1"/>
+              </a:effectRef>
+              <a:fontRef idx="minor">
+                <a:schemeClr val="lt1"/>
+              </a:fontRef>
+            </p:style>
+            <p:txBody>
+              <a:bodyPr rtlCol="0" anchor="ctr"/>
+              <a:lstStyle/>
+              <a:p>
+                <a:pPr algn="ctr"/>
+                <a:endParaRPr lang="zh-TW" altLang="en-US" sz="1630" dirty="0">
+                  <a:solidFill>
+                    <a:schemeClr val="tx1"/>
+                  </a:solidFill>
+                  <a:latin typeface="Times New Roman" panose="02020603050405020304" pitchFamily="18" charset="0"/>
+                  <a:cs typeface="Times New Roman" panose="02020603050405020304" pitchFamily="18" charset="0"/>
+                </a:endParaRPr>
+              </a:p>
+            </p:txBody>
+          </p:sp>
+        </p:grpSp>
+        <p:grpSp>
+          <p:nvGrpSpPr>
+            <p:cNvPr id="268" name="群組 267">
+              <a:extLst>
+                <a:ext uri="{FF2B5EF4-FFF2-40B4-BE49-F238E27FC236}">
+                  <a16:creationId xmlns:a16="http://schemas.microsoft.com/office/drawing/2014/main" id="{0E3F31E3-C952-482B-9BC7-E768D7D68741}"/>
+                </a:ext>
+              </a:extLst>
+            </p:cNvPr>
+            <p:cNvGrpSpPr/>
+            <p:nvPr/>
+          </p:nvGrpSpPr>
+          <p:grpSpPr>
+            <a:xfrm>
+              <a:off x="1138020" y="4656366"/>
+              <a:ext cx="655028" cy="568541"/>
+              <a:chOff x="-995630" y="983808"/>
+              <a:chExt cx="600414" cy="521138"/>
+            </a:xfrm>
+          </p:grpSpPr>
+          <mc:AlternateContent xmlns:mc="http://schemas.openxmlformats.org/markup-compatibility/2006">
+            <mc:Choice xmlns:a14="http://schemas.microsoft.com/office/drawing/2010/main" Requires="a14">
+              <p:sp>
+                <p:nvSpPr>
+                  <p:cNvPr id="274" name="文字方塊 273">
+                    <a:extLst>
+                      <a:ext uri="{FF2B5EF4-FFF2-40B4-BE49-F238E27FC236}">
+                        <a16:creationId xmlns:a16="http://schemas.microsoft.com/office/drawing/2014/main" id="{1CD21653-A1AD-4400-90CC-55C9F1C414B4}"/>
+                      </a:ext>
+                    </a:extLst>
+                  </p:cNvPr>
+                  <p:cNvSpPr txBox="1"/>
+                  <p:nvPr/>
+                </p:nvSpPr>
+                <p:spPr>
+                  <a:xfrm>
+                    <a:off x="-995630" y="983808"/>
+                    <a:ext cx="323387" cy="335658"/>
+                  </a:xfrm>
+                  <a:prstGeom prst="rect">
+                    <a:avLst/>
+                  </a:prstGeom>
+                  <a:noFill/>
+                </p:spPr>
+                <p:txBody>
+                  <a:bodyPr wrap="square" rtlCol="0">
+                    <a:spAutoFit/>
+                  </a:bodyPr>
+                  <a:lstStyle/>
+                  <a:p>
+                    <a:pPr/>
+                    <a14:m>
+                      <m:oMathPara xmlns:m="http://schemas.openxmlformats.org/officeDocument/2006/math">
+                        <m:oMathParaPr>
+                          <m:jc m:val="centerGroup"/>
+                        </m:oMathParaPr>
+                        <m:oMath xmlns:m="http://schemas.openxmlformats.org/officeDocument/2006/math">
+                          <m:sSub>
+                            <m:sSubPr>
+                              <m:ctrlPr>
+                                <a:rPr lang="en-US" altLang="zh-TW" sz="1630" b="1" i="1">
+                                  <a:latin typeface="Cambria Math" panose="02040503050406030204" pitchFamily="18" charset="0"/>
+                                </a:rPr>
+                              </m:ctrlPr>
+                            </m:sSubPr>
+                            <m:e>
+                              <m:r>
+                                <a:rPr lang="en-US" altLang="zh-TW" sz="1630" b="1" i="1">
+                                  <a:latin typeface="Cambria Math" panose="02040503050406030204" pitchFamily="18" charset="0"/>
+                                </a:rPr>
+                                <m:t>𝒒</m:t>
+                              </m:r>
+                            </m:e>
+                            <m:sub>
+                              <m:r>
+                                <a:rPr lang="en-US" altLang="zh-TW" sz="1630" b="1" i="1">
+                                  <a:latin typeface="Cambria Math" panose="02040503050406030204" pitchFamily="18" charset="0"/>
+                                </a:rPr>
+                                <m:t>𝒚</m:t>
+                              </m:r>
+                            </m:sub>
+                          </m:sSub>
+                        </m:oMath>
+                      </m:oMathPara>
+                    </a14:m>
+                    <a:endParaRPr lang="en-US" altLang="zh-TW" sz="1630" dirty="0">
+                      <a:latin typeface="Times New Roman" panose="02020603050405020304" pitchFamily="18" charset="0"/>
+                      <a:cs typeface="Times New Roman" panose="02020603050405020304" pitchFamily="18" charset="0"/>
+                    </a:endParaRPr>
+                  </a:p>
+                </p:txBody>
+              </p:sp>
+            </mc:Choice>
+            <mc:Fallback>
+              <p:sp>
+                <p:nvSpPr>
+                  <p:cNvPr id="274" name="文字方塊 273">
+                    <a:extLst>
+                      <a:ext uri="{FF2B5EF4-FFF2-40B4-BE49-F238E27FC236}">
+                        <a16:creationId xmlns:a16="http://schemas.microsoft.com/office/drawing/2014/main" id="{1CD21653-A1AD-4400-90CC-55C9F1C414B4}"/>
+                      </a:ext>
+                    </a:extLst>
+                  </p:cNvPr>
+                  <p:cNvSpPr txBox="1">
+                    <a:spLocks noRot="1" noChangeAspect="1" noMove="1" noResize="1" noEditPoints="1" noAdjustHandles="1" noChangeArrowheads="1" noChangeShapeType="1" noTextEdit="1"/>
+                  </p:cNvSpPr>
+                  <p:nvPr/>
+                </p:nvSpPr>
+                <p:spPr>
+                  <a:xfrm>
+                    <a:off x="-995630" y="983808"/>
+                    <a:ext cx="323387" cy="335658"/>
+                  </a:xfrm>
+                  <a:prstGeom prst="rect">
+                    <a:avLst/>
+                  </a:prstGeom>
+                  <a:blipFill>
+                    <a:blip r:embed="rId20"/>
+                    <a:stretch>
+                      <a:fillRect r="-5263"/>
+                    </a:stretch>
+                  </a:blipFill>
+                </p:spPr>
+                <p:txBody>
+                  <a:bodyPr/>
+                  <a:lstStyle/>
+                  <a:p>
+                    <a:r>
+                      <a:rPr lang="zh-TW" altLang="en-US">
+                        <a:noFill/>
+                      </a:rPr>
+                      <a:t> </a:t>
+                    </a:r>
+                  </a:p>
+                </p:txBody>
+              </p:sp>
+            </mc:Fallback>
+          </mc:AlternateContent>
+          <mc:AlternateContent xmlns:mc="http://schemas.openxmlformats.org/markup-compatibility/2006" xmlns:a14="http://schemas.microsoft.com/office/drawing/2010/main">
+            <mc:Choice Requires="a14">
+              <p:sp>
+                <p:nvSpPr>
+                  <p:cNvPr id="275" name="文字方塊 274">
+                    <a:extLst>
+                      <a:ext uri="{FF2B5EF4-FFF2-40B4-BE49-F238E27FC236}">
+                        <a16:creationId xmlns:a16="http://schemas.microsoft.com/office/drawing/2014/main" id="{87ADA85D-6E70-4FED-874F-D10BD8CB47F5}"/>
+                      </a:ext>
+                    </a:extLst>
+                  </p:cNvPr>
+                  <p:cNvSpPr txBox="1"/>
+                  <p:nvPr/>
+                </p:nvSpPr>
+                <p:spPr>
+                  <a:xfrm>
+                    <a:off x="-802135" y="1190388"/>
+                    <a:ext cx="406919" cy="314558"/>
+                  </a:xfrm>
+                  <a:prstGeom prst="rect">
+                    <a:avLst/>
+                  </a:prstGeom>
+                  <a:noFill/>
+                </p:spPr>
+                <p:txBody>
+                  <a:bodyPr wrap="square" rtlCol="0">
+                    <a:spAutoFit/>
+                  </a:bodyPr>
+                  <a:lstStyle/>
+                  <a:p>
+                    <a:pPr/>
+                    <a14:m>
+                      <m:oMathPara xmlns:m="http://schemas.openxmlformats.org/officeDocument/2006/math">
+                        <m:oMathParaPr>
+                          <m:jc m:val="centerGroup"/>
+                        </m:oMathParaPr>
+                        <m:oMath xmlns:m="http://schemas.openxmlformats.org/officeDocument/2006/math">
+                          <m:sSub>
+                            <m:sSubPr>
+                              <m:ctrlPr>
+                                <a:rPr lang="en-US" altLang="zh-TW" sz="1630" b="1" i="1">
+                                  <a:latin typeface="Cambria Math" panose="02040503050406030204" pitchFamily="18" charset="0"/>
+                                </a:rPr>
+                              </m:ctrlPr>
+                            </m:sSubPr>
+                            <m:e>
+                              <m:r>
+                                <a:rPr lang="en-US" altLang="zh-TW" sz="1630" b="1" i="1">
+                                  <a:latin typeface="Cambria Math" panose="02040503050406030204" pitchFamily="18" charset="0"/>
+                                </a:rPr>
+                                <m:t>𝒒</m:t>
+                              </m:r>
+                            </m:e>
+                            <m:sub>
+                              <m:r>
+                                <a:rPr lang="en-US" altLang="zh-TW" sz="1630" b="1" i="1">
+                                  <a:latin typeface="Cambria Math" panose="02040503050406030204" pitchFamily="18" charset="0"/>
+                                </a:rPr>
+                                <m:t>𝒙</m:t>
+                              </m:r>
+                            </m:sub>
+                          </m:sSub>
+                        </m:oMath>
+                      </m:oMathPara>
+                    </a14:m>
+                    <a:endParaRPr lang="en-US" altLang="zh-TW" sz="1630" dirty="0">
+                      <a:latin typeface="Times New Roman" panose="02020603050405020304" pitchFamily="18" charset="0"/>
+                      <a:cs typeface="Times New Roman" panose="02020603050405020304" pitchFamily="18" charset="0"/>
+                    </a:endParaRPr>
+                  </a:p>
+                </p:txBody>
+              </p:sp>
+            </mc:Choice>
+            <mc:Fallback xmlns="">
+              <p:sp>
+                <p:nvSpPr>
+                  <p:cNvPr id="275" name="文字方塊 274">
+                    <a:extLst>
+                      <a:ext uri="{FF2B5EF4-FFF2-40B4-BE49-F238E27FC236}">
+                        <a16:creationId xmlns:a16="http://schemas.microsoft.com/office/drawing/2014/main" id="{87ADA85D-6E70-4FED-874F-D10BD8CB47F5}"/>
+                      </a:ext>
+                    </a:extLst>
+                  </p:cNvPr>
+                  <p:cNvSpPr txBox="1">
+                    <a:spLocks noRot="1" noChangeAspect="1" noMove="1" noResize="1" noEditPoints="1" noAdjustHandles="1" noChangeArrowheads="1" noChangeShapeType="1" noTextEdit="1"/>
+                  </p:cNvSpPr>
+                  <p:nvPr/>
+                </p:nvSpPr>
+                <p:spPr>
+                  <a:xfrm>
+                    <a:off x="-802135" y="1190388"/>
+                    <a:ext cx="406919" cy="314558"/>
+                  </a:xfrm>
+                  <a:prstGeom prst="rect">
+                    <a:avLst/>
+                  </a:prstGeom>
+                  <a:blipFill>
+                    <a:blip r:embed="rId21"/>
+                    <a:stretch>
+                      <a:fillRect b="-7143"/>
+                    </a:stretch>
+                  </a:blipFill>
+                </p:spPr>
+                <p:txBody>
+                  <a:bodyPr/>
+                  <a:lstStyle/>
+                  <a:p>
+                    <a:r>
+                      <a:rPr lang="zh-TW" altLang="en-US">
+                        <a:noFill/>
+                      </a:rPr>
+                      <a:t> </a:t>
+                    </a:r>
+                  </a:p>
+                </p:txBody>
+              </p:sp>
+            </mc:Fallback>
+          </mc:AlternateContent>
+          <p:sp>
+            <p:nvSpPr>
+              <p:cNvPr id="276" name="箭號: 向右 275">
+                <a:extLst>
+                  <a:ext uri="{FF2B5EF4-FFF2-40B4-BE49-F238E27FC236}">
+                    <a16:creationId xmlns:a16="http://schemas.microsoft.com/office/drawing/2014/main" id="{770AE165-61BB-473D-9254-44D70D2D158D}"/>
+                  </a:ext>
+                </a:extLst>
+              </p:cNvPr>
+              <p:cNvSpPr/>
+              <p:nvPr/>
+            </p:nvSpPr>
+            <p:spPr>
+              <a:xfrm>
+                <a:off x="-837092" y="1356364"/>
+                <a:ext cx="92654" cy="27541"/>
+              </a:xfrm>
+              <a:prstGeom prst="rightArrow">
+                <a:avLst>
+                  <a:gd name="adj1" fmla="val 50000"/>
+                  <a:gd name="adj2" fmla="val 99023"/>
+                </a:avLst>
+              </a:prstGeom>
+              <a:solidFill>
+                <a:schemeClr val="tx1"/>
+              </a:solidFill>
+              <a:ln>
+                <a:solidFill>
+                  <a:schemeClr val="tx1"/>
+                </a:solidFill>
+              </a:ln>
+            </p:spPr>
+            <p:style>
+              <a:lnRef idx="2">
+                <a:schemeClr val="dk1">
+                  <a:shade val="50000"/>
+                </a:schemeClr>
+              </a:lnRef>
+              <a:fillRef idx="1">
+                <a:schemeClr val="dk1"/>
+              </a:fillRef>
+              <a:effectRef idx="0">
+                <a:schemeClr val="dk1"/>
+              </a:effectRef>
+              <a:fontRef idx="minor">
+                <a:schemeClr val="lt1"/>
+              </a:fontRef>
+            </p:style>
+            <p:txBody>
+              <a:bodyPr rtlCol="0" anchor="ctr"/>
+              <a:lstStyle/>
+              <a:p>
+                <a:pPr algn="ctr"/>
+                <a:endParaRPr lang="zh-TW" altLang="en-US" sz="1630">
+                  <a:solidFill>
+                    <a:schemeClr val="tx1"/>
+                  </a:solidFill>
+                  <a:latin typeface="Times New Roman" panose="02020603050405020304" pitchFamily="18" charset="0"/>
+                  <a:cs typeface="Times New Roman" panose="02020603050405020304" pitchFamily="18" charset="0"/>
+                </a:endParaRPr>
+              </a:p>
+            </p:txBody>
+          </p:sp>
+          <p:sp>
+            <p:nvSpPr>
+              <p:cNvPr id="277" name="箭號: 向右 276">
+                <a:extLst>
+                  <a:ext uri="{FF2B5EF4-FFF2-40B4-BE49-F238E27FC236}">
+                    <a16:creationId xmlns:a16="http://schemas.microsoft.com/office/drawing/2014/main" id="{614AEB28-253F-4993-A1D4-48EF43196C0C}"/>
+                  </a:ext>
+                </a:extLst>
+              </p:cNvPr>
+              <p:cNvSpPr/>
+              <p:nvPr/>
+            </p:nvSpPr>
+            <p:spPr>
+              <a:xfrm rot="16200000">
+                <a:off x="-877012" y="1316853"/>
+                <a:ext cx="91764" cy="27808"/>
+              </a:xfrm>
+              <a:prstGeom prst="rightArrow">
+                <a:avLst>
+                  <a:gd name="adj1" fmla="val 50000"/>
+                  <a:gd name="adj2" fmla="val 99023"/>
+                </a:avLst>
+              </a:prstGeom>
+              <a:solidFill>
+                <a:schemeClr val="tx1"/>
+              </a:solidFill>
+              <a:ln>
+                <a:solidFill>
+                  <a:schemeClr val="tx1"/>
+                </a:solidFill>
+              </a:ln>
+            </p:spPr>
+            <p:style>
+              <a:lnRef idx="2">
+                <a:schemeClr val="dk1">
+                  <a:shade val="50000"/>
+                </a:schemeClr>
+              </a:lnRef>
+              <a:fillRef idx="1">
+                <a:schemeClr val="dk1"/>
+              </a:fillRef>
+              <a:effectRef idx="0">
+                <a:schemeClr val="dk1"/>
+              </a:effectRef>
+              <a:fontRef idx="minor">
+                <a:schemeClr val="lt1"/>
+              </a:fontRef>
+            </p:style>
+            <p:txBody>
+              <a:bodyPr rtlCol="0" anchor="ctr"/>
+              <a:lstStyle/>
+              <a:p>
+                <a:pPr algn="ctr"/>
+                <a:endParaRPr lang="zh-TW" altLang="en-US" sz="1630" dirty="0">
+                  <a:solidFill>
+                    <a:schemeClr val="tx1"/>
+                  </a:solidFill>
+                  <a:latin typeface="Times New Roman" panose="02020603050405020304" pitchFamily="18" charset="0"/>
+                  <a:cs typeface="Times New Roman" panose="02020603050405020304" pitchFamily="18" charset="0"/>
+                </a:endParaRPr>
+              </a:p>
+            </p:txBody>
+          </p:sp>
+        </p:grpSp>
+        <p:pic>
+          <p:nvPicPr>
+            <p:cNvPr id="272" name="圖片 271">
+              <a:extLst>
+                <a:ext uri="{FF2B5EF4-FFF2-40B4-BE49-F238E27FC236}">
+                  <a16:creationId xmlns:a16="http://schemas.microsoft.com/office/drawing/2014/main" id="{7468B6E1-A0E2-4B23-9D46-61F376D4E063}"/>
+                </a:ext>
+              </a:extLst>
+            </p:cNvPr>
+            <p:cNvPicPr>
+              <a:picLocks noChangeAspect="1"/>
+            </p:cNvPicPr>
+            <p:nvPr/>
+          </p:nvPicPr>
+          <p:blipFill rotWithShape="1">
+            <a:blip r:embed="rId2">
+              <a:clrChange>
+                <a:clrFrom>
+                  <a:srgbClr val="FFFFFF"/>
+                </a:clrFrom>
+                <a:clrTo>
+                  <a:srgbClr val="FFFFFF">
+                    <a:alpha val="0"/>
+                  </a:srgbClr>
+                </a:clrTo>
+              </a:clrChange>
+            </a:blip>
+            <a:srcRect l="63840" r="19837"/>
+            <a:stretch/>
+          </p:blipFill>
+          <p:spPr>
+            <a:xfrm>
+              <a:off x="694275" y="4059792"/>
+              <a:ext cx="601980" cy="505704"/>
+            </a:xfrm>
+            <a:prstGeom prst="rect">
+              <a:avLst/>
+            </a:prstGeom>
+          </p:spPr>
+        </p:pic>
+        <p:pic>
+          <p:nvPicPr>
+            <p:cNvPr id="273" name="圖片 272">
+              <a:extLst>
+                <a:ext uri="{FF2B5EF4-FFF2-40B4-BE49-F238E27FC236}">
+                  <a16:creationId xmlns:a16="http://schemas.microsoft.com/office/drawing/2014/main" id="{E074A7D9-C35F-4EDD-91A7-F385F0D7913B}"/>
+                </a:ext>
+              </a:extLst>
+            </p:cNvPr>
+            <p:cNvPicPr>
+              <a:picLocks noChangeAspect="1"/>
+            </p:cNvPicPr>
+            <p:nvPr/>
+          </p:nvPicPr>
+          <p:blipFill rotWithShape="1">
+            <a:blip r:embed="rId2">
+              <a:clrChange>
+                <a:clrFrom>
+                  <a:srgbClr val="FFFFFF"/>
+                </a:clrFrom>
+                <a:clrTo>
+                  <a:srgbClr val="FFFFFF">
+                    <a:alpha val="0"/>
+                  </a:srgbClr>
+                </a:clrTo>
+              </a:clrChange>
+            </a:blip>
+            <a:srcRect l="80038"/>
+            <a:stretch/>
+          </p:blipFill>
+          <p:spPr>
+            <a:xfrm>
+              <a:off x="694275" y="2504122"/>
+              <a:ext cx="736126" cy="505704"/>
+            </a:xfrm>
+            <a:prstGeom prst="rect">
+              <a:avLst/>
+            </a:prstGeom>
+          </p:spPr>
+        </p:pic>
+        <p:pic>
+          <p:nvPicPr>
+            <p:cNvPr id="39" name="圖片 38">
+              <a:extLst>
+                <a:ext uri="{FF2B5EF4-FFF2-40B4-BE49-F238E27FC236}">
+                  <a16:creationId xmlns:a16="http://schemas.microsoft.com/office/drawing/2014/main" id="{5EF9E74D-E01F-41A2-A26B-0C33487195EC}"/>
+                </a:ext>
+              </a:extLst>
+            </p:cNvPr>
+            <p:cNvPicPr>
+              <a:picLocks noChangeAspect="1"/>
+            </p:cNvPicPr>
+            <p:nvPr/>
+          </p:nvPicPr>
+          <p:blipFill rotWithShape="1">
+            <a:blip r:embed="rId22">
+              <a:clrChange>
+                <a:clrFrom>
+                  <a:srgbClr val="FFFFFF"/>
+                </a:clrFrom>
+                <a:clrTo>
+                  <a:srgbClr val="FFFFFF">
+                    <a:alpha val="0"/>
+                  </a:srgbClr>
+                </a:clrTo>
+              </a:clrChange>
+              <a:extLst>
+                <a:ext uri="{28A0092B-C50C-407E-A947-70E740481C1C}">
+                  <a14:useLocalDpi xmlns:a14="http://schemas.microsoft.com/office/drawing/2010/main" val="0"/>
+                </a:ext>
+              </a:extLst>
+            </a:blip>
+            <a:srcRect l="90879" t="9023" r="5591" b="70339"/>
+            <a:stretch/>
+          </p:blipFill>
+          <p:spPr>
+            <a:xfrm>
+              <a:off x="7434825" y="734055"/>
+              <a:ext cx="344719" cy="1343486"/>
+            </a:xfrm>
+            <a:prstGeom prst="rect">
+              <a:avLst/>
+            </a:prstGeom>
+          </p:spPr>
+        </p:pic>
+        <p:sp>
+          <p:nvSpPr>
+            <p:cNvPr id="40" name="矩形: 圓角 39">
+              <a:extLst>
+                <a:ext uri="{FF2B5EF4-FFF2-40B4-BE49-F238E27FC236}">
+                  <a16:creationId xmlns:a16="http://schemas.microsoft.com/office/drawing/2014/main" id="{71B59539-B160-476E-A456-3B4D373ECA78}"/>
+                </a:ext>
+              </a:extLst>
+            </p:cNvPr>
+            <p:cNvSpPr/>
+            <p:nvPr/>
+          </p:nvSpPr>
+          <p:spPr>
+            <a:xfrm>
+              <a:off x="621965" y="627665"/>
+              <a:ext cx="6717600" cy="1458000"/>
+            </a:xfrm>
+            <a:prstGeom prst="roundRect">
+              <a:avLst>
+                <a:gd name="adj" fmla="val 6163"/>
+              </a:avLst>
+            </a:prstGeom>
+            <a:noFill/>
+            <a:ln w="9525" cap="flat" cmpd="sng" algn="ctr">
+              <a:solidFill>
+                <a:schemeClr val="accent1"/>
+              </a:solidFill>
+              <a:prstDash val="solid"/>
+              <a:round/>
+              <a:headEnd type="none" w="med" len="med"/>
+              <a:tailEnd type="none" w="med" len="med"/>
+            </a:ln>
+          </p:spPr>
+          <p:style>
+            <a:lnRef idx="0">
+              <a:scrgbClr r="0" g="0" b="0"/>
+            </a:lnRef>
+            <a:fillRef idx="0">
+              <a:scrgbClr r="0" g="0" b="0"/>
+            </a:fillRef>
+            <a:effectRef idx="0">
+              <a:scrgbClr r="0" g="0" b="0"/>
+            </a:effectRef>
+            <a:fontRef idx="minor">
+              <a:schemeClr val="accent1"/>
+            </a:fontRef>
+          </p:style>
+          <p:txBody>
+            <a:bodyPr rot="0" spcFirstLastPara="0" vertOverflow="overflow" horzOverflow="overflow" vert="horz" wrap="square" lIns="91440" tIns="45720" rIns="91440" bIns="45720" numCol="1" spcCol="0" rtlCol="0" fromWordArt="0" anchor="ctr" anchorCtr="0" forceAA="0" compatLnSpc="1">
+              <a:prstTxWarp prst="textNoShape">
+                <a:avLst/>
+              </a:prstTxWarp>
+              <a:noAutofit/>
+            </a:bodyPr>
+            <a:lstStyle/>
+            <a:p>
+              <a:pPr algn="ctr"/>
+              <a:endParaRPr lang="zh-TW" altLang="en-US" sz="1900" dirty="0">
+                <a:latin typeface="Times New Roman" panose="02020603050405020304" pitchFamily="18" charset="0"/>
+                <a:cs typeface="Times New Roman" panose="02020603050405020304" pitchFamily="18" charset="0"/>
+              </a:endParaRPr>
+            </a:p>
+          </p:txBody>
+        </p:sp>
+        <p:sp>
+          <p:nvSpPr>
+            <p:cNvPr id="41" name="矩形: 圓角 40">
+              <a:extLst>
+                <a:ext uri="{FF2B5EF4-FFF2-40B4-BE49-F238E27FC236}">
+                  <a16:creationId xmlns:a16="http://schemas.microsoft.com/office/drawing/2014/main" id="{07AC0EB3-BCCA-4107-B7F8-52B8C595E6A3}"/>
+                </a:ext>
+              </a:extLst>
+            </p:cNvPr>
+            <p:cNvSpPr/>
+            <p:nvPr/>
+          </p:nvSpPr>
+          <p:spPr>
+            <a:xfrm>
+              <a:off x="621965" y="2553950"/>
+              <a:ext cx="6717600" cy="3265825"/>
+            </a:xfrm>
+            <a:prstGeom prst="roundRect">
+              <a:avLst>
+                <a:gd name="adj" fmla="val 3246"/>
+              </a:avLst>
+            </a:prstGeom>
+            <a:noFill/>
+            <a:ln w="9525" cap="flat" cmpd="sng" algn="ctr">
+              <a:solidFill>
+                <a:schemeClr val="accent2"/>
+              </a:solidFill>
+              <a:prstDash val="solid"/>
+              <a:round/>
+              <a:headEnd type="none" w="med" len="med"/>
+              <a:tailEnd type="none" w="med" len="med"/>
+            </a:ln>
+          </p:spPr>
+          <p:style>
+            <a:lnRef idx="0">
+              <a:scrgbClr r="0" g="0" b="0"/>
+            </a:lnRef>
+            <a:fillRef idx="0">
+              <a:scrgbClr r="0" g="0" b="0"/>
+            </a:fillRef>
+            <a:effectRef idx="0">
+              <a:scrgbClr r="0" g="0" b="0"/>
+            </a:effectRef>
+            <a:fontRef idx="minor">
+              <a:schemeClr val="accent2"/>
+            </a:fontRef>
+          </p:style>
+          <p:txBody>
+            <a:bodyPr rot="0" spcFirstLastPara="0" vertOverflow="overflow" horzOverflow="overflow" vert="horz" wrap="square" lIns="91440" tIns="45720" rIns="91440" bIns="45720" numCol="1" spcCol="0" rtlCol="0" fromWordArt="0" anchor="ctr" anchorCtr="0" forceAA="0" compatLnSpc="1">
+              <a:prstTxWarp prst="textNoShape">
+                <a:avLst/>
+              </a:prstTxWarp>
+              <a:noAutofit/>
+            </a:bodyPr>
+            <a:lstStyle/>
+            <a:p>
+              <a:pPr algn="ctr"/>
+              <a:endParaRPr lang="zh-TW" altLang="en-US" sz="1900" dirty="0">
+                <a:latin typeface="Times New Roman" panose="02020603050405020304" pitchFamily="18" charset="0"/>
+                <a:cs typeface="Times New Roman" panose="02020603050405020304" pitchFamily="18" charset="0"/>
+              </a:endParaRPr>
+            </a:p>
+          </p:txBody>
+        </p:sp>
+        <p:pic>
+          <p:nvPicPr>
+            <p:cNvPr id="42" name="圖片 41">
+              <a:extLst>
+                <a:ext uri="{FF2B5EF4-FFF2-40B4-BE49-F238E27FC236}">
+                  <a16:creationId xmlns:a16="http://schemas.microsoft.com/office/drawing/2014/main" id="{C0F59C79-9428-42A1-9F92-5705E07AD825}"/>
+                </a:ext>
+              </a:extLst>
+            </p:cNvPr>
+            <p:cNvPicPr>
+              <a:picLocks noChangeAspect="1"/>
+            </p:cNvPicPr>
+            <p:nvPr/>
+          </p:nvPicPr>
+          <p:blipFill rotWithShape="1">
+            <a:blip r:embed="rId3">
+              <a:clrChange>
+                <a:clrFrom>
+                  <a:srgbClr val="FFFFFF"/>
+                </a:clrFrom>
+                <a:clrTo>
+                  <a:srgbClr val="FFFFFF">
+                    <a:alpha val="0"/>
+                  </a:srgbClr>
+                </a:clrTo>
+              </a:clrChange>
+              <a:extLst>
+                <a:ext uri="{28A0092B-C50C-407E-A947-70E740481C1C}">
+                  <a14:useLocalDpi xmlns:a14="http://schemas.microsoft.com/office/drawing/2010/main" val="0"/>
+                </a:ext>
+              </a:extLst>
+            </a:blip>
+            <a:srcRect l="17808" r="68081"/>
+            <a:stretch/>
+          </p:blipFill>
+          <p:spPr>
+            <a:xfrm>
+              <a:off x="1956435" y="563411"/>
+              <a:ext cx="1405108" cy="1659600"/>
+            </a:xfrm>
+            <a:prstGeom prst="rect">
+              <a:avLst/>
+            </a:prstGeom>
+          </p:spPr>
+        </p:pic>
+        <p:pic>
+          <p:nvPicPr>
+            <p:cNvPr id="43" name="圖片 42">
+              <a:extLst>
+                <a:ext uri="{FF2B5EF4-FFF2-40B4-BE49-F238E27FC236}">
+                  <a16:creationId xmlns:a16="http://schemas.microsoft.com/office/drawing/2014/main" id="{9971268F-AE2C-49A0-BF9A-F74BCA8D2484}"/>
+                </a:ext>
+              </a:extLst>
+            </p:cNvPr>
+            <p:cNvPicPr>
+              <a:picLocks noChangeAspect="1"/>
+            </p:cNvPicPr>
+            <p:nvPr/>
+          </p:nvPicPr>
+          <p:blipFill rotWithShape="1">
+            <a:blip r:embed="rId3">
+              <a:clrChange>
+                <a:clrFrom>
+                  <a:srgbClr val="FFFFFF"/>
+                </a:clrFrom>
+                <a:clrTo>
+                  <a:srgbClr val="FFFFFF">
+                    <a:alpha val="0"/>
+                  </a:srgbClr>
+                </a:clrTo>
+              </a:clrChange>
+              <a:extLst>
+                <a:ext uri="{28A0092B-C50C-407E-A947-70E740481C1C}">
+                  <a14:useLocalDpi xmlns:a14="http://schemas.microsoft.com/office/drawing/2010/main" val="0"/>
+                </a:ext>
+              </a:extLst>
+            </a:blip>
+            <a:srcRect l="34528" r="51361"/>
+            <a:stretch/>
+          </p:blipFill>
+          <p:spPr>
+            <a:xfrm>
+              <a:off x="3288030" y="563411"/>
+              <a:ext cx="1405108" cy="1659600"/>
+            </a:xfrm>
+            <a:prstGeom prst="rect">
+              <a:avLst/>
+            </a:prstGeom>
+          </p:spPr>
+        </p:pic>
+        <p:pic>
+          <p:nvPicPr>
+            <p:cNvPr id="44" name="圖片 43">
+              <a:extLst>
+                <a:ext uri="{FF2B5EF4-FFF2-40B4-BE49-F238E27FC236}">
+                  <a16:creationId xmlns:a16="http://schemas.microsoft.com/office/drawing/2014/main" id="{3C636C70-FE87-448E-B232-CC1EA069B745}"/>
+                </a:ext>
+              </a:extLst>
+            </p:cNvPr>
+            <p:cNvPicPr>
+              <a:picLocks noChangeAspect="1"/>
+            </p:cNvPicPr>
+            <p:nvPr/>
+          </p:nvPicPr>
+          <p:blipFill rotWithShape="1">
+            <a:blip r:embed="rId3">
+              <a:clrChange>
+                <a:clrFrom>
+                  <a:srgbClr val="FFFFFF"/>
+                </a:clrFrom>
+                <a:clrTo>
+                  <a:srgbClr val="FFFFFF">
+                    <a:alpha val="0"/>
+                  </a:srgbClr>
+                </a:clrTo>
+              </a:clrChange>
+              <a:extLst>
+                <a:ext uri="{28A0092B-C50C-407E-A947-70E740481C1C}">
+                  <a14:useLocalDpi xmlns:a14="http://schemas.microsoft.com/office/drawing/2010/main" val="0"/>
+                </a:ext>
+              </a:extLst>
+            </a:blip>
+            <a:srcRect l="51010" r="34405"/>
+            <a:stretch/>
+          </p:blipFill>
+          <p:spPr>
+            <a:xfrm>
+              <a:off x="4591050" y="563411"/>
+              <a:ext cx="1452338" cy="1659600"/>
+            </a:xfrm>
+            <a:prstGeom prst="rect">
+              <a:avLst/>
+            </a:prstGeom>
+          </p:spPr>
+        </p:pic>
+        <p:pic>
+          <p:nvPicPr>
+            <p:cNvPr id="45" name="圖片 44">
+              <a:extLst>
+                <a:ext uri="{FF2B5EF4-FFF2-40B4-BE49-F238E27FC236}">
+                  <a16:creationId xmlns:a16="http://schemas.microsoft.com/office/drawing/2014/main" id="{4A8CE513-856E-4C18-84FC-A234356D2FA3}"/>
+                </a:ext>
+              </a:extLst>
+            </p:cNvPr>
+            <p:cNvPicPr>
+              <a:picLocks noChangeAspect="1"/>
+            </p:cNvPicPr>
+            <p:nvPr/>
+          </p:nvPicPr>
+          <p:blipFill rotWithShape="1">
+            <a:blip r:embed="rId3">
+              <a:clrChange>
+                <a:clrFrom>
+                  <a:srgbClr val="FFFFFF"/>
+                </a:clrFrom>
+                <a:clrTo>
+                  <a:srgbClr val="FFFFFF">
+                    <a:alpha val="0"/>
+                  </a:srgbClr>
+                </a:clrTo>
+              </a:clrChange>
+              <a:extLst>
+                <a:ext uri="{28A0092B-C50C-407E-A947-70E740481C1C}">
+                  <a14:useLocalDpi xmlns:a14="http://schemas.microsoft.com/office/drawing/2010/main" val="0"/>
+                </a:ext>
+              </a:extLst>
+            </a:blip>
+            <a:srcRect l="68086" r="17644"/>
+            <a:stretch/>
+          </p:blipFill>
+          <p:spPr>
+            <a:xfrm>
+              <a:off x="5951220" y="563411"/>
+              <a:ext cx="1420969" cy="1659600"/>
+            </a:xfrm>
+            <a:prstGeom prst="rect">
+              <a:avLst/>
+            </a:prstGeom>
+          </p:spPr>
+        </p:pic>
+        <p:pic>
+          <p:nvPicPr>
+            <p:cNvPr id="46" name="圖片 45">
+              <a:extLst>
+                <a:ext uri="{FF2B5EF4-FFF2-40B4-BE49-F238E27FC236}">
+                  <a16:creationId xmlns:a16="http://schemas.microsoft.com/office/drawing/2014/main" id="{9E9363E5-ACF5-48B9-839D-602366EE5B7A}"/>
+                </a:ext>
+              </a:extLst>
+            </p:cNvPr>
+            <p:cNvPicPr>
+              <a:picLocks noChangeAspect="1"/>
+            </p:cNvPicPr>
+            <p:nvPr/>
+          </p:nvPicPr>
+          <p:blipFill rotWithShape="1">
+            <a:blip r:embed="rId23">
+              <a:clrChange>
+                <a:clrFrom>
+                  <a:srgbClr val="FFFFFF"/>
+                </a:clrFrom>
+                <a:clrTo>
+                  <a:srgbClr val="FFFFFF">
+                    <a:alpha val="0"/>
+                  </a:srgbClr>
+                </a:clrTo>
+              </a:clrChange>
+              <a:extLst>
+                <a:ext uri="{28A0092B-C50C-407E-A947-70E740481C1C}">
+                  <a14:useLocalDpi xmlns:a14="http://schemas.microsoft.com/office/drawing/2010/main" val="0"/>
+                </a:ext>
+              </a:extLst>
+            </a:blip>
+            <a:srcRect l="17554" r="67362"/>
+            <a:stretch/>
+          </p:blipFill>
+          <p:spPr>
+            <a:xfrm>
+              <a:off x="1963421" y="2718106"/>
+              <a:ext cx="1433497" cy="1584000"/>
+            </a:xfrm>
+            <a:prstGeom prst="rect">
+              <a:avLst/>
+            </a:prstGeom>
+          </p:spPr>
+        </p:pic>
+        <p:pic>
+          <p:nvPicPr>
+            <p:cNvPr id="47" name="圖片 46">
+              <a:extLst>
+                <a:ext uri="{FF2B5EF4-FFF2-40B4-BE49-F238E27FC236}">
+                  <a16:creationId xmlns:a16="http://schemas.microsoft.com/office/drawing/2014/main" id="{7CC92E4D-8CB6-4F94-A431-41E0D9EE08E9}"/>
+                </a:ext>
+              </a:extLst>
+            </p:cNvPr>
+            <p:cNvPicPr>
+              <a:picLocks noChangeAspect="1"/>
+            </p:cNvPicPr>
+            <p:nvPr/>
+          </p:nvPicPr>
+          <p:blipFill rotWithShape="1">
+            <a:blip r:embed="rId4">
+              <a:clrChange>
+                <a:clrFrom>
+                  <a:srgbClr val="FFFFFF"/>
+                </a:clrFrom>
+                <a:clrTo>
+                  <a:srgbClr val="FFFFFF">
+                    <a:alpha val="0"/>
+                  </a:srgbClr>
+                </a:clrTo>
+              </a:clrChange>
+              <a:extLst>
+                <a:ext uri="{28A0092B-C50C-407E-A947-70E740481C1C}">
+                  <a14:useLocalDpi xmlns:a14="http://schemas.microsoft.com/office/drawing/2010/main" val="0"/>
+                </a:ext>
+              </a:extLst>
+            </a:blip>
+            <a:srcRect l="17483" r="67565"/>
+            <a:stretch/>
+          </p:blipFill>
+          <p:spPr>
+            <a:xfrm>
+              <a:off x="1951990" y="4275785"/>
+              <a:ext cx="1421032" cy="1584000"/>
+            </a:xfrm>
+            <a:prstGeom prst="rect">
+              <a:avLst/>
+            </a:prstGeom>
+          </p:spPr>
+        </p:pic>
+        <p:pic>
+          <p:nvPicPr>
+            <p:cNvPr id="50" name="圖片 49">
+              <a:extLst>
+                <a:ext uri="{FF2B5EF4-FFF2-40B4-BE49-F238E27FC236}">
+                  <a16:creationId xmlns:a16="http://schemas.microsoft.com/office/drawing/2014/main" id="{CF0DC5EF-4E4A-4CDE-AC7D-6AAB311CB34A}"/>
+                </a:ext>
+              </a:extLst>
+            </p:cNvPr>
+            <p:cNvPicPr>
+              <a:picLocks noChangeAspect="1"/>
+            </p:cNvPicPr>
+            <p:nvPr/>
+          </p:nvPicPr>
+          <p:blipFill rotWithShape="1">
+            <a:blip r:embed="rId23">
+              <a:clrChange>
+                <a:clrFrom>
+                  <a:srgbClr val="FFFFFF"/>
+                </a:clrFrom>
+                <a:clrTo>
+                  <a:srgbClr val="FFFFFF">
+                    <a:alpha val="0"/>
+                  </a:srgbClr>
+                </a:clrTo>
+              </a:clrChange>
+              <a:extLst>
+                <a:ext uri="{28A0092B-C50C-407E-A947-70E740481C1C}">
+                  <a14:useLocalDpi xmlns:a14="http://schemas.microsoft.com/office/drawing/2010/main" val="0"/>
+                </a:ext>
+              </a:extLst>
+            </a:blip>
+            <a:srcRect l="33949" r="50443"/>
+            <a:stretch/>
+          </p:blipFill>
+          <p:spPr>
+            <a:xfrm>
+              <a:off x="3266440" y="2718106"/>
+              <a:ext cx="1483358" cy="1584000"/>
+            </a:xfrm>
+            <a:prstGeom prst="rect">
+              <a:avLst/>
+            </a:prstGeom>
+          </p:spPr>
+        </p:pic>
+        <p:pic>
+          <p:nvPicPr>
+            <p:cNvPr id="51" name="圖片 50">
+              <a:extLst>
+                <a:ext uri="{FF2B5EF4-FFF2-40B4-BE49-F238E27FC236}">
+                  <a16:creationId xmlns:a16="http://schemas.microsoft.com/office/drawing/2014/main" id="{CC56BF8D-07A7-4A08-BDA6-08B4A048AE37}"/>
+                </a:ext>
+              </a:extLst>
+            </p:cNvPr>
+            <p:cNvPicPr>
+              <a:picLocks noChangeAspect="1"/>
+            </p:cNvPicPr>
+            <p:nvPr/>
+          </p:nvPicPr>
+          <p:blipFill rotWithShape="1">
+            <a:blip r:embed="rId4">
+              <a:clrChange>
+                <a:clrFrom>
+                  <a:srgbClr val="FFFFFF"/>
+                </a:clrFrom>
+                <a:clrTo>
+                  <a:srgbClr val="FFFFFF">
+                    <a:alpha val="0"/>
+                  </a:srgbClr>
+                </a:clrTo>
+              </a:clrChange>
+              <a:extLst>
+                <a:ext uri="{28A0092B-C50C-407E-A947-70E740481C1C}">
+                  <a14:useLocalDpi xmlns:a14="http://schemas.microsoft.com/office/drawing/2010/main" val="0"/>
+                </a:ext>
+              </a:extLst>
+            </a:blip>
+            <a:srcRect l="34009" r="50777"/>
+            <a:stretch/>
+          </p:blipFill>
+          <p:spPr>
+            <a:xfrm>
+              <a:off x="3266440" y="4275785"/>
+              <a:ext cx="1445962" cy="1584000"/>
+            </a:xfrm>
+            <a:prstGeom prst="rect">
+              <a:avLst/>
+            </a:prstGeom>
+          </p:spPr>
+        </p:pic>
+        <p:pic>
+          <p:nvPicPr>
+            <p:cNvPr id="52" name="圖片 51">
+              <a:extLst>
+                <a:ext uri="{FF2B5EF4-FFF2-40B4-BE49-F238E27FC236}">
+                  <a16:creationId xmlns:a16="http://schemas.microsoft.com/office/drawing/2014/main" id="{FA15D31F-F97A-4A93-923E-4765732953C4}"/>
+                </a:ext>
+              </a:extLst>
+            </p:cNvPr>
+            <p:cNvPicPr>
+              <a:picLocks noChangeAspect="1"/>
+            </p:cNvPicPr>
+            <p:nvPr/>
+          </p:nvPicPr>
+          <p:blipFill rotWithShape="1">
+            <a:blip r:embed="rId23">
+              <a:clrChange>
+                <a:clrFrom>
+                  <a:srgbClr val="FFFFFF"/>
+                </a:clrFrom>
+                <a:clrTo>
+                  <a:srgbClr val="FFFFFF">
+                    <a:alpha val="0"/>
+                  </a:srgbClr>
+                </a:clrTo>
+              </a:clrChange>
+              <a:extLst>
+                <a:ext uri="{28A0092B-C50C-407E-A947-70E740481C1C}">
+                  <a14:useLocalDpi xmlns:a14="http://schemas.microsoft.com/office/drawing/2010/main" val="0"/>
+                </a:ext>
+              </a:extLst>
+            </a:blip>
+            <a:srcRect l="50869" r="34179"/>
+            <a:stretch/>
+          </p:blipFill>
+          <p:spPr>
+            <a:xfrm>
+              <a:off x="4601210" y="2718106"/>
+              <a:ext cx="1421032" cy="1584000"/>
+            </a:xfrm>
+            <a:prstGeom prst="rect">
+              <a:avLst/>
+            </a:prstGeom>
+          </p:spPr>
+        </p:pic>
+        <p:pic>
+          <p:nvPicPr>
+            <p:cNvPr id="53" name="圖片 52">
+              <a:extLst>
+                <a:ext uri="{FF2B5EF4-FFF2-40B4-BE49-F238E27FC236}">
+                  <a16:creationId xmlns:a16="http://schemas.microsoft.com/office/drawing/2014/main" id="{53371DB9-76BA-454A-87AF-397AB73D2531}"/>
+                </a:ext>
+              </a:extLst>
+            </p:cNvPr>
+            <p:cNvPicPr>
+              <a:picLocks noChangeAspect="1"/>
+            </p:cNvPicPr>
+            <p:nvPr/>
+          </p:nvPicPr>
+          <p:blipFill rotWithShape="1">
+            <a:blip r:embed="rId4">
+              <a:clrChange>
+                <a:clrFrom>
+                  <a:srgbClr val="FFFFFF"/>
+                </a:clrFrom>
+                <a:clrTo>
+                  <a:srgbClr val="FFFFFF">
+                    <a:alpha val="0"/>
+                  </a:srgbClr>
+                </a:clrTo>
+              </a:clrChange>
+              <a:extLst>
+                <a:ext uri="{28A0092B-C50C-407E-A947-70E740481C1C}">
+                  <a14:useLocalDpi xmlns:a14="http://schemas.microsoft.com/office/drawing/2010/main" val="0"/>
+                </a:ext>
+              </a:extLst>
+            </a:blip>
+            <a:srcRect l="50928" r="33989"/>
+            <a:stretch/>
+          </p:blipFill>
+          <p:spPr>
+            <a:xfrm>
+              <a:off x="4601211" y="4275785"/>
+              <a:ext cx="1433497" cy="1584000"/>
+            </a:xfrm>
+            <a:prstGeom prst="rect">
+              <a:avLst/>
+            </a:prstGeom>
+          </p:spPr>
+        </p:pic>
+        <p:pic>
+          <p:nvPicPr>
+            <p:cNvPr id="54" name="圖片 53">
+              <a:extLst>
+                <a:ext uri="{FF2B5EF4-FFF2-40B4-BE49-F238E27FC236}">
+                  <a16:creationId xmlns:a16="http://schemas.microsoft.com/office/drawing/2014/main" id="{013D93B5-84DA-4E86-A8DF-ABBABB05A417}"/>
+                </a:ext>
+              </a:extLst>
+            </p:cNvPr>
+            <p:cNvPicPr>
+              <a:picLocks noChangeAspect="1"/>
+            </p:cNvPicPr>
+            <p:nvPr/>
+          </p:nvPicPr>
+          <p:blipFill rotWithShape="1">
+            <a:blip r:embed="rId23">
+              <a:clrChange>
+                <a:clrFrom>
+                  <a:srgbClr val="FFFFFF"/>
+                </a:clrFrom>
+                <a:clrTo>
+                  <a:srgbClr val="FFFFFF">
+                    <a:alpha val="0"/>
+                  </a:srgbClr>
+                </a:clrTo>
+              </a:clrChange>
+              <a:extLst>
+                <a:ext uri="{28A0092B-C50C-407E-A947-70E740481C1C}">
+                  <a14:useLocalDpi xmlns:a14="http://schemas.microsoft.com/office/drawing/2010/main" val="0"/>
+                </a:ext>
+              </a:extLst>
+            </a:blip>
+            <a:srcRect l="67525" r="17047"/>
+            <a:stretch/>
+          </p:blipFill>
+          <p:spPr>
+            <a:xfrm>
+              <a:off x="5930900" y="2718106"/>
+              <a:ext cx="1466245" cy="1584000"/>
+            </a:xfrm>
+            <a:prstGeom prst="rect">
+              <a:avLst/>
+            </a:prstGeom>
+          </p:spPr>
+        </p:pic>
+        <p:pic>
+          <p:nvPicPr>
+            <p:cNvPr id="55" name="圖片 54">
+              <a:extLst>
+                <a:ext uri="{FF2B5EF4-FFF2-40B4-BE49-F238E27FC236}">
+                  <a16:creationId xmlns:a16="http://schemas.microsoft.com/office/drawing/2014/main" id="{12C550DC-EFC7-4465-A6AB-1EB8C0FCFBD7}"/>
+                </a:ext>
+              </a:extLst>
+            </p:cNvPr>
+            <p:cNvPicPr>
+              <a:picLocks noChangeAspect="1"/>
+            </p:cNvPicPr>
+            <p:nvPr/>
+          </p:nvPicPr>
+          <p:blipFill rotWithShape="1">
+            <a:blip r:embed="rId4">
+              <a:clrChange>
+                <a:clrFrom>
+                  <a:srgbClr val="FFFFFF"/>
+                </a:clrFrom>
+                <a:clrTo>
+                  <a:srgbClr val="FFFFFF">
+                    <a:alpha val="0"/>
+                  </a:srgbClr>
+                </a:clrTo>
+              </a:clrChange>
+              <a:extLst>
+                <a:ext uri="{28A0092B-C50C-407E-A947-70E740481C1C}">
+                  <a14:useLocalDpi xmlns:a14="http://schemas.microsoft.com/office/drawing/2010/main" val="0"/>
+                </a:ext>
+              </a:extLst>
+            </a:blip>
+            <a:srcRect l="67585" r="17265"/>
+            <a:stretch/>
+          </p:blipFill>
+          <p:spPr>
+            <a:xfrm>
+              <a:off x="5930901" y="4275785"/>
+              <a:ext cx="1439827" cy="1584000"/>
+            </a:xfrm>
+            <a:prstGeom prst="rect">
+              <a:avLst/>
+            </a:prstGeom>
+          </p:spPr>
+        </p:pic>
+        <p:pic>
+          <p:nvPicPr>
+            <p:cNvPr id="248" name="圖片 247">
+              <a:extLst>
+                <a:ext uri="{FF2B5EF4-FFF2-40B4-BE49-F238E27FC236}">
+                  <a16:creationId xmlns:a16="http://schemas.microsoft.com/office/drawing/2014/main" id="{D0F1D35A-8EDB-4C72-BE3C-58B1EB45EEF5}"/>
+                </a:ext>
+              </a:extLst>
+            </p:cNvPr>
+            <p:cNvPicPr>
+              <a:picLocks noChangeAspect="1"/>
+            </p:cNvPicPr>
+            <p:nvPr/>
+          </p:nvPicPr>
+          <p:blipFill rotWithShape="1">
+            <a:blip r:embed="rId23">
+              <a:clrChange>
+                <a:clrFrom>
+                  <a:srgbClr val="FFFFFF"/>
+                </a:clrFrom>
+                <a:clrTo>
+                  <a:srgbClr val="FFFFFF">
+                    <a:alpha val="0"/>
+                  </a:srgbClr>
+                </a:clrTo>
+              </a:clrChange>
+              <a:extLst>
+                <a:ext uri="{28A0092B-C50C-407E-A947-70E740481C1C}">
+                  <a14:useLocalDpi xmlns:a14="http://schemas.microsoft.com/office/drawing/2010/main" val="0"/>
+                </a:ext>
+              </a:extLst>
+            </a:blip>
+            <a:srcRect r="84151"/>
+            <a:stretch/>
+          </p:blipFill>
+          <p:spPr>
+            <a:xfrm>
+              <a:off x="556810" y="2718106"/>
+              <a:ext cx="1506302" cy="1584000"/>
+            </a:xfrm>
+            <a:prstGeom prst="rect">
+              <a:avLst/>
+            </a:prstGeom>
+          </p:spPr>
+        </p:pic>
+        <mc:AlternateContent xmlns:mc="http://schemas.openxmlformats.org/markup-compatibility/2006">
+          <mc:Choice xmlns:a14="http://schemas.microsoft.com/office/drawing/2010/main" Requires="a14">
+            <p:sp>
+              <p:nvSpPr>
+                <p:cNvPr id="260" name="矩形 259">
+                  <a:extLst>
+                    <a:ext uri="{FF2B5EF4-FFF2-40B4-BE49-F238E27FC236}">
+                      <a16:creationId xmlns:a16="http://schemas.microsoft.com/office/drawing/2014/main" id="{398344E3-64D8-4CE0-9B3A-57828151AFBC}"/>
+                    </a:ext>
+                  </a:extLst>
+                </p:cNvPr>
+                <p:cNvSpPr/>
+                <p:nvPr/>
+              </p:nvSpPr>
+              <p:spPr>
+                <a:xfrm>
+                  <a:off x="831161" y="2893995"/>
+                  <a:ext cx="889154" cy="343171"/>
+                </a:xfrm>
+                <a:prstGeom prst="rect">
+                  <a:avLst/>
+                </a:prstGeom>
+              </p:spPr>
+              <p:txBody>
+                <a:bodyPr wrap="none">
+                  <a:spAutoFit/>
+                </a:bodyPr>
+                <a:lstStyle/>
+                <a:p>
+                  <a:pPr/>
+                  <a14:m>
+                    <m:oMathPara xmlns:m="http://schemas.openxmlformats.org/officeDocument/2006/math">
+                      <m:oMathParaPr>
+                        <m:jc m:val="centerGroup"/>
+                      </m:oMathParaPr>
+                      <m:oMath xmlns:m="http://schemas.openxmlformats.org/officeDocument/2006/math">
+                        <m:r>
+                          <a:rPr lang="en-US" altLang="zh-TW" sz="1630" i="1">
+                            <a:latin typeface="Cambria Math" panose="02040503050406030204" pitchFamily="18" charset="0"/>
+                          </a:rPr>
+                          <m:t>ℓ=−2</m:t>
+                        </m:r>
+                      </m:oMath>
+                    </m:oMathPara>
+                  </a14:m>
+                  <a:endParaRPr lang="zh-TW" altLang="en-US" sz="1630" dirty="0">
+                    <a:latin typeface="Times New Roman" panose="02020603050405020304" pitchFamily="18" charset="0"/>
+                    <a:cs typeface="Times New Roman" panose="02020603050405020304" pitchFamily="18" charset="0"/>
+                  </a:endParaRPr>
+                </a:p>
+              </p:txBody>
+            </p:sp>
+          </mc:Choice>
+          <mc:Fallback>
+            <p:sp>
+              <p:nvSpPr>
+                <p:cNvPr id="260" name="矩形 259">
+                  <a:extLst>
+                    <a:ext uri="{FF2B5EF4-FFF2-40B4-BE49-F238E27FC236}">
+                      <a16:creationId xmlns:a16="http://schemas.microsoft.com/office/drawing/2014/main" id="{398344E3-64D8-4CE0-9B3A-57828151AFBC}"/>
+                    </a:ext>
+                  </a:extLst>
+                </p:cNvPr>
+                <p:cNvSpPr>
+                  <a:spLocks noRot="1" noChangeAspect="1" noMove="1" noResize="1" noEditPoints="1" noAdjustHandles="1" noChangeArrowheads="1" noChangeShapeType="1" noTextEdit="1"/>
+                </p:cNvSpPr>
+                <p:nvPr/>
+              </p:nvSpPr>
+              <p:spPr>
+                <a:xfrm>
+                  <a:off x="831161" y="2893995"/>
+                  <a:ext cx="889154" cy="343171"/>
+                </a:xfrm>
+                <a:prstGeom prst="rect">
+                  <a:avLst/>
+                </a:prstGeom>
+                <a:blipFill>
+                  <a:blip r:embed="rId24"/>
+                  <a:stretch>
+                    <a:fillRect/>
+                  </a:stretch>
+                </a:blipFill>
+              </p:spPr>
+              <p:txBody>
+                <a:bodyPr/>
+                <a:lstStyle/>
+                <a:p>
+                  <a:r>
+                    <a:rPr lang="zh-TW" altLang="en-US">
+                      <a:noFill/>
+                    </a:rPr>
+                    <a:t> </a:t>
+                  </a:r>
+                </a:p>
+              </p:txBody>
+            </p:sp>
+          </mc:Fallback>
+        </mc:AlternateContent>
+        <mc:AlternateContent xmlns:mc="http://schemas.openxmlformats.org/markup-compatibility/2006">
+          <mc:Choice xmlns:a14="http://schemas.microsoft.com/office/drawing/2010/main" Requires="a14">
+            <p:sp>
+              <p:nvSpPr>
+                <p:cNvPr id="261" name="矩形 260">
+                  <a:extLst>
+                    <a:ext uri="{FF2B5EF4-FFF2-40B4-BE49-F238E27FC236}">
+                      <a16:creationId xmlns:a16="http://schemas.microsoft.com/office/drawing/2014/main" id="{AC32431E-EE34-4064-A175-F612662C94E9}"/>
+                    </a:ext>
+                  </a:extLst>
+                </p:cNvPr>
+                <p:cNvSpPr/>
+                <p:nvPr/>
+              </p:nvSpPr>
+              <p:spPr>
+                <a:xfrm>
+                  <a:off x="2274909" y="2893995"/>
+                  <a:ext cx="889154" cy="343171"/>
+                </a:xfrm>
+                <a:prstGeom prst="rect">
+                  <a:avLst/>
+                </a:prstGeom>
+              </p:spPr>
+              <p:txBody>
+                <a:bodyPr wrap="none">
+                  <a:spAutoFit/>
+                </a:bodyPr>
+                <a:lstStyle/>
+                <a:p>
+                  <a:pPr/>
+                  <a14:m>
+                    <m:oMathPara xmlns:m="http://schemas.openxmlformats.org/officeDocument/2006/math">
+                      <m:oMathParaPr>
+                        <m:jc m:val="centerGroup"/>
+                      </m:oMathParaPr>
+                      <m:oMath xmlns:m="http://schemas.openxmlformats.org/officeDocument/2006/math">
+                        <m:r>
+                          <a:rPr lang="en-US" altLang="zh-TW" sz="1630" i="1">
+                            <a:latin typeface="Cambria Math" panose="02040503050406030204" pitchFamily="18" charset="0"/>
+                          </a:rPr>
+                          <m:t>ℓ=−1</m:t>
+                        </m:r>
+                      </m:oMath>
+                    </m:oMathPara>
+                  </a14:m>
+                  <a:endParaRPr lang="zh-TW" altLang="en-US" sz="1630" dirty="0">
+                    <a:latin typeface="Times New Roman" panose="02020603050405020304" pitchFamily="18" charset="0"/>
+                    <a:cs typeface="Times New Roman" panose="02020603050405020304" pitchFamily="18" charset="0"/>
+                  </a:endParaRPr>
+                </a:p>
+              </p:txBody>
+            </p:sp>
+          </mc:Choice>
+          <mc:Fallback>
+            <p:sp>
+              <p:nvSpPr>
+                <p:cNvPr id="261" name="矩形 260">
+                  <a:extLst>
+                    <a:ext uri="{FF2B5EF4-FFF2-40B4-BE49-F238E27FC236}">
+                      <a16:creationId xmlns:a16="http://schemas.microsoft.com/office/drawing/2014/main" id="{AC32431E-EE34-4064-A175-F612662C94E9}"/>
+                    </a:ext>
+                  </a:extLst>
+                </p:cNvPr>
+                <p:cNvSpPr>
+                  <a:spLocks noRot="1" noChangeAspect="1" noMove="1" noResize="1" noEditPoints="1" noAdjustHandles="1" noChangeArrowheads="1" noChangeShapeType="1" noTextEdit="1"/>
+                </p:cNvSpPr>
+                <p:nvPr/>
+              </p:nvSpPr>
+              <p:spPr>
+                <a:xfrm>
+                  <a:off x="2274909" y="2893995"/>
+                  <a:ext cx="889154" cy="343171"/>
+                </a:xfrm>
+                <a:prstGeom prst="rect">
+                  <a:avLst/>
+                </a:prstGeom>
+                <a:blipFill>
+                  <a:blip r:embed="rId25"/>
+                  <a:stretch>
+                    <a:fillRect/>
+                  </a:stretch>
+                </a:blipFill>
+              </p:spPr>
+              <p:txBody>
+                <a:bodyPr/>
+                <a:lstStyle/>
+                <a:p>
+                  <a:r>
+                    <a:rPr lang="zh-TW" altLang="en-US">
+                      <a:noFill/>
+                    </a:rPr>
+                    <a:t> </a:t>
+                  </a:r>
+                </a:p>
+              </p:txBody>
+            </p:sp>
+          </mc:Fallback>
+        </mc:AlternateContent>
+        <mc:AlternateContent xmlns:mc="http://schemas.openxmlformats.org/markup-compatibility/2006">
+          <mc:Choice xmlns:a14="http://schemas.microsoft.com/office/drawing/2010/main" Requires="a14">
+            <p:sp>
+              <p:nvSpPr>
+                <p:cNvPr id="262" name="矩形 261">
+                  <a:extLst>
+                    <a:ext uri="{FF2B5EF4-FFF2-40B4-BE49-F238E27FC236}">
+                      <a16:creationId xmlns:a16="http://schemas.microsoft.com/office/drawing/2014/main" id="{59045CCB-FC7C-45BF-B766-16DAFAED3F4B}"/>
+                    </a:ext>
+                  </a:extLst>
+                </p:cNvPr>
+                <p:cNvSpPr/>
+                <p:nvPr/>
+              </p:nvSpPr>
+              <p:spPr>
+                <a:xfrm>
+                  <a:off x="3718657" y="2893995"/>
+                  <a:ext cx="733662" cy="343171"/>
+                </a:xfrm>
+                <a:prstGeom prst="rect">
+                  <a:avLst/>
+                </a:prstGeom>
+              </p:spPr>
+              <p:txBody>
+                <a:bodyPr wrap="none">
+                  <a:spAutoFit/>
+                </a:bodyPr>
+                <a:lstStyle/>
+                <a:p>
+                  <a:pPr/>
+                  <a14:m>
+                    <m:oMathPara xmlns:m="http://schemas.openxmlformats.org/officeDocument/2006/math">
+                      <m:oMathParaPr>
+                        <m:jc m:val="centerGroup"/>
+                      </m:oMathParaPr>
+                      <m:oMath xmlns:m="http://schemas.openxmlformats.org/officeDocument/2006/math">
+                        <m:r>
+                          <a:rPr lang="en-US" altLang="zh-TW" sz="1630" i="1">
+                            <a:latin typeface="Cambria Math" panose="02040503050406030204" pitchFamily="18" charset="0"/>
+                          </a:rPr>
+                          <m:t>ℓ=0</m:t>
+                        </m:r>
+                      </m:oMath>
+                    </m:oMathPara>
+                  </a14:m>
+                  <a:endParaRPr lang="zh-TW" altLang="en-US" sz="1630" dirty="0">
+                    <a:latin typeface="Times New Roman" panose="02020603050405020304" pitchFamily="18" charset="0"/>
+                    <a:cs typeface="Times New Roman" panose="02020603050405020304" pitchFamily="18" charset="0"/>
+                  </a:endParaRPr>
+                </a:p>
+              </p:txBody>
+            </p:sp>
+          </mc:Choice>
+          <mc:Fallback>
+            <p:sp>
+              <p:nvSpPr>
+                <p:cNvPr id="262" name="矩形 261">
+                  <a:extLst>
+                    <a:ext uri="{FF2B5EF4-FFF2-40B4-BE49-F238E27FC236}">
+                      <a16:creationId xmlns:a16="http://schemas.microsoft.com/office/drawing/2014/main" id="{59045CCB-FC7C-45BF-B766-16DAFAED3F4B}"/>
+                    </a:ext>
+                  </a:extLst>
+                </p:cNvPr>
+                <p:cNvSpPr>
+                  <a:spLocks noRot="1" noChangeAspect="1" noMove="1" noResize="1" noEditPoints="1" noAdjustHandles="1" noChangeArrowheads="1" noChangeShapeType="1" noTextEdit="1"/>
+                </p:cNvSpPr>
+                <p:nvPr/>
+              </p:nvSpPr>
+              <p:spPr>
+                <a:xfrm>
+                  <a:off x="3718657" y="2893995"/>
+                  <a:ext cx="733662" cy="343171"/>
+                </a:xfrm>
+                <a:prstGeom prst="rect">
+                  <a:avLst/>
+                </a:prstGeom>
+                <a:blipFill>
+                  <a:blip r:embed="rId26"/>
+                  <a:stretch>
+                    <a:fillRect/>
+                  </a:stretch>
+                </a:blipFill>
+              </p:spPr>
+              <p:txBody>
+                <a:bodyPr/>
+                <a:lstStyle/>
+                <a:p>
+                  <a:r>
+                    <a:rPr lang="zh-TW" altLang="en-US">
+                      <a:noFill/>
+                    </a:rPr>
+                    <a:t> </a:t>
+                  </a:r>
+                </a:p>
+              </p:txBody>
+            </p:sp>
+          </mc:Fallback>
+        </mc:AlternateContent>
+        <mc:AlternateContent xmlns:mc="http://schemas.openxmlformats.org/markup-compatibility/2006">
+          <mc:Choice xmlns:a14="http://schemas.microsoft.com/office/drawing/2010/main" Requires="a14">
+            <p:sp>
+              <p:nvSpPr>
+                <p:cNvPr id="263" name="矩形 262">
+                  <a:extLst>
+                    <a:ext uri="{FF2B5EF4-FFF2-40B4-BE49-F238E27FC236}">
+                      <a16:creationId xmlns:a16="http://schemas.microsoft.com/office/drawing/2014/main" id="{04B8F826-6F72-4206-963D-2CD5C8B8E93B}"/>
+                    </a:ext>
+                  </a:extLst>
+                </p:cNvPr>
+                <p:cNvSpPr/>
+                <p:nvPr/>
+              </p:nvSpPr>
+              <p:spPr>
+                <a:xfrm>
+                  <a:off x="5006913" y="2893995"/>
+                  <a:ext cx="733662" cy="343171"/>
+                </a:xfrm>
+                <a:prstGeom prst="rect">
+                  <a:avLst/>
+                </a:prstGeom>
+              </p:spPr>
+              <p:txBody>
+                <a:bodyPr wrap="none">
+                  <a:spAutoFit/>
+                </a:bodyPr>
+                <a:lstStyle/>
+                <a:p>
+                  <a:pPr/>
+                  <a14:m>
+                    <m:oMathPara xmlns:m="http://schemas.openxmlformats.org/officeDocument/2006/math">
+                      <m:oMathParaPr>
+                        <m:jc m:val="centerGroup"/>
+                      </m:oMathParaPr>
+                      <m:oMath xmlns:m="http://schemas.openxmlformats.org/officeDocument/2006/math">
+                        <m:r>
+                          <a:rPr lang="en-US" altLang="zh-TW" sz="1630" i="1">
+                            <a:latin typeface="Cambria Math" panose="02040503050406030204" pitchFamily="18" charset="0"/>
+                          </a:rPr>
+                          <m:t>ℓ=1</m:t>
+                        </m:r>
+                      </m:oMath>
+                    </m:oMathPara>
+                  </a14:m>
+                  <a:endParaRPr lang="zh-TW" altLang="en-US" sz="1630" dirty="0">
+                    <a:latin typeface="Times New Roman" panose="02020603050405020304" pitchFamily="18" charset="0"/>
+                    <a:cs typeface="Times New Roman" panose="02020603050405020304" pitchFamily="18" charset="0"/>
+                  </a:endParaRPr>
+                </a:p>
+              </p:txBody>
+            </p:sp>
+          </mc:Choice>
+          <mc:Fallback>
+            <p:sp>
+              <p:nvSpPr>
+                <p:cNvPr id="263" name="矩形 262">
+                  <a:extLst>
+                    <a:ext uri="{FF2B5EF4-FFF2-40B4-BE49-F238E27FC236}">
+                      <a16:creationId xmlns:a16="http://schemas.microsoft.com/office/drawing/2014/main" id="{04B8F826-6F72-4206-963D-2CD5C8B8E93B}"/>
+                    </a:ext>
+                  </a:extLst>
+                </p:cNvPr>
+                <p:cNvSpPr>
+                  <a:spLocks noRot="1" noChangeAspect="1" noMove="1" noResize="1" noEditPoints="1" noAdjustHandles="1" noChangeArrowheads="1" noChangeShapeType="1" noTextEdit="1"/>
+                </p:cNvSpPr>
+                <p:nvPr/>
+              </p:nvSpPr>
+              <p:spPr>
+                <a:xfrm>
+                  <a:off x="5006913" y="2893995"/>
+                  <a:ext cx="733662" cy="343171"/>
+                </a:xfrm>
+                <a:prstGeom prst="rect">
+                  <a:avLst/>
+                </a:prstGeom>
+                <a:blipFill>
+                  <a:blip r:embed="rId27"/>
+                  <a:stretch>
+                    <a:fillRect/>
+                  </a:stretch>
+                </a:blipFill>
+              </p:spPr>
+              <p:txBody>
+                <a:bodyPr/>
+                <a:lstStyle/>
+                <a:p>
+                  <a:r>
+                    <a:rPr lang="zh-TW" altLang="en-US">
+                      <a:noFill/>
+                    </a:rPr>
+                    <a:t> </a:t>
+                  </a:r>
+                </a:p>
+              </p:txBody>
+            </p:sp>
+          </mc:Fallback>
+        </mc:AlternateContent>
+        <mc:AlternateContent xmlns:mc="http://schemas.openxmlformats.org/markup-compatibility/2006">
+          <mc:Choice xmlns:a14="http://schemas.microsoft.com/office/drawing/2010/main" Requires="a14">
+            <p:sp>
+              <p:nvSpPr>
+                <p:cNvPr id="264" name="矩形 263">
+                  <a:extLst>
+                    <a:ext uri="{FF2B5EF4-FFF2-40B4-BE49-F238E27FC236}">
+                      <a16:creationId xmlns:a16="http://schemas.microsoft.com/office/drawing/2014/main" id="{E4AEE6D0-356B-42B8-BF92-D04FD5D8291A}"/>
+                    </a:ext>
+                  </a:extLst>
+                </p:cNvPr>
+                <p:cNvSpPr/>
+                <p:nvPr/>
+              </p:nvSpPr>
+              <p:spPr>
+                <a:xfrm>
+                  <a:off x="6295171" y="2893995"/>
+                  <a:ext cx="733662" cy="343171"/>
+                </a:xfrm>
+                <a:prstGeom prst="rect">
+                  <a:avLst/>
+                </a:prstGeom>
+              </p:spPr>
+              <p:txBody>
+                <a:bodyPr wrap="none">
+                  <a:spAutoFit/>
+                </a:bodyPr>
+                <a:lstStyle/>
+                <a:p>
+                  <a:pPr/>
+                  <a14:m>
+                    <m:oMathPara xmlns:m="http://schemas.openxmlformats.org/officeDocument/2006/math">
+                      <m:oMathParaPr>
+                        <m:jc m:val="centerGroup"/>
+                      </m:oMathParaPr>
+                      <m:oMath xmlns:m="http://schemas.openxmlformats.org/officeDocument/2006/math">
+                        <m:r>
+                          <a:rPr lang="en-US" altLang="zh-TW" sz="1630" i="1">
+                            <a:latin typeface="Cambria Math" panose="02040503050406030204" pitchFamily="18" charset="0"/>
+                          </a:rPr>
+                          <m:t>ℓ=2</m:t>
+                        </m:r>
+                      </m:oMath>
+                    </m:oMathPara>
+                  </a14:m>
+                  <a:endParaRPr lang="zh-TW" altLang="en-US" sz="1630" dirty="0">
+                    <a:latin typeface="Times New Roman" panose="02020603050405020304" pitchFamily="18" charset="0"/>
+                    <a:cs typeface="Times New Roman" panose="02020603050405020304" pitchFamily="18" charset="0"/>
+                  </a:endParaRPr>
+                </a:p>
+              </p:txBody>
+            </p:sp>
+          </mc:Choice>
+          <mc:Fallback>
+            <p:sp>
+              <p:nvSpPr>
+                <p:cNvPr id="264" name="矩形 263">
+                  <a:extLst>
+                    <a:ext uri="{FF2B5EF4-FFF2-40B4-BE49-F238E27FC236}">
+                      <a16:creationId xmlns:a16="http://schemas.microsoft.com/office/drawing/2014/main" id="{E4AEE6D0-356B-42B8-BF92-D04FD5D8291A}"/>
+                    </a:ext>
+                  </a:extLst>
+                </p:cNvPr>
+                <p:cNvSpPr>
+                  <a:spLocks noRot="1" noChangeAspect="1" noMove="1" noResize="1" noEditPoints="1" noAdjustHandles="1" noChangeArrowheads="1" noChangeShapeType="1" noTextEdit="1"/>
+                </p:cNvSpPr>
+                <p:nvPr/>
+              </p:nvSpPr>
+              <p:spPr>
+                <a:xfrm>
+                  <a:off x="6295171" y="2893995"/>
+                  <a:ext cx="733662" cy="343171"/>
+                </a:xfrm>
+                <a:prstGeom prst="rect">
+                  <a:avLst/>
+                </a:prstGeom>
+                <a:blipFill>
+                  <a:blip r:embed="rId28"/>
+                  <a:stretch>
+                    <a:fillRect/>
+                  </a:stretch>
+                </a:blipFill>
+              </p:spPr>
+              <p:txBody>
+                <a:bodyPr/>
+                <a:lstStyle/>
+                <a:p>
+                  <a:r>
+                    <a:rPr lang="zh-TW" altLang="en-US">
+                      <a:noFill/>
+                    </a:rPr>
+                    <a:t> </a:t>
+                  </a:r>
+                </a:p>
+              </p:txBody>
+            </p:sp>
+          </mc:Fallback>
+        </mc:AlternateContent>
+        <mc:AlternateContent xmlns:mc="http://schemas.openxmlformats.org/markup-compatibility/2006">
+          <mc:Choice xmlns:a14="http://schemas.microsoft.com/office/drawing/2010/main" Requires="a14">
+            <p:sp>
+              <p:nvSpPr>
+                <p:cNvPr id="254" name="矩形 253">
+                  <a:extLst>
+                    <a:ext uri="{FF2B5EF4-FFF2-40B4-BE49-F238E27FC236}">
+                      <a16:creationId xmlns:a16="http://schemas.microsoft.com/office/drawing/2014/main" id="{69EB4EE8-5B4E-4097-A322-784B9C457674}"/>
+                    </a:ext>
+                  </a:extLst>
+                </p:cNvPr>
+                <p:cNvSpPr/>
+                <p:nvPr/>
+              </p:nvSpPr>
+              <p:spPr>
+                <a:xfrm>
+                  <a:off x="798802" y="688103"/>
+                  <a:ext cx="889154" cy="343171"/>
+                </a:xfrm>
+                <a:prstGeom prst="rect">
+                  <a:avLst/>
+                </a:prstGeom>
+              </p:spPr>
+              <p:txBody>
+                <a:bodyPr wrap="none">
+                  <a:spAutoFit/>
+                </a:bodyPr>
+                <a:lstStyle/>
+                <a:p>
+                  <a:pPr/>
+                  <a14:m>
+                    <m:oMathPara xmlns:m="http://schemas.openxmlformats.org/officeDocument/2006/math">
+                      <m:oMathParaPr>
+                        <m:jc m:val="centerGroup"/>
+                      </m:oMathParaPr>
+                      <m:oMath xmlns:m="http://schemas.openxmlformats.org/officeDocument/2006/math">
+                        <m:r>
+                          <a:rPr lang="en-US" altLang="zh-TW" sz="1630" i="1">
+                            <a:latin typeface="Cambria Math" panose="02040503050406030204" pitchFamily="18" charset="0"/>
+                          </a:rPr>
+                          <m:t>ℓ=−1</m:t>
+                        </m:r>
+                      </m:oMath>
+                    </m:oMathPara>
+                  </a14:m>
+                  <a:endParaRPr lang="zh-TW" altLang="en-US" sz="1630" dirty="0">
+                    <a:latin typeface="Times New Roman" panose="02020603050405020304" pitchFamily="18" charset="0"/>
+                    <a:cs typeface="Times New Roman" panose="02020603050405020304" pitchFamily="18" charset="0"/>
+                  </a:endParaRPr>
+                </a:p>
+              </p:txBody>
+            </p:sp>
+          </mc:Choice>
+          <mc:Fallback>
+            <p:sp>
+              <p:nvSpPr>
+                <p:cNvPr id="254" name="矩形 253">
+                  <a:extLst>
+                    <a:ext uri="{FF2B5EF4-FFF2-40B4-BE49-F238E27FC236}">
+                      <a16:creationId xmlns:a16="http://schemas.microsoft.com/office/drawing/2014/main" id="{69EB4EE8-5B4E-4097-A322-784B9C457674}"/>
+                    </a:ext>
+                  </a:extLst>
+                </p:cNvPr>
+                <p:cNvSpPr>
+                  <a:spLocks noRot="1" noChangeAspect="1" noMove="1" noResize="1" noEditPoints="1" noAdjustHandles="1" noChangeArrowheads="1" noChangeShapeType="1" noTextEdit="1"/>
+                </p:cNvSpPr>
+                <p:nvPr/>
+              </p:nvSpPr>
+              <p:spPr>
+                <a:xfrm>
+                  <a:off x="798802" y="688103"/>
+                  <a:ext cx="889154" cy="343171"/>
+                </a:xfrm>
+                <a:prstGeom prst="rect">
+                  <a:avLst/>
+                </a:prstGeom>
+                <a:blipFill>
+                  <a:blip r:embed="rId29"/>
+                  <a:stretch>
+                    <a:fillRect/>
+                  </a:stretch>
+                </a:blipFill>
+              </p:spPr>
+              <p:txBody>
+                <a:bodyPr/>
+                <a:lstStyle/>
+                <a:p>
+                  <a:r>
+                    <a:rPr lang="zh-TW" altLang="en-US">
+                      <a:noFill/>
+                    </a:rPr>
+                    <a:t> </a:t>
+                  </a:r>
+                </a:p>
+              </p:txBody>
+            </p:sp>
+          </mc:Fallback>
+        </mc:AlternateContent>
+        <mc:AlternateContent xmlns:mc="http://schemas.openxmlformats.org/markup-compatibility/2006">
+          <mc:Choice xmlns:a14="http://schemas.microsoft.com/office/drawing/2010/main" Requires="a14">
+            <p:sp>
+              <p:nvSpPr>
+                <p:cNvPr id="255" name="矩形 254">
+                  <a:extLst>
+                    <a:ext uri="{FF2B5EF4-FFF2-40B4-BE49-F238E27FC236}">
+                      <a16:creationId xmlns:a16="http://schemas.microsoft.com/office/drawing/2014/main" id="{ADB96A3F-6FB2-42D8-9E50-43C201847A7C}"/>
+                    </a:ext>
+                  </a:extLst>
+                </p:cNvPr>
+                <p:cNvSpPr/>
+                <p:nvPr/>
+              </p:nvSpPr>
+              <p:spPr>
+                <a:xfrm>
+                  <a:off x="2242068" y="688103"/>
+                  <a:ext cx="889154" cy="343171"/>
+                </a:xfrm>
+                <a:prstGeom prst="rect">
+                  <a:avLst/>
+                </a:prstGeom>
+              </p:spPr>
+              <p:txBody>
+                <a:bodyPr wrap="none">
+                  <a:spAutoFit/>
+                </a:bodyPr>
+                <a:lstStyle/>
+                <a:p>
+                  <a:pPr/>
+                  <a14:m>
+                    <m:oMathPara xmlns:m="http://schemas.openxmlformats.org/officeDocument/2006/math">
+                      <m:oMathParaPr>
+                        <m:jc m:val="centerGroup"/>
+                      </m:oMathParaPr>
+                      <m:oMath xmlns:m="http://schemas.openxmlformats.org/officeDocument/2006/math">
+                        <m:r>
+                          <a:rPr lang="en-US" altLang="zh-TW" sz="1630" i="1">
+                            <a:latin typeface="Cambria Math" panose="02040503050406030204" pitchFamily="18" charset="0"/>
+                          </a:rPr>
+                          <m:t>ℓ=−2</m:t>
+                        </m:r>
+                      </m:oMath>
+                    </m:oMathPara>
+                  </a14:m>
+                  <a:endParaRPr lang="zh-TW" altLang="en-US" sz="1630" dirty="0">
+                    <a:latin typeface="Times New Roman" panose="02020603050405020304" pitchFamily="18" charset="0"/>
+                    <a:cs typeface="Times New Roman" panose="02020603050405020304" pitchFamily="18" charset="0"/>
+                  </a:endParaRPr>
+                </a:p>
+              </p:txBody>
+            </p:sp>
+          </mc:Choice>
+          <mc:Fallback>
+            <p:sp>
+              <p:nvSpPr>
+                <p:cNvPr id="255" name="矩形 254">
+                  <a:extLst>
+                    <a:ext uri="{FF2B5EF4-FFF2-40B4-BE49-F238E27FC236}">
+                      <a16:creationId xmlns:a16="http://schemas.microsoft.com/office/drawing/2014/main" id="{ADB96A3F-6FB2-42D8-9E50-43C201847A7C}"/>
+                    </a:ext>
+                  </a:extLst>
+                </p:cNvPr>
+                <p:cNvSpPr>
+                  <a:spLocks noRot="1" noChangeAspect="1" noMove="1" noResize="1" noEditPoints="1" noAdjustHandles="1" noChangeArrowheads="1" noChangeShapeType="1" noTextEdit="1"/>
+                </p:cNvSpPr>
+                <p:nvPr/>
+              </p:nvSpPr>
+              <p:spPr>
+                <a:xfrm>
+                  <a:off x="2242068" y="688103"/>
+                  <a:ext cx="889154" cy="343171"/>
+                </a:xfrm>
+                <a:prstGeom prst="rect">
+                  <a:avLst/>
+                </a:prstGeom>
+                <a:blipFill>
+                  <a:blip r:embed="rId30"/>
+                  <a:stretch>
+                    <a:fillRect/>
+                  </a:stretch>
+                </a:blipFill>
+              </p:spPr>
+              <p:txBody>
+                <a:bodyPr/>
+                <a:lstStyle/>
+                <a:p>
+                  <a:r>
+                    <a:rPr lang="zh-TW" altLang="en-US">
+                      <a:noFill/>
+                    </a:rPr>
+                    <a:t> </a:t>
+                  </a:r>
+                </a:p>
+              </p:txBody>
+            </p:sp>
+          </mc:Fallback>
+        </mc:AlternateContent>
+        <mc:AlternateContent xmlns:mc="http://schemas.openxmlformats.org/markup-compatibility/2006">
+          <mc:Choice xmlns:a14="http://schemas.microsoft.com/office/drawing/2010/main" Requires="a14">
+            <p:sp>
+              <p:nvSpPr>
+                <p:cNvPr id="256" name="矩形 255">
+                  <a:extLst>
+                    <a:ext uri="{FF2B5EF4-FFF2-40B4-BE49-F238E27FC236}">
+                      <a16:creationId xmlns:a16="http://schemas.microsoft.com/office/drawing/2014/main" id="{2DF06E1D-DE6F-4AC3-B5FB-5ED5DA15B19F}"/>
+                    </a:ext>
+                  </a:extLst>
+                </p:cNvPr>
+                <p:cNvSpPr/>
+                <p:nvPr/>
+              </p:nvSpPr>
+              <p:spPr>
+                <a:xfrm>
+                  <a:off x="3685334" y="688103"/>
+                  <a:ext cx="733662" cy="343171"/>
+                </a:xfrm>
+                <a:prstGeom prst="rect">
+                  <a:avLst/>
+                </a:prstGeom>
+              </p:spPr>
+              <p:txBody>
+                <a:bodyPr wrap="none">
+                  <a:spAutoFit/>
+                </a:bodyPr>
+                <a:lstStyle/>
+                <a:p>
+                  <a:pPr/>
+                  <a14:m>
+                    <m:oMathPara xmlns:m="http://schemas.openxmlformats.org/officeDocument/2006/math">
+                      <m:oMathParaPr>
+                        <m:jc m:val="centerGroup"/>
+                      </m:oMathParaPr>
+                      <m:oMath xmlns:m="http://schemas.openxmlformats.org/officeDocument/2006/math">
+                        <m:r>
+                          <a:rPr lang="en-US" altLang="zh-TW" sz="1630" i="1">
+                            <a:latin typeface="Cambria Math" panose="02040503050406030204" pitchFamily="18" charset="0"/>
+                          </a:rPr>
+                          <m:t>ℓ=0</m:t>
+                        </m:r>
+                      </m:oMath>
+                    </m:oMathPara>
+                  </a14:m>
+                  <a:endParaRPr lang="zh-TW" altLang="en-US" sz="1630" dirty="0">
+                    <a:latin typeface="Times New Roman" panose="02020603050405020304" pitchFamily="18" charset="0"/>
+                    <a:cs typeface="Times New Roman" panose="02020603050405020304" pitchFamily="18" charset="0"/>
+                  </a:endParaRPr>
+                </a:p>
+              </p:txBody>
+            </p:sp>
+          </mc:Choice>
+          <mc:Fallback>
+            <p:sp>
+              <p:nvSpPr>
+                <p:cNvPr id="256" name="矩形 255">
+                  <a:extLst>
+                    <a:ext uri="{FF2B5EF4-FFF2-40B4-BE49-F238E27FC236}">
+                      <a16:creationId xmlns:a16="http://schemas.microsoft.com/office/drawing/2014/main" id="{2DF06E1D-DE6F-4AC3-B5FB-5ED5DA15B19F}"/>
+                    </a:ext>
+                  </a:extLst>
+                </p:cNvPr>
+                <p:cNvSpPr>
+                  <a:spLocks noRot="1" noChangeAspect="1" noMove="1" noResize="1" noEditPoints="1" noAdjustHandles="1" noChangeArrowheads="1" noChangeShapeType="1" noTextEdit="1"/>
+                </p:cNvSpPr>
+                <p:nvPr/>
+              </p:nvSpPr>
+              <p:spPr>
+                <a:xfrm>
+                  <a:off x="3685334" y="688103"/>
+                  <a:ext cx="733662" cy="343171"/>
+                </a:xfrm>
+                <a:prstGeom prst="rect">
+                  <a:avLst/>
+                </a:prstGeom>
+                <a:blipFill>
+                  <a:blip r:embed="rId31"/>
+                  <a:stretch>
+                    <a:fillRect/>
+                  </a:stretch>
+                </a:blipFill>
+              </p:spPr>
+              <p:txBody>
+                <a:bodyPr/>
+                <a:lstStyle/>
+                <a:p>
+                  <a:r>
+                    <a:rPr lang="zh-TW" altLang="en-US">
+                      <a:noFill/>
+                    </a:rPr>
+                    <a:t> </a:t>
+                  </a:r>
+                </a:p>
+              </p:txBody>
+            </p:sp>
+          </mc:Fallback>
+        </mc:AlternateContent>
+        <mc:AlternateContent xmlns:mc="http://schemas.openxmlformats.org/markup-compatibility/2006">
+          <mc:Choice xmlns:a14="http://schemas.microsoft.com/office/drawing/2010/main" Requires="a14">
+            <p:sp>
+              <p:nvSpPr>
+                <p:cNvPr id="257" name="矩形 256">
+                  <a:extLst>
+                    <a:ext uri="{FF2B5EF4-FFF2-40B4-BE49-F238E27FC236}">
+                      <a16:creationId xmlns:a16="http://schemas.microsoft.com/office/drawing/2014/main" id="{11730B68-B888-4253-81F5-33C838AA52E1}"/>
+                    </a:ext>
+                  </a:extLst>
+                </p:cNvPr>
+                <p:cNvSpPr/>
+                <p:nvPr/>
+              </p:nvSpPr>
+              <p:spPr>
+                <a:xfrm>
+                  <a:off x="4973108" y="688103"/>
+                  <a:ext cx="733662" cy="343171"/>
+                </a:xfrm>
+                <a:prstGeom prst="rect">
+                  <a:avLst/>
+                </a:prstGeom>
+              </p:spPr>
+              <p:txBody>
+                <a:bodyPr wrap="none">
+                  <a:spAutoFit/>
+                </a:bodyPr>
+                <a:lstStyle/>
+                <a:p>
+                  <a:pPr/>
+                  <a14:m>
+                    <m:oMathPara xmlns:m="http://schemas.openxmlformats.org/officeDocument/2006/math">
+                      <m:oMathParaPr>
+                        <m:jc m:val="centerGroup"/>
+                      </m:oMathParaPr>
+                      <m:oMath xmlns:m="http://schemas.openxmlformats.org/officeDocument/2006/math">
+                        <m:r>
+                          <a:rPr lang="en-US" altLang="zh-TW" sz="1630" i="1">
+                            <a:latin typeface="Cambria Math" panose="02040503050406030204" pitchFamily="18" charset="0"/>
+                          </a:rPr>
+                          <m:t>ℓ=1</m:t>
+                        </m:r>
+                      </m:oMath>
+                    </m:oMathPara>
+                  </a14:m>
+                  <a:endParaRPr lang="zh-TW" altLang="en-US" sz="1630" dirty="0">
+                    <a:latin typeface="Times New Roman" panose="02020603050405020304" pitchFamily="18" charset="0"/>
+                    <a:cs typeface="Times New Roman" panose="02020603050405020304" pitchFamily="18" charset="0"/>
+                  </a:endParaRPr>
+                </a:p>
+              </p:txBody>
+            </p:sp>
+          </mc:Choice>
+          <mc:Fallback>
+            <p:sp>
+              <p:nvSpPr>
+                <p:cNvPr id="257" name="矩形 256">
+                  <a:extLst>
+                    <a:ext uri="{FF2B5EF4-FFF2-40B4-BE49-F238E27FC236}">
+                      <a16:creationId xmlns:a16="http://schemas.microsoft.com/office/drawing/2014/main" id="{11730B68-B888-4253-81F5-33C838AA52E1}"/>
+                    </a:ext>
+                  </a:extLst>
+                </p:cNvPr>
+                <p:cNvSpPr>
+                  <a:spLocks noRot="1" noChangeAspect="1" noMove="1" noResize="1" noEditPoints="1" noAdjustHandles="1" noChangeArrowheads="1" noChangeShapeType="1" noTextEdit="1"/>
+                </p:cNvSpPr>
+                <p:nvPr/>
+              </p:nvSpPr>
+              <p:spPr>
+                <a:xfrm>
+                  <a:off x="4973108" y="688103"/>
+                  <a:ext cx="733662" cy="343171"/>
+                </a:xfrm>
+                <a:prstGeom prst="rect">
+                  <a:avLst/>
+                </a:prstGeom>
+                <a:blipFill>
+                  <a:blip r:embed="rId32"/>
+                  <a:stretch>
+                    <a:fillRect/>
+                  </a:stretch>
+                </a:blipFill>
+              </p:spPr>
+              <p:txBody>
+                <a:bodyPr/>
+                <a:lstStyle/>
+                <a:p>
+                  <a:r>
+                    <a:rPr lang="zh-TW" altLang="en-US">
+                      <a:noFill/>
+                    </a:rPr>
+                    <a:t> </a:t>
+                  </a:r>
+                </a:p>
+              </p:txBody>
+            </p:sp>
+          </mc:Fallback>
+        </mc:AlternateContent>
+        <mc:AlternateContent xmlns:mc="http://schemas.openxmlformats.org/markup-compatibility/2006">
+          <mc:Choice xmlns:a14="http://schemas.microsoft.com/office/drawing/2010/main" Requires="a14">
+            <p:sp>
+              <p:nvSpPr>
+                <p:cNvPr id="258" name="矩形 257">
+                  <a:extLst>
+                    <a:ext uri="{FF2B5EF4-FFF2-40B4-BE49-F238E27FC236}">
+                      <a16:creationId xmlns:a16="http://schemas.microsoft.com/office/drawing/2014/main" id="{4E4FAD64-43F0-4BD9-B7AD-6211EF98281C}"/>
+                    </a:ext>
+                  </a:extLst>
+                </p:cNvPr>
+                <p:cNvSpPr/>
+                <p:nvPr/>
+              </p:nvSpPr>
+              <p:spPr>
+                <a:xfrm>
+                  <a:off x="6260881" y="688103"/>
+                  <a:ext cx="733662" cy="343171"/>
+                </a:xfrm>
+                <a:prstGeom prst="rect">
+                  <a:avLst/>
+                </a:prstGeom>
+              </p:spPr>
+              <p:txBody>
+                <a:bodyPr wrap="none">
+                  <a:spAutoFit/>
+                </a:bodyPr>
+                <a:lstStyle/>
+                <a:p>
+                  <a:pPr/>
+                  <a14:m>
+                    <m:oMathPara xmlns:m="http://schemas.openxmlformats.org/officeDocument/2006/math">
+                      <m:oMathParaPr>
+                        <m:jc m:val="centerGroup"/>
+                      </m:oMathParaPr>
+                      <m:oMath xmlns:m="http://schemas.openxmlformats.org/officeDocument/2006/math">
+                        <m:r>
+                          <a:rPr lang="en-US" altLang="zh-TW" sz="1630" i="1">
+                            <a:latin typeface="Cambria Math" panose="02040503050406030204" pitchFamily="18" charset="0"/>
+                          </a:rPr>
+                          <m:t>ℓ=2</m:t>
+                        </m:r>
+                      </m:oMath>
+                    </m:oMathPara>
+                  </a14:m>
+                  <a:endParaRPr lang="zh-TW" altLang="en-US" sz="1630" dirty="0">
+                    <a:latin typeface="Times New Roman" panose="02020603050405020304" pitchFamily="18" charset="0"/>
+                    <a:cs typeface="Times New Roman" panose="02020603050405020304" pitchFamily="18" charset="0"/>
+                  </a:endParaRPr>
+                </a:p>
+              </p:txBody>
+            </p:sp>
+          </mc:Choice>
+          <mc:Fallback>
+            <p:sp>
+              <p:nvSpPr>
+                <p:cNvPr id="258" name="矩形 257">
+                  <a:extLst>
+                    <a:ext uri="{FF2B5EF4-FFF2-40B4-BE49-F238E27FC236}">
+                      <a16:creationId xmlns:a16="http://schemas.microsoft.com/office/drawing/2014/main" id="{4E4FAD64-43F0-4BD9-B7AD-6211EF98281C}"/>
+                    </a:ext>
+                  </a:extLst>
+                </p:cNvPr>
+                <p:cNvSpPr>
+                  <a:spLocks noRot="1" noChangeAspect="1" noMove="1" noResize="1" noEditPoints="1" noAdjustHandles="1" noChangeArrowheads="1" noChangeShapeType="1" noTextEdit="1"/>
+                </p:cNvSpPr>
+                <p:nvPr/>
+              </p:nvSpPr>
+              <p:spPr>
+                <a:xfrm>
+                  <a:off x="6260881" y="688103"/>
+                  <a:ext cx="733662" cy="343171"/>
+                </a:xfrm>
+                <a:prstGeom prst="rect">
+                  <a:avLst/>
+                </a:prstGeom>
+                <a:blipFill>
+                  <a:blip r:embed="rId33"/>
+                  <a:stretch>
+                    <a:fillRect/>
+                  </a:stretch>
+                </a:blipFill>
+              </p:spPr>
+              <p:txBody>
+                <a:bodyPr/>
+                <a:lstStyle/>
+                <a:p>
+                  <a:r>
+                    <a:rPr lang="zh-TW" altLang="en-US">
+                      <a:noFill/>
+                    </a:rPr>
+                    <a:t> </a:t>
+                  </a:r>
+                </a:p>
+              </p:txBody>
+            </p:sp>
+          </mc:Fallback>
+        </mc:AlternateContent>
+        <p:sp>
+          <p:nvSpPr>
+            <p:cNvPr id="56" name="矩形 55">
+              <a:extLst>
+                <a:ext uri="{FF2B5EF4-FFF2-40B4-BE49-F238E27FC236}">
+                  <a16:creationId xmlns:a16="http://schemas.microsoft.com/office/drawing/2014/main" id="{797AD572-5775-4288-8939-87CD3B6325A6}"/>
+                </a:ext>
+              </a:extLst>
+            </p:cNvPr>
+            <p:cNvSpPr/>
+            <p:nvPr/>
+          </p:nvSpPr>
+          <p:spPr>
+            <a:xfrm>
+              <a:off x="7376467" y="1931128"/>
+              <a:ext cx="487634" cy="343171"/>
+            </a:xfrm>
+            <a:prstGeom prst="rect">
+              <a:avLst/>
+            </a:prstGeom>
+          </p:spPr>
+          <p:txBody>
+            <a:bodyPr wrap="none">
+              <a:spAutoFit/>
+            </a:bodyPr>
+            <a:lstStyle/>
+            <a:p>
+              <a:r>
+                <a:rPr lang="en-US" altLang="zh-TW" sz="1630" dirty="0">
+                  <a:latin typeface="Times New Roman" panose="02020603050405020304" pitchFamily="18" charset="0"/>
+                  <a:cs typeface="Times New Roman" panose="02020603050405020304" pitchFamily="18" charset="0"/>
+                </a:rPr>
+                <a:t>a.u.</a:t>
+              </a:r>
+              <a:endParaRPr lang="zh-TW" altLang="en-US" sz="1630" dirty="0">
+                <a:latin typeface="Times New Roman" panose="02020603050405020304" pitchFamily="18" charset="0"/>
+                <a:cs typeface="Times New Roman" panose="02020603050405020304" pitchFamily="18" charset="0"/>
+              </a:endParaRPr>
+            </a:p>
+          </p:txBody>
+        </p:sp>
+        <p:sp>
+          <p:nvSpPr>
+            <p:cNvPr id="57" name="矩形 56">
+              <a:extLst>
+                <a:ext uri="{FF2B5EF4-FFF2-40B4-BE49-F238E27FC236}">
+                  <a16:creationId xmlns:a16="http://schemas.microsoft.com/office/drawing/2014/main" id="{7E4C2416-B327-4D68-9A7C-099E8E98D2D4}"/>
+                </a:ext>
+              </a:extLst>
+            </p:cNvPr>
+            <p:cNvSpPr/>
+            <p:nvPr/>
+          </p:nvSpPr>
+          <p:spPr>
+            <a:xfrm>
+              <a:off x="7351896" y="5570973"/>
+              <a:ext cx="487634" cy="343171"/>
+            </a:xfrm>
+            <a:prstGeom prst="rect">
+              <a:avLst/>
+            </a:prstGeom>
+          </p:spPr>
+          <p:txBody>
+            <a:bodyPr wrap="none">
+              <a:spAutoFit/>
+            </a:bodyPr>
+            <a:lstStyle/>
+            <a:p>
+              <a:r>
+                <a:rPr lang="en-US" altLang="zh-TW" sz="1630" dirty="0">
+                  <a:latin typeface="Times New Roman" panose="02020603050405020304" pitchFamily="18" charset="0"/>
+                  <a:cs typeface="Times New Roman" panose="02020603050405020304" pitchFamily="18" charset="0"/>
+                </a:rPr>
+                <a:t>a.u.</a:t>
+              </a:r>
+              <a:endParaRPr lang="zh-TW" altLang="en-US" sz="1630" dirty="0">
+                <a:latin typeface="Times New Roman" panose="02020603050405020304" pitchFamily="18" charset="0"/>
+                <a:cs typeface="Times New Roman" panose="02020603050405020304" pitchFamily="18" charset="0"/>
+              </a:endParaRPr>
+            </a:p>
+          </p:txBody>
+        </p:sp>
+        <p:pic>
+          <p:nvPicPr>
+            <p:cNvPr id="58" name="圖片 57">
+              <a:extLst>
+                <a:ext uri="{FF2B5EF4-FFF2-40B4-BE49-F238E27FC236}">
+                  <a16:creationId xmlns:a16="http://schemas.microsoft.com/office/drawing/2014/main" id="{36B5CFFE-242B-4573-87F4-362200E6CB34}"/>
+                </a:ext>
+              </a:extLst>
+            </p:cNvPr>
+            <p:cNvPicPr>
+              <a:picLocks noChangeAspect="1"/>
+            </p:cNvPicPr>
+            <p:nvPr/>
+          </p:nvPicPr>
+          <p:blipFill rotWithShape="1">
+            <a:blip r:embed="rId34">
+              <a:clrChange>
+                <a:clrFrom>
+                  <a:srgbClr val="FFFFFF"/>
+                </a:clrFrom>
+                <a:clrTo>
+                  <a:srgbClr val="FFFFFF">
+                    <a:alpha val="0"/>
+                  </a:srgbClr>
+                </a:clrTo>
+              </a:clrChange>
+            </a:blip>
+            <a:srcRect r="32321"/>
+            <a:stretch/>
+          </p:blipFill>
+          <p:spPr>
+            <a:xfrm>
+              <a:off x="7381252" y="4397987"/>
+              <a:ext cx="407456" cy="1328804"/>
+            </a:xfrm>
+            <a:prstGeom prst="rect">
+              <a:avLst/>
+            </a:prstGeom>
+          </p:spPr>
+        </p:pic>
+        <p:sp>
+          <p:nvSpPr>
+            <p:cNvPr id="59" name="矩形 58">
+              <a:extLst>
+                <a:ext uri="{FF2B5EF4-FFF2-40B4-BE49-F238E27FC236}">
+                  <a16:creationId xmlns:a16="http://schemas.microsoft.com/office/drawing/2014/main" id="{564D86CE-95CE-4311-A6BA-FBC49B431C30}"/>
+                </a:ext>
+              </a:extLst>
+            </p:cNvPr>
+            <p:cNvSpPr/>
+            <p:nvPr/>
+          </p:nvSpPr>
+          <p:spPr>
+            <a:xfrm>
+              <a:off x="7680008" y="623239"/>
+              <a:ext cx="288862" cy="343171"/>
+            </a:xfrm>
+            <a:prstGeom prst="rect">
+              <a:avLst/>
+            </a:prstGeom>
+          </p:spPr>
+          <p:txBody>
+            <a:bodyPr wrap="none">
+              <a:spAutoFit/>
+            </a:bodyPr>
+            <a:lstStyle/>
+            <a:p>
+              <a:r>
+                <a:rPr lang="en-US" altLang="zh-TW" sz="1630" dirty="0">
+                  <a:latin typeface="Times New Roman" panose="02020603050405020304" pitchFamily="18" charset="0"/>
+                  <a:cs typeface="Times New Roman" panose="02020603050405020304" pitchFamily="18" charset="0"/>
+                </a:rPr>
+                <a:t>1</a:t>
+              </a:r>
+              <a:endParaRPr lang="zh-TW" altLang="en-US" sz="1630" dirty="0">
+                <a:latin typeface="Times New Roman" panose="02020603050405020304" pitchFamily="18" charset="0"/>
+                <a:cs typeface="Times New Roman" panose="02020603050405020304" pitchFamily="18" charset="0"/>
+              </a:endParaRPr>
+            </a:p>
+          </p:txBody>
+        </p:sp>
+        <p:sp>
+          <p:nvSpPr>
+            <p:cNvPr id="60" name="矩形 59">
+              <a:extLst>
+                <a:ext uri="{FF2B5EF4-FFF2-40B4-BE49-F238E27FC236}">
+                  <a16:creationId xmlns:a16="http://schemas.microsoft.com/office/drawing/2014/main" id="{A2533813-81CE-4B60-A2C6-2266CF4DE05F}"/>
+                </a:ext>
+              </a:extLst>
+            </p:cNvPr>
+            <p:cNvSpPr/>
+            <p:nvPr/>
+          </p:nvSpPr>
+          <p:spPr>
+            <a:xfrm>
+              <a:off x="7699058" y="1890064"/>
+              <a:ext cx="288862" cy="343171"/>
+            </a:xfrm>
+            <a:prstGeom prst="rect">
+              <a:avLst/>
+            </a:prstGeom>
+          </p:spPr>
+          <p:txBody>
+            <a:bodyPr wrap="none">
+              <a:spAutoFit/>
+            </a:bodyPr>
+            <a:lstStyle/>
+            <a:p>
+              <a:r>
+                <a:rPr lang="en-US" altLang="zh-TW" sz="1630" dirty="0">
+                  <a:latin typeface="Times New Roman" panose="02020603050405020304" pitchFamily="18" charset="0"/>
+                  <a:cs typeface="Times New Roman" panose="02020603050405020304" pitchFamily="18" charset="0"/>
+                </a:rPr>
+                <a:t>0</a:t>
+              </a:r>
+              <a:endParaRPr lang="zh-TW" altLang="en-US" sz="1630" dirty="0">
+                <a:latin typeface="Times New Roman" panose="02020603050405020304" pitchFamily="18" charset="0"/>
+                <a:cs typeface="Times New Roman" panose="02020603050405020304" pitchFamily="18" charset="0"/>
+              </a:endParaRPr>
+            </a:p>
+          </p:txBody>
+        </p:sp>
+        <p:sp>
+          <p:nvSpPr>
+            <p:cNvPr id="61" name="矩形 60">
+              <a:extLst>
+                <a:ext uri="{FF2B5EF4-FFF2-40B4-BE49-F238E27FC236}">
+                  <a16:creationId xmlns:a16="http://schemas.microsoft.com/office/drawing/2014/main" id="{02D3B054-B522-476B-A353-E4CC137E993F}"/>
+                </a:ext>
+              </a:extLst>
+            </p:cNvPr>
+            <p:cNvSpPr/>
+            <p:nvPr/>
+          </p:nvSpPr>
+          <p:spPr>
+            <a:xfrm>
+              <a:off x="7689533" y="4245524"/>
+              <a:ext cx="288862" cy="343171"/>
+            </a:xfrm>
+            <a:prstGeom prst="rect">
+              <a:avLst/>
+            </a:prstGeom>
+          </p:spPr>
+          <p:txBody>
+            <a:bodyPr wrap="none">
+              <a:spAutoFit/>
+            </a:bodyPr>
+            <a:lstStyle/>
+            <a:p>
+              <a:r>
+                <a:rPr lang="en-US" altLang="zh-TW" sz="1630" dirty="0">
+                  <a:latin typeface="Times New Roman" panose="02020603050405020304" pitchFamily="18" charset="0"/>
+                  <a:cs typeface="Times New Roman" panose="02020603050405020304" pitchFamily="18" charset="0"/>
+                </a:rPr>
+                <a:t>1</a:t>
+              </a:r>
+              <a:endParaRPr lang="zh-TW" altLang="en-US" sz="1630" dirty="0">
+                <a:latin typeface="Times New Roman" panose="02020603050405020304" pitchFamily="18" charset="0"/>
+                <a:cs typeface="Times New Roman" panose="02020603050405020304" pitchFamily="18" charset="0"/>
+              </a:endParaRPr>
+            </a:p>
+          </p:txBody>
+        </p:sp>
+        <p:sp>
+          <p:nvSpPr>
+            <p:cNvPr id="62" name="矩形 61">
+              <a:extLst>
+                <a:ext uri="{FF2B5EF4-FFF2-40B4-BE49-F238E27FC236}">
+                  <a16:creationId xmlns:a16="http://schemas.microsoft.com/office/drawing/2014/main" id="{1D433D44-68DB-443E-B327-4157514A705D}"/>
+                </a:ext>
+              </a:extLst>
+            </p:cNvPr>
+            <p:cNvSpPr/>
+            <p:nvPr/>
+          </p:nvSpPr>
+          <p:spPr>
+            <a:xfrm>
+              <a:off x="7708583" y="5483774"/>
+              <a:ext cx="357790" cy="343171"/>
+            </a:xfrm>
+            <a:prstGeom prst="rect">
+              <a:avLst/>
+            </a:prstGeom>
+          </p:spPr>
+          <p:txBody>
+            <a:bodyPr wrap="none">
+              <a:spAutoFit/>
+            </a:bodyPr>
+            <a:lstStyle/>
+            <a:p>
+              <a:r>
+                <a:rPr lang="en-US" altLang="zh-TW" sz="1630" dirty="0">
+                  <a:latin typeface="Times New Roman" panose="02020603050405020304" pitchFamily="18" charset="0"/>
+                  <a:cs typeface="Times New Roman" panose="02020603050405020304" pitchFamily="18" charset="0"/>
+                </a:rPr>
+                <a:t>-1</a:t>
+              </a:r>
+              <a:endParaRPr lang="zh-TW" altLang="en-US" sz="1630" dirty="0">
+                <a:latin typeface="Times New Roman" panose="02020603050405020304" pitchFamily="18" charset="0"/>
+                <a:cs typeface="Times New Roman" panose="02020603050405020304" pitchFamily="18" charset="0"/>
+              </a:endParaRPr>
+            </a:p>
+          </p:txBody>
+        </p:sp>
+      </p:grpSp>
+    </p:spTree>
+    <p:extLst>
+      <p:ext uri="{BB962C8B-B14F-4D97-AF65-F5344CB8AC3E}">
+        <p14:creationId xmlns:p14="http://schemas.microsoft.com/office/powerpoint/2010/main" val="2416378980"/>
+      </p:ext>
+    </p:extLst>
+  </p:cSld>
+  <p:clrMapOvr>
+    <a:masterClrMapping/>
+  </p:clrMapOvr>
+</p:sld>
+</file>
+
 <file path=ppt/theme/theme1.xml><?xml version="1.0" encoding="utf-8"?>
 <a:theme xmlns:a="http://schemas.openxmlformats.org/drawingml/2006/main" name="Office 佈景主題">
   <a:themeElements>

--- a/Final/Figures/A_C_longitudinal.pptx
+++ b/Final/Figures/A_C_longitudinal.pptx
@@ -244,7 +244,7 @@
           <a:p>
             <a:fld id="{CC6FB895-B65F-4EA9-9907-69D32227E72B}" type="datetimeFigureOut">
               <a:rPr lang="zh-TW" altLang="en-US" smtClean="0"/>
-              <a:t>2026/7/2</a:t>
+              <a:t>2026/7/25</a:t>
             </a:fld>
             <a:endParaRPr lang="zh-TW" altLang="en-US"/>
           </a:p>
@@ -414,7 +414,7 @@
           <a:p>
             <a:fld id="{CC6FB895-B65F-4EA9-9907-69D32227E72B}" type="datetimeFigureOut">
               <a:rPr lang="zh-TW" altLang="en-US" smtClean="0"/>
-              <a:t>2026/7/2</a:t>
+              <a:t>2026/7/25</a:t>
             </a:fld>
             <a:endParaRPr lang="zh-TW" altLang="en-US"/>
           </a:p>
@@ -594,7 +594,7 @@
           <a:p>
             <a:fld id="{CC6FB895-B65F-4EA9-9907-69D32227E72B}" type="datetimeFigureOut">
               <a:rPr lang="zh-TW" altLang="en-US" smtClean="0"/>
-              <a:t>2026/7/2</a:t>
+              <a:t>2026/7/25</a:t>
             </a:fld>
             <a:endParaRPr lang="zh-TW" altLang="en-US"/>
           </a:p>
@@ -764,7 +764,7 @@
           <a:p>
             <a:fld id="{CC6FB895-B65F-4EA9-9907-69D32227E72B}" type="datetimeFigureOut">
               <a:rPr lang="zh-TW" altLang="en-US" smtClean="0"/>
-              <a:t>2026/7/2</a:t>
+              <a:t>2026/7/25</a:t>
             </a:fld>
             <a:endParaRPr lang="zh-TW" altLang="en-US"/>
           </a:p>
@@ -1010,7 +1010,7 @@
           <a:p>
             <a:fld id="{CC6FB895-B65F-4EA9-9907-69D32227E72B}" type="datetimeFigureOut">
               <a:rPr lang="zh-TW" altLang="en-US" smtClean="0"/>
-              <a:t>2026/7/2</a:t>
+              <a:t>2026/7/25</a:t>
             </a:fld>
             <a:endParaRPr lang="zh-TW" altLang="en-US"/>
           </a:p>
@@ -1242,7 +1242,7 @@
           <a:p>
             <a:fld id="{CC6FB895-B65F-4EA9-9907-69D32227E72B}" type="datetimeFigureOut">
               <a:rPr lang="zh-TW" altLang="en-US" smtClean="0"/>
-              <a:t>2026/7/2</a:t>
+              <a:t>2026/7/25</a:t>
             </a:fld>
             <a:endParaRPr lang="zh-TW" altLang="en-US"/>
           </a:p>
@@ -1609,7 +1609,7 @@
           <a:p>
             <a:fld id="{CC6FB895-B65F-4EA9-9907-69D32227E72B}" type="datetimeFigureOut">
               <a:rPr lang="zh-TW" altLang="en-US" smtClean="0"/>
-              <a:t>2026/7/2</a:t>
+              <a:t>2026/7/25</a:t>
             </a:fld>
             <a:endParaRPr lang="zh-TW" altLang="en-US"/>
           </a:p>
@@ -1727,7 +1727,7 @@
           <a:p>
             <a:fld id="{CC6FB895-B65F-4EA9-9907-69D32227E72B}" type="datetimeFigureOut">
               <a:rPr lang="zh-TW" altLang="en-US" smtClean="0"/>
-              <a:t>2026/7/2</a:t>
+              <a:t>2026/7/25</a:t>
             </a:fld>
             <a:endParaRPr lang="zh-TW" altLang="en-US"/>
           </a:p>
@@ -1822,7 +1822,7 @@
           <a:p>
             <a:fld id="{CC6FB895-B65F-4EA9-9907-69D32227E72B}" type="datetimeFigureOut">
               <a:rPr lang="zh-TW" altLang="en-US" smtClean="0"/>
-              <a:t>2026/7/2</a:t>
+              <a:t>2026/7/25</a:t>
             </a:fld>
             <a:endParaRPr lang="zh-TW" altLang="en-US"/>
           </a:p>
@@ -2099,7 +2099,7 @@
           <a:p>
             <a:fld id="{CC6FB895-B65F-4EA9-9907-69D32227E72B}" type="datetimeFigureOut">
               <a:rPr lang="zh-TW" altLang="en-US" smtClean="0"/>
-              <a:t>2026/7/2</a:t>
+              <a:t>2026/7/25</a:t>
             </a:fld>
             <a:endParaRPr lang="zh-TW" altLang="en-US"/>
           </a:p>
@@ -2356,7 +2356,7 @@
           <a:p>
             <a:fld id="{CC6FB895-B65F-4EA9-9907-69D32227E72B}" type="datetimeFigureOut">
               <a:rPr lang="zh-TW" altLang="en-US" smtClean="0"/>
-              <a:t>2026/7/2</a:t>
+              <a:t>2026/7/25</a:t>
             </a:fld>
             <a:endParaRPr lang="zh-TW" altLang="en-US"/>
           </a:p>
@@ -2569,7 +2569,7 @@
           <a:p>
             <a:fld id="{CC6FB895-B65F-4EA9-9907-69D32227E72B}" type="datetimeFigureOut">
               <a:rPr lang="zh-TW" altLang="en-US" smtClean="0"/>
-              <a:t>2026/7/2</a:t>
+              <a:t>2026/7/25</a:t>
             </a:fld>
             <a:endParaRPr lang="zh-TW" altLang="en-US"/>
           </a:p>
@@ -3425,8 +3425,8 @@
             </p:sp>
           </mc:Fallback>
         </mc:AlternateContent>
-        <mc:AlternateContent xmlns:mc="http://schemas.openxmlformats.org/markup-compatibility/2006">
-          <mc:Choice xmlns:a14="http://schemas.microsoft.com/office/drawing/2010/main" Requires="a14">
+        <mc:AlternateContent xmlns:mc="http://schemas.openxmlformats.org/markup-compatibility/2006" xmlns:a14="http://schemas.microsoft.com/office/drawing/2010/main">
+          <mc:Choice Requires="a14">
             <p:sp>
               <p:nvSpPr>
                 <p:cNvPr id="254" name="矩形 253">
@@ -3465,13 +3465,7 @@
                           <a:rPr lang="en-US" altLang="zh-TW" sz="1630" i="1">
                             <a:latin typeface="Cambria Math" panose="02040503050406030204" pitchFamily="18" charset="0"/>
                           </a:rPr>
-                          <m:t>ℓ=−</m:t>
-                        </m:r>
-                        <m:r>
-                          <a:rPr lang="en-US" altLang="zh-TW" sz="1630" i="1">
-                            <a:latin typeface="Cambria Math" panose="02040503050406030204" pitchFamily="18" charset="0"/>
-                          </a:rPr>
-                          <m:t>2</m:t>
+                          <m:t>ℓ=−2</m:t>
                         </m:r>
                       </m:oMath>
                     </m:oMathPara>
@@ -3484,7 +3478,7 @@
               </p:txBody>
             </p:sp>
           </mc:Choice>
-          <mc:Fallback>
+          <mc:Fallback xmlns="">
             <p:sp>
               <p:nvSpPr>
                 <p:cNvPr id="254" name="矩形 253">
@@ -3529,8 +3523,8 @@
             </p:sp>
           </mc:Fallback>
         </mc:AlternateContent>
-        <mc:AlternateContent xmlns:mc="http://schemas.openxmlformats.org/markup-compatibility/2006">
-          <mc:Choice xmlns:a14="http://schemas.microsoft.com/office/drawing/2010/main" Requires="a14">
+        <mc:AlternateContent xmlns:mc="http://schemas.openxmlformats.org/markup-compatibility/2006" xmlns:a14="http://schemas.microsoft.com/office/drawing/2010/main">
+          <mc:Choice Requires="a14">
             <p:sp>
               <p:nvSpPr>
                 <p:cNvPr id="255" name="矩形 254">
@@ -3569,13 +3563,7 @@
                           <a:rPr lang="en-US" altLang="zh-TW" sz="1630" i="1">
                             <a:latin typeface="Cambria Math" panose="02040503050406030204" pitchFamily="18" charset="0"/>
                           </a:rPr>
-                          <m:t>ℓ=−</m:t>
-                        </m:r>
-                        <m:r>
-                          <a:rPr lang="en-US" altLang="zh-TW" sz="1630" i="1">
-                            <a:latin typeface="Cambria Math" panose="02040503050406030204" pitchFamily="18" charset="0"/>
-                          </a:rPr>
-                          <m:t>2</m:t>
+                          <m:t>ℓ=−2</m:t>
                         </m:r>
                       </m:oMath>
                     </m:oMathPara>
@@ -3588,7 +3576,7 @@
               </p:txBody>
             </p:sp>
           </mc:Choice>
-          <mc:Fallback>
+          <mc:Fallback xmlns="">
             <p:sp>
               <p:nvSpPr>
                 <p:cNvPr id="255" name="矩形 254">
@@ -5624,12 +5612,428 @@
           <a:chExt cx="0" cy="0"/>
         </a:xfrm>
       </p:grpSpPr>
+      <p:pic>
+        <p:nvPicPr>
+          <p:cNvPr id="270" name="圖片 269">
+            <a:extLst>
+              <a:ext uri="{FF2B5EF4-FFF2-40B4-BE49-F238E27FC236}">
+                <a16:creationId xmlns:a16="http://schemas.microsoft.com/office/drawing/2014/main" id="{F157FA9A-98EF-4516-AE35-187962CFDA60}"/>
+              </a:ext>
+            </a:extLst>
+          </p:cNvPr>
+          <p:cNvPicPr>
+            <a:picLocks noChangeAspect="1"/>
+          </p:cNvPicPr>
+          <p:nvPr/>
+        </p:nvPicPr>
+        <p:blipFill rotWithShape="1">
+          <a:blip r:embed="rId2">
+            <a:clrChange>
+              <a:clrFrom>
+                <a:srgbClr val="FFFFFF"/>
+              </a:clrFrom>
+              <a:clrTo>
+                <a:srgbClr val="FFFFFF">
+                  <a:alpha val="0"/>
+                </a:srgbClr>
+              </a:clrTo>
+            </a:clrChange>
+          </a:blip>
+          <a:srcRect r="72281"/>
+          <a:stretch/>
+        </p:blipFill>
+        <p:spPr>
+          <a:xfrm>
+            <a:off x="1352857" y="189428"/>
+            <a:ext cx="907359" cy="448871"/>
+          </a:xfrm>
+          <a:prstGeom prst="rect">
+            <a:avLst/>
+          </a:prstGeom>
+        </p:spPr>
+      </p:pic>
+      <p:pic>
+        <p:nvPicPr>
+          <p:cNvPr id="271" name="圖片 270">
+            <a:extLst>
+              <a:ext uri="{FF2B5EF4-FFF2-40B4-BE49-F238E27FC236}">
+                <a16:creationId xmlns:a16="http://schemas.microsoft.com/office/drawing/2014/main" id="{53AF8546-BA0D-431B-9720-D4AA06DC8EE2}"/>
+              </a:ext>
+            </a:extLst>
+          </p:cNvPr>
+          <p:cNvPicPr>
+            <a:picLocks noChangeAspect="1"/>
+          </p:cNvPicPr>
+          <p:nvPr/>
+        </p:nvPicPr>
+        <p:blipFill rotWithShape="1">
+          <a:blip r:embed="rId2">
+            <a:clrChange>
+              <a:clrFrom>
+                <a:srgbClr val="FFFFFF"/>
+              </a:clrFrom>
+              <a:clrTo>
+                <a:srgbClr val="FFFFFF">
+                  <a:alpha val="0"/>
+                </a:srgbClr>
+              </a:clrTo>
+            </a:clrChange>
+          </a:blip>
+          <a:srcRect l="28538" r="36079"/>
+          <a:stretch/>
+        </p:blipFill>
+        <p:spPr>
+          <a:xfrm>
+            <a:off x="1352857" y="2127593"/>
+            <a:ext cx="1158240" cy="448871"/>
+          </a:xfrm>
+          <a:prstGeom prst="rect">
+            <a:avLst/>
+          </a:prstGeom>
+        </p:spPr>
+      </p:pic>
+      <p:pic>
+        <p:nvPicPr>
+          <p:cNvPr id="247" name="圖片 246">
+            <a:extLst>
+              <a:ext uri="{FF2B5EF4-FFF2-40B4-BE49-F238E27FC236}">
+                <a16:creationId xmlns:a16="http://schemas.microsoft.com/office/drawing/2014/main" id="{C560BE30-6DE3-4B0F-9DD0-7A175D4742EA}"/>
+              </a:ext>
+            </a:extLst>
+          </p:cNvPr>
+          <p:cNvPicPr>
+            <a:picLocks noChangeAspect="1"/>
+          </p:cNvPicPr>
+          <p:nvPr/>
+        </p:nvPicPr>
+        <p:blipFill rotWithShape="1">
+          <a:blip r:embed="rId3">
+            <a:clrChange>
+              <a:clrFrom>
+                <a:srgbClr val="FFFFFF"/>
+              </a:clrFrom>
+              <a:clrTo>
+                <a:srgbClr val="FFFFFF">
+                  <a:alpha val="0"/>
+                </a:srgbClr>
+              </a:clrTo>
+            </a:clrChange>
+            <a:extLst>
+              <a:ext uri="{28A0092B-C50C-407E-A947-70E740481C1C}">
+                <a14:useLocalDpi xmlns:a14="http://schemas.microsoft.com/office/drawing/2010/main" val="0"/>
+              </a:ext>
+            </a:extLst>
+          </a:blip>
+          <a:srcRect r="84682"/>
+          <a:stretch/>
+        </p:blipFill>
+        <p:spPr>
+          <a:xfrm>
+            <a:off x="1175986" y="579651"/>
+            <a:ext cx="1525256" cy="1659600"/>
+          </a:xfrm>
+          <a:prstGeom prst="rect">
+            <a:avLst/>
+          </a:prstGeom>
+        </p:spPr>
+      </p:pic>
+      <p:pic>
+        <p:nvPicPr>
+          <p:cNvPr id="249" name="圖片 248">
+            <a:extLst>
+              <a:ext uri="{FF2B5EF4-FFF2-40B4-BE49-F238E27FC236}">
+                <a16:creationId xmlns:a16="http://schemas.microsoft.com/office/drawing/2014/main" id="{9990BC9F-C16F-4F14-A974-AB4E840835BC}"/>
+              </a:ext>
+            </a:extLst>
+          </p:cNvPr>
+          <p:cNvPicPr>
+            <a:picLocks noChangeAspect="1"/>
+          </p:cNvPicPr>
+          <p:nvPr/>
+        </p:nvPicPr>
+        <p:blipFill rotWithShape="1">
+          <a:blip r:embed="rId4">
+            <a:clrChange>
+              <a:clrFrom>
+                <a:srgbClr val="FFFFFF"/>
+              </a:clrFrom>
+              <a:clrTo>
+                <a:srgbClr val="FFFFFF">
+                  <a:alpha val="0"/>
+                </a:srgbClr>
+              </a:clrTo>
+            </a:clrChange>
+            <a:extLst>
+              <a:ext uri="{28A0092B-C50C-407E-A947-70E740481C1C}">
+                <a14:useLocalDpi xmlns:a14="http://schemas.microsoft.com/office/drawing/2010/main" val="0"/>
+              </a:ext>
+            </a:extLst>
+          </a:blip>
+          <a:srcRect r="84222"/>
+          <a:stretch/>
+        </p:blipFill>
+        <p:spPr>
+          <a:xfrm>
+            <a:off x="1215278" y="4292025"/>
+            <a:ext cx="1499480" cy="1584000"/>
+          </a:xfrm>
+          <a:prstGeom prst="rect">
+            <a:avLst/>
+          </a:prstGeom>
+        </p:spPr>
+      </p:pic>
+      <mc:AlternateContent xmlns:mc="http://schemas.openxmlformats.org/markup-compatibility/2006">
+        <mc:Choice xmlns:a14="http://schemas.microsoft.com/office/drawing/2010/main" Requires="a14">
+          <p:sp>
+            <p:nvSpPr>
+              <p:cNvPr id="253" name="矩形 252">
+                <a:extLst>
+                  <a:ext uri="{FF2B5EF4-FFF2-40B4-BE49-F238E27FC236}">
+                    <a16:creationId xmlns:a16="http://schemas.microsoft.com/office/drawing/2014/main" id="{86848877-0BCF-4F05-B932-A3B27CCC542F}"/>
+                  </a:ext>
+                </a:extLst>
+              </p:cNvPr>
+              <p:cNvSpPr/>
+              <p:nvPr/>
+            </p:nvSpPr>
+            <p:spPr>
+              <a:xfrm>
+                <a:off x="1465907" y="1721593"/>
+                <a:ext cx="783035" cy="343171"/>
+              </a:xfrm>
+              <a:prstGeom prst="rect">
+                <a:avLst/>
+              </a:prstGeom>
+            </p:spPr>
+            <p:txBody>
+              <a:bodyPr wrap="none">
+                <a:spAutoFit/>
+              </a:bodyPr>
+              <a:lstStyle/>
+              <a:p>
+                <a:pPr/>
+                <a14:m>
+                  <m:oMathPara xmlns:m="http://schemas.openxmlformats.org/officeDocument/2006/math">
+                    <m:oMathParaPr>
+                      <m:jc m:val="centerGroup"/>
+                    </m:oMathParaPr>
+                    <m:oMath xmlns:m="http://schemas.openxmlformats.org/officeDocument/2006/math">
+                      <m:r>
+                        <a:rPr lang="en-US" altLang="zh-TW" sz="1630" i="1">
+                          <a:latin typeface="Cambria Math" panose="02040503050406030204" pitchFamily="18" charset="0"/>
+                        </a:rPr>
+                        <m:t>0.1 </m:t>
+                      </m:r>
+                      <m:sSub>
+                        <m:sSubPr>
+                          <m:ctrlPr>
+                            <a:rPr lang="en-US" altLang="zh-TW" sz="1630" i="1">
+                              <a:latin typeface="Cambria Math" panose="02040503050406030204" pitchFamily="18" charset="0"/>
+                            </a:rPr>
+                          </m:ctrlPr>
+                        </m:sSubPr>
+                        <m:e>
+                          <m:r>
+                            <a:rPr lang="en-US" altLang="zh-TW" sz="1630" i="1">
+                              <a:latin typeface="Cambria Math" panose="02040503050406030204" pitchFamily="18" charset="0"/>
+                            </a:rPr>
+                            <m:t>𝑄</m:t>
+                          </m:r>
+                        </m:e>
+                        <m:sub>
+                          <m:r>
+                            <a:rPr lang="en-US" altLang="zh-TW" sz="1630" i="1">
+                              <a:latin typeface="Cambria Math" panose="02040503050406030204" pitchFamily="18" charset="0"/>
+                            </a:rPr>
+                            <m:t>𝑐</m:t>
+                          </m:r>
+                        </m:sub>
+                      </m:sSub>
+                    </m:oMath>
+                  </m:oMathPara>
+                </a14:m>
+                <a:endParaRPr lang="zh-TW" altLang="en-US" sz="1630" dirty="0">
+                  <a:latin typeface="Times New Roman" panose="02020603050405020304" pitchFamily="18" charset="0"/>
+                  <a:cs typeface="Times New Roman" panose="02020603050405020304" pitchFamily="18" charset="0"/>
+                </a:endParaRPr>
+              </a:p>
+            </p:txBody>
+          </p:sp>
+        </mc:Choice>
+        <mc:Fallback>
+          <p:sp>
+            <p:nvSpPr>
+              <p:cNvPr id="253" name="矩形 252">
+                <a:extLst>
+                  <a:ext uri="{FF2B5EF4-FFF2-40B4-BE49-F238E27FC236}">
+                    <a16:creationId xmlns:a16="http://schemas.microsoft.com/office/drawing/2014/main" id="{86848877-0BCF-4F05-B932-A3B27CCC542F}"/>
+                  </a:ext>
+                </a:extLst>
+              </p:cNvPr>
+              <p:cNvSpPr>
+                <a:spLocks noRot="1" noChangeAspect="1" noMove="1" noResize="1" noEditPoints="1" noAdjustHandles="1" noChangeArrowheads="1" noChangeShapeType="1" noTextEdit="1"/>
+              </p:cNvSpPr>
+              <p:nvPr/>
+            </p:nvSpPr>
+            <p:spPr>
+              <a:xfrm>
+                <a:off x="1465907" y="1721593"/>
+                <a:ext cx="783035" cy="343171"/>
+              </a:xfrm>
+              <a:prstGeom prst="rect">
+                <a:avLst/>
+              </a:prstGeom>
+              <a:blipFill>
+                <a:blip r:embed="rId5"/>
+                <a:stretch>
+                  <a:fillRect b="-8772"/>
+                </a:stretch>
+              </a:blipFill>
+            </p:spPr>
+            <p:txBody>
+              <a:bodyPr/>
+              <a:lstStyle/>
+              <a:p>
+                <a:r>
+                  <a:rPr lang="zh-TW" altLang="en-US">
+                    <a:noFill/>
+                  </a:rPr>
+                  <a:t> </a:t>
+                </a:r>
+              </a:p>
+            </p:txBody>
+          </p:sp>
+        </mc:Fallback>
+      </mc:AlternateContent>
+      <mc:AlternateContent xmlns:mc="http://schemas.openxmlformats.org/markup-compatibility/2006">
+        <mc:Choice xmlns:a14="http://schemas.microsoft.com/office/drawing/2010/main" Requires="a14">
+          <p:sp>
+            <p:nvSpPr>
+              <p:cNvPr id="259" name="矩形 258">
+                <a:extLst>
+                  <a:ext uri="{FF2B5EF4-FFF2-40B4-BE49-F238E27FC236}">
+                    <a16:creationId xmlns:a16="http://schemas.microsoft.com/office/drawing/2014/main" id="{79BCCC95-FE7A-4A13-BC1B-2E9839597C7F}"/>
+                  </a:ext>
+                </a:extLst>
+              </p:cNvPr>
+              <p:cNvSpPr/>
+              <p:nvPr/>
+            </p:nvSpPr>
+            <p:spPr>
+              <a:xfrm>
+                <a:off x="1500918" y="5447560"/>
+                <a:ext cx="783035" cy="343171"/>
+              </a:xfrm>
+              <a:prstGeom prst="rect">
+                <a:avLst/>
+              </a:prstGeom>
+            </p:spPr>
+            <p:txBody>
+              <a:bodyPr wrap="none">
+                <a:spAutoFit/>
+              </a:bodyPr>
+              <a:lstStyle/>
+              <a:p>
+                <a:pPr/>
+                <a14:m>
+                  <m:oMathPara xmlns:m="http://schemas.openxmlformats.org/officeDocument/2006/math">
+                    <m:oMathParaPr>
+                      <m:jc m:val="centerGroup"/>
+                    </m:oMathParaPr>
+                    <m:oMath xmlns:m="http://schemas.openxmlformats.org/officeDocument/2006/math">
+                      <m:r>
+                        <a:rPr lang="en-US" altLang="zh-TW" sz="1630" i="1">
+                          <a:latin typeface="Cambria Math" panose="02040503050406030204" pitchFamily="18" charset="0"/>
+                        </a:rPr>
+                        <m:t>0.1 </m:t>
+                      </m:r>
+                      <m:sSub>
+                        <m:sSubPr>
+                          <m:ctrlPr>
+                            <a:rPr lang="en-US" altLang="zh-TW" sz="1630" i="1">
+                              <a:latin typeface="Cambria Math" panose="02040503050406030204" pitchFamily="18" charset="0"/>
+                            </a:rPr>
+                          </m:ctrlPr>
+                        </m:sSubPr>
+                        <m:e>
+                          <m:r>
+                            <a:rPr lang="en-US" altLang="zh-TW" sz="1630" i="1">
+                              <a:latin typeface="Cambria Math" panose="02040503050406030204" pitchFamily="18" charset="0"/>
+                            </a:rPr>
+                            <m:t>𝑄</m:t>
+                          </m:r>
+                        </m:e>
+                        <m:sub>
+                          <m:r>
+                            <a:rPr lang="en-US" altLang="zh-TW" sz="1630" i="1">
+                              <a:latin typeface="Cambria Math" panose="02040503050406030204" pitchFamily="18" charset="0"/>
+                            </a:rPr>
+                            <m:t>𝑐</m:t>
+                          </m:r>
+                        </m:sub>
+                      </m:sSub>
+                    </m:oMath>
+                  </m:oMathPara>
+                </a14:m>
+                <a:endParaRPr lang="zh-TW" altLang="en-US" sz="1630" dirty="0">
+                  <a:latin typeface="Times New Roman" panose="02020603050405020304" pitchFamily="18" charset="0"/>
+                  <a:cs typeface="Times New Roman" panose="02020603050405020304" pitchFamily="18" charset="0"/>
+                </a:endParaRPr>
+              </a:p>
+            </p:txBody>
+          </p:sp>
+        </mc:Choice>
+        <mc:Fallback>
+          <p:sp>
+            <p:nvSpPr>
+              <p:cNvPr id="259" name="矩形 258">
+                <a:extLst>
+                  <a:ext uri="{FF2B5EF4-FFF2-40B4-BE49-F238E27FC236}">
+                    <a16:creationId xmlns:a16="http://schemas.microsoft.com/office/drawing/2014/main" id="{79BCCC95-FE7A-4A13-BC1B-2E9839597C7F}"/>
+                  </a:ext>
+                </a:extLst>
+              </p:cNvPr>
+              <p:cNvSpPr>
+                <a:spLocks noRot="1" noChangeAspect="1" noMove="1" noResize="1" noEditPoints="1" noAdjustHandles="1" noChangeArrowheads="1" noChangeShapeType="1" noTextEdit="1"/>
+              </p:cNvSpPr>
+              <p:nvPr/>
+            </p:nvSpPr>
+            <p:spPr>
+              <a:xfrm>
+                <a:off x="1500918" y="5447560"/>
+                <a:ext cx="783035" cy="343171"/>
+              </a:xfrm>
+              <a:prstGeom prst="rect">
+                <a:avLst/>
+              </a:prstGeom>
+              <a:blipFill>
+                <a:blip r:embed="rId6"/>
+                <a:stretch>
+                  <a:fillRect b="-8929"/>
+                </a:stretch>
+              </a:blipFill>
+            </p:spPr>
+            <p:txBody>
+              <a:bodyPr/>
+              <a:lstStyle/>
+              <a:p>
+                <a:r>
+                  <a:rPr lang="zh-TW" altLang="en-US">
+                    <a:noFill/>
+                  </a:rPr>
+                  <a:t> </a:t>
+                </a:r>
+              </a:p>
+            </p:txBody>
+          </p:sp>
+        </mc:Fallback>
+      </mc:AlternateContent>
       <p:grpSp>
         <p:nvGrpSpPr>
-          <p:cNvPr id="2" name="群組 1">
+          <p:cNvPr id="267" name="群組 266">
             <a:extLst>
               <a:ext uri="{FF2B5EF4-FFF2-40B4-BE49-F238E27FC236}">
-                <a16:creationId xmlns:a16="http://schemas.microsoft.com/office/drawing/2014/main" id="{D7FAB985-2800-412E-B39D-72E9F4CB610E}"/>
+                <a16:creationId xmlns:a16="http://schemas.microsoft.com/office/drawing/2014/main" id="{DA4B229F-6242-4A27-9F3E-C3CBA9E27020}"/>
               </a:ext>
             </a:extLst>
           </p:cNvPr>
@@ -5638,207 +6042,38 @@
         </p:nvGrpSpPr>
         <p:grpSpPr>
           <a:xfrm>
-            <a:off x="1175986" y="189428"/>
-            <a:ext cx="7554029" cy="5740956"/>
-            <a:chOff x="512344" y="173188"/>
-            <a:chExt cx="7554029" cy="5740956"/>
+            <a:off x="1793507" y="971419"/>
+            <a:ext cx="642040" cy="567243"/>
+            <a:chOff x="-994837" y="983411"/>
+            <a:chExt cx="588508" cy="519948"/>
           </a:xfrm>
         </p:grpSpPr>
-        <p:pic>
-          <p:nvPicPr>
-            <p:cNvPr id="270" name="圖片 269">
-              <a:extLst>
-                <a:ext uri="{FF2B5EF4-FFF2-40B4-BE49-F238E27FC236}">
-                  <a16:creationId xmlns:a16="http://schemas.microsoft.com/office/drawing/2014/main" id="{F157FA9A-98EF-4516-AE35-187962CFDA60}"/>
-                </a:ext>
-              </a:extLst>
-            </p:cNvPr>
-            <p:cNvPicPr>
-              <a:picLocks noChangeAspect="1"/>
-            </p:cNvPicPr>
-            <p:nvPr/>
-          </p:nvPicPr>
-          <p:blipFill rotWithShape="1">
-            <a:blip r:embed="rId2">
-              <a:clrChange>
-                <a:clrFrom>
-                  <a:srgbClr val="FFFFFF"/>
-                </a:clrFrom>
-                <a:clrTo>
-                  <a:srgbClr val="FFFFFF">
-                    <a:alpha val="0"/>
-                  </a:srgbClr>
-                </a:clrTo>
-              </a:clrChange>
-            </a:blip>
-            <a:srcRect r="72281"/>
-            <a:stretch/>
-          </p:blipFill>
-          <p:spPr>
-            <a:xfrm>
-              <a:off x="689215" y="173188"/>
-              <a:ext cx="907359" cy="448871"/>
-            </a:xfrm>
-            <a:prstGeom prst="rect">
-              <a:avLst/>
-            </a:prstGeom>
-          </p:spPr>
-        </p:pic>
-        <p:pic>
-          <p:nvPicPr>
-            <p:cNvPr id="271" name="圖片 270">
-              <a:extLst>
-                <a:ext uri="{FF2B5EF4-FFF2-40B4-BE49-F238E27FC236}">
-                  <a16:creationId xmlns:a16="http://schemas.microsoft.com/office/drawing/2014/main" id="{53AF8546-BA0D-431B-9720-D4AA06DC8EE2}"/>
-                </a:ext>
-              </a:extLst>
-            </p:cNvPr>
-            <p:cNvPicPr>
-              <a:picLocks noChangeAspect="1"/>
-            </p:cNvPicPr>
-            <p:nvPr/>
-          </p:nvPicPr>
-          <p:blipFill rotWithShape="1">
-            <a:blip r:embed="rId2">
-              <a:clrChange>
-                <a:clrFrom>
-                  <a:srgbClr val="FFFFFF"/>
-                </a:clrFrom>
-                <a:clrTo>
-                  <a:srgbClr val="FFFFFF">
-                    <a:alpha val="0"/>
-                  </a:srgbClr>
-                </a:clrTo>
-              </a:clrChange>
-            </a:blip>
-            <a:srcRect l="28538" r="36079"/>
-            <a:stretch/>
-          </p:blipFill>
-          <p:spPr>
-            <a:xfrm>
-              <a:off x="689215" y="2111353"/>
-              <a:ext cx="1158240" cy="448871"/>
-            </a:xfrm>
-            <a:prstGeom prst="rect">
-              <a:avLst/>
-            </a:prstGeom>
-          </p:spPr>
-        </p:pic>
-        <p:pic>
-          <p:nvPicPr>
-            <p:cNvPr id="247" name="圖片 246">
-              <a:extLst>
-                <a:ext uri="{FF2B5EF4-FFF2-40B4-BE49-F238E27FC236}">
-                  <a16:creationId xmlns:a16="http://schemas.microsoft.com/office/drawing/2014/main" id="{C560BE30-6DE3-4B0F-9DD0-7A175D4742EA}"/>
-                </a:ext>
-              </a:extLst>
-            </p:cNvPr>
-            <p:cNvPicPr>
-              <a:picLocks noChangeAspect="1"/>
-            </p:cNvPicPr>
-            <p:nvPr/>
-          </p:nvPicPr>
-          <p:blipFill rotWithShape="1">
-            <a:blip r:embed="rId3">
-              <a:clrChange>
-                <a:clrFrom>
-                  <a:srgbClr val="FFFFFF"/>
-                </a:clrFrom>
-                <a:clrTo>
-                  <a:srgbClr val="FFFFFF">
-                    <a:alpha val="0"/>
-                  </a:srgbClr>
-                </a:clrTo>
-              </a:clrChange>
-              <a:extLst>
-                <a:ext uri="{28A0092B-C50C-407E-A947-70E740481C1C}">
-                  <a14:useLocalDpi xmlns:a14="http://schemas.microsoft.com/office/drawing/2010/main" val="0"/>
-                </a:ext>
-              </a:extLst>
-            </a:blip>
-            <a:srcRect r="84682"/>
-            <a:stretch/>
-          </p:blipFill>
-          <p:spPr>
-            <a:xfrm>
-              <a:off x="512344" y="563411"/>
-              <a:ext cx="1525256" cy="1659600"/>
-            </a:xfrm>
-            <a:prstGeom prst="rect">
-              <a:avLst/>
-            </a:prstGeom>
-          </p:spPr>
-        </p:pic>
-        <p:pic>
-          <p:nvPicPr>
-            <p:cNvPr id="249" name="圖片 248">
-              <a:extLst>
-                <a:ext uri="{FF2B5EF4-FFF2-40B4-BE49-F238E27FC236}">
-                  <a16:creationId xmlns:a16="http://schemas.microsoft.com/office/drawing/2014/main" id="{9990BC9F-C16F-4F14-A974-AB4E840835BC}"/>
-                </a:ext>
-              </a:extLst>
-            </p:cNvPr>
-            <p:cNvPicPr>
-              <a:picLocks noChangeAspect="1"/>
-            </p:cNvPicPr>
-            <p:nvPr/>
-          </p:nvPicPr>
-          <p:blipFill rotWithShape="1">
-            <a:blip r:embed="rId4">
-              <a:clrChange>
-                <a:clrFrom>
-                  <a:srgbClr val="FFFFFF"/>
-                </a:clrFrom>
-                <a:clrTo>
-                  <a:srgbClr val="FFFFFF">
-                    <a:alpha val="0"/>
-                  </a:srgbClr>
-                </a:clrTo>
-              </a:clrChange>
-              <a:extLst>
-                <a:ext uri="{28A0092B-C50C-407E-A947-70E740481C1C}">
-                  <a14:useLocalDpi xmlns:a14="http://schemas.microsoft.com/office/drawing/2010/main" val="0"/>
-                </a:ext>
-              </a:extLst>
-            </a:blip>
-            <a:srcRect r="84222"/>
-            <a:stretch/>
-          </p:blipFill>
-          <p:spPr>
-            <a:xfrm>
-              <a:off x="551636" y="4275785"/>
-              <a:ext cx="1499480" cy="1584000"/>
-            </a:xfrm>
-            <a:prstGeom prst="rect">
-              <a:avLst/>
-            </a:prstGeom>
-          </p:spPr>
-        </p:pic>
-        <mc:AlternateContent xmlns:mc="http://schemas.openxmlformats.org/markup-compatibility/2006">
-          <mc:Choice xmlns:a14="http://schemas.microsoft.com/office/drawing/2010/main" Requires="a14">
+        <mc:AlternateContent xmlns:mc="http://schemas.openxmlformats.org/markup-compatibility/2006" xmlns:a14="http://schemas.microsoft.com/office/drawing/2010/main">
+          <mc:Choice Requires="a14">
             <p:sp>
               <p:nvSpPr>
-                <p:cNvPr id="253" name="矩形 252">
+                <p:cNvPr id="278" name="文字方塊 277">
                   <a:extLst>
                     <a:ext uri="{FF2B5EF4-FFF2-40B4-BE49-F238E27FC236}">
-                      <a16:creationId xmlns:a16="http://schemas.microsoft.com/office/drawing/2014/main" id="{86848877-0BCF-4F05-B932-A3B27CCC542F}"/>
+                      <a16:creationId xmlns:a16="http://schemas.microsoft.com/office/drawing/2014/main" id="{1DCA7ED1-C6DF-4238-A6EA-89995713FD97}"/>
                     </a:ext>
                   </a:extLst>
                 </p:cNvPr>
-                <p:cNvSpPr/>
+                <p:cNvSpPr txBox="1"/>
                 <p:nvPr/>
               </p:nvSpPr>
               <p:spPr>
                 <a:xfrm>
-                  <a:off x="802265" y="1705353"/>
-                  <a:ext cx="783035" cy="343171"/>
+                  <a:off x="-994837" y="983411"/>
+                  <a:ext cx="323387" cy="335658"/>
                 </a:xfrm>
                 <a:prstGeom prst="rect">
                   <a:avLst/>
                 </a:prstGeom>
+                <a:noFill/>
               </p:spPr>
               <p:txBody>
-                <a:bodyPr wrap="none">
+                <a:bodyPr wrap="square" rtlCol="0">
                   <a:spAutoFit/>
                 </a:bodyPr>
                 <a:lstStyle/>
@@ -5850,41 +6085,35 @@
                         <m:jc m:val="centerGroup"/>
                       </m:oMathParaPr>
                       <m:oMath xmlns:m="http://schemas.openxmlformats.org/officeDocument/2006/math">
-                        <m:r>
-                          <a:rPr lang="en-US" altLang="zh-TW" sz="1630" i="1">
-                            <a:latin typeface="Cambria Math" panose="02040503050406030204" pitchFamily="18" charset="0"/>
-                          </a:rPr>
-                          <m:t>0.1 </m:t>
-                        </m:r>
                         <m:sSub>
                           <m:sSubPr>
                             <m:ctrlPr>
-                              <a:rPr lang="en-US" altLang="zh-TW" sz="1630" i="1">
+                              <a:rPr lang="en-US" altLang="zh-TW" sz="1630" b="1" i="1">
                                 <a:latin typeface="Cambria Math" panose="02040503050406030204" pitchFamily="18" charset="0"/>
                               </a:rPr>
                             </m:ctrlPr>
                           </m:sSubPr>
                           <m:e>
                             <m:r>
-                              <a:rPr lang="en-US" altLang="zh-TW" sz="1630" i="1">
+                              <a:rPr lang="en-US" altLang="zh-TW" sz="1630" b="1" i="1">
                                 <a:latin typeface="Cambria Math" panose="02040503050406030204" pitchFamily="18" charset="0"/>
                               </a:rPr>
-                              <m:t>𝑄</m:t>
+                              <m:t>𝒒</m:t>
                             </m:r>
                           </m:e>
                           <m:sub>
                             <m:r>
-                              <a:rPr lang="en-US" altLang="zh-TW" sz="1630" i="1">
+                              <a:rPr lang="en-US" altLang="zh-TW" sz="1630" b="1" i="1">
                                 <a:latin typeface="Cambria Math" panose="02040503050406030204" pitchFamily="18" charset="0"/>
                               </a:rPr>
-                              <m:t>𝑐</m:t>
+                              <m:t>𝒚</m:t>
                             </m:r>
                           </m:sub>
                         </m:sSub>
                       </m:oMath>
                     </m:oMathPara>
                   </a14:m>
-                  <a:endParaRPr lang="zh-TW" altLang="en-US" sz="1630" dirty="0">
+                  <a:endParaRPr lang="en-US" altLang="zh-TW" sz="1630" dirty="0">
                     <a:latin typeface="Times New Roman" panose="02020603050405020304" pitchFamily="18" charset="0"/>
                     <a:cs typeface="Times New Roman" panose="02020603050405020304" pitchFamily="18" charset="0"/>
                   </a:endParaRPr>
@@ -5892,33 +6121,33 @@
               </p:txBody>
             </p:sp>
           </mc:Choice>
-          <mc:Fallback>
+          <mc:Fallback xmlns="">
             <p:sp>
               <p:nvSpPr>
-                <p:cNvPr id="253" name="矩形 252">
+                <p:cNvPr id="278" name="文字方塊 277">
                   <a:extLst>
                     <a:ext uri="{FF2B5EF4-FFF2-40B4-BE49-F238E27FC236}">
-                      <a16:creationId xmlns:a16="http://schemas.microsoft.com/office/drawing/2014/main" id="{86848877-0BCF-4F05-B932-A3B27CCC542F}"/>
+                      <a16:creationId xmlns:a16="http://schemas.microsoft.com/office/drawing/2014/main" id="{1DCA7ED1-C6DF-4238-A6EA-89995713FD97}"/>
                     </a:ext>
                   </a:extLst>
                 </p:cNvPr>
-                <p:cNvSpPr>
+                <p:cNvSpPr txBox="1">
                   <a:spLocks noRot="1" noChangeAspect="1" noMove="1" noResize="1" noEditPoints="1" noAdjustHandles="1" noChangeArrowheads="1" noChangeShapeType="1" noTextEdit="1"/>
                 </p:cNvSpPr>
                 <p:nvPr/>
               </p:nvSpPr>
               <p:spPr>
                 <a:xfrm>
-                  <a:off x="802265" y="1705353"/>
-                  <a:ext cx="783035" cy="343171"/>
+                  <a:off x="-994837" y="983411"/>
+                  <a:ext cx="323387" cy="335658"/>
                 </a:xfrm>
                 <a:prstGeom prst="rect">
                   <a:avLst/>
                 </a:prstGeom>
                 <a:blipFill>
-                  <a:blip r:embed="rId5"/>
+                  <a:blip r:embed="rId7"/>
                   <a:stretch>
-                    <a:fillRect b="-8772"/>
+                    <a:fillRect r="-3448" b="-1667"/>
                   </a:stretch>
                 </a:blipFill>
               </p:spPr>
@@ -5937,31 +6166,32 @@
             </p:sp>
           </mc:Fallback>
         </mc:AlternateContent>
-        <mc:AlternateContent xmlns:mc="http://schemas.openxmlformats.org/markup-compatibility/2006">
-          <mc:Choice xmlns:a14="http://schemas.microsoft.com/office/drawing/2010/main" Requires="a14">
+        <mc:AlternateContent xmlns:mc="http://schemas.openxmlformats.org/markup-compatibility/2006" xmlns:a14="http://schemas.microsoft.com/office/drawing/2010/main">
+          <mc:Choice Requires="a14">
             <p:sp>
               <p:nvSpPr>
-                <p:cNvPr id="259" name="矩形 258">
+                <p:cNvPr id="279" name="文字方塊 278">
                   <a:extLst>
                     <a:ext uri="{FF2B5EF4-FFF2-40B4-BE49-F238E27FC236}">
-                      <a16:creationId xmlns:a16="http://schemas.microsoft.com/office/drawing/2014/main" id="{79BCCC95-FE7A-4A13-BC1B-2E9839597C7F}"/>
+                      <a16:creationId xmlns:a16="http://schemas.microsoft.com/office/drawing/2014/main" id="{81975D7E-C0BD-4713-84BE-05259DAF8C12}"/>
                     </a:ext>
                   </a:extLst>
                 </p:cNvPr>
-                <p:cNvSpPr/>
+                <p:cNvSpPr txBox="1"/>
                 <p:nvPr/>
               </p:nvSpPr>
               <p:spPr>
                 <a:xfrm>
-                  <a:off x="837276" y="5431320"/>
-                  <a:ext cx="783035" cy="343171"/>
+                  <a:off x="-813248" y="1188801"/>
+                  <a:ext cx="406919" cy="314558"/>
                 </a:xfrm>
                 <a:prstGeom prst="rect">
                   <a:avLst/>
                 </a:prstGeom>
+                <a:noFill/>
               </p:spPr>
               <p:txBody>
-                <a:bodyPr wrap="none">
+                <a:bodyPr wrap="square" rtlCol="0">
                   <a:spAutoFit/>
                 </a:bodyPr>
                 <a:lstStyle/>
@@ -5973,41 +6203,35 @@
                         <m:jc m:val="centerGroup"/>
                       </m:oMathParaPr>
                       <m:oMath xmlns:m="http://schemas.openxmlformats.org/officeDocument/2006/math">
-                        <m:r>
-                          <a:rPr lang="en-US" altLang="zh-TW" sz="1630" i="1">
-                            <a:latin typeface="Cambria Math" panose="02040503050406030204" pitchFamily="18" charset="0"/>
-                          </a:rPr>
-                          <m:t>0.1 </m:t>
-                        </m:r>
                         <m:sSub>
                           <m:sSubPr>
                             <m:ctrlPr>
-                              <a:rPr lang="en-US" altLang="zh-TW" sz="1630" i="1">
+                              <a:rPr lang="en-US" altLang="zh-TW" sz="1630" b="1" i="1">
                                 <a:latin typeface="Cambria Math" panose="02040503050406030204" pitchFamily="18" charset="0"/>
                               </a:rPr>
                             </m:ctrlPr>
                           </m:sSubPr>
                           <m:e>
                             <m:r>
-                              <a:rPr lang="en-US" altLang="zh-TW" sz="1630" i="1">
+                              <a:rPr lang="en-US" altLang="zh-TW" sz="1630" b="1" i="1">
                                 <a:latin typeface="Cambria Math" panose="02040503050406030204" pitchFamily="18" charset="0"/>
                               </a:rPr>
-                              <m:t>𝑄</m:t>
+                              <m:t>𝒒</m:t>
                             </m:r>
                           </m:e>
                           <m:sub>
                             <m:r>
-                              <a:rPr lang="en-US" altLang="zh-TW" sz="1630" i="1">
+                              <a:rPr lang="en-US" altLang="zh-TW" sz="1630" b="1" i="1">
                                 <a:latin typeface="Cambria Math" panose="02040503050406030204" pitchFamily="18" charset="0"/>
                               </a:rPr>
-                              <m:t>𝑐</m:t>
+                              <m:t>𝒙</m:t>
                             </m:r>
                           </m:sub>
                         </m:sSub>
                       </m:oMath>
                     </m:oMathPara>
                   </a14:m>
-                  <a:endParaRPr lang="zh-TW" altLang="en-US" sz="1630" dirty="0">
+                  <a:endParaRPr lang="en-US" altLang="zh-TW" sz="1630" dirty="0">
                     <a:latin typeface="Times New Roman" panose="02020603050405020304" pitchFamily="18" charset="0"/>
                     <a:cs typeface="Times New Roman" panose="02020603050405020304" pitchFamily="18" charset="0"/>
                   </a:endParaRPr>
@@ -6015,2617 +6239,33 @@
               </p:txBody>
             </p:sp>
           </mc:Choice>
-          <mc:Fallback>
+          <mc:Fallback xmlns="">
             <p:sp>
               <p:nvSpPr>
-                <p:cNvPr id="259" name="矩形 258">
+                <p:cNvPr id="279" name="文字方塊 278">
                   <a:extLst>
                     <a:ext uri="{FF2B5EF4-FFF2-40B4-BE49-F238E27FC236}">
-                      <a16:creationId xmlns:a16="http://schemas.microsoft.com/office/drawing/2014/main" id="{79BCCC95-FE7A-4A13-BC1B-2E9839597C7F}"/>
+                      <a16:creationId xmlns:a16="http://schemas.microsoft.com/office/drawing/2014/main" id="{81975D7E-C0BD-4713-84BE-05259DAF8C12}"/>
                     </a:ext>
                   </a:extLst>
                 </p:cNvPr>
-                <p:cNvSpPr>
+                <p:cNvSpPr txBox="1">
                   <a:spLocks noRot="1" noChangeAspect="1" noMove="1" noResize="1" noEditPoints="1" noAdjustHandles="1" noChangeArrowheads="1" noChangeShapeType="1" noTextEdit="1"/>
                 </p:cNvSpPr>
                 <p:nvPr/>
               </p:nvSpPr>
               <p:spPr>
                 <a:xfrm>
-                  <a:off x="837276" y="5431320"/>
-                  <a:ext cx="783035" cy="343171"/>
+                  <a:off x="-813248" y="1188801"/>
+                  <a:ext cx="406919" cy="314558"/>
                 </a:xfrm>
                 <a:prstGeom prst="rect">
                   <a:avLst/>
                 </a:prstGeom>
                 <a:blipFill>
-                  <a:blip r:embed="rId6"/>
+                  <a:blip r:embed="rId19"/>
                   <a:stretch>
-                    <a:fillRect b="-8929"/>
-                  </a:stretch>
-                </a:blipFill>
-              </p:spPr>
-              <p:txBody>
-                <a:bodyPr/>
-                <a:lstStyle/>
-                <a:p>
-                  <a:r>
-                    <a:rPr lang="zh-TW" altLang="en-US">
-                      <a:noFill/>
-                    </a:rPr>
-                    <a:t> </a:t>
-                  </a:r>
-                </a:p>
-              </p:txBody>
-            </p:sp>
-          </mc:Fallback>
-        </mc:AlternateContent>
-        <p:grpSp>
-          <p:nvGrpSpPr>
-            <p:cNvPr id="267" name="群組 266">
-              <a:extLst>
-                <a:ext uri="{FF2B5EF4-FFF2-40B4-BE49-F238E27FC236}">
-                  <a16:creationId xmlns:a16="http://schemas.microsoft.com/office/drawing/2014/main" id="{DA4B229F-6242-4A27-9F3E-C3CBA9E27020}"/>
-                </a:ext>
-              </a:extLst>
-            </p:cNvPr>
-            <p:cNvGrpSpPr/>
-            <p:nvPr/>
-          </p:nvGrpSpPr>
-          <p:grpSpPr>
-            <a:xfrm>
-              <a:off x="1129865" y="955179"/>
-              <a:ext cx="642040" cy="567243"/>
-              <a:chOff x="-994837" y="983411"/>
-              <a:chExt cx="588508" cy="519948"/>
-            </a:xfrm>
-          </p:grpSpPr>
-          <mc:AlternateContent xmlns:mc="http://schemas.openxmlformats.org/markup-compatibility/2006">
-            <mc:Choice xmlns:a14="http://schemas.microsoft.com/office/drawing/2010/main" Requires="a14">
-              <p:sp>
-                <p:nvSpPr>
-                  <p:cNvPr id="278" name="文字方塊 277">
-                    <a:extLst>
-                      <a:ext uri="{FF2B5EF4-FFF2-40B4-BE49-F238E27FC236}">
-                        <a16:creationId xmlns:a16="http://schemas.microsoft.com/office/drawing/2014/main" id="{1DCA7ED1-C6DF-4238-A6EA-89995713FD97}"/>
-                      </a:ext>
-                    </a:extLst>
-                  </p:cNvPr>
-                  <p:cNvSpPr txBox="1"/>
-                  <p:nvPr/>
-                </p:nvSpPr>
-                <p:spPr>
-                  <a:xfrm>
-                    <a:off x="-994837" y="983411"/>
-                    <a:ext cx="323387" cy="335658"/>
-                  </a:xfrm>
-                  <a:prstGeom prst="rect">
-                    <a:avLst/>
-                  </a:prstGeom>
-                  <a:noFill/>
-                </p:spPr>
-                <p:txBody>
-                  <a:bodyPr wrap="square" rtlCol="0">
-                    <a:spAutoFit/>
-                  </a:bodyPr>
-                  <a:lstStyle/>
-                  <a:p>
-                    <a:pPr/>
-                    <a14:m>
-                      <m:oMathPara xmlns:m="http://schemas.openxmlformats.org/officeDocument/2006/math">
-                        <m:oMathParaPr>
-                          <m:jc m:val="centerGroup"/>
-                        </m:oMathParaPr>
-                        <m:oMath xmlns:m="http://schemas.openxmlformats.org/officeDocument/2006/math">
-                          <m:sSub>
-                            <m:sSubPr>
-                              <m:ctrlPr>
-                                <a:rPr lang="en-US" altLang="zh-TW" sz="1630" b="1" i="1">
-                                  <a:latin typeface="Cambria Math" panose="02040503050406030204" pitchFamily="18" charset="0"/>
-                                </a:rPr>
-                              </m:ctrlPr>
-                            </m:sSubPr>
-                            <m:e>
-                              <m:r>
-                                <a:rPr lang="en-US" altLang="zh-TW" sz="1630" b="1" i="1">
-                                  <a:latin typeface="Cambria Math" panose="02040503050406030204" pitchFamily="18" charset="0"/>
-                                </a:rPr>
-                                <m:t>𝒒</m:t>
-                              </m:r>
-                            </m:e>
-                            <m:sub>
-                              <m:r>
-                                <a:rPr lang="en-US" altLang="zh-TW" sz="1630" b="1" i="1">
-                                  <a:latin typeface="Cambria Math" panose="02040503050406030204" pitchFamily="18" charset="0"/>
-                                </a:rPr>
-                                <m:t>𝒚</m:t>
-                              </m:r>
-                            </m:sub>
-                          </m:sSub>
-                        </m:oMath>
-                      </m:oMathPara>
-                    </a14:m>
-                    <a:endParaRPr lang="en-US" altLang="zh-TW" sz="1630" dirty="0">
-                      <a:latin typeface="Times New Roman" panose="02020603050405020304" pitchFamily="18" charset="0"/>
-                      <a:cs typeface="Times New Roman" panose="02020603050405020304" pitchFamily="18" charset="0"/>
-                    </a:endParaRPr>
-                  </a:p>
-                </p:txBody>
-              </p:sp>
-            </mc:Choice>
-            <mc:Fallback>
-              <p:sp>
-                <p:nvSpPr>
-                  <p:cNvPr id="278" name="文字方塊 277">
-                    <a:extLst>
-                      <a:ext uri="{FF2B5EF4-FFF2-40B4-BE49-F238E27FC236}">
-                        <a16:creationId xmlns:a16="http://schemas.microsoft.com/office/drawing/2014/main" id="{1DCA7ED1-C6DF-4238-A6EA-89995713FD97}"/>
-                      </a:ext>
-                    </a:extLst>
-                  </p:cNvPr>
-                  <p:cNvSpPr txBox="1">
-                    <a:spLocks noRot="1" noChangeAspect="1" noMove="1" noResize="1" noEditPoints="1" noAdjustHandles="1" noChangeArrowheads="1" noChangeShapeType="1" noTextEdit="1"/>
-                  </p:cNvSpPr>
-                  <p:nvPr/>
-                </p:nvSpPr>
-                <p:spPr>
-                  <a:xfrm>
-                    <a:off x="-994837" y="983411"/>
-                    <a:ext cx="323387" cy="335658"/>
-                  </a:xfrm>
-                  <a:prstGeom prst="rect">
-                    <a:avLst/>
-                  </a:prstGeom>
-                  <a:blipFill>
-                    <a:blip r:embed="rId7"/>
-                    <a:stretch>
-                      <a:fillRect r="-3448" b="-1667"/>
-                    </a:stretch>
-                  </a:blipFill>
-                </p:spPr>
-                <p:txBody>
-                  <a:bodyPr/>
-                  <a:lstStyle/>
-                  <a:p>
-                    <a:r>
-                      <a:rPr lang="zh-TW" altLang="en-US">
-                        <a:noFill/>
-                      </a:rPr>
-                      <a:t> </a:t>
-                    </a:r>
-                  </a:p>
-                </p:txBody>
-              </p:sp>
-            </mc:Fallback>
-          </mc:AlternateContent>
-          <mc:AlternateContent xmlns:mc="http://schemas.openxmlformats.org/markup-compatibility/2006" xmlns:a14="http://schemas.microsoft.com/office/drawing/2010/main">
-            <mc:Choice Requires="a14">
-              <p:sp>
-                <p:nvSpPr>
-                  <p:cNvPr id="279" name="文字方塊 278">
-                    <a:extLst>
-                      <a:ext uri="{FF2B5EF4-FFF2-40B4-BE49-F238E27FC236}">
-                        <a16:creationId xmlns:a16="http://schemas.microsoft.com/office/drawing/2014/main" id="{81975D7E-C0BD-4713-84BE-05259DAF8C12}"/>
-                      </a:ext>
-                    </a:extLst>
-                  </p:cNvPr>
-                  <p:cNvSpPr txBox="1"/>
-                  <p:nvPr/>
-                </p:nvSpPr>
-                <p:spPr>
-                  <a:xfrm>
-                    <a:off x="-813248" y="1188801"/>
-                    <a:ext cx="406919" cy="314558"/>
-                  </a:xfrm>
-                  <a:prstGeom prst="rect">
-                    <a:avLst/>
-                  </a:prstGeom>
-                  <a:noFill/>
-                </p:spPr>
-                <p:txBody>
-                  <a:bodyPr wrap="square" rtlCol="0">
-                    <a:spAutoFit/>
-                  </a:bodyPr>
-                  <a:lstStyle/>
-                  <a:p>
-                    <a:pPr/>
-                    <a14:m>
-                      <m:oMathPara xmlns:m="http://schemas.openxmlformats.org/officeDocument/2006/math">
-                        <m:oMathParaPr>
-                          <m:jc m:val="centerGroup"/>
-                        </m:oMathParaPr>
-                        <m:oMath xmlns:m="http://schemas.openxmlformats.org/officeDocument/2006/math">
-                          <m:sSub>
-                            <m:sSubPr>
-                              <m:ctrlPr>
-                                <a:rPr lang="en-US" altLang="zh-TW" sz="1630" b="1" i="1">
-                                  <a:latin typeface="Cambria Math" panose="02040503050406030204" pitchFamily="18" charset="0"/>
-                                </a:rPr>
-                              </m:ctrlPr>
-                            </m:sSubPr>
-                            <m:e>
-                              <m:r>
-                                <a:rPr lang="en-US" altLang="zh-TW" sz="1630" b="1" i="1">
-                                  <a:latin typeface="Cambria Math" panose="02040503050406030204" pitchFamily="18" charset="0"/>
-                                </a:rPr>
-                                <m:t>𝒒</m:t>
-                              </m:r>
-                            </m:e>
-                            <m:sub>
-                              <m:r>
-                                <a:rPr lang="en-US" altLang="zh-TW" sz="1630" b="1" i="1">
-                                  <a:latin typeface="Cambria Math" panose="02040503050406030204" pitchFamily="18" charset="0"/>
-                                </a:rPr>
-                                <m:t>𝒙</m:t>
-                              </m:r>
-                            </m:sub>
-                          </m:sSub>
-                        </m:oMath>
-                      </m:oMathPara>
-                    </a14:m>
-                    <a:endParaRPr lang="en-US" altLang="zh-TW" sz="1630" dirty="0">
-                      <a:latin typeface="Times New Roman" panose="02020603050405020304" pitchFamily="18" charset="0"/>
-                      <a:cs typeface="Times New Roman" panose="02020603050405020304" pitchFamily="18" charset="0"/>
-                    </a:endParaRPr>
-                  </a:p>
-                </p:txBody>
-              </p:sp>
-            </mc:Choice>
-            <mc:Fallback xmlns="">
-              <p:sp>
-                <p:nvSpPr>
-                  <p:cNvPr id="279" name="文字方塊 278">
-                    <a:extLst>
-                      <a:ext uri="{FF2B5EF4-FFF2-40B4-BE49-F238E27FC236}">
-                        <a16:creationId xmlns:a16="http://schemas.microsoft.com/office/drawing/2014/main" id="{81975D7E-C0BD-4713-84BE-05259DAF8C12}"/>
-                      </a:ext>
-                    </a:extLst>
-                  </p:cNvPr>
-                  <p:cNvSpPr txBox="1">
-                    <a:spLocks noRot="1" noChangeAspect="1" noMove="1" noResize="1" noEditPoints="1" noAdjustHandles="1" noChangeArrowheads="1" noChangeShapeType="1" noTextEdit="1"/>
-                  </p:cNvSpPr>
-                  <p:nvPr/>
-                </p:nvSpPr>
-                <p:spPr>
-                  <a:xfrm>
-                    <a:off x="-813248" y="1188801"/>
-                    <a:ext cx="406919" cy="314558"/>
-                  </a:xfrm>
-                  <a:prstGeom prst="rect">
-                    <a:avLst/>
-                  </a:prstGeom>
-                  <a:blipFill>
-                    <a:blip r:embed="rId19"/>
-                    <a:stretch>
-                      <a:fillRect b="-5263"/>
-                    </a:stretch>
-                  </a:blipFill>
-                </p:spPr>
-                <p:txBody>
-                  <a:bodyPr/>
-                  <a:lstStyle/>
-                  <a:p>
-                    <a:r>
-                      <a:rPr lang="zh-TW" altLang="en-US">
-                        <a:noFill/>
-                      </a:rPr>
-                      <a:t> </a:t>
-                    </a:r>
-                  </a:p>
-                </p:txBody>
-              </p:sp>
-            </mc:Fallback>
-          </mc:AlternateContent>
-          <p:sp>
-            <p:nvSpPr>
-              <p:cNvPr id="280" name="箭號: 向右 279">
-                <a:extLst>
-                  <a:ext uri="{FF2B5EF4-FFF2-40B4-BE49-F238E27FC236}">
-                    <a16:creationId xmlns:a16="http://schemas.microsoft.com/office/drawing/2014/main" id="{A8A6788E-178E-4359-A5E5-749475B64C5C}"/>
-                  </a:ext>
-                </a:extLst>
-              </p:cNvPr>
-              <p:cNvSpPr/>
-              <p:nvPr/>
-            </p:nvSpPr>
-            <p:spPr>
-              <a:xfrm>
-                <a:off x="-837092" y="1356364"/>
-                <a:ext cx="92654" cy="27541"/>
-              </a:xfrm>
-              <a:prstGeom prst="rightArrow">
-                <a:avLst>
-                  <a:gd name="adj1" fmla="val 50000"/>
-                  <a:gd name="adj2" fmla="val 99023"/>
-                </a:avLst>
-              </a:prstGeom>
-              <a:solidFill>
-                <a:schemeClr val="tx1"/>
-              </a:solidFill>
-              <a:ln>
-                <a:solidFill>
-                  <a:schemeClr val="tx1"/>
-                </a:solidFill>
-              </a:ln>
-            </p:spPr>
-            <p:style>
-              <a:lnRef idx="2">
-                <a:schemeClr val="dk1">
-                  <a:shade val="50000"/>
-                </a:schemeClr>
-              </a:lnRef>
-              <a:fillRef idx="1">
-                <a:schemeClr val="dk1"/>
-              </a:fillRef>
-              <a:effectRef idx="0">
-                <a:schemeClr val="dk1"/>
-              </a:effectRef>
-              <a:fontRef idx="minor">
-                <a:schemeClr val="lt1"/>
-              </a:fontRef>
-            </p:style>
-            <p:txBody>
-              <a:bodyPr rtlCol="0" anchor="ctr"/>
-              <a:lstStyle/>
-              <a:p>
-                <a:pPr algn="ctr"/>
-                <a:endParaRPr lang="zh-TW" altLang="en-US" sz="1630">
-                  <a:solidFill>
-                    <a:schemeClr val="tx1"/>
-                  </a:solidFill>
-                  <a:latin typeface="Times New Roman" panose="02020603050405020304" pitchFamily="18" charset="0"/>
-                  <a:cs typeface="Times New Roman" panose="02020603050405020304" pitchFamily="18" charset="0"/>
-                </a:endParaRPr>
-              </a:p>
-            </p:txBody>
-          </p:sp>
-          <p:sp>
-            <p:nvSpPr>
-              <p:cNvPr id="281" name="箭號: 向右 280">
-                <a:extLst>
-                  <a:ext uri="{FF2B5EF4-FFF2-40B4-BE49-F238E27FC236}">
-                    <a16:creationId xmlns:a16="http://schemas.microsoft.com/office/drawing/2014/main" id="{FEED7821-B0D8-4E8F-AA25-5D1DEA18901C}"/>
-                  </a:ext>
-                </a:extLst>
-              </p:cNvPr>
-              <p:cNvSpPr/>
-              <p:nvPr/>
-            </p:nvSpPr>
-            <p:spPr>
-              <a:xfrm rot="16200000">
-                <a:off x="-877012" y="1316853"/>
-                <a:ext cx="91764" cy="27808"/>
-              </a:xfrm>
-              <a:prstGeom prst="rightArrow">
-                <a:avLst>
-                  <a:gd name="adj1" fmla="val 50000"/>
-                  <a:gd name="adj2" fmla="val 99023"/>
-                </a:avLst>
-              </a:prstGeom>
-              <a:solidFill>
-                <a:schemeClr val="tx1"/>
-              </a:solidFill>
-              <a:ln>
-                <a:solidFill>
-                  <a:schemeClr val="tx1"/>
-                </a:solidFill>
-              </a:ln>
-            </p:spPr>
-            <p:style>
-              <a:lnRef idx="2">
-                <a:schemeClr val="dk1">
-                  <a:shade val="50000"/>
-                </a:schemeClr>
-              </a:lnRef>
-              <a:fillRef idx="1">
-                <a:schemeClr val="dk1"/>
-              </a:fillRef>
-              <a:effectRef idx="0">
-                <a:schemeClr val="dk1"/>
-              </a:effectRef>
-              <a:fontRef idx="minor">
-                <a:schemeClr val="lt1"/>
-              </a:fontRef>
-            </p:style>
-            <p:txBody>
-              <a:bodyPr rtlCol="0" anchor="ctr"/>
-              <a:lstStyle/>
-              <a:p>
-                <a:pPr algn="ctr"/>
-                <a:endParaRPr lang="zh-TW" altLang="en-US" sz="1630" dirty="0">
-                  <a:solidFill>
-                    <a:schemeClr val="tx1"/>
-                  </a:solidFill>
-                  <a:latin typeface="Times New Roman" panose="02020603050405020304" pitchFamily="18" charset="0"/>
-                  <a:cs typeface="Times New Roman" panose="02020603050405020304" pitchFamily="18" charset="0"/>
-                </a:endParaRPr>
-              </a:p>
-            </p:txBody>
-          </p:sp>
-        </p:grpSp>
-        <p:grpSp>
-          <p:nvGrpSpPr>
-            <p:cNvPr id="268" name="群組 267">
-              <a:extLst>
-                <a:ext uri="{FF2B5EF4-FFF2-40B4-BE49-F238E27FC236}">
-                  <a16:creationId xmlns:a16="http://schemas.microsoft.com/office/drawing/2014/main" id="{0E3F31E3-C952-482B-9BC7-E768D7D68741}"/>
-                </a:ext>
-              </a:extLst>
-            </p:cNvPr>
-            <p:cNvGrpSpPr/>
-            <p:nvPr/>
-          </p:nvGrpSpPr>
-          <p:grpSpPr>
-            <a:xfrm>
-              <a:off x="1138020" y="4656366"/>
-              <a:ext cx="655028" cy="568541"/>
-              <a:chOff x="-995630" y="983808"/>
-              <a:chExt cx="600414" cy="521138"/>
-            </a:xfrm>
-          </p:grpSpPr>
-          <mc:AlternateContent xmlns:mc="http://schemas.openxmlformats.org/markup-compatibility/2006">
-            <mc:Choice xmlns:a14="http://schemas.microsoft.com/office/drawing/2010/main" Requires="a14">
-              <p:sp>
-                <p:nvSpPr>
-                  <p:cNvPr id="274" name="文字方塊 273">
-                    <a:extLst>
-                      <a:ext uri="{FF2B5EF4-FFF2-40B4-BE49-F238E27FC236}">
-                        <a16:creationId xmlns:a16="http://schemas.microsoft.com/office/drawing/2014/main" id="{1CD21653-A1AD-4400-90CC-55C9F1C414B4}"/>
-                      </a:ext>
-                    </a:extLst>
-                  </p:cNvPr>
-                  <p:cNvSpPr txBox="1"/>
-                  <p:nvPr/>
-                </p:nvSpPr>
-                <p:spPr>
-                  <a:xfrm>
-                    <a:off x="-995630" y="983808"/>
-                    <a:ext cx="323387" cy="335658"/>
-                  </a:xfrm>
-                  <a:prstGeom prst="rect">
-                    <a:avLst/>
-                  </a:prstGeom>
-                  <a:noFill/>
-                </p:spPr>
-                <p:txBody>
-                  <a:bodyPr wrap="square" rtlCol="0">
-                    <a:spAutoFit/>
-                  </a:bodyPr>
-                  <a:lstStyle/>
-                  <a:p>
-                    <a:pPr/>
-                    <a14:m>
-                      <m:oMathPara xmlns:m="http://schemas.openxmlformats.org/officeDocument/2006/math">
-                        <m:oMathParaPr>
-                          <m:jc m:val="centerGroup"/>
-                        </m:oMathParaPr>
-                        <m:oMath xmlns:m="http://schemas.openxmlformats.org/officeDocument/2006/math">
-                          <m:sSub>
-                            <m:sSubPr>
-                              <m:ctrlPr>
-                                <a:rPr lang="en-US" altLang="zh-TW" sz="1630" b="1" i="1">
-                                  <a:latin typeface="Cambria Math" panose="02040503050406030204" pitchFamily="18" charset="0"/>
-                                </a:rPr>
-                              </m:ctrlPr>
-                            </m:sSubPr>
-                            <m:e>
-                              <m:r>
-                                <a:rPr lang="en-US" altLang="zh-TW" sz="1630" b="1" i="1">
-                                  <a:latin typeface="Cambria Math" panose="02040503050406030204" pitchFamily="18" charset="0"/>
-                                </a:rPr>
-                                <m:t>𝒒</m:t>
-                              </m:r>
-                            </m:e>
-                            <m:sub>
-                              <m:r>
-                                <a:rPr lang="en-US" altLang="zh-TW" sz="1630" b="1" i="1">
-                                  <a:latin typeface="Cambria Math" panose="02040503050406030204" pitchFamily="18" charset="0"/>
-                                </a:rPr>
-                                <m:t>𝒚</m:t>
-                              </m:r>
-                            </m:sub>
-                          </m:sSub>
-                        </m:oMath>
-                      </m:oMathPara>
-                    </a14:m>
-                    <a:endParaRPr lang="en-US" altLang="zh-TW" sz="1630" dirty="0">
-                      <a:latin typeface="Times New Roman" panose="02020603050405020304" pitchFamily="18" charset="0"/>
-                      <a:cs typeface="Times New Roman" panose="02020603050405020304" pitchFamily="18" charset="0"/>
-                    </a:endParaRPr>
-                  </a:p>
-                </p:txBody>
-              </p:sp>
-            </mc:Choice>
-            <mc:Fallback>
-              <p:sp>
-                <p:nvSpPr>
-                  <p:cNvPr id="274" name="文字方塊 273">
-                    <a:extLst>
-                      <a:ext uri="{FF2B5EF4-FFF2-40B4-BE49-F238E27FC236}">
-                        <a16:creationId xmlns:a16="http://schemas.microsoft.com/office/drawing/2014/main" id="{1CD21653-A1AD-4400-90CC-55C9F1C414B4}"/>
-                      </a:ext>
-                    </a:extLst>
-                  </p:cNvPr>
-                  <p:cNvSpPr txBox="1">
-                    <a:spLocks noRot="1" noChangeAspect="1" noMove="1" noResize="1" noEditPoints="1" noAdjustHandles="1" noChangeArrowheads="1" noChangeShapeType="1" noTextEdit="1"/>
-                  </p:cNvSpPr>
-                  <p:nvPr/>
-                </p:nvSpPr>
-                <p:spPr>
-                  <a:xfrm>
-                    <a:off x="-995630" y="983808"/>
-                    <a:ext cx="323387" cy="335658"/>
-                  </a:xfrm>
-                  <a:prstGeom prst="rect">
-                    <a:avLst/>
-                  </a:prstGeom>
-                  <a:blipFill>
-                    <a:blip r:embed="rId20"/>
-                    <a:stretch>
-                      <a:fillRect r="-5263"/>
-                    </a:stretch>
-                  </a:blipFill>
-                </p:spPr>
-                <p:txBody>
-                  <a:bodyPr/>
-                  <a:lstStyle/>
-                  <a:p>
-                    <a:r>
-                      <a:rPr lang="zh-TW" altLang="en-US">
-                        <a:noFill/>
-                      </a:rPr>
-                      <a:t> </a:t>
-                    </a:r>
-                  </a:p>
-                </p:txBody>
-              </p:sp>
-            </mc:Fallback>
-          </mc:AlternateContent>
-          <mc:AlternateContent xmlns:mc="http://schemas.openxmlformats.org/markup-compatibility/2006" xmlns:a14="http://schemas.microsoft.com/office/drawing/2010/main">
-            <mc:Choice Requires="a14">
-              <p:sp>
-                <p:nvSpPr>
-                  <p:cNvPr id="275" name="文字方塊 274">
-                    <a:extLst>
-                      <a:ext uri="{FF2B5EF4-FFF2-40B4-BE49-F238E27FC236}">
-                        <a16:creationId xmlns:a16="http://schemas.microsoft.com/office/drawing/2014/main" id="{87ADA85D-6E70-4FED-874F-D10BD8CB47F5}"/>
-                      </a:ext>
-                    </a:extLst>
-                  </p:cNvPr>
-                  <p:cNvSpPr txBox="1"/>
-                  <p:nvPr/>
-                </p:nvSpPr>
-                <p:spPr>
-                  <a:xfrm>
-                    <a:off x="-802135" y="1190388"/>
-                    <a:ext cx="406919" cy="314558"/>
-                  </a:xfrm>
-                  <a:prstGeom prst="rect">
-                    <a:avLst/>
-                  </a:prstGeom>
-                  <a:noFill/>
-                </p:spPr>
-                <p:txBody>
-                  <a:bodyPr wrap="square" rtlCol="0">
-                    <a:spAutoFit/>
-                  </a:bodyPr>
-                  <a:lstStyle/>
-                  <a:p>
-                    <a:pPr/>
-                    <a14:m>
-                      <m:oMathPara xmlns:m="http://schemas.openxmlformats.org/officeDocument/2006/math">
-                        <m:oMathParaPr>
-                          <m:jc m:val="centerGroup"/>
-                        </m:oMathParaPr>
-                        <m:oMath xmlns:m="http://schemas.openxmlformats.org/officeDocument/2006/math">
-                          <m:sSub>
-                            <m:sSubPr>
-                              <m:ctrlPr>
-                                <a:rPr lang="en-US" altLang="zh-TW" sz="1630" b="1" i="1">
-                                  <a:latin typeface="Cambria Math" panose="02040503050406030204" pitchFamily="18" charset="0"/>
-                                </a:rPr>
-                              </m:ctrlPr>
-                            </m:sSubPr>
-                            <m:e>
-                              <m:r>
-                                <a:rPr lang="en-US" altLang="zh-TW" sz="1630" b="1" i="1">
-                                  <a:latin typeface="Cambria Math" panose="02040503050406030204" pitchFamily="18" charset="0"/>
-                                </a:rPr>
-                                <m:t>𝒒</m:t>
-                              </m:r>
-                            </m:e>
-                            <m:sub>
-                              <m:r>
-                                <a:rPr lang="en-US" altLang="zh-TW" sz="1630" b="1" i="1">
-                                  <a:latin typeface="Cambria Math" panose="02040503050406030204" pitchFamily="18" charset="0"/>
-                                </a:rPr>
-                                <m:t>𝒙</m:t>
-                              </m:r>
-                            </m:sub>
-                          </m:sSub>
-                        </m:oMath>
-                      </m:oMathPara>
-                    </a14:m>
-                    <a:endParaRPr lang="en-US" altLang="zh-TW" sz="1630" dirty="0">
-                      <a:latin typeface="Times New Roman" panose="02020603050405020304" pitchFamily="18" charset="0"/>
-                      <a:cs typeface="Times New Roman" panose="02020603050405020304" pitchFamily="18" charset="0"/>
-                    </a:endParaRPr>
-                  </a:p>
-                </p:txBody>
-              </p:sp>
-            </mc:Choice>
-            <mc:Fallback xmlns="">
-              <p:sp>
-                <p:nvSpPr>
-                  <p:cNvPr id="275" name="文字方塊 274">
-                    <a:extLst>
-                      <a:ext uri="{FF2B5EF4-FFF2-40B4-BE49-F238E27FC236}">
-                        <a16:creationId xmlns:a16="http://schemas.microsoft.com/office/drawing/2014/main" id="{87ADA85D-6E70-4FED-874F-D10BD8CB47F5}"/>
-                      </a:ext>
-                    </a:extLst>
-                  </p:cNvPr>
-                  <p:cNvSpPr txBox="1">
-                    <a:spLocks noRot="1" noChangeAspect="1" noMove="1" noResize="1" noEditPoints="1" noAdjustHandles="1" noChangeArrowheads="1" noChangeShapeType="1" noTextEdit="1"/>
-                  </p:cNvSpPr>
-                  <p:nvPr/>
-                </p:nvSpPr>
-                <p:spPr>
-                  <a:xfrm>
-                    <a:off x="-802135" y="1190388"/>
-                    <a:ext cx="406919" cy="314558"/>
-                  </a:xfrm>
-                  <a:prstGeom prst="rect">
-                    <a:avLst/>
-                  </a:prstGeom>
-                  <a:blipFill>
-                    <a:blip r:embed="rId21"/>
-                    <a:stretch>
-                      <a:fillRect b="-7143"/>
-                    </a:stretch>
-                  </a:blipFill>
-                </p:spPr>
-                <p:txBody>
-                  <a:bodyPr/>
-                  <a:lstStyle/>
-                  <a:p>
-                    <a:r>
-                      <a:rPr lang="zh-TW" altLang="en-US">
-                        <a:noFill/>
-                      </a:rPr>
-                      <a:t> </a:t>
-                    </a:r>
-                  </a:p>
-                </p:txBody>
-              </p:sp>
-            </mc:Fallback>
-          </mc:AlternateContent>
-          <p:sp>
-            <p:nvSpPr>
-              <p:cNvPr id="276" name="箭號: 向右 275">
-                <a:extLst>
-                  <a:ext uri="{FF2B5EF4-FFF2-40B4-BE49-F238E27FC236}">
-                    <a16:creationId xmlns:a16="http://schemas.microsoft.com/office/drawing/2014/main" id="{770AE165-61BB-473D-9254-44D70D2D158D}"/>
-                  </a:ext>
-                </a:extLst>
-              </p:cNvPr>
-              <p:cNvSpPr/>
-              <p:nvPr/>
-            </p:nvSpPr>
-            <p:spPr>
-              <a:xfrm>
-                <a:off x="-837092" y="1356364"/>
-                <a:ext cx="92654" cy="27541"/>
-              </a:xfrm>
-              <a:prstGeom prst="rightArrow">
-                <a:avLst>
-                  <a:gd name="adj1" fmla="val 50000"/>
-                  <a:gd name="adj2" fmla="val 99023"/>
-                </a:avLst>
-              </a:prstGeom>
-              <a:solidFill>
-                <a:schemeClr val="tx1"/>
-              </a:solidFill>
-              <a:ln>
-                <a:solidFill>
-                  <a:schemeClr val="tx1"/>
-                </a:solidFill>
-              </a:ln>
-            </p:spPr>
-            <p:style>
-              <a:lnRef idx="2">
-                <a:schemeClr val="dk1">
-                  <a:shade val="50000"/>
-                </a:schemeClr>
-              </a:lnRef>
-              <a:fillRef idx="1">
-                <a:schemeClr val="dk1"/>
-              </a:fillRef>
-              <a:effectRef idx="0">
-                <a:schemeClr val="dk1"/>
-              </a:effectRef>
-              <a:fontRef idx="minor">
-                <a:schemeClr val="lt1"/>
-              </a:fontRef>
-            </p:style>
-            <p:txBody>
-              <a:bodyPr rtlCol="0" anchor="ctr"/>
-              <a:lstStyle/>
-              <a:p>
-                <a:pPr algn="ctr"/>
-                <a:endParaRPr lang="zh-TW" altLang="en-US" sz="1630">
-                  <a:solidFill>
-                    <a:schemeClr val="tx1"/>
-                  </a:solidFill>
-                  <a:latin typeface="Times New Roman" panose="02020603050405020304" pitchFamily="18" charset="0"/>
-                  <a:cs typeface="Times New Roman" panose="02020603050405020304" pitchFamily="18" charset="0"/>
-                </a:endParaRPr>
-              </a:p>
-            </p:txBody>
-          </p:sp>
-          <p:sp>
-            <p:nvSpPr>
-              <p:cNvPr id="277" name="箭號: 向右 276">
-                <a:extLst>
-                  <a:ext uri="{FF2B5EF4-FFF2-40B4-BE49-F238E27FC236}">
-                    <a16:creationId xmlns:a16="http://schemas.microsoft.com/office/drawing/2014/main" id="{614AEB28-253F-4993-A1D4-48EF43196C0C}"/>
-                  </a:ext>
-                </a:extLst>
-              </p:cNvPr>
-              <p:cNvSpPr/>
-              <p:nvPr/>
-            </p:nvSpPr>
-            <p:spPr>
-              <a:xfrm rot="16200000">
-                <a:off x="-877012" y="1316853"/>
-                <a:ext cx="91764" cy="27808"/>
-              </a:xfrm>
-              <a:prstGeom prst="rightArrow">
-                <a:avLst>
-                  <a:gd name="adj1" fmla="val 50000"/>
-                  <a:gd name="adj2" fmla="val 99023"/>
-                </a:avLst>
-              </a:prstGeom>
-              <a:solidFill>
-                <a:schemeClr val="tx1"/>
-              </a:solidFill>
-              <a:ln>
-                <a:solidFill>
-                  <a:schemeClr val="tx1"/>
-                </a:solidFill>
-              </a:ln>
-            </p:spPr>
-            <p:style>
-              <a:lnRef idx="2">
-                <a:schemeClr val="dk1">
-                  <a:shade val="50000"/>
-                </a:schemeClr>
-              </a:lnRef>
-              <a:fillRef idx="1">
-                <a:schemeClr val="dk1"/>
-              </a:fillRef>
-              <a:effectRef idx="0">
-                <a:schemeClr val="dk1"/>
-              </a:effectRef>
-              <a:fontRef idx="minor">
-                <a:schemeClr val="lt1"/>
-              </a:fontRef>
-            </p:style>
-            <p:txBody>
-              <a:bodyPr rtlCol="0" anchor="ctr"/>
-              <a:lstStyle/>
-              <a:p>
-                <a:pPr algn="ctr"/>
-                <a:endParaRPr lang="zh-TW" altLang="en-US" sz="1630" dirty="0">
-                  <a:solidFill>
-                    <a:schemeClr val="tx1"/>
-                  </a:solidFill>
-                  <a:latin typeface="Times New Roman" panose="02020603050405020304" pitchFamily="18" charset="0"/>
-                  <a:cs typeface="Times New Roman" panose="02020603050405020304" pitchFamily="18" charset="0"/>
-                </a:endParaRPr>
-              </a:p>
-            </p:txBody>
-          </p:sp>
-        </p:grpSp>
-        <p:pic>
-          <p:nvPicPr>
-            <p:cNvPr id="272" name="圖片 271">
-              <a:extLst>
-                <a:ext uri="{FF2B5EF4-FFF2-40B4-BE49-F238E27FC236}">
-                  <a16:creationId xmlns:a16="http://schemas.microsoft.com/office/drawing/2014/main" id="{7468B6E1-A0E2-4B23-9D46-61F376D4E063}"/>
-                </a:ext>
-              </a:extLst>
-            </p:cNvPr>
-            <p:cNvPicPr>
-              <a:picLocks noChangeAspect="1"/>
-            </p:cNvPicPr>
-            <p:nvPr/>
-          </p:nvPicPr>
-          <p:blipFill rotWithShape="1">
-            <a:blip r:embed="rId2">
-              <a:clrChange>
-                <a:clrFrom>
-                  <a:srgbClr val="FFFFFF"/>
-                </a:clrFrom>
-                <a:clrTo>
-                  <a:srgbClr val="FFFFFF">
-                    <a:alpha val="0"/>
-                  </a:srgbClr>
-                </a:clrTo>
-              </a:clrChange>
-            </a:blip>
-            <a:srcRect l="63840" r="19837"/>
-            <a:stretch/>
-          </p:blipFill>
-          <p:spPr>
-            <a:xfrm>
-              <a:off x="694275" y="4059792"/>
-              <a:ext cx="601980" cy="505704"/>
-            </a:xfrm>
-            <a:prstGeom prst="rect">
-              <a:avLst/>
-            </a:prstGeom>
-          </p:spPr>
-        </p:pic>
-        <p:pic>
-          <p:nvPicPr>
-            <p:cNvPr id="273" name="圖片 272">
-              <a:extLst>
-                <a:ext uri="{FF2B5EF4-FFF2-40B4-BE49-F238E27FC236}">
-                  <a16:creationId xmlns:a16="http://schemas.microsoft.com/office/drawing/2014/main" id="{E074A7D9-C35F-4EDD-91A7-F385F0D7913B}"/>
-                </a:ext>
-              </a:extLst>
-            </p:cNvPr>
-            <p:cNvPicPr>
-              <a:picLocks noChangeAspect="1"/>
-            </p:cNvPicPr>
-            <p:nvPr/>
-          </p:nvPicPr>
-          <p:blipFill rotWithShape="1">
-            <a:blip r:embed="rId2">
-              <a:clrChange>
-                <a:clrFrom>
-                  <a:srgbClr val="FFFFFF"/>
-                </a:clrFrom>
-                <a:clrTo>
-                  <a:srgbClr val="FFFFFF">
-                    <a:alpha val="0"/>
-                  </a:srgbClr>
-                </a:clrTo>
-              </a:clrChange>
-            </a:blip>
-            <a:srcRect l="80038"/>
-            <a:stretch/>
-          </p:blipFill>
-          <p:spPr>
-            <a:xfrm>
-              <a:off x="694275" y="2504122"/>
-              <a:ext cx="736126" cy="505704"/>
-            </a:xfrm>
-            <a:prstGeom prst="rect">
-              <a:avLst/>
-            </a:prstGeom>
-          </p:spPr>
-        </p:pic>
-        <p:pic>
-          <p:nvPicPr>
-            <p:cNvPr id="39" name="圖片 38">
-              <a:extLst>
-                <a:ext uri="{FF2B5EF4-FFF2-40B4-BE49-F238E27FC236}">
-                  <a16:creationId xmlns:a16="http://schemas.microsoft.com/office/drawing/2014/main" id="{5EF9E74D-E01F-41A2-A26B-0C33487195EC}"/>
-                </a:ext>
-              </a:extLst>
-            </p:cNvPr>
-            <p:cNvPicPr>
-              <a:picLocks noChangeAspect="1"/>
-            </p:cNvPicPr>
-            <p:nvPr/>
-          </p:nvPicPr>
-          <p:blipFill rotWithShape="1">
-            <a:blip r:embed="rId22">
-              <a:clrChange>
-                <a:clrFrom>
-                  <a:srgbClr val="FFFFFF"/>
-                </a:clrFrom>
-                <a:clrTo>
-                  <a:srgbClr val="FFFFFF">
-                    <a:alpha val="0"/>
-                  </a:srgbClr>
-                </a:clrTo>
-              </a:clrChange>
-              <a:extLst>
-                <a:ext uri="{28A0092B-C50C-407E-A947-70E740481C1C}">
-                  <a14:useLocalDpi xmlns:a14="http://schemas.microsoft.com/office/drawing/2010/main" val="0"/>
-                </a:ext>
-              </a:extLst>
-            </a:blip>
-            <a:srcRect l="90879" t="9023" r="5591" b="70339"/>
-            <a:stretch/>
-          </p:blipFill>
-          <p:spPr>
-            <a:xfrm>
-              <a:off x="7434825" y="734055"/>
-              <a:ext cx="344719" cy="1343486"/>
-            </a:xfrm>
-            <a:prstGeom prst="rect">
-              <a:avLst/>
-            </a:prstGeom>
-          </p:spPr>
-        </p:pic>
-        <p:sp>
-          <p:nvSpPr>
-            <p:cNvPr id="40" name="矩形: 圓角 39">
-              <a:extLst>
-                <a:ext uri="{FF2B5EF4-FFF2-40B4-BE49-F238E27FC236}">
-                  <a16:creationId xmlns:a16="http://schemas.microsoft.com/office/drawing/2014/main" id="{71B59539-B160-476E-A456-3B4D373ECA78}"/>
-                </a:ext>
-              </a:extLst>
-            </p:cNvPr>
-            <p:cNvSpPr/>
-            <p:nvPr/>
-          </p:nvSpPr>
-          <p:spPr>
-            <a:xfrm>
-              <a:off x="621965" y="627665"/>
-              <a:ext cx="6717600" cy="1458000"/>
-            </a:xfrm>
-            <a:prstGeom prst="roundRect">
-              <a:avLst>
-                <a:gd name="adj" fmla="val 6163"/>
-              </a:avLst>
-            </a:prstGeom>
-            <a:noFill/>
-            <a:ln w="9525" cap="flat" cmpd="sng" algn="ctr">
-              <a:solidFill>
-                <a:schemeClr val="accent1"/>
-              </a:solidFill>
-              <a:prstDash val="solid"/>
-              <a:round/>
-              <a:headEnd type="none" w="med" len="med"/>
-              <a:tailEnd type="none" w="med" len="med"/>
-            </a:ln>
-          </p:spPr>
-          <p:style>
-            <a:lnRef idx="0">
-              <a:scrgbClr r="0" g="0" b="0"/>
-            </a:lnRef>
-            <a:fillRef idx="0">
-              <a:scrgbClr r="0" g="0" b="0"/>
-            </a:fillRef>
-            <a:effectRef idx="0">
-              <a:scrgbClr r="0" g="0" b="0"/>
-            </a:effectRef>
-            <a:fontRef idx="minor">
-              <a:schemeClr val="accent1"/>
-            </a:fontRef>
-          </p:style>
-          <p:txBody>
-            <a:bodyPr rot="0" spcFirstLastPara="0" vertOverflow="overflow" horzOverflow="overflow" vert="horz" wrap="square" lIns="91440" tIns="45720" rIns="91440" bIns="45720" numCol="1" spcCol="0" rtlCol="0" fromWordArt="0" anchor="ctr" anchorCtr="0" forceAA="0" compatLnSpc="1">
-              <a:prstTxWarp prst="textNoShape">
-                <a:avLst/>
-              </a:prstTxWarp>
-              <a:noAutofit/>
-            </a:bodyPr>
-            <a:lstStyle/>
-            <a:p>
-              <a:pPr algn="ctr"/>
-              <a:endParaRPr lang="zh-TW" altLang="en-US" sz="1900" dirty="0">
-                <a:latin typeface="Times New Roman" panose="02020603050405020304" pitchFamily="18" charset="0"/>
-                <a:cs typeface="Times New Roman" panose="02020603050405020304" pitchFamily="18" charset="0"/>
-              </a:endParaRPr>
-            </a:p>
-          </p:txBody>
-        </p:sp>
-        <p:sp>
-          <p:nvSpPr>
-            <p:cNvPr id="41" name="矩形: 圓角 40">
-              <a:extLst>
-                <a:ext uri="{FF2B5EF4-FFF2-40B4-BE49-F238E27FC236}">
-                  <a16:creationId xmlns:a16="http://schemas.microsoft.com/office/drawing/2014/main" id="{07AC0EB3-BCCA-4107-B7F8-52B8C595E6A3}"/>
-                </a:ext>
-              </a:extLst>
-            </p:cNvPr>
-            <p:cNvSpPr/>
-            <p:nvPr/>
-          </p:nvSpPr>
-          <p:spPr>
-            <a:xfrm>
-              <a:off x="621965" y="2553950"/>
-              <a:ext cx="6717600" cy="3265825"/>
-            </a:xfrm>
-            <a:prstGeom prst="roundRect">
-              <a:avLst>
-                <a:gd name="adj" fmla="val 3246"/>
-              </a:avLst>
-            </a:prstGeom>
-            <a:noFill/>
-            <a:ln w="9525" cap="flat" cmpd="sng" algn="ctr">
-              <a:solidFill>
-                <a:schemeClr val="accent2"/>
-              </a:solidFill>
-              <a:prstDash val="solid"/>
-              <a:round/>
-              <a:headEnd type="none" w="med" len="med"/>
-              <a:tailEnd type="none" w="med" len="med"/>
-            </a:ln>
-          </p:spPr>
-          <p:style>
-            <a:lnRef idx="0">
-              <a:scrgbClr r="0" g="0" b="0"/>
-            </a:lnRef>
-            <a:fillRef idx="0">
-              <a:scrgbClr r="0" g="0" b="0"/>
-            </a:fillRef>
-            <a:effectRef idx="0">
-              <a:scrgbClr r="0" g="0" b="0"/>
-            </a:effectRef>
-            <a:fontRef idx="minor">
-              <a:schemeClr val="accent2"/>
-            </a:fontRef>
-          </p:style>
-          <p:txBody>
-            <a:bodyPr rot="0" spcFirstLastPara="0" vertOverflow="overflow" horzOverflow="overflow" vert="horz" wrap="square" lIns="91440" tIns="45720" rIns="91440" bIns="45720" numCol="1" spcCol="0" rtlCol="0" fromWordArt="0" anchor="ctr" anchorCtr="0" forceAA="0" compatLnSpc="1">
-              <a:prstTxWarp prst="textNoShape">
-                <a:avLst/>
-              </a:prstTxWarp>
-              <a:noAutofit/>
-            </a:bodyPr>
-            <a:lstStyle/>
-            <a:p>
-              <a:pPr algn="ctr"/>
-              <a:endParaRPr lang="zh-TW" altLang="en-US" sz="1900" dirty="0">
-                <a:latin typeface="Times New Roman" panose="02020603050405020304" pitchFamily="18" charset="0"/>
-                <a:cs typeface="Times New Roman" panose="02020603050405020304" pitchFamily="18" charset="0"/>
-              </a:endParaRPr>
-            </a:p>
-          </p:txBody>
-        </p:sp>
-        <p:pic>
-          <p:nvPicPr>
-            <p:cNvPr id="42" name="圖片 41">
-              <a:extLst>
-                <a:ext uri="{FF2B5EF4-FFF2-40B4-BE49-F238E27FC236}">
-                  <a16:creationId xmlns:a16="http://schemas.microsoft.com/office/drawing/2014/main" id="{C0F59C79-9428-42A1-9F92-5705E07AD825}"/>
-                </a:ext>
-              </a:extLst>
-            </p:cNvPr>
-            <p:cNvPicPr>
-              <a:picLocks noChangeAspect="1"/>
-            </p:cNvPicPr>
-            <p:nvPr/>
-          </p:nvPicPr>
-          <p:blipFill rotWithShape="1">
-            <a:blip r:embed="rId3">
-              <a:clrChange>
-                <a:clrFrom>
-                  <a:srgbClr val="FFFFFF"/>
-                </a:clrFrom>
-                <a:clrTo>
-                  <a:srgbClr val="FFFFFF">
-                    <a:alpha val="0"/>
-                  </a:srgbClr>
-                </a:clrTo>
-              </a:clrChange>
-              <a:extLst>
-                <a:ext uri="{28A0092B-C50C-407E-A947-70E740481C1C}">
-                  <a14:useLocalDpi xmlns:a14="http://schemas.microsoft.com/office/drawing/2010/main" val="0"/>
-                </a:ext>
-              </a:extLst>
-            </a:blip>
-            <a:srcRect l="17808" r="68081"/>
-            <a:stretch/>
-          </p:blipFill>
-          <p:spPr>
-            <a:xfrm>
-              <a:off x="1956435" y="563411"/>
-              <a:ext cx="1405108" cy="1659600"/>
-            </a:xfrm>
-            <a:prstGeom prst="rect">
-              <a:avLst/>
-            </a:prstGeom>
-          </p:spPr>
-        </p:pic>
-        <p:pic>
-          <p:nvPicPr>
-            <p:cNvPr id="43" name="圖片 42">
-              <a:extLst>
-                <a:ext uri="{FF2B5EF4-FFF2-40B4-BE49-F238E27FC236}">
-                  <a16:creationId xmlns:a16="http://schemas.microsoft.com/office/drawing/2014/main" id="{9971268F-AE2C-49A0-BF9A-F74BCA8D2484}"/>
-                </a:ext>
-              </a:extLst>
-            </p:cNvPr>
-            <p:cNvPicPr>
-              <a:picLocks noChangeAspect="1"/>
-            </p:cNvPicPr>
-            <p:nvPr/>
-          </p:nvPicPr>
-          <p:blipFill rotWithShape="1">
-            <a:blip r:embed="rId3">
-              <a:clrChange>
-                <a:clrFrom>
-                  <a:srgbClr val="FFFFFF"/>
-                </a:clrFrom>
-                <a:clrTo>
-                  <a:srgbClr val="FFFFFF">
-                    <a:alpha val="0"/>
-                  </a:srgbClr>
-                </a:clrTo>
-              </a:clrChange>
-              <a:extLst>
-                <a:ext uri="{28A0092B-C50C-407E-A947-70E740481C1C}">
-                  <a14:useLocalDpi xmlns:a14="http://schemas.microsoft.com/office/drawing/2010/main" val="0"/>
-                </a:ext>
-              </a:extLst>
-            </a:blip>
-            <a:srcRect l="34528" r="51361"/>
-            <a:stretch/>
-          </p:blipFill>
-          <p:spPr>
-            <a:xfrm>
-              <a:off x="3288030" y="563411"/>
-              <a:ext cx="1405108" cy="1659600"/>
-            </a:xfrm>
-            <a:prstGeom prst="rect">
-              <a:avLst/>
-            </a:prstGeom>
-          </p:spPr>
-        </p:pic>
-        <p:pic>
-          <p:nvPicPr>
-            <p:cNvPr id="44" name="圖片 43">
-              <a:extLst>
-                <a:ext uri="{FF2B5EF4-FFF2-40B4-BE49-F238E27FC236}">
-                  <a16:creationId xmlns:a16="http://schemas.microsoft.com/office/drawing/2014/main" id="{3C636C70-FE87-448E-B232-CC1EA069B745}"/>
-                </a:ext>
-              </a:extLst>
-            </p:cNvPr>
-            <p:cNvPicPr>
-              <a:picLocks noChangeAspect="1"/>
-            </p:cNvPicPr>
-            <p:nvPr/>
-          </p:nvPicPr>
-          <p:blipFill rotWithShape="1">
-            <a:blip r:embed="rId3">
-              <a:clrChange>
-                <a:clrFrom>
-                  <a:srgbClr val="FFFFFF"/>
-                </a:clrFrom>
-                <a:clrTo>
-                  <a:srgbClr val="FFFFFF">
-                    <a:alpha val="0"/>
-                  </a:srgbClr>
-                </a:clrTo>
-              </a:clrChange>
-              <a:extLst>
-                <a:ext uri="{28A0092B-C50C-407E-A947-70E740481C1C}">
-                  <a14:useLocalDpi xmlns:a14="http://schemas.microsoft.com/office/drawing/2010/main" val="0"/>
-                </a:ext>
-              </a:extLst>
-            </a:blip>
-            <a:srcRect l="51010" r="34405"/>
-            <a:stretch/>
-          </p:blipFill>
-          <p:spPr>
-            <a:xfrm>
-              <a:off x="4591050" y="563411"/>
-              <a:ext cx="1452338" cy="1659600"/>
-            </a:xfrm>
-            <a:prstGeom prst="rect">
-              <a:avLst/>
-            </a:prstGeom>
-          </p:spPr>
-        </p:pic>
-        <p:pic>
-          <p:nvPicPr>
-            <p:cNvPr id="45" name="圖片 44">
-              <a:extLst>
-                <a:ext uri="{FF2B5EF4-FFF2-40B4-BE49-F238E27FC236}">
-                  <a16:creationId xmlns:a16="http://schemas.microsoft.com/office/drawing/2014/main" id="{4A8CE513-856E-4C18-84FC-A234356D2FA3}"/>
-                </a:ext>
-              </a:extLst>
-            </p:cNvPr>
-            <p:cNvPicPr>
-              <a:picLocks noChangeAspect="1"/>
-            </p:cNvPicPr>
-            <p:nvPr/>
-          </p:nvPicPr>
-          <p:blipFill rotWithShape="1">
-            <a:blip r:embed="rId3">
-              <a:clrChange>
-                <a:clrFrom>
-                  <a:srgbClr val="FFFFFF"/>
-                </a:clrFrom>
-                <a:clrTo>
-                  <a:srgbClr val="FFFFFF">
-                    <a:alpha val="0"/>
-                  </a:srgbClr>
-                </a:clrTo>
-              </a:clrChange>
-              <a:extLst>
-                <a:ext uri="{28A0092B-C50C-407E-A947-70E740481C1C}">
-                  <a14:useLocalDpi xmlns:a14="http://schemas.microsoft.com/office/drawing/2010/main" val="0"/>
-                </a:ext>
-              </a:extLst>
-            </a:blip>
-            <a:srcRect l="68086" r="17644"/>
-            <a:stretch/>
-          </p:blipFill>
-          <p:spPr>
-            <a:xfrm>
-              <a:off x="5951220" y="563411"/>
-              <a:ext cx="1420969" cy="1659600"/>
-            </a:xfrm>
-            <a:prstGeom prst="rect">
-              <a:avLst/>
-            </a:prstGeom>
-          </p:spPr>
-        </p:pic>
-        <p:pic>
-          <p:nvPicPr>
-            <p:cNvPr id="46" name="圖片 45">
-              <a:extLst>
-                <a:ext uri="{FF2B5EF4-FFF2-40B4-BE49-F238E27FC236}">
-                  <a16:creationId xmlns:a16="http://schemas.microsoft.com/office/drawing/2014/main" id="{9E9363E5-ACF5-48B9-839D-602366EE5B7A}"/>
-                </a:ext>
-              </a:extLst>
-            </p:cNvPr>
-            <p:cNvPicPr>
-              <a:picLocks noChangeAspect="1"/>
-            </p:cNvPicPr>
-            <p:nvPr/>
-          </p:nvPicPr>
-          <p:blipFill rotWithShape="1">
-            <a:blip r:embed="rId23">
-              <a:clrChange>
-                <a:clrFrom>
-                  <a:srgbClr val="FFFFFF"/>
-                </a:clrFrom>
-                <a:clrTo>
-                  <a:srgbClr val="FFFFFF">
-                    <a:alpha val="0"/>
-                  </a:srgbClr>
-                </a:clrTo>
-              </a:clrChange>
-              <a:extLst>
-                <a:ext uri="{28A0092B-C50C-407E-A947-70E740481C1C}">
-                  <a14:useLocalDpi xmlns:a14="http://schemas.microsoft.com/office/drawing/2010/main" val="0"/>
-                </a:ext>
-              </a:extLst>
-            </a:blip>
-            <a:srcRect l="17554" r="67362"/>
-            <a:stretch/>
-          </p:blipFill>
-          <p:spPr>
-            <a:xfrm>
-              <a:off x="1963421" y="2718106"/>
-              <a:ext cx="1433497" cy="1584000"/>
-            </a:xfrm>
-            <a:prstGeom prst="rect">
-              <a:avLst/>
-            </a:prstGeom>
-          </p:spPr>
-        </p:pic>
-        <p:pic>
-          <p:nvPicPr>
-            <p:cNvPr id="47" name="圖片 46">
-              <a:extLst>
-                <a:ext uri="{FF2B5EF4-FFF2-40B4-BE49-F238E27FC236}">
-                  <a16:creationId xmlns:a16="http://schemas.microsoft.com/office/drawing/2014/main" id="{7CC92E4D-8CB6-4F94-A431-41E0D9EE08E9}"/>
-                </a:ext>
-              </a:extLst>
-            </p:cNvPr>
-            <p:cNvPicPr>
-              <a:picLocks noChangeAspect="1"/>
-            </p:cNvPicPr>
-            <p:nvPr/>
-          </p:nvPicPr>
-          <p:blipFill rotWithShape="1">
-            <a:blip r:embed="rId4">
-              <a:clrChange>
-                <a:clrFrom>
-                  <a:srgbClr val="FFFFFF"/>
-                </a:clrFrom>
-                <a:clrTo>
-                  <a:srgbClr val="FFFFFF">
-                    <a:alpha val="0"/>
-                  </a:srgbClr>
-                </a:clrTo>
-              </a:clrChange>
-              <a:extLst>
-                <a:ext uri="{28A0092B-C50C-407E-A947-70E740481C1C}">
-                  <a14:useLocalDpi xmlns:a14="http://schemas.microsoft.com/office/drawing/2010/main" val="0"/>
-                </a:ext>
-              </a:extLst>
-            </a:blip>
-            <a:srcRect l="17483" r="67565"/>
-            <a:stretch/>
-          </p:blipFill>
-          <p:spPr>
-            <a:xfrm>
-              <a:off x="1951990" y="4275785"/>
-              <a:ext cx="1421032" cy="1584000"/>
-            </a:xfrm>
-            <a:prstGeom prst="rect">
-              <a:avLst/>
-            </a:prstGeom>
-          </p:spPr>
-        </p:pic>
-        <p:pic>
-          <p:nvPicPr>
-            <p:cNvPr id="50" name="圖片 49">
-              <a:extLst>
-                <a:ext uri="{FF2B5EF4-FFF2-40B4-BE49-F238E27FC236}">
-                  <a16:creationId xmlns:a16="http://schemas.microsoft.com/office/drawing/2014/main" id="{CF0DC5EF-4E4A-4CDE-AC7D-6AAB311CB34A}"/>
-                </a:ext>
-              </a:extLst>
-            </p:cNvPr>
-            <p:cNvPicPr>
-              <a:picLocks noChangeAspect="1"/>
-            </p:cNvPicPr>
-            <p:nvPr/>
-          </p:nvPicPr>
-          <p:blipFill rotWithShape="1">
-            <a:blip r:embed="rId23">
-              <a:clrChange>
-                <a:clrFrom>
-                  <a:srgbClr val="FFFFFF"/>
-                </a:clrFrom>
-                <a:clrTo>
-                  <a:srgbClr val="FFFFFF">
-                    <a:alpha val="0"/>
-                  </a:srgbClr>
-                </a:clrTo>
-              </a:clrChange>
-              <a:extLst>
-                <a:ext uri="{28A0092B-C50C-407E-A947-70E740481C1C}">
-                  <a14:useLocalDpi xmlns:a14="http://schemas.microsoft.com/office/drawing/2010/main" val="0"/>
-                </a:ext>
-              </a:extLst>
-            </a:blip>
-            <a:srcRect l="33949" r="50443"/>
-            <a:stretch/>
-          </p:blipFill>
-          <p:spPr>
-            <a:xfrm>
-              <a:off x="3266440" y="2718106"/>
-              <a:ext cx="1483358" cy="1584000"/>
-            </a:xfrm>
-            <a:prstGeom prst="rect">
-              <a:avLst/>
-            </a:prstGeom>
-          </p:spPr>
-        </p:pic>
-        <p:pic>
-          <p:nvPicPr>
-            <p:cNvPr id="51" name="圖片 50">
-              <a:extLst>
-                <a:ext uri="{FF2B5EF4-FFF2-40B4-BE49-F238E27FC236}">
-                  <a16:creationId xmlns:a16="http://schemas.microsoft.com/office/drawing/2014/main" id="{CC56BF8D-07A7-4A08-BDA6-08B4A048AE37}"/>
-                </a:ext>
-              </a:extLst>
-            </p:cNvPr>
-            <p:cNvPicPr>
-              <a:picLocks noChangeAspect="1"/>
-            </p:cNvPicPr>
-            <p:nvPr/>
-          </p:nvPicPr>
-          <p:blipFill rotWithShape="1">
-            <a:blip r:embed="rId4">
-              <a:clrChange>
-                <a:clrFrom>
-                  <a:srgbClr val="FFFFFF"/>
-                </a:clrFrom>
-                <a:clrTo>
-                  <a:srgbClr val="FFFFFF">
-                    <a:alpha val="0"/>
-                  </a:srgbClr>
-                </a:clrTo>
-              </a:clrChange>
-              <a:extLst>
-                <a:ext uri="{28A0092B-C50C-407E-A947-70E740481C1C}">
-                  <a14:useLocalDpi xmlns:a14="http://schemas.microsoft.com/office/drawing/2010/main" val="0"/>
-                </a:ext>
-              </a:extLst>
-            </a:blip>
-            <a:srcRect l="34009" r="50777"/>
-            <a:stretch/>
-          </p:blipFill>
-          <p:spPr>
-            <a:xfrm>
-              <a:off x="3266440" y="4275785"/>
-              <a:ext cx="1445962" cy="1584000"/>
-            </a:xfrm>
-            <a:prstGeom prst="rect">
-              <a:avLst/>
-            </a:prstGeom>
-          </p:spPr>
-        </p:pic>
-        <p:pic>
-          <p:nvPicPr>
-            <p:cNvPr id="52" name="圖片 51">
-              <a:extLst>
-                <a:ext uri="{FF2B5EF4-FFF2-40B4-BE49-F238E27FC236}">
-                  <a16:creationId xmlns:a16="http://schemas.microsoft.com/office/drawing/2014/main" id="{FA15D31F-F97A-4A93-923E-4765732953C4}"/>
-                </a:ext>
-              </a:extLst>
-            </p:cNvPr>
-            <p:cNvPicPr>
-              <a:picLocks noChangeAspect="1"/>
-            </p:cNvPicPr>
-            <p:nvPr/>
-          </p:nvPicPr>
-          <p:blipFill rotWithShape="1">
-            <a:blip r:embed="rId23">
-              <a:clrChange>
-                <a:clrFrom>
-                  <a:srgbClr val="FFFFFF"/>
-                </a:clrFrom>
-                <a:clrTo>
-                  <a:srgbClr val="FFFFFF">
-                    <a:alpha val="0"/>
-                  </a:srgbClr>
-                </a:clrTo>
-              </a:clrChange>
-              <a:extLst>
-                <a:ext uri="{28A0092B-C50C-407E-A947-70E740481C1C}">
-                  <a14:useLocalDpi xmlns:a14="http://schemas.microsoft.com/office/drawing/2010/main" val="0"/>
-                </a:ext>
-              </a:extLst>
-            </a:blip>
-            <a:srcRect l="50869" r="34179"/>
-            <a:stretch/>
-          </p:blipFill>
-          <p:spPr>
-            <a:xfrm>
-              <a:off x="4601210" y="2718106"/>
-              <a:ext cx="1421032" cy="1584000"/>
-            </a:xfrm>
-            <a:prstGeom prst="rect">
-              <a:avLst/>
-            </a:prstGeom>
-          </p:spPr>
-        </p:pic>
-        <p:pic>
-          <p:nvPicPr>
-            <p:cNvPr id="53" name="圖片 52">
-              <a:extLst>
-                <a:ext uri="{FF2B5EF4-FFF2-40B4-BE49-F238E27FC236}">
-                  <a16:creationId xmlns:a16="http://schemas.microsoft.com/office/drawing/2014/main" id="{53371DB9-76BA-454A-87AF-397AB73D2531}"/>
-                </a:ext>
-              </a:extLst>
-            </p:cNvPr>
-            <p:cNvPicPr>
-              <a:picLocks noChangeAspect="1"/>
-            </p:cNvPicPr>
-            <p:nvPr/>
-          </p:nvPicPr>
-          <p:blipFill rotWithShape="1">
-            <a:blip r:embed="rId4">
-              <a:clrChange>
-                <a:clrFrom>
-                  <a:srgbClr val="FFFFFF"/>
-                </a:clrFrom>
-                <a:clrTo>
-                  <a:srgbClr val="FFFFFF">
-                    <a:alpha val="0"/>
-                  </a:srgbClr>
-                </a:clrTo>
-              </a:clrChange>
-              <a:extLst>
-                <a:ext uri="{28A0092B-C50C-407E-A947-70E740481C1C}">
-                  <a14:useLocalDpi xmlns:a14="http://schemas.microsoft.com/office/drawing/2010/main" val="0"/>
-                </a:ext>
-              </a:extLst>
-            </a:blip>
-            <a:srcRect l="50928" r="33989"/>
-            <a:stretch/>
-          </p:blipFill>
-          <p:spPr>
-            <a:xfrm>
-              <a:off x="4601211" y="4275785"/>
-              <a:ext cx="1433497" cy="1584000"/>
-            </a:xfrm>
-            <a:prstGeom prst="rect">
-              <a:avLst/>
-            </a:prstGeom>
-          </p:spPr>
-        </p:pic>
-        <p:pic>
-          <p:nvPicPr>
-            <p:cNvPr id="54" name="圖片 53">
-              <a:extLst>
-                <a:ext uri="{FF2B5EF4-FFF2-40B4-BE49-F238E27FC236}">
-                  <a16:creationId xmlns:a16="http://schemas.microsoft.com/office/drawing/2014/main" id="{013D93B5-84DA-4E86-A8DF-ABBABB05A417}"/>
-                </a:ext>
-              </a:extLst>
-            </p:cNvPr>
-            <p:cNvPicPr>
-              <a:picLocks noChangeAspect="1"/>
-            </p:cNvPicPr>
-            <p:nvPr/>
-          </p:nvPicPr>
-          <p:blipFill rotWithShape="1">
-            <a:blip r:embed="rId23">
-              <a:clrChange>
-                <a:clrFrom>
-                  <a:srgbClr val="FFFFFF"/>
-                </a:clrFrom>
-                <a:clrTo>
-                  <a:srgbClr val="FFFFFF">
-                    <a:alpha val="0"/>
-                  </a:srgbClr>
-                </a:clrTo>
-              </a:clrChange>
-              <a:extLst>
-                <a:ext uri="{28A0092B-C50C-407E-A947-70E740481C1C}">
-                  <a14:useLocalDpi xmlns:a14="http://schemas.microsoft.com/office/drawing/2010/main" val="0"/>
-                </a:ext>
-              </a:extLst>
-            </a:blip>
-            <a:srcRect l="67525" r="17047"/>
-            <a:stretch/>
-          </p:blipFill>
-          <p:spPr>
-            <a:xfrm>
-              <a:off x="5930900" y="2718106"/>
-              <a:ext cx="1466245" cy="1584000"/>
-            </a:xfrm>
-            <a:prstGeom prst="rect">
-              <a:avLst/>
-            </a:prstGeom>
-          </p:spPr>
-        </p:pic>
-        <p:pic>
-          <p:nvPicPr>
-            <p:cNvPr id="55" name="圖片 54">
-              <a:extLst>
-                <a:ext uri="{FF2B5EF4-FFF2-40B4-BE49-F238E27FC236}">
-                  <a16:creationId xmlns:a16="http://schemas.microsoft.com/office/drawing/2014/main" id="{12C550DC-EFC7-4465-A6AB-1EB8C0FCFBD7}"/>
-                </a:ext>
-              </a:extLst>
-            </p:cNvPr>
-            <p:cNvPicPr>
-              <a:picLocks noChangeAspect="1"/>
-            </p:cNvPicPr>
-            <p:nvPr/>
-          </p:nvPicPr>
-          <p:blipFill rotWithShape="1">
-            <a:blip r:embed="rId4">
-              <a:clrChange>
-                <a:clrFrom>
-                  <a:srgbClr val="FFFFFF"/>
-                </a:clrFrom>
-                <a:clrTo>
-                  <a:srgbClr val="FFFFFF">
-                    <a:alpha val="0"/>
-                  </a:srgbClr>
-                </a:clrTo>
-              </a:clrChange>
-              <a:extLst>
-                <a:ext uri="{28A0092B-C50C-407E-A947-70E740481C1C}">
-                  <a14:useLocalDpi xmlns:a14="http://schemas.microsoft.com/office/drawing/2010/main" val="0"/>
-                </a:ext>
-              </a:extLst>
-            </a:blip>
-            <a:srcRect l="67585" r="17265"/>
-            <a:stretch/>
-          </p:blipFill>
-          <p:spPr>
-            <a:xfrm>
-              <a:off x="5930901" y="4275785"/>
-              <a:ext cx="1439827" cy="1584000"/>
-            </a:xfrm>
-            <a:prstGeom prst="rect">
-              <a:avLst/>
-            </a:prstGeom>
-          </p:spPr>
-        </p:pic>
-        <p:pic>
-          <p:nvPicPr>
-            <p:cNvPr id="248" name="圖片 247">
-              <a:extLst>
-                <a:ext uri="{FF2B5EF4-FFF2-40B4-BE49-F238E27FC236}">
-                  <a16:creationId xmlns:a16="http://schemas.microsoft.com/office/drawing/2014/main" id="{D0F1D35A-8EDB-4C72-BE3C-58B1EB45EEF5}"/>
-                </a:ext>
-              </a:extLst>
-            </p:cNvPr>
-            <p:cNvPicPr>
-              <a:picLocks noChangeAspect="1"/>
-            </p:cNvPicPr>
-            <p:nvPr/>
-          </p:nvPicPr>
-          <p:blipFill rotWithShape="1">
-            <a:blip r:embed="rId23">
-              <a:clrChange>
-                <a:clrFrom>
-                  <a:srgbClr val="FFFFFF"/>
-                </a:clrFrom>
-                <a:clrTo>
-                  <a:srgbClr val="FFFFFF">
-                    <a:alpha val="0"/>
-                  </a:srgbClr>
-                </a:clrTo>
-              </a:clrChange>
-              <a:extLst>
-                <a:ext uri="{28A0092B-C50C-407E-A947-70E740481C1C}">
-                  <a14:useLocalDpi xmlns:a14="http://schemas.microsoft.com/office/drawing/2010/main" val="0"/>
-                </a:ext>
-              </a:extLst>
-            </a:blip>
-            <a:srcRect r="84151"/>
-            <a:stretch/>
-          </p:blipFill>
-          <p:spPr>
-            <a:xfrm>
-              <a:off x="556810" y="2718106"/>
-              <a:ext cx="1506302" cy="1584000"/>
-            </a:xfrm>
-            <a:prstGeom prst="rect">
-              <a:avLst/>
-            </a:prstGeom>
-          </p:spPr>
-        </p:pic>
-        <mc:AlternateContent xmlns:mc="http://schemas.openxmlformats.org/markup-compatibility/2006">
-          <mc:Choice xmlns:a14="http://schemas.microsoft.com/office/drawing/2010/main" Requires="a14">
-            <p:sp>
-              <p:nvSpPr>
-                <p:cNvPr id="260" name="矩形 259">
-                  <a:extLst>
-                    <a:ext uri="{FF2B5EF4-FFF2-40B4-BE49-F238E27FC236}">
-                      <a16:creationId xmlns:a16="http://schemas.microsoft.com/office/drawing/2014/main" id="{398344E3-64D8-4CE0-9B3A-57828151AFBC}"/>
-                    </a:ext>
-                  </a:extLst>
-                </p:cNvPr>
-                <p:cNvSpPr/>
-                <p:nvPr/>
-              </p:nvSpPr>
-              <p:spPr>
-                <a:xfrm>
-                  <a:off x="831161" y="2893995"/>
-                  <a:ext cx="889154" cy="343171"/>
-                </a:xfrm>
-                <a:prstGeom prst="rect">
-                  <a:avLst/>
-                </a:prstGeom>
-              </p:spPr>
-              <p:txBody>
-                <a:bodyPr wrap="none">
-                  <a:spAutoFit/>
-                </a:bodyPr>
-                <a:lstStyle/>
-                <a:p>
-                  <a:pPr/>
-                  <a14:m>
-                    <m:oMathPara xmlns:m="http://schemas.openxmlformats.org/officeDocument/2006/math">
-                      <m:oMathParaPr>
-                        <m:jc m:val="centerGroup"/>
-                      </m:oMathParaPr>
-                      <m:oMath xmlns:m="http://schemas.openxmlformats.org/officeDocument/2006/math">
-                        <m:r>
-                          <a:rPr lang="en-US" altLang="zh-TW" sz="1630" i="1">
-                            <a:latin typeface="Cambria Math" panose="02040503050406030204" pitchFamily="18" charset="0"/>
-                          </a:rPr>
-                          <m:t>ℓ=−2</m:t>
-                        </m:r>
-                      </m:oMath>
-                    </m:oMathPara>
-                  </a14:m>
-                  <a:endParaRPr lang="zh-TW" altLang="en-US" sz="1630" dirty="0">
-                    <a:latin typeface="Times New Roman" panose="02020603050405020304" pitchFamily="18" charset="0"/>
-                    <a:cs typeface="Times New Roman" panose="02020603050405020304" pitchFamily="18" charset="0"/>
-                  </a:endParaRPr>
-                </a:p>
-              </p:txBody>
-            </p:sp>
-          </mc:Choice>
-          <mc:Fallback>
-            <p:sp>
-              <p:nvSpPr>
-                <p:cNvPr id="260" name="矩形 259">
-                  <a:extLst>
-                    <a:ext uri="{FF2B5EF4-FFF2-40B4-BE49-F238E27FC236}">
-                      <a16:creationId xmlns:a16="http://schemas.microsoft.com/office/drawing/2014/main" id="{398344E3-64D8-4CE0-9B3A-57828151AFBC}"/>
-                    </a:ext>
-                  </a:extLst>
-                </p:cNvPr>
-                <p:cNvSpPr>
-                  <a:spLocks noRot="1" noChangeAspect="1" noMove="1" noResize="1" noEditPoints="1" noAdjustHandles="1" noChangeArrowheads="1" noChangeShapeType="1" noTextEdit="1"/>
-                </p:cNvSpPr>
-                <p:nvPr/>
-              </p:nvSpPr>
-              <p:spPr>
-                <a:xfrm>
-                  <a:off x="831161" y="2893995"/>
-                  <a:ext cx="889154" cy="343171"/>
-                </a:xfrm>
-                <a:prstGeom prst="rect">
-                  <a:avLst/>
-                </a:prstGeom>
-                <a:blipFill>
-                  <a:blip r:embed="rId24"/>
-                  <a:stretch>
-                    <a:fillRect/>
-                  </a:stretch>
-                </a:blipFill>
-              </p:spPr>
-              <p:txBody>
-                <a:bodyPr/>
-                <a:lstStyle/>
-                <a:p>
-                  <a:r>
-                    <a:rPr lang="zh-TW" altLang="en-US">
-                      <a:noFill/>
-                    </a:rPr>
-                    <a:t> </a:t>
-                  </a:r>
-                </a:p>
-              </p:txBody>
-            </p:sp>
-          </mc:Fallback>
-        </mc:AlternateContent>
-        <mc:AlternateContent xmlns:mc="http://schemas.openxmlformats.org/markup-compatibility/2006">
-          <mc:Choice xmlns:a14="http://schemas.microsoft.com/office/drawing/2010/main" Requires="a14">
-            <p:sp>
-              <p:nvSpPr>
-                <p:cNvPr id="261" name="矩形 260">
-                  <a:extLst>
-                    <a:ext uri="{FF2B5EF4-FFF2-40B4-BE49-F238E27FC236}">
-                      <a16:creationId xmlns:a16="http://schemas.microsoft.com/office/drawing/2014/main" id="{AC32431E-EE34-4064-A175-F612662C94E9}"/>
-                    </a:ext>
-                  </a:extLst>
-                </p:cNvPr>
-                <p:cNvSpPr/>
-                <p:nvPr/>
-              </p:nvSpPr>
-              <p:spPr>
-                <a:xfrm>
-                  <a:off x="2274909" y="2893995"/>
-                  <a:ext cx="889154" cy="343171"/>
-                </a:xfrm>
-                <a:prstGeom prst="rect">
-                  <a:avLst/>
-                </a:prstGeom>
-              </p:spPr>
-              <p:txBody>
-                <a:bodyPr wrap="none">
-                  <a:spAutoFit/>
-                </a:bodyPr>
-                <a:lstStyle/>
-                <a:p>
-                  <a:pPr/>
-                  <a14:m>
-                    <m:oMathPara xmlns:m="http://schemas.openxmlformats.org/officeDocument/2006/math">
-                      <m:oMathParaPr>
-                        <m:jc m:val="centerGroup"/>
-                      </m:oMathParaPr>
-                      <m:oMath xmlns:m="http://schemas.openxmlformats.org/officeDocument/2006/math">
-                        <m:r>
-                          <a:rPr lang="en-US" altLang="zh-TW" sz="1630" i="1">
-                            <a:latin typeface="Cambria Math" panose="02040503050406030204" pitchFamily="18" charset="0"/>
-                          </a:rPr>
-                          <m:t>ℓ=−1</m:t>
-                        </m:r>
-                      </m:oMath>
-                    </m:oMathPara>
-                  </a14:m>
-                  <a:endParaRPr lang="zh-TW" altLang="en-US" sz="1630" dirty="0">
-                    <a:latin typeface="Times New Roman" panose="02020603050405020304" pitchFamily="18" charset="0"/>
-                    <a:cs typeface="Times New Roman" panose="02020603050405020304" pitchFamily="18" charset="0"/>
-                  </a:endParaRPr>
-                </a:p>
-              </p:txBody>
-            </p:sp>
-          </mc:Choice>
-          <mc:Fallback>
-            <p:sp>
-              <p:nvSpPr>
-                <p:cNvPr id="261" name="矩形 260">
-                  <a:extLst>
-                    <a:ext uri="{FF2B5EF4-FFF2-40B4-BE49-F238E27FC236}">
-                      <a16:creationId xmlns:a16="http://schemas.microsoft.com/office/drawing/2014/main" id="{AC32431E-EE34-4064-A175-F612662C94E9}"/>
-                    </a:ext>
-                  </a:extLst>
-                </p:cNvPr>
-                <p:cNvSpPr>
-                  <a:spLocks noRot="1" noChangeAspect="1" noMove="1" noResize="1" noEditPoints="1" noAdjustHandles="1" noChangeArrowheads="1" noChangeShapeType="1" noTextEdit="1"/>
-                </p:cNvSpPr>
-                <p:nvPr/>
-              </p:nvSpPr>
-              <p:spPr>
-                <a:xfrm>
-                  <a:off x="2274909" y="2893995"/>
-                  <a:ext cx="889154" cy="343171"/>
-                </a:xfrm>
-                <a:prstGeom prst="rect">
-                  <a:avLst/>
-                </a:prstGeom>
-                <a:blipFill>
-                  <a:blip r:embed="rId25"/>
-                  <a:stretch>
-                    <a:fillRect/>
-                  </a:stretch>
-                </a:blipFill>
-              </p:spPr>
-              <p:txBody>
-                <a:bodyPr/>
-                <a:lstStyle/>
-                <a:p>
-                  <a:r>
-                    <a:rPr lang="zh-TW" altLang="en-US">
-                      <a:noFill/>
-                    </a:rPr>
-                    <a:t> </a:t>
-                  </a:r>
-                </a:p>
-              </p:txBody>
-            </p:sp>
-          </mc:Fallback>
-        </mc:AlternateContent>
-        <mc:AlternateContent xmlns:mc="http://schemas.openxmlformats.org/markup-compatibility/2006">
-          <mc:Choice xmlns:a14="http://schemas.microsoft.com/office/drawing/2010/main" Requires="a14">
-            <p:sp>
-              <p:nvSpPr>
-                <p:cNvPr id="262" name="矩形 261">
-                  <a:extLst>
-                    <a:ext uri="{FF2B5EF4-FFF2-40B4-BE49-F238E27FC236}">
-                      <a16:creationId xmlns:a16="http://schemas.microsoft.com/office/drawing/2014/main" id="{59045CCB-FC7C-45BF-B766-16DAFAED3F4B}"/>
-                    </a:ext>
-                  </a:extLst>
-                </p:cNvPr>
-                <p:cNvSpPr/>
-                <p:nvPr/>
-              </p:nvSpPr>
-              <p:spPr>
-                <a:xfrm>
-                  <a:off x="3718657" y="2893995"/>
-                  <a:ext cx="733662" cy="343171"/>
-                </a:xfrm>
-                <a:prstGeom prst="rect">
-                  <a:avLst/>
-                </a:prstGeom>
-              </p:spPr>
-              <p:txBody>
-                <a:bodyPr wrap="none">
-                  <a:spAutoFit/>
-                </a:bodyPr>
-                <a:lstStyle/>
-                <a:p>
-                  <a:pPr/>
-                  <a14:m>
-                    <m:oMathPara xmlns:m="http://schemas.openxmlformats.org/officeDocument/2006/math">
-                      <m:oMathParaPr>
-                        <m:jc m:val="centerGroup"/>
-                      </m:oMathParaPr>
-                      <m:oMath xmlns:m="http://schemas.openxmlformats.org/officeDocument/2006/math">
-                        <m:r>
-                          <a:rPr lang="en-US" altLang="zh-TW" sz="1630" i="1">
-                            <a:latin typeface="Cambria Math" panose="02040503050406030204" pitchFamily="18" charset="0"/>
-                          </a:rPr>
-                          <m:t>ℓ=0</m:t>
-                        </m:r>
-                      </m:oMath>
-                    </m:oMathPara>
-                  </a14:m>
-                  <a:endParaRPr lang="zh-TW" altLang="en-US" sz="1630" dirty="0">
-                    <a:latin typeface="Times New Roman" panose="02020603050405020304" pitchFamily="18" charset="0"/>
-                    <a:cs typeface="Times New Roman" panose="02020603050405020304" pitchFamily="18" charset="0"/>
-                  </a:endParaRPr>
-                </a:p>
-              </p:txBody>
-            </p:sp>
-          </mc:Choice>
-          <mc:Fallback>
-            <p:sp>
-              <p:nvSpPr>
-                <p:cNvPr id="262" name="矩形 261">
-                  <a:extLst>
-                    <a:ext uri="{FF2B5EF4-FFF2-40B4-BE49-F238E27FC236}">
-                      <a16:creationId xmlns:a16="http://schemas.microsoft.com/office/drawing/2014/main" id="{59045CCB-FC7C-45BF-B766-16DAFAED3F4B}"/>
-                    </a:ext>
-                  </a:extLst>
-                </p:cNvPr>
-                <p:cNvSpPr>
-                  <a:spLocks noRot="1" noChangeAspect="1" noMove="1" noResize="1" noEditPoints="1" noAdjustHandles="1" noChangeArrowheads="1" noChangeShapeType="1" noTextEdit="1"/>
-                </p:cNvSpPr>
-                <p:nvPr/>
-              </p:nvSpPr>
-              <p:spPr>
-                <a:xfrm>
-                  <a:off x="3718657" y="2893995"/>
-                  <a:ext cx="733662" cy="343171"/>
-                </a:xfrm>
-                <a:prstGeom prst="rect">
-                  <a:avLst/>
-                </a:prstGeom>
-                <a:blipFill>
-                  <a:blip r:embed="rId26"/>
-                  <a:stretch>
-                    <a:fillRect/>
-                  </a:stretch>
-                </a:blipFill>
-              </p:spPr>
-              <p:txBody>
-                <a:bodyPr/>
-                <a:lstStyle/>
-                <a:p>
-                  <a:r>
-                    <a:rPr lang="zh-TW" altLang="en-US">
-                      <a:noFill/>
-                    </a:rPr>
-                    <a:t> </a:t>
-                  </a:r>
-                </a:p>
-              </p:txBody>
-            </p:sp>
-          </mc:Fallback>
-        </mc:AlternateContent>
-        <mc:AlternateContent xmlns:mc="http://schemas.openxmlformats.org/markup-compatibility/2006">
-          <mc:Choice xmlns:a14="http://schemas.microsoft.com/office/drawing/2010/main" Requires="a14">
-            <p:sp>
-              <p:nvSpPr>
-                <p:cNvPr id="263" name="矩形 262">
-                  <a:extLst>
-                    <a:ext uri="{FF2B5EF4-FFF2-40B4-BE49-F238E27FC236}">
-                      <a16:creationId xmlns:a16="http://schemas.microsoft.com/office/drawing/2014/main" id="{04B8F826-6F72-4206-963D-2CD5C8B8E93B}"/>
-                    </a:ext>
-                  </a:extLst>
-                </p:cNvPr>
-                <p:cNvSpPr/>
-                <p:nvPr/>
-              </p:nvSpPr>
-              <p:spPr>
-                <a:xfrm>
-                  <a:off x="5006913" y="2893995"/>
-                  <a:ext cx="733662" cy="343171"/>
-                </a:xfrm>
-                <a:prstGeom prst="rect">
-                  <a:avLst/>
-                </a:prstGeom>
-              </p:spPr>
-              <p:txBody>
-                <a:bodyPr wrap="none">
-                  <a:spAutoFit/>
-                </a:bodyPr>
-                <a:lstStyle/>
-                <a:p>
-                  <a:pPr/>
-                  <a14:m>
-                    <m:oMathPara xmlns:m="http://schemas.openxmlformats.org/officeDocument/2006/math">
-                      <m:oMathParaPr>
-                        <m:jc m:val="centerGroup"/>
-                      </m:oMathParaPr>
-                      <m:oMath xmlns:m="http://schemas.openxmlformats.org/officeDocument/2006/math">
-                        <m:r>
-                          <a:rPr lang="en-US" altLang="zh-TW" sz="1630" i="1">
-                            <a:latin typeface="Cambria Math" panose="02040503050406030204" pitchFamily="18" charset="0"/>
-                          </a:rPr>
-                          <m:t>ℓ=1</m:t>
-                        </m:r>
-                      </m:oMath>
-                    </m:oMathPara>
-                  </a14:m>
-                  <a:endParaRPr lang="zh-TW" altLang="en-US" sz="1630" dirty="0">
-                    <a:latin typeface="Times New Roman" panose="02020603050405020304" pitchFamily="18" charset="0"/>
-                    <a:cs typeface="Times New Roman" panose="02020603050405020304" pitchFamily="18" charset="0"/>
-                  </a:endParaRPr>
-                </a:p>
-              </p:txBody>
-            </p:sp>
-          </mc:Choice>
-          <mc:Fallback>
-            <p:sp>
-              <p:nvSpPr>
-                <p:cNvPr id="263" name="矩形 262">
-                  <a:extLst>
-                    <a:ext uri="{FF2B5EF4-FFF2-40B4-BE49-F238E27FC236}">
-                      <a16:creationId xmlns:a16="http://schemas.microsoft.com/office/drawing/2014/main" id="{04B8F826-6F72-4206-963D-2CD5C8B8E93B}"/>
-                    </a:ext>
-                  </a:extLst>
-                </p:cNvPr>
-                <p:cNvSpPr>
-                  <a:spLocks noRot="1" noChangeAspect="1" noMove="1" noResize="1" noEditPoints="1" noAdjustHandles="1" noChangeArrowheads="1" noChangeShapeType="1" noTextEdit="1"/>
-                </p:cNvSpPr>
-                <p:nvPr/>
-              </p:nvSpPr>
-              <p:spPr>
-                <a:xfrm>
-                  <a:off x="5006913" y="2893995"/>
-                  <a:ext cx="733662" cy="343171"/>
-                </a:xfrm>
-                <a:prstGeom prst="rect">
-                  <a:avLst/>
-                </a:prstGeom>
-                <a:blipFill>
-                  <a:blip r:embed="rId27"/>
-                  <a:stretch>
-                    <a:fillRect/>
-                  </a:stretch>
-                </a:blipFill>
-              </p:spPr>
-              <p:txBody>
-                <a:bodyPr/>
-                <a:lstStyle/>
-                <a:p>
-                  <a:r>
-                    <a:rPr lang="zh-TW" altLang="en-US">
-                      <a:noFill/>
-                    </a:rPr>
-                    <a:t> </a:t>
-                  </a:r>
-                </a:p>
-              </p:txBody>
-            </p:sp>
-          </mc:Fallback>
-        </mc:AlternateContent>
-        <mc:AlternateContent xmlns:mc="http://schemas.openxmlformats.org/markup-compatibility/2006">
-          <mc:Choice xmlns:a14="http://schemas.microsoft.com/office/drawing/2010/main" Requires="a14">
-            <p:sp>
-              <p:nvSpPr>
-                <p:cNvPr id="264" name="矩形 263">
-                  <a:extLst>
-                    <a:ext uri="{FF2B5EF4-FFF2-40B4-BE49-F238E27FC236}">
-                      <a16:creationId xmlns:a16="http://schemas.microsoft.com/office/drawing/2014/main" id="{E4AEE6D0-356B-42B8-BF92-D04FD5D8291A}"/>
-                    </a:ext>
-                  </a:extLst>
-                </p:cNvPr>
-                <p:cNvSpPr/>
-                <p:nvPr/>
-              </p:nvSpPr>
-              <p:spPr>
-                <a:xfrm>
-                  <a:off x="6295171" y="2893995"/>
-                  <a:ext cx="733662" cy="343171"/>
-                </a:xfrm>
-                <a:prstGeom prst="rect">
-                  <a:avLst/>
-                </a:prstGeom>
-              </p:spPr>
-              <p:txBody>
-                <a:bodyPr wrap="none">
-                  <a:spAutoFit/>
-                </a:bodyPr>
-                <a:lstStyle/>
-                <a:p>
-                  <a:pPr/>
-                  <a14:m>
-                    <m:oMathPara xmlns:m="http://schemas.openxmlformats.org/officeDocument/2006/math">
-                      <m:oMathParaPr>
-                        <m:jc m:val="centerGroup"/>
-                      </m:oMathParaPr>
-                      <m:oMath xmlns:m="http://schemas.openxmlformats.org/officeDocument/2006/math">
-                        <m:r>
-                          <a:rPr lang="en-US" altLang="zh-TW" sz="1630" i="1">
-                            <a:latin typeface="Cambria Math" panose="02040503050406030204" pitchFamily="18" charset="0"/>
-                          </a:rPr>
-                          <m:t>ℓ=2</m:t>
-                        </m:r>
-                      </m:oMath>
-                    </m:oMathPara>
-                  </a14:m>
-                  <a:endParaRPr lang="zh-TW" altLang="en-US" sz="1630" dirty="0">
-                    <a:latin typeface="Times New Roman" panose="02020603050405020304" pitchFamily="18" charset="0"/>
-                    <a:cs typeface="Times New Roman" panose="02020603050405020304" pitchFamily="18" charset="0"/>
-                  </a:endParaRPr>
-                </a:p>
-              </p:txBody>
-            </p:sp>
-          </mc:Choice>
-          <mc:Fallback>
-            <p:sp>
-              <p:nvSpPr>
-                <p:cNvPr id="264" name="矩形 263">
-                  <a:extLst>
-                    <a:ext uri="{FF2B5EF4-FFF2-40B4-BE49-F238E27FC236}">
-                      <a16:creationId xmlns:a16="http://schemas.microsoft.com/office/drawing/2014/main" id="{E4AEE6D0-356B-42B8-BF92-D04FD5D8291A}"/>
-                    </a:ext>
-                  </a:extLst>
-                </p:cNvPr>
-                <p:cNvSpPr>
-                  <a:spLocks noRot="1" noChangeAspect="1" noMove="1" noResize="1" noEditPoints="1" noAdjustHandles="1" noChangeArrowheads="1" noChangeShapeType="1" noTextEdit="1"/>
-                </p:cNvSpPr>
-                <p:nvPr/>
-              </p:nvSpPr>
-              <p:spPr>
-                <a:xfrm>
-                  <a:off x="6295171" y="2893995"/>
-                  <a:ext cx="733662" cy="343171"/>
-                </a:xfrm>
-                <a:prstGeom prst="rect">
-                  <a:avLst/>
-                </a:prstGeom>
-                <a:blipFill>
-                  <a:blip r:embed="rId28"/>
-                  <a:stretch>
-                    <a:fillRect/>
-                  </a:stretch>
-                </a:blipFill>
-              </p:spPr>
-              <p:txBody>
-                <a:bodyPr/>
-                <a:lstStyle/>
-                <a:p>
-                  <a:r>
-                    <a:rPr lang="zh-TW" altLang="en-US">
-                      <a:noFill/>
-                    </a:rPr>
-                    <a:t> </a:t>
-                  </a:r>
-                </a:p>
-              </p:txBody>
-            </p:sp>
-          </mc:Fallback>
-        </mc:AlternateContent>
-        <mc:AlternateContent xmlns:mc="http://schemas.openxmlformats.org/markup-compatibility/2006">
-          <mc:Choice xmlns:a14="http://schemas.microsoft.com/office/drawing/2010/main" Requires="a14">
-            <p:sp>
-              <p:nvSpPr>
-                <p:cNvPr id="254" name="矩形 253">
-                  <a:extLst>
-                    <a:ext uri="{FF2B5EF4-FFF2-40B4-BE49-F238E27FC236}">
-                      <a16:creationId xmlns:a16="http://schemas.microsoft.com/office/drawing/2014/main" id="{69EB4EE8-5B4E-4097-A322-784B9C457674}"/>
-                    </a:ext>
-                  </a:extLst>
-                </p:cNvPr>
-                <p:cNvSpPr/>
-                <p:nvPr/>
-              </p:nvSpPr>
-              <p:spPr>
-                <a:xfrm>
-                  <a:off x="798802" y="688103"/>
-                  <a:ext cx="889154" cy="343171"/>
-                </a:xfrm>
-                <a:prstGeom prst="rect">
-                  <a:avLst/>
-                </a:prstGeom>
-              </p:spPr>
-              <p:txBody>
-                <a:bodyPr wrap="none">
-                  <a:spAutoFit/>
-                </a:bodyPr>
-                <a:lstStyle/>
-                <a:p>
-                  <a:pPr/>
-                  <a14:m>
-                    <m:oMathPara xmlns:m="http://schemas.openxmlformats.org/officeDocument/2006/math">
-                      <m:oMathParaPr>
-                        <m:jc m:val="centerGroup"/>
-                      </m:oMathParaPr>
-                      <m:oMath xmlns:m="http://schemas.openxmlformats.org/officeDocument/2006/math">
-                        <m:r>
-                          <a:rPr lang="en-US" altLang="zh-TW" sz="1630" i="1">
-                            <a:latin typeface="Cambria Math" panose="02040503050406030204" pitchFamily="18" charset="0"/>
-                          </a:rPr>
-                          <m:t>ℓ=−1</m:t>
-                        </m:r>
-                      </m:oMath>
-                    </m:oMathPara>
-                  </a14:m>
-                  <a:endParaRPr lang="zh-TW" altLang="en-US" sz="1630" dirty="0">
-                    <a:latin typeface="Times New Roman" panose="02020603050405020304" pitchFamily="18" charset="0"/>
-                    <a:cs typeface="Times New Roman" panose="02020603050405020304" pitchFamily="18" charset="0"/>
-                  </a:endParaRPr>
-                </a:p>
-              </p:txBody>
-            </p:sp>
-          </mc:Choice>
-          <mc:Fallback>
-            <p:sp>
-              <p:nvSpPr>
-                <p:cNvPr id="254" name="矩形 253">
-                  <a:extLst>
-                    <a:ext uri="{FF2B5EF4-FFF2-40B4-BE49-F238E27FC236}">
-                      <a16:creationId xmlns:a16="http://schemas.microsoft.com/office/drawing/2014/main" id="{69EB4EE8-5B4E-4097-A322-784B9C457674}"/>
-                    </a:ext>
-                  </a:extLst>
-                </p:cNvPr>
-                <p:cNvSpPr>
-                  <a:spLocks noRot="1" noChangeAspect="1" noMove="1" noResize="1" noEditPoints="1" noAdjustHandles="1" noChangeArrowheads="1" noChangeShapeType="1" noTextEdit="1"/>
-                </p:cNvSpPr>
-                <p:nvPr/>
-              </p:nvSpPr>
-              <p:spPr>
-                <a:xfrm>
-                  <a:off x="798802" y="688103"/>
-                  <a:ext cx="889154" cy="343171"/>
-                </a:xfrm>
-                <a:prstGeom prst="rect">
-                  <a:avLst/>
-                </a:prstGeom>
-                <a:blipFill>
-                  <a:blip r:embed="rId29"/>
-                  <a:stretch>
-                    <a:fillRect/>
-                  </a:stretch>
-                </a:blipFill>
-              </p:spPr>
-              <p:txBody>
-                <a:bodyPr/>
-                <a:lstStyle/>
-                <a:p>
-                  <a:r>
-                    <a:rPr lang="zh-TW" altLang="en-US">
-                      <a:noFill/>
-                    </a:rPr>
-                    <a:t> </a:t>
-                  </a:r>
-                </a:p>
-              </p:txBody>
-            </p:sp>
-          </mc:Fallback>
-        </mc:AlternateContent>
-        <mc:AlternateContent xmlns:mc="http://schemas.openxmlformats.org/markup-compatibility/2006">
-          <mc:Choice xmlns:a14="http://schemas.microsoft.com/office/drawing/2010/main" Requires="a14">
-            <p:sp>
-              <p:nvSpPr>
-                <p:cNvPr id="255" name="矩形 254">
-                  <a:extLst>
-                    <a:ext uri="{FF2B5EF4-FFF2-40B4-BE49-F238E27FC236}">
-                      <a16:creationId xmlns:a16="http://schemas.microsoft.com/office/drawing/2014/main" id="{ADB96A3F-6FB2-42D8-9E50-43C201847A7C}"/>
-                    </a:ext>
-                  </a:extLst>
-                </p:cNvPr>
-                <p:cNvSpPr/>
-                <p:nvPr/>
-              </p:nvSpPr>
-              <p:spPr>
-                <a:xfrm>
-                  <a:off x="2242068" y="688103"/>
-                  <a:ext cx="889154" cy="343171"/>
-                </a:xfrm>
-                <a:prstGeom prst="rect">
-                  <a:avLst/>
-                </a:prstGeom>
-              </p:spPr>
-              <p:txBody>
-                <a:bodyPr wrap="none">
-                  <a:spAutoFit/>
-                </a:bodyPr>
-                <a:lstStyle/>
-                <a:p>
-                  <a:pPr/>
-                  <a14:m>
-                    <m:oMathPara xmlns:m="http://schemas.openxmlformats.org/officeDocument/2006/math">
-                      <m:oMathParaPr>
-                        <m:jc m:val="centerGroup"/>
-                      </m:oMathParaPr>
-                      <m:oMath xmlns:m="http://schemas.openxmlformats.org/officeDocument/2006/math">
-                        <m:r>
-                          <a:rPr lang="en-US" altLang="zh-TW" sz="1630" i="1">
-                            <a:latin typeface="Cambria Math" panose="02040503050406030204" pitchFamily="18" charset="0"/>
-                          </a:rPr>
-                          <m:t>ℓ=−2</m:t>
-                        </m:r>
-                      </m:oMath>
-                    </m:oMathPara>
-                  </a14:m>
-                  <a:endParaRPr lang="zh-TW" altLang="en-US" sz="1630" dirty="0">
-                    <a:latin typeface="Times New Roman" panose="02020603050405020304" pitchFamily="18" charset="0"/>
-                    <a:cs typeface="Times New Roman" panose="02020603050405020304" pitchFamily="18" charset="0"/>
-                  </a:endParaRPr>
-                </a:p>
-              </p:txBody>
-            </p:sp>
-          </mc:Choice>
-          <mc:Fallback>
-            <p:sp>
-              <p:nvSpPr>
-                <p:cNvPr id="255" name="矩形 254">
-                  <a:extLst>
-                    <a:ext uri="{FF2B5EF4-FFF2-40B4-BE49-F238E27FC236}">
-                      <a16:creationId xmlns:a16="http://schemas.microsoft.com/office/drawing/2014/main" id="{ADB96A3F-6FB2-42D8-9E50-43C201847A7C}"/>
-                    </a:ext>
-                  </a:extLst>
-                </p:cNvPr>
-                <p:cNvSpPr>
-                  <a:spLocks noRot="1" noChangeAspect="1" noMove="1" noResize="1" noEditPoints="1" noAdjustHandles="1" noChangeArrowheads="1" noChangeShapeType="1" noTextEdit="1"/>
-                </p:cNvSpPr>
-                <p:nvPr/>
-              </p:nvSpPr>
-              <p:spPr>
-                <a:xfrm>
-                  <a:off x="2242068" y="688103"/>
-                  <a:ext cx="889154" cy="343171"/>
-                </a:xfrm>
-                <a:prstGeom prst="rect">
-                  <a:avLst/>
-                </a:prstGeom>
-                <a:blipFill>
-                  <a:blip r:embed="rId30"/>
-                  <a:stretch>
-                    <a:fillRect/>
-                  </a:stretch>
-                </a:blipFill>
-              </p:spPr>
-              <p:txBody>
-                <a:bodyPr/>
-                <a:lstStyle/>
-                <a:p>
-                  <a:r>
-                    <a:rPr lang="zh-TW" altLang="en-US">
-                      <a:noFill/>
-                    </a:rPr>
-                    <a:t> </a:t>
-                  </a:r>
-                </a:p>
-              </p:txBody>
-            </p:sp>
-          </mc:Fallback>
-        </mc:AlternateContent>
-        <mc:AlternateContent xmlns:mc="http://schemas.openxmlformats.org/markup-compatibility/2006">
-          <mc:Choice xmlns:a14="http://schemas.microsoft.com/office/drawing/2010/main" Requires="a14">
-            <p:sp>
-              <p:nvSpPr>
-                <p:cNvPr id="256" name="矩形 255">
-                  <a:extLst>
-                    <a:ext uri="{FF2B5EF4-FFF2-40B4-BE49-F238E27FC236}">
-                      <a16:creationId xmlns:a16="http://schemas.microsoft.com/office/drawing/2014/main" id="{2DF06E1D-DE6F-4AC3-B5FB-5ED5DA15B19F}"/>
-                    </a:ext>
-                  </a:extLst>
-                </p:cNvPr>
-                <p:cNvSpPr/>
-                <p:nvPr/>
-              </p:nvSpPr>
-              <p:spPr>
-                <a:xfrm>
-                  <a:off x="3685334" y="688103"/>
-                  <a:ext cx="733662" cy="343171"/>
-                </a:xfrm>
-                <a:prstGeom prst="rect">
-                  <a:avLst/>
-                </a:prstGeom>
-              </p:spPr>
-              <p:txBody>
-                <a:bodyPr wrap="none">
-                  <a:spAutoFit/>
-                </a:bodyPr>
-                <a:lstStyle/>
-                <a:p>
-                  <a:pPr/>
-                  <a14:m>
-                    <m:oMathPara xmlns:m="http://schemas.openxmlformats.org/officeDocument/2006/math">
-                      <m:oMathParaPr>
-                        <m:jc m:val="centerGroup"/>
-                      </m:oMathParaPr>
-                      <m:oMath xmlns:m="http://schemas.openxmlformats.org/officeDocument/2006/math">
-                        <m:r>
-                          <a:rPr lang="en-US" altLang="zh-TW" sz="1630" i="1">
-                            <a:latin typeface="Cambria Math" panose="02040503050406030204" pitchFamily="18" charset="0"/>
-                          </a:rPr>
-                          <m:t>ℓ=0</m:t>
-                        </m:r>
-                      </m:oMath>
-                    </m:oMathPara>
-                  </a14:m>
-                  <a:endParaRPr lang="zh-TW" altLang="en-US" sz="1630" dirty="0">
-                    <a:latin typeface="Times New Roman" panose="02020603050405020304" pitchFamily="18" charset="0"/>
-                    <a:cs typeface="Times New Roman" panose="02020603050405020304" pitchFamily="18" charset="0"/>
-                  </a:endParaRPr>
-                </a:p>
-              </p:txBody>
-            </p:sp>
-          </mc:Choice>
-          <mc:Fallback>
-            <p:sp>
-              <p:nvSpPr>
-                <p:cNvPr id="256" name="矩形 255">
-                  <a:extLst>
-                    <a:ext uri="{FF2B5EF4-FFF2-40B4-BE49-F238E27FC236}">
-                      <a16:creationId xmlns:a16="http://schemas.microsoft.com/office/drawing/2014/main" id="{2DF06E1D-DE6F-4AC3-B5FB-5ED5DA15B19F}"/>
-                    </a:ext>
-                  </a:extLst>
-                </p:cNvPr>
-                <p:cNvSpPr>
-                  <a:spLocks noRot="1" noChangeAspect="1" noMove="1" noResize="1" noEditPoints="1" noAdjustHandles="1" noChangeArrowheads="1" noChangeShapeType="1" noTextEdit="1"/>
-                </p:cNvSpPr>
-                <p:nvPr/>
-              </p:nvSpPr>
-              <p:spPr>
-                <a:xfrm>
-                  <a:off x="3685334" y="688103"/>
-                  <a:ext cx="733662" cy="343171"/>
-                </a:xfrm>
-                <a:prstGeom prst="rect">
-                  <a:avLst/>
-                </a:prstGeom>
-                <a:blipFill>
-                  <a:blip r:embed="rId31"/>
-                  <a:stretch>
-                    <a:fillRect/>
-                  </a:stretch>
-                </a:blipFill>
-              </p:spPr>
-              <p:txBody>
-                <a:bodyPr/>
-                <a:lstStyle/>
-                <a:p>
-                  <a:r>
-                    <a:rPr lang="zh-TW" altLang="en-US">
-                      <a:noFill/>
-                    </a:rPr>
-                    <a:t> </a:t>
-                  </a:r>
-                </a:p>
-              </p:txBody>
-            </p:sp>
-          </mc:Fallback>
-        </mc:AlternateContent>
-        <mc:AlternateContent xmlns:mc="http://schemas.openxmlformats.org/markup-compatibility/2006">
-          <mc:Choice xmlns:a14="http://schemas.microsoft.com/office/drawing/2010/main" Requires="a14">
-            <p:sp>
-              <p:nvSpPr>
-                <p:cNvPr id="257" name="矩形 256">
-                  <a:extLst>
-                    <a:ext uri="{FF2B5EF4-FFF2-40B4-BE49-F238E27FC236}">
-                      <a16:creationId xmlns:a16="http://schemas.microsoft.com/office/drawing/2014/main" id="{11730B68-B888-4253-81F5-33C838AA52E1}"/>
-                    </a:ext>
-                  </a:extLst>
-                </p:cNvPr>
-                <p:cNvSpPr/>
-                <p:nvPr/>
-              </p:nvSpPr>
-              <p:spPr>
-                <a:xfrm>
-                  <a:off x="4973108" y="688103"/>
-                  <a:ext cx="733662" cy="343171"/>
-                </a:xfrm>
-                <a:prstGeom prst="rect">
-                  <a:avLst/>
-                </a:prstGeom>
-              </p:spPr>
-              <p:txBody>
-                <a:bodyPr wrap="none">
-                  <a:spAutoFit/>
-                </a:bodyPr>
-                <a:lstStyle/>
-                <a:p>
-                  <a:pPr/>
-                  <a14:m>
-                    <m:oMathPara xmlns:m="http://schemas.openxmlformats.org/officeDocument/2006/math">
-                      <m:oMathParaPr>
-                        <m:jc m:val="centerGroup"/>
-                      </m:oMathParaPr>
-                      <m:oMath xmlns:m="http://schemas.openxmlformats.org/officeDocument/2006/math">
-                        <m:r>
-                          <a:rPr lang="en-US" altLang="zh-TW" sz="1630" i="1">
-                            <a:latin typeface="Cambria Math" panose="02040503050406030204" pitchFamily="18" charset="0"/>
-                          </a:rPr>
-                          <m:t>ℓ=1</m:t>
-                        </m:r>
-                      </m:oMath>
-                    </m:oMathPara>
-                  </a14:m>
-                  <a:endParaRPr lang="zh-TW" altLang="en-US" sz="1630" dirty="0">
-                    <a:latin typeface="Times New Roman" panose="02020603050405020304" pitchFamily="18" charset="0"/>
-                    <a:cs typeface="Times New Roman" panose="02020603050405020304" pitchFamily="18" charset="0"/>
-                  </a:endParaRPr>
-                </a:p>
-              </p:txBody>
-            </p:sp>
-          </mc:Choice>
-          <mc:Fallback>
-            <p:sp>
-              <p:nvSpPr>
-                <p:cNvPr id="257" name="矩形 256">
-                  <a:extLst>
-                    <a:ext uri="{FF2B5EF4-FFF2-40B4-BE49-F238E27FC236}">
-                      <a16:creationId xmlns:a16="http://schemas.microsoft.com/office/drawing/2014/main" id="{11730B68-B888-4253-81F5-33C838AA52E1}"/>
-                    </a:ext>
-                  </a:extLst>
-                </p:cNvPr>
-                <p:cNvSpPr>
-                  <a:spLocks noRot="1" noChangeAspect="1" noMove="1" noResize="1" noEditPoints="1" noAdjustHandles="1" noChangeArrowheads="1" noChangeShapeType="1" noTextEdit="1"/>
-                </p:cNvSpPr>
-                <p:nvPr/>
-              </p:nvSpPr>
-              <p:spPr>
-                <a:xfrm>
-                  <a:off x="4973108" y="688103"/>
-                  <a:ext cx="733662" cy="343171"/>
-                </a:xfrm>
-                <a:prstGeom prst="rect">
-                  <a:avLst/>
-                </a:prstGeom>
-                <a:blipFill>
-                  <a:blip r:embed="rId32"/>
-                  <a:stretch>
-                    <a:fillRect/>
-                  </a:stretch>
-                </a:blipFill>
-              </p:spPr>
-              <p:txBody>
-                <a:bodyPr/>
-                <a:lstStyle/>
-                <a:p>
-                  <a:r>
-                    <a:rPr lang="zh-TW" altLang="en-US">
-                      <a:noFill/>
-                    </a:rPr>
-                    <a:t> </a:t>
-                  </a:r>
-                </a:p>
-              </p:txBody>
-            </p:sp>
-          </mc:Fallback>
-        </mc:AlternateContent>
-        <mc:AlternateContent xmlns:mc="http://schemas.openxmlformats.org/markup-compatibility/2006">
-          <mc:Choice xmlns:a14="http://schemas.microsoft.com/office/drawing/2010/main" Requires="a14">
-            <p:sp>
-              <p:nvSpPr>
-                <p:cNvPr id="258" name="矩形 257">
-                  <a:extLst>
-                    <a:ext uri="{FF2B5EF4-FFF2-40B4-BE49-F238E27FC236}">
-                      <a16:creationId xmlns:a16="http://schemas.microsoft.com/office/drawing/2014/main" id="{4E4FAD64-43F0-4BD9-B7AD-6211EF98281C}"/>
-                    </a:ext>
-                  </a:extLst>
-                </p:cNvPr>
-                <p:cNvSpPr/>
-                <p:nvPr/>
-              </p:nvSpPr>
-              <p:spPr>
-                <a:xfrm>
-                  <a:off x="6260881" y="688103"/>
-                  <a:ext cx="733662" cy="343171"/>
-                </a:xfrm>
-                <a:prstGeom prst="rect">
-                  <a:avLst/>
-                </a:prstGeom>
-              </p:spPr>
-              <p:txBody>
-                <a:bodyPr wrap="none">
-                  <a:spAutoFit/>
-                </a:bodyPr>
-                <a:lstStyle/>
-                <a:p>
-                  <a:pPr/>
-                  <a14:m>
-                    <m:oMathPara xmlns:m="http://schemas.openxmlformats.org/officeDocument/2006/math">
-                      <m:oMathParaPr>
-                        <m:jc m:val="centerGroup"/>
-                      </m:oMathParaPr>
-                      <m:oMath xmlns:m="http://schemas.openxmlformats.org/officeDocument/2006/math">
-                        <m:r>
-                          <a:rPr lang="en-US" altLang="zh-TW" sz="1630" i="1">
-                            <a:latin typeface="Cambria Math" panose="02040503050406030204" pitchFamily="18" charset="0"/>
-                          </a:rPr>
-                          <m:t>ℓ=2</m:t>
-                        </m:r>
-                      </m:oMath>
-                    </m:oMathPara>
-                  </a14:m>
-                  <a:endParaRPr lang="zh-TW" altLang="en-US" sz="1630" dirty="0">
-                    <a:latin typeface="Times New Roman" panose="02020603050405020304" pitchFamily="18" charset="0"/>
-                    <a:cs typeface="Times New Roman" panose="02020603050405020304" pitchFamily="18" charset="0"/>
-                  </a:endParaRPr>
-                </a:p>
-              </p:txBody>
-            </p:sp>
-          </mc:Choice>
-          <mc:Fallback>
-            <p:sp>
-              <p:nvSpPr>
-                <p:cNvPr id="258" name="矩形 257">
-                  <a:extLst>
-                    <a:ext uri="{FF2B5EF4-FFF2-40B4-BE49-F238E27FC236}">
-                      <a16:creationId xmlns:a16="http://schemas.microsoft.com/office/drawing/2014/main" id="{4E4FAD64-43F0-4BD9-B7AD-6211EF98281C}"/>
-                    </a:ext>
-                  </a:extLst>
-                </p:cNvPr>
-                <p:cNvSpPr>
-                  <a:spLocks noRot="1" noChangeAspect="1" noMove="1" noResize="1" noEditPoints="1" noAdjustHandles="1" noChangeArrowheads="1" noChangeShapeType="1" noTextEdit="1"/>
-                </p:cNvSpPr>
-                <p:nvPr/>
-              </p:nvSpPr>
-              <p:spPr>
-                <a:xfrm>
-                  <a:off x="6260881" y="688103"/>
-                  <a:ext cx="733662" cy="343171"/>
-                </a:xfrm>
-                <a:prstGeom prst="rect">
-                  <a:avLst/>
-                </a:prstGeom>
-                <a:blipFill>
-                  <a:blip r:embed="rId33"/>
-                  <a:stretch>
-                    <a:fillRect/>
+                    <a:fillRect b="-5263"/>
                   </a:stretch>
                 </a:blipFill>
               </p:spPr>
@@ -8646,10 +6286,10 @@
         </mc:AlternateContent>
         <p:sp>
           <p:nvSpPr>
-            <p:cNvPr id="56" name="矩形 55">
+            <p:cNvPr id="280" name="箭號: 向右 279">
               <a:extLst>
                 <a:ext uri="{FF2B5EF4-FFF2-40B4-BE49-F238E27FC236}">
-                  <a16:creationId xmlns:a16="http://schemas.microsoft.com/office/drawing/2014/main" id="{797AD572-5775-4288-8939-87CD3B6325A6}"/>
+                  <a16:creationId xmlns:a16="http://schemas.microsoft.com/office/drawing/2014/main" id="{A8A6788E-178E-4359-A5E5-749475B64C5C}"/>
                 </a:ext>
               </a:extLst>
             </p:cNvPr>
@@ -8658,27 +6298,49 @@
           </p:nvSpPr>
           <p:spPr>
             <a:xfrm>
-              <a:off x="7376467" y="1931128"/>
-              <a:ext cx="487634" cy="343171"/>
+              <a:off x="-837092" y="1356364"/>
+              <a:ext cx="92654" cy="27541"/>
             </a:xfrm>
-            <a:prstGeom prst="rect">
-              <a:avLst/>
+            <a:prstGeom prst="rightArrow">
+              <a:avLst>
+                <a:gd name="adj1" fmla="val 50000"/>
+                <a:gd name="adj2" fmla="val 99023"/>
+              </a:avLst>
             </a:prstGeom>
+            <a:solidFill>
+              <a:schemeClr val="tx1"/>
+            </a:solidFill>
+            <a:ln>
+              <a:solidFill>
+                <a:schemeClr val="tx1"/>
+              </a:solidFill>
+            </a:ln>
           </p:spPr>
+          <p:style>
+            <a:lnRef idx="2">
+              <a:schemeClr val="dk1">
+                <a:shade val="50000"/>
+              </a:schemeClr>
+            </a:lnRef>
+            <a:fillRef idx="1">
+              <a:schemeClr val="dk1"/>
+            </a:fillRef>
+            <a:effectRef idx="0">
+              <a:schemeClr val="dk1"/>
+            </a:effectRef>
+            <a:fontRef idx="minor">
+              <a:schemeClr val="lt1"/>
+            </a:fontRef>
+          </p:style>
           <p:txBody>
-            <a:bodyPr wrap="none">
-              <a:spAutoFit/>
-            </a:bodyPr>
+            <a:bodyPr rtlCol="0" anchor="ctr"/>
             <a:lstStyle/>
             <a:p>
-              <a:r>
-                <a:rPr lang="en-US" altLang="zh-TW" sz="1630" dirty="0">
-                  <a:latin typeface="Times New Roman" panose="02020603050405020304" pitchFamily="18" charset="0"/>
-                  <a:cs typeface="Times New Roman" panose="02020603050405020304" pitchFamily="18" charset="0"/>
-                </a:rPr>
-                <a:t>a.u.</a:t>
-              </a:r>
-              <a:endParaRPr lang="zh-TW" altLang="en-US" sz="1630" dirty="0">
+              <a:pPr algn="ctr"/>
+              <a:endParaRPr lang="zh-TW" altLang="en-US" sz="1630">
+                <a:solidFill>
+                  <a:schemeClr val="tx1"/>
+                </a:solidFill>
                 <a:latin typeface="Times New Roman" panose="02020603050405020304" pitchFamily="18" charset="0"/>
                 <a:cs typeface="Times New Roman" panose="02020603050405020304" pitchFamily="18" charset="0"/>
               </a:endParaRPr>
@@ -8687,10 +6349,330 @@
         </p:sp>
         <p:sp>
           <p:nvSpPr>
-            <p:cNvPr id="57" name="矩形 56">
+            <p:cNvPr id="281" name="箭號: 向右 280">
               <a:extLst>
                 <a:ext uri="{FF2B5EF4-FFF2-40B4-BE49-F238E27FC236}">
-                  <a16:creationId xmlns:a16="http://schemas.microsoft.com/office/drawing/2014/main" id="{7E4C2416-B327-4D68-9A7C-099E8E98D2D4}"/>
+                  <a16:creationId xmlns:a16="http://schemas.microsoft.com/office/drawing/2014/main" id="{FEED7821-B0D8-4E8F-AA25-5D1DEA18901C}"/>
+                </a:ext>
+              </a:extLst>
+            </p:cNvPr>
+            <p:cNvSpPr/>
+            <p:nvPr/>
+          </p:nvSpPr>
+          <p:spPr>
+            <a:xfrm rot="16200000">
+              <a:off x="-877012" y="1316853"/>
+              <a:ext cx="91764" cy="27808"/>
+            </a:xfrm>
+            <a:prstGeom prst="rightArrow">
+              <a:avLst>
+                <a:gd name="adj1" fmla="val 50000"/>
+                <a:gd name="adj2" fmla="val 99023"/>
+              </a:avLst>
+            </a:prstGeom>
+            <a:solidFill>
+              <a:schemeClr val="tx1"/>
+            </a:solidFill>
+            <a:ln>
+              <a:solidFill>
+                <a:schemeClr val="tx1"/>
+              </a:solidFill>
+            </a:ln>
+          </p:spPr>
+          <p:style>
+            <a:lnRef idx="2">
+              <a:schemeClr val="dk1">
+                <a:shade val="50000"/>
+              </a:schemeClr>
+            </a:lnRef>
+            <a:fillRef idx="1">
+              <a:schemeClr val="dk1"/>
+            </a:fillRef>
+            <a:effectRef idx="0">
+              <a:schemeClr val="dk1"/>
+            </a:effectRef>
+            <a:fontRef idx="minor">
+              <a:schemeClr val="lt1"/>
+            </a:fontRef>
+          </p:style>
+          <p:txBody>
+            <a:bodyPr rtlCol="0" anchor="ctr"/>
+            <a:lstStyle/>
+            <a:p>
+              <a:pPr algn="ctr"/>
+              <a:endParaRPr lang="zh-TW" altLang="en-US" sz="1630" dirty="0">
+                <a:solidFill>
+                  <a:schemeClr val="tx1"/>
+                </a:solidFill>
+                <a:latin typeface="Times New Roman" panose="02020603050405020304" pitchFamily="18" charset="0"/>
+                <a:cs typeface="Times New Roman" panose="02020603050405020304" pitchFamily="18" charset="0"/>
+              </a:endParaRPr>
+            </a:p>
+          </p:txBody>
+        </p:sp>
+      </p:grpSp>
+      <p:grpSp>
+        <p:nvGrpSpPr>
+          <p:cNvPr id="268" name="群組 267">
+            <a:extLst>
+              <a:ext uri="{FF2B5EF4-FFF2-40B4-BE49-F238E27FC236}">
+                <a16:creationId xmlns:a16="http://schemas.microsoft.com/office/drawing/2014/main" id="{0E3F31E3-C952-482B-9BC7-E768D7D68741}"/>
+              </a:ext>
+            </a:extLst>
+          </p:cNvPr>
+          <p:cNvGrpSpPr/>
+          <p:nvPr/>
+        </p:nvGrpSpPr>
+        <p:grpSpPr>
+          <a:xfrm>
+            <a:off x="1801662" y="4672606"/>
+            <a:ext cx="655028" cy="568541"/>
+            <a:chOff x="-995630" y="983808"/>
+            <a:chExt cx="600414" cy="521138"/>
+          </a:xfrm>
+        </p:grpSpPr>
+        <mc:AlternateContent xmlns:mc="http://schemas.openxmlformats.org/markup-compatibility/2006" xmlns:a14="http://schemas.microsoft.com/office/drawing/2010/main">
+          <mc:Choice Requires="a14">
+            <p:sp>
+              <p:nvSpPr>
+                <p:cNvPr id="274" name="文字方塊 273">
+                  <a:extLst>
+                    <a:ext uri="{FF2B5EF4-FFF2-40B4-BE49-F238E27FC236}">
+                      <a16:creationId xmlns:a16="http://schemas.microsoft.com/office/drawing/2014/main" id="{1CD21653-A1AD-4400-90CC-55C9F1C414B4}"/>
+                    </a:ext>
+                  </a:extLst>
+                </p:cNvPr>
+                <p:cNvSpPr txBox="1"/>
+                <p:nvPr/>
+              </p:nvSpPr>
+              <p:spPr>
+                <a:xfrm>
+                  <a:off x="-995630" y="983808"/>
+                  <a:ext cx="323387" cy="335658"/>
+                </a:xfrm>
+                <a:prstGeom prst="rect">
+                  <a:avLst/>
+                </a:prstGeom>
+                <a:noFill/>
+              </p:spPr>
+              <p:txBody>
+                <a:bodyPr wrap="square" rtlCol="0">
+                  <a:spAutoFit/>
+                </a:bodyPr>
+                <a:lstStyle/>
+                <a:p>
+                  <a:pPr/>
+                  <a14:m>
+                    <m:oMathPara xmlns:m="http://schemas.openxmlformats.org/officeDocument/2006/math">
+                      <m:oMathParaPr>
+                        <m:jc m:val="centerGroup"/>
+                      </m:oMathParaPr>
+                      <m:oMath xmlns:m="http://schemas.openxmlformats.org/officeDocument/2006/math">
+                        <m:sSub>
+                          <m:sSubPr>
+                            <m:ctrlPr>
+                              <a:rPr lang="en-US" altLang="zh-TW" sz="1630" b="1" i="1">
+                                <a:latin typeface="Cambria Math" panose="02040503050406030204" pitchFamily="18" charset="0"/>
+                              </a:rPr>
+                            </m:ctrlPr>
+                          </m:sSubPr>
+                          <m:e>
+                            <m:r>
+                              <a:rPr lang="en-US" altLang="zh-TW" sz="1630" b="1" i="1">
+                                <a:latin typeface="Cambria Math" panose="02040503050406030204" pitchFamily="18" charset="0"/>
+                              </a:rPr>
+                              <m:t>𝒒</m:t>
+                            </m:r>
+                          </m:e>
+                          <m:sub>
+                            <m:r>
+                              <a:rPr lang="en-US" altLang="zh-TW" sz="1630" b="1" i="1">
+                                <a:latin typeface="Cambria Math" panose="02040503050406030204" pitchFamily="18" charset="0"/>
+                              </a:rPr>
+                              <m:t>𝒚</m:t>
+                            </m:r>
+                          </m:sub>
+                        </m:sSub>
+                      </m:oMath>
+                    </m:oMathPara>
+                  </a14:m>
+                  <a:endParaRPr lang="en-US" altLang="zh-TW" sz="1630" dirty="0">
+                    <a:latin typeface="Times New Roman" panose="02020603050405020304" pitchFamily="18" charset="0"/>
+                    <a:cs typeface="Times New Roman" panose="02020603050405020304" pitchFamily="18" charset="0"/>
+                  </a:endParaRPr>
+                </a:p>
+              </p:txBody>
+            </p:sp>
+          </mc:Choice>
+          <mc:Fallback xmlns="">
+            <p:sp>
+              <p:nvSpPr>
+                <p:cNvPr id="274" name="文字方塊 273">
+                  <a:extLst>
+                    <a:ext uri="{FF2B5EF4-FFF2-40B4-BE49-F238E27FC236}">
+                      <a16:creationId xmlns:a16="http://schemas.microsoft.com/office/drawing/2014/main" id="{1CD21653-A1AD-4400-90CC-55C9F1C414B4}"/>
+                    </a:ext>
+                  </a:extLst>
+                </p:cNvPr>
+                <p:cNvSpPr txBox="1">
+                  <a:spLocks noRot="1" noChangeAspect="1" noMove="1" noResize="1" noEditPoints="1" noAdjustHandles="1" noChangeArrowheads="1" noChangeShapeType="1" noTextEdit="1"/>
+                </p:cNvSpPr>
+                <p:nvPr/>
+              </p:nvSpPr>
+              <p:spPr>
+                <a:xfrm>
+                  <a:off x="-995630" y="983808"/>
+                  <a:ext cx="323387" cy="335658"/>
+                </a:xfrm>
+                <a:prstGeom prst="rect">
+                  <a:avLst/>
+                </a:prstGeom>
+                <a:blipFill>
+                  <a:blip r:embed="rId20"/>
+                  <a:stretch>
+                    <a:fillRect r="-5263"/>
+                  </a:stretch>
+                </a:blipFill>
+              </p:spPr>
+              <p:txBody>
+                <a:bodyPr/>
+                <a:lstStyle/>
+                <a:p>
+                  <a:r>
+                    <a:rPr lang="zh-TW" altLang="en-US">
+                      <a:noFill/>
+                    </a:rPr>
+                    <a:t> </a:t>
+                  </a:r>
+                </a:p>
+              </p:txBody>
+            </p:sp>
+          </mc:Fallback>
+        </mc:AlternateContent>
+        <mc:AlternateContent xmlns:mc="http://schemas.openxmlformats.org/markup-compatibility/2006" xmlns:a14="http://schemas.microsoft.com/office/drawing/2010/main">
+          <mc:Choice Requires="a14">
+            <p:sp>
+              <p:nvSpPr>
+                <p:cNvPr id="275" name="文字方塊 274">
+                  <a:extLst>
+                    <a:ext uri="{FF2B5EF4-FFF2-40B4-BE49-F238E27FC236}">
+                      <a16:creationId xmlns:a16="http://schemas.microsoft.com/office/drawing/2014/main" id="{87ADA85D-6E70-4FED-874F-D10BD8CB47F5}"/>
+                    </a:ext>
+                  </a:extLst>
+                </p:cNvPr>
+                <p:cNvSpPr txBox="1"/>
+                <p:nvPr/>
+              </p:nvSpPr>
+              <p:spPr>
+                <a:xfrm>
+                  <a:off x="-802135" y="1190388"/>
+                  <a:ext cx="406919" cy="314558"/>
+                </a:xfrm>
+                <a:prstGeom prst="rect">
+                  <a:avLst/>
+                </a:prstGeom>
+                <a:noFill/>
+              </p:spPr>
+              <p:txBody>
+                <a:bodyPr wrap="square" rtlCol="0">
+                  <a:spAutoFit/>
+                </a:bodyPr>
+                <a:lstStyle/>
+                <a:p>
+                  <a:pPr/>
+                  <a14:m>
+                    <m:oMathPara xmlns:m="http://schemas.openxmlformats.org/officeDocument/2006/math">
+                      <m:oMathParaPr>
+                        <m:jc m:val="centerGroup"/>
+                      </m:oMathParaPr>
+                      <m:oMath xmlns:m="http://schemas.openxmlformats.org/officeDocument/2006/math">
+                        <m:sSub>
+                          <m:sSubPr>
+                            <m:ctrlPr>
+                              <a:rPr lang="en-US" altLang="zh-TW" sz="1630" b="1" i="1">
+                                <a:latin typeface="Cambria Math" panose="02040503050406030204" pitchFamily="18" charset="0"/>
+                              </a:rPr>
+                            </m:ctrlPr>
+                          </m:sSubPr>
+                          <m:e>
+                            <m:r>
+                              <a:rPr lang="en-US" altLang="zh-TW" sz="1630" b="1" i="1">
+                                <a:latin typeface="Cambria Math" panose="02040503050406030204" pitchFamily="18" charset="0"/>
+                              </a:rPr>
+                              <m:t>𝒒</m:t>
+                            </m:r>
+                          </m:e>
+                          <m:sub>
+                            <m:r>
+                              <a:rPr lang="en-US" altLang="zh-TW" sz="1630" b="1" i="1">
+                                <a:latin typeface="Cambria Math" panose="02040503050406030204" pitchFamily="18" charset="0"/>
+                              </a:rPr>
+                              <m:t>𝒙</m:t>
+                            </m:r>
+                          </m:sub>
+                        </m:sSub>
+                      </m:oMath>
+                    </m:oMathPara>
+                  </a14:m>
+                  <a:endParaRPr lang="en-US" altLang="zh-TW" sz="1630" dirty="0">
+                    <a:latin typeface="Times New Roman" panose="02020603050405020304" pitchFamily="18" charset="0"/>
+                    <a:cs typeface="Times New Roman" panose="02020603050405020304" pitchFamily="18" charset="0"/>
+                  </a:endParaRPr>
+                </a:p>
+              </p:txBody>
+            </p:sp>
+          </mc:Choice>
+          <mc:Fallback xmlns="">
+            <p:sp>
+              <p:nvSpPr>
+                <p:cNvPr id="275" name="文字方塊 274">
+                  <a:extLst>
+                    <a:ext uri="{FF2B5EF4-FFF2-40B4-BE49-F238E27FC236}">
+                      <a16:creationId xmlns:a16="http://schemas.microsoft.com/office/drawing/2014/main" id="{87ADA85D-6E70-4FED-874F-D10BD8CB47F5}"/>
+                    </a:ext>
+                  </a:extLst>
+                </p:cNvPr>
+                <p:cNvSpPr txBox="1">
+                  <a:spLocks noRot="1" noChangeAspect="1" noMove="1" noResize="1" noEditPoints="1" noAdjustHandles="1" noChangeArrowheads="1" noChangeShapeType="1" noTextEdit="1"/>
+                </p:cNvSpPr>
+                <p:nvPr/>
+              </p:nvSpPr>
+              <p:spPr>
+                <a:xfrm>
+                  <a:off x="-802135" y="1190388"/>
+                  <a:ext cx="406919" cy="314558"/>
+                </a:xfrm>
+                <a:prstGeom prst="rect">
+                  <a:avLst/>
+                </a:prstGeom>
+                <a:blipFill>
+                  <a:blip r:embed="rId21"/>
+                  <a:stretch>
+                    <a:fillRect b="-7143"/>
+                  </a:stretch>
+                </a:blipFill>
+              </p:spPr>
+              <p:txBody>
+                <a:bodyPr/>
+                <a:lstStyle/>
+                <a:p>
+                  <a:r>
+                    <a:rPr lang="zh-TW" altLang="en-US">
+                      <a:noFill/>
+                    </a:rPr>
+                    <a:t> </a:t>
+                  </a:r>
+                </a:p>
+              </p:txBody>
+            </p:sp>
+          </mc:Fallback>
+        </mc:AlternateContent>
+        <p:sp>
+          <p:nvSpPr>
+            <p:cNvPr id="276" name="箭號: 向右 275">
+              <a:extLst>
+                <a:ext uri="{FF2B5EF4-FFF2-40B4-BE49-F238E27FC236}">
+                  <a16:creationId xmlns:a16="http://schemas.microsoft.com/office/drawing/2014/main" id="{770AE165-61BB-473D-9254-44D70D2D158D}"/>
                 </a:ext>
               </a:extLst>
             </p:cNvPr>
@@ -8699,108 +6681,49 @@
           </p:nvSpPr>
           <p:spPr>
             <a:xfrm>
-              <a:off x="7351896" y="5570973"/>
-              <a:ext cx="487634" cy="343171"/>
+              <a:off x="-837092" y="1356364"/>
+              <a:ext cx="92654" cy="27541"/>
             </a:xfrm>
-            <a:prstGeom prst="rect">
-              <a:avLst/>
+            <a:prstGeom prst="rightArrow">
+              <a:avLst>
+                <a:gd name="adj1" fmla="val 50000"/>
+                <a:gd name="adj2" fmla="val 99023"/>
+              </a:avLst>
             </a:prstGeom>
+            <a:solidFill>
+              <a:schemeClr val="tx1"/>
+            </a:solidFill>
+            <a:ln>
+              <a:solidFill>
+                <a:schemeClr val="tx1"/>
+              </a:solidFill>
+            </a:ln>
           </p:spPr>
+          <p:style>
+            <a:lnRef idx="2">
+              <a:schemeClr val="dk1">
+                <a:shade val="50000"/>
+              </a:schemeClr>
+            </a:lnRef>
+            <a:fillRef idx="1">
+              <a:schemeClr val="dk1"/>
+            </a:fillRef>
+            <a:effectRef idx="0">
+              <a:schemeClr val="dk1"/>
+            </a:effectRef>
+            <a:fontRef idx="minor">
+              <a:schemeClr val="lt1"/>
+            </a:fontRef>
+          </p:style>
           <p:txBody>
-            <a:bodyPr wrap="none">
-              <a:spAutoFit/>
-            </a:bodyPr>
+            <a:bodyPr rtlCol="0" anchor="ctr"/>
             <a:lstStyle/>
             <a:p>
-              <a:r>
-                <a:rPr lang="en-US" altLang="zh-TW" sz="1630" dirty="0">
-                  <a:latin typeface="Times New Roman" panose="02020603050405020304" pitchFamily="18" charset="0"/>
-                  <a:cs typeface="Times New Roman" panose="02020603050405020304" pitchFamily="18" charset="0"/>
-                </a:rPr>
-                <a:t>a.u.</a:t>
-              </a:r>
-              <a:endParaRPr lang="zh-TW" altLang="en-US" sz="1630" dirty="0">
-                <a:latin typeface="Times New Roman" panose="02020603050405020304" pitchFamily="18" charset="0"/>
-                <a:cs typeface="Times New Roman" panose="02020603050405020304" pitchFamily="18" charset="0"/>
-              </a:endParaRPr>
-            </a:p>
-          </p:txBody>
-        </p:sp>
-        <p:pic>
-          <p:nvPicPr>
-            <p:cNvPr id="58" name="圖片 57">
-              <a:extLst>
-                <a:ext uri="{FF2B5EF4-FFF2-40B4-BE49-F238E27FC236}">
-                  <a16:creationId xmlns:a16="http://schemas.microsoft.com/office/drawing/2014/main" id="{36B5CFFE-242B-4573-87F4-362200E6CB34}"/>
-                </a:ext>
-              </a:extLst>
-            </p:cNvPr>
-            <p:cNvPicPr>
-              <a:picLocks noChangeAspect="1"/>
-            </p:cNvPicPr>
-            <p:nvPr/>
-          </p:nvPicPr>
-          <p:blipFill rotWithShape="1">
-            <a:blip r:embed="rId34">
-              <a:clrChange>
-                <a:clrFrom>
-                  <a:srgbClr val="FFFFFF"/>
-                </a:clrFrom>
-                <a:clrTo>
-                  <a:srgbClr val="FFFFFF">
-                    <a:alpha val="0"/>
-                  </a:srgbClr>
-                </a:clrTo>
-              </a:clrChange>
-            </a:blip>
-            <a:srcRect r="32321"/>
-            <a:stretch/>
-          </p:blipFill>
-          <p:spPr>
-            <a:xfrm>
-              <a:off x="7381252" y="4397987"/>
-              <a:ext cx="407456" cy="1328804"/>
-            </a:xfrm>
-            <a:prstGeom prst="rect">
-              <a:avLst/>
-            </a:prstGeom>
-          </p:spPr>
-        </p:pic>
-        <p:sp>
-          <p:nvSpPr>
-            <p:cNvPr id="59" name="矩形 58">
-              <a:extLst>
-                <a:ext uri="{FF2B5EF4-FFF2-40B4-BE49-F238E27FC236}">
-                  <a16:creationId xmlns:a16="http://schemas.microsoft.com/office/drawing/2014/main" id="{564D86CE-95CE-4311-A6BA-FBC49B431C30}"/>
-                </a:ext>
-              </a:extLst>
-            </p:cNvPr>
-            <p:cNvSpPr/>
-            <p:nvPr/>
-          </p:nvSpPr>
-          <p:spPr>
-            <a:xfrm>
-              <a:off x="7680008" y="623239"/>
-              <a:ext cx="288862" cy="343171"/>
-            </a:xfrm>
-            <a:prstGeom prst="rect">
-              <a:avLst/>
-            </a:prstGeom>
-          </p:spPr>
-          <p:txBody>
-            <a:bodyPr wrap="none">
-              <a:spAutoFit/>
-            </a:bodyPr>
-            <a:lstStyle/>
-            <a:p>
-              <a:r>
-                <a:rPr lang="en-US" altLang="zh-TW" sz="1630" dirty="0">
-                  <a:latin typeface="Times New Roman" panose="02020603050405020304" pitchFamily="18" charset="0"/>
-                  <a:cs typeface="Times New Roman" panose="02020603050405020304" pitchFamily="18" charset="0"/>
-                </a:rPr>
-                <a:t>1</a:t>
-              </a:r>
-              <a:endParaRPr lang="zh-TW" altLang="en-US" sz="1630" dirty="0">
+              <a:pPr algn="ctr"/>
+              <a:endParaRPr lang="zh-TW" altLang="en-US" sz="1630">
+                <a:solidFill>
+                  <a:schemeClr val="tx1"/>
+                </a:solidFill>
                 <a:latin typeface="Times New Roman" panose="02020603050405020304" pitchFamily="18" charset="0"/>
                 <a:cs typeface="Times New Roman" panose="02020603050405020304" pitchFamily="18" charset="0"/>
               </a:endParaRPr>
@@ -8809,10 +6732,10 @@
         </p:sp>
         <p:sp>
           <p:nvSpPr>
-            <p:cNvPr id="60" name="矩形 59">
+            <p:cNvPr id="277" name="箭號: 向右 276">
               <a:extLst>
                 <a:ext uri="{FF2B5EF4-FFF2-40B4-BE49-F238E27FC236}">
-                  <a16:creationId xmlns:a16="http://schemas.microsoft.com/office/drawing/2014/main" id="{A2533813-81CE-4B60-A2C6-2266CF4DE05F}"/>
+                  <a16:creationId xmlns:a16="http://schemas.microsoft.com/office/drawing/2014/main" id="{614AEB28-253F-4993-A1D4-48EF43196C0C}"/>
                 </a:ext>
               </a:extLst>
             </p:cNvPr>
@@ -8820,110 +6743,50 @@
             <p:nvPr/>
           </p:nvSpPr>
           <p:spPr>
-            <a:xfrm>
-              <a:off x="7699058" y="1890064"/>
-              <a:ext cx="288862" cy="343171"/>
+            <a:xfrm rot="16200000">
+              <a:off x="-877012" y="1316853"/>
+              <a:ext cx="91764" cy="27808"/>
             </a:xfrm>
-            <a:prstGeom prst="rect">
-              <a:avLst/>
+            <a:prstGeom prst="rightArrow">
+              <a:avLst>
+                <a:gd name="adj1" fmla="val 50000"/>
+                <a:gd name="adj2" fmla="val 99023"/>
+              </a:avLst>
             </a:prstGeom>
+            <a:solidFill>
+              <a:schemeClr val="tx1"/>
+            </a:solidFill>
+            <a:ln>
+              <a:solidFill>
+                <a:schemeClr val="tx1"/>
+              </a:solidFill>
+            </a:ln>
           </p:spPr>
+          <p:style>
+            <a:lnRef idx="2">
+              <a:schemeClr val="dk1">
+                <a:shade val="50000"/>
+              </a:schemeClr>
+            </a:lnRef>
+            <a:fillRef idx="1">
+              <a:schemeClr val="dk1"/>
+            </a:fillRef>
+            <a:effectRef idx="0">
+              <a:schemeClr val="dk1"/>
+            </a:effectRef>
+            <a:fontRef idx="minor">
+              <a:schemeClr val="lt1"/>
+            </a:fontRef>
+          </p:style>
           <p:txBody>
-            <a:bodyPr wrap="none">
-              <a:spAutoFit/>
-            </a:bodyPr>
+            <a:bodyPr rtlCol="0" anchor="ctr"/>
             <a:lstStyle/>
             <a:p>
-              <a:r>
-                <a:rPr lang="en-US" altLang="zh-TW" sz="1630" dirty="0">
-                  <a:latin typeface="Times New Roman" panose="02020603050405020304" pitchFamily="18" charset="0"/>
-                  <a:cs typeface="Times New Roman" panose="02020603050405020304" pitchFamily="18" charset="0"/>
-                </a:rPr>
-                <a:t>0</a:t>
-              </a:r>
+              <a:pPr algn="ctr"/>
               <a:endParaRPr lang="zh-TW" altLang="en-US" sz="1630" dirty="0">
-                <a:latin typeface="Times New Roman" panose="02020603050405020304" pitchFamily="18" charset="0"/>
-                <a:cs typeface="Times New Roman" panose="02020603050405020304" pitchFamily="18" charset="0"/>
-              </a:endParaRPr>
-            </a:p>
-          </p:txBody>
-        </p:sp>
-        <p:sp>
-          <p:nvSpPr>
-            <p:cNvPr id="61" name="矩形 60">
-              <a:extLst>
-                <a:ext uri="{FF2B5EF4-FFF2-40B4-BE49-F238E27FC236}">
-                  <a16:creationId xmlns:a16="http://schemas.microsoft.com/office/drawing/2014/main" id="{02D3B054-B522-476B-A353-E4CC137E993F}"/>
-                </a:ext>
-              </a:extLst>
-            </p:cNvPr>
-            <p:cNvSpPr/>
-            <p:nvPr/>
-          </p:nvSpPr>
-          <p:spPr>
-            <a:xfrm>
-              <a:off x="7689533" y="4245524"/>
-              <a:ext cx="288862" cy="343171"/>
-            </a:xfrm>
-            <a:prstGeom prst="rect">
-              <a:avLst/>
-            </a:prstGeom>
-          </p:spPr>
-          <p:txBody>
-            <a:bodyPr wrap="none">
-              <a:spAutoFit/>
-            </a:bodyPr>
-            <a:lstStyle/>
-            <a:p>
-              <a:r>
-                <a:rPr lang="en-US" altLang="zh-TW" sz="1630" dirty="0">
-                  <a:latin typeface="Times New Roman" panose="02020603050405020304" pitchFamily="18" charset="0"/>
-                  <a:cs typeface="Times New Roman" panose="02020603050405020304" pitchFamily="18" charset="0"/>
-                </a:rPr>
-                <a:t>1</a:t>
-              </a:r>
-              <a:endParaRPr lang="zh-TW" altLang="en-US" sz="1630" dirty="0">
-                <a:latin typeface="Times New Roman" panose="02020603050405020304" pitchFamily="18" charset="0"/>
-                <a:cs typeface="Times New Roman" panose="02020603050405020304" pitchFamily="18" charset="0"/>
-              </a:endParaRPr>
-            </a:p>
-          </p:txBody>
-        </p:sp>
-        <p:sp>
-          <p:nvSpPr>
-            <p:cNvPr id="62" name="矩形 61">
-              <a:extLst>
-                <a:ext uri="{FF2B5EF4-FFF2-40B4-BE49-F238E27FC236}">
-                  <a16:creationId xmlns:a16="http://schemas.microsoft.com/office/drawing/2014/main" id="{1D433D44-68DB-443E-B327-4157514A705D}"/>
-                </a:ext>
-              </a:extLst>
-            </p:cNvPr>
-            <p:cNvSpPr/>
-            <p:nvPr/>
-          </p:nvSpPr>
-          <p:spPr>
-            <a:xfrm>
-              <a:off x="7708583" y="5483774"/>
-              <a:ext cx="357790" cy="343171"/>
-            </a:xfrm>
-            <a:prstGeom prst="rect">
-              <a:avLst/>
-            </a:prstGeom>
-          </p:spPr>
-          <p:txBody>
-            <a:bodyPr wrap="none">
-              <a:spAutoFit/>
-            </a:bodyPr>
-            <a:lstStyle/>
-            <a:p>
-              <a:r>
-                <a:rPr lang="en-US" altLang="zh-TW" sz="1630" dirty="0">
-                  <a:latin typeface="Times New Roman" panose="02020603050405020304" pitchFamily="18" charset="0"/>
-                  <a:cs typeface="Times New Roman" panose="02020603050405020304" pitchFamily="18" charset="0"/>
-                </a:rPr>
-                <a:t>-1</a:t>
-              </a:r>
-              <a:endParaRPr lang="zh-TW" altLang="en-US" sz="1630" dirty="0">
+                <a:solidFill>
+                  <a:schemeClr val="tx1"/>
+                </a:solidFill>
                 <a:latin typeface="Times New Roman" panose="02020603050405020304" pitchFamily="18" charset="0"/>
                 <a:cs typeface="Times New Roman" panose="02020603050405020304" pitchFamily="18" charset="0"/>
               </a:endParaRPr>
@@ -8931,6 +6794,2110 @@
           </p:txBody>
         </p:sp>
       </p:grpSp>
+      <p:pic>
+        <p:nvPicPr>
+          <p:cNvPr id="272" name="圖片 271">
+            <a:extLst>
+              <a:ext uri="{FF2B5EF4-FFF2-40B4-BE49-F238E27FC236}">
+                <a16:creationId xmlns:a16="http://schemas.microsoft.com/office/drawing/2014/main" id="{7468B6E1-A0E2-4B23-9D46-61F376D4E063}"/>
+              </a:ext>
+            </a:extLst>
+          </p:cNvPr>
+          <p:cNvPicPr>
+            <a:picLocks noChangeAspect="1"/>
+          </p:cNvPicPr>
+          <p:nvPr/>
+        </p:nvPicPr>
+        <p:blipFill rotWithShape="1">
+          <a:blip r:embed="rId2">
+            <a:clrChange>
+              <a:clrFrom>
+                <a:srgbClr val="FFFFFF"/>
+              </a:clrFrom>
+              <a:clrTo>
+                <a:srgbClr val="FFFFFF">
+                  <a:alpha val="0"/>
+                </a:srgbClr>
+              </a:clrTo>
+            </a:clrChange>
+          </a:blip>
+          <a:srcRect l="63840" r="19837"/>
+          <a:stretch/>
+        </p:blipFill>
+        <p:spPr>
+          <a:xfrm>
+            <a:off x="1357917" y="4076032"/>
+            <a:ext cx="601980" cy="505704"/>
+          </a:xfrm>
+          <a:prstGeom prst="rect">
+            <a:avLst/>
+          </a:prstGeom>
+        </p:spPr>
+      </p:pic>
+      <p:pic>
+        <p:nvPicPr>
+          <p:cNvPr id="273" name="圖片 272">
+            <a:extLst>
+              <a:ext uri="{FF2B5EF4-FFF2-40B4-BE49-F238E27FC236}">
+                <a16:creationId xmlns:a16="http://schemas.microsoft.com/office/drawing/2014/main" id="{E074A7D9-C35F-4EDD-91A7-F385F0D7913B}"/>
+              </a:ext>
+            </a:extLst>
+          </p:cNvPr>
+          <p:cNvPicPr>
+            <a:picLocks noChangeAspect="1"/>
+          </p:cNvPicPr>
+          <p:nvPr/>
+        </p:nvPicPr>
+        <p:blipFill rotWithShape="1">
+          <a:blip r:embed="rId2">
+            <a:clrChange>
+              <a:clrFrom>
+                <a:srgbClr val="FFFFFF"/>
+              </a:clrFrom>
+              <a:clrTo>
+                <a:srgbClr val="FFFFFF">
+                  <a:alpha val="0"/>
+                </a:srgbClr>
+              </a:clrTo>
+            </a:clrChange>
+          </a:blip>
+          <a:srcRect l="80038"/>
+          <a:stretch/>
+        </p:blipFill>
+        <p:spPr>
+          <a:xfrm>
+            <a:off x="1357917" y="2520362"/>
+            <a:ext cx="736126" cy="505704"/>
+          </a:xfrm>
+          <a:prstGeom prst="rect">
+            <a:avLst/>
+          </a:prstGeom>
+        </p:spPr>
+      </p:pic>
+      <p:pic>
+        <p:nvPicPr>
+          <p:cNvPr id="39" name="圖片 38">
+            <a:extLst>
+              <a:ext uri="{FF2B5EF4-FFF2-40B4-BE49-F238E27FC236}">
+                <a16:creationId xmlns:a16="http://schemas.microsoft.com/office/drawing/2014/main" id="{5EF9E74D-E01F-41A2-A26B-0C33487195EC}"/>
+              </a:ext>
+            </a:extLst>
+          </p:cNvPr>
+          <p:cNvPicPr>
+            <a:picLocks noChangeAspect="1"/>
+          </p:cNvPicPr>
+          <p:nvPr/>
+        </p:nvPicPr>
+        <p:blipFill rotWithShape="1">
+          <a:blip r:embed="rId22">
+            <a:clrChange>
+              <a:clrFrom>
+                <a:srgbClr val="FFFFFF"/>
+              </a:clrFrom>
+              <a:clrTo>
+                <a:srgbClr val="FFFFFF">
+                  <a:alpha val="0"/>
+                </a:srgbClr>
+              </a:clrTo>
+            </a:clrChange>
+            <a:extLst>
+              <a:ext uri="{28A0092B-C50C-407E-A947-70E740481C1C}">
+                <a14:useLocalDpi xmlns:a14="http://schemas.microsoft.com/office/drawing/2010/main" val="0"/>
+              </a:ext>
+            </a:extLst>
+          </a:blip>
+          <a:srcRect l="90879" t="9023" r="5591" b="70339"/>
+          <a:stretch/>
+        </p:blipFill>
+        <p:spPr>
+          <a:xfrm>
+            <a:off x="8098467" y="750295"/>
+            <a:ext cx="344719" cy="1343486"/>
+          </a:xfrm>
+          <a:prstGeom prst="rect">
+            <a:avLst/>
+          </a:prstGeom>
+        </p:spPr>
+      </p:pic>
+      <p:sp>
+        <p:nvSpPr>
+          <p:cNvPr id="40" name="矩形: 圓角 39">
+            <a:extLst>
+              <a:ext uri="{FF2B5EF4-FFF2-40B4-BE49-F238E27FC236}">
+                <a16:creationId xmlns:a16="http://schemas.microsoft.com/office/drawing/2014/main" id="{71B59539-B160-476E-A456-3B4D373ECA78}"/>
+              </a:ext>
+            </a:extLst>
+          </p:cNvPr>
+          <p:cNvSpPr/>
+          <p:nvPr/>
+        </p:nvSpPr>
+        <p:spPr>
+          <a:xfrm>
+            <a:off x="1285607" y="643905"/>
+            <a:ext cx="6717600" cy="1458000"/>
+          </a:xfrm>
+          <a:prstGeom prst="roundRect">
+            <a:avLst>
+              <a:gd name="adj" fmla="val 6163"/>
+            </a:avLst>
+          </a:prstGeom>
+          <a:noFill/>
+          <a:ln w="9525" cap="flat" cmpd="sng" algn="ctr">
+            <a:solidFill>
+              <a:schemeClr val="accent1"/>
+            </a:solidFill>
+            <a:prstDash val="solid"/>
+            <a:round/>
+            <a:headEnd type="none" w="med" len="med"/>
+            <a:tailEnd type="none" w="med" len="med"/>
+          </a:ln>
+        </p:spPr>
+        <p:style>
+          <a:lnRef idx="0">
+            <a:scrgbClr r="0" g="0" b="0"/>
+          </a:lnRef>
+          <a:fillRef idx="0">
+            <a:scrgbClr r="0" g="0" b="0"/>
+          </a:fillRef>
+          <a:effectRef idx="0">
+            <a:scrgbClr r="0" g="0" b="0"/>
+          </a:effectRef>
+          <a:fontRef idx="minor">
+            <a:schemeClr val="accent1"/>
+          </a:fontRef>
+        </p:style>
+        <p:txBody>
+          <a:bodyPr rot="0" spcFirstLastPara="0" vertOverflow="overflow" horzOverflow="overflow" vert="horz" wrap="square" lIns="91440" tIns="45720" rIns="91440" bIns="45720" numCol="1" spcCol="0" rtlCol="0" fromWordArt="0" anchor="ctr" anchorCtr="0" forceAA="0" compatLnSpc="1">
+            <a:prstTxWarp prst="textNoShape">
+              <a:avLst/>
+            </a:prstTxWarp>
+            <a:noAutofit/>
+          </a:bodyPr>
+          <a:lstStyle/>
+          <a:p>
+            <a:pPr algn="ctr"/>
+            <a:endParaRPr lang="zh-TW" altLang="en-US" sz="1900" dirty="0">
+              <a:latin typeface="Times New Roman" panose="02020603050405020304" pitchFamily="18" charset="0"/>
+              <a:cs typeface="Times New Roman" panose="02020603050405020304" pitchFamily="18" charset="0"/>
+            </a:endParaRPr>
+          </a:p>
+        </p:txBody>
+      </p:sp>
+      <p:sp>
+        <p:nvSpPr>
+          <p:cNvPr id="41" name="矩形: 圓角 40">
+            <a:extLst>
+              <a:ext uri="{FF2B5EF4-FFF2-40B4-BE49-F238E27FC236}">
+                <a16:creationId xmlns:a16="http://schemas.microsoft.com/office/drawing/2014/main" id="{07AC0EB3-BCCA-4107-B7F8-52B8C595E6A3}"/>
+              </a:ext>
+            </a:extLst>
+          </p:cNvPr>
+          <p:cNvSpPr/>
+          <p:nvPr/>
+        </p:nvSpPr>
+        <p:spPr>
+          <a:xfrm>
+            <a:off x="1285607" y="2570190"/>
+            <a:ext cx="6717600" cy="3265825"/>
+          </a:xfrm>
+          <a:prstGeom prst="roundRect">
+            <a:avLst>
+              <a:gd name="adj" fmla="val 3246"/>
+            </a:avLst>
+          </a:prstGeom>
+          <a:noFill/>
+          <a:ln w="9525" cap="flat" cmpd="sng" algn="ctr">
+            <a:solidFill>
+              <a:schemeClr val="accent2"/>
+            </a:solidFill>
+            <a:prstDash val="solid"/>
+            <a:round/>
+            <a:headEnd type="none" w="med" len="med"/>
+            <a:tailEnd type="none" w="med" len="med"/>
+          </a:ln>
+        </p:spPr>
+        <p:style>
+          <a:lnRef idx="0">
+            <a:scrgbClr r="0" g="0" b="0"/>
+          </a:lnRef>
+          <a:fillRef idx="0">
+            <a:scrgbClr r="0" g="0" b="0"/>
+          </a:fillRef>
+          <a:effectRef idx="0">
+            <a:scrgbClr r="0" g="0" b="0"/>
+          </a:effectRef>
+          <a:fontRef idx="minor">
+            <a:schemeClr val="accent2"/>
+          </a:fontRef>
+        </p:style>
+        <p:txBody>
+          <a:bodyPr rot="0" spcFirstLastPara="0" vertOverflow="overflow" horzOverflow="overflow" vert="horz" wrap="square" lIns="91440" tIns="45720" rIns="91440" bIns="45720" numCol="1" spcCol="0" rtlCol="0" fromWordArt="0" anchor="ctr" anchorCtr="0" forceAA="0" compatLnSpc="1">
+            <a:prstTxWarp prst="textNoShape">
+              <a:avLst/>
+            </a:prstTxWarp>
+            <a:noAutofit/>
+          </a:bodyPr>
+          <a:lstStyle/>
+          <a:p>
+            <a:pPr algn="ctr"/>
+            <a:endParaRPr lang="zh-TW" altLang="en-US" sz="1900" dirty="0">
+              <a:latin typeface="Times New Roman" panose="02020603050405020304" pitchFamily="18" charset="0"/>
+              <a:cs typeface="Times New Roman" panose="02020603050405020304" pitchFamily="18" charset="0"/>
+            </a:endParaRPr>
+          </a:p>
+        </p:txBody>
+      </p:sp>
+      <p:pic>
+        <p:nvPicPr>
+          <p:cNvPr id="42" name="圖片 41">
+            <a:extLst>
+              <a:ext uri="{FF2B5EF4-FFF2-40B4-BE49-F238E27FC236}">
+                <a16:creationId xmlns:a16="http://schemas.microsoft.com/office/drawing/2014/main" id="{C0F59C79-9428-42A1-9F92-5705E07AD825}"/>
+              </a:ext>
+            </a:extLst>
+          </p:cNvPr>
+          <p:cNvPicPr>
+            <a:picLocks noChangeAspect="1"/>
+          </p:cNvPicPr>
+          <p:nvPr/>
+        </p:nvPicPr>
+        <p:blipFill rotWithShape="1">
+          <a:blip r:embed="rId3">
+            <a:clrChange>
+              <a:clrFrom>
+                <a:srgbClr val="FFFFFF"/>
+              </a:clrFrom>
+              <a:clrTo>
+                <a:srgbClr val="FFFFFF">
+                  <a:alpha val="0"/>
+                </a:srgbClr>
+              </a:clrTo>
+            </a:clrChange>
+            <a:extLst>
+              <a:ext uri="{28A0092B-C50C-407E-A947-70E740481C1C}">
+                <a14:useLocalDpi xmlns:a14="http://schemas.microsoft.com/office/drawing/2010/main" val="0"/>
+              </a:ext>
+            </a:extLst>
+          </a:blip>
+          <a:srcRect l="17808" r="68081"/>
+          <a:stretch/>
+        </p:blipFill>
+        <p:spPr>
+          <a:xfrm>
+            <a:off x="2620077" y="579651"/>
+            <a:ext cx="1405108" cy="1659600"/>
+          </a:xfrm>
+          <a:prstGeom prst="rect">
+            <a:avLst/>
+          </a:prstGeom>
+        </p:spPr>
+      </p:pic>
+      <p:pic>
+        <p:nvPicPr>
+          <p:cNvPr id="43" name="圖片 42">
+            <a:extLst>
+              <a:ext uri="{FF2B5EF4-FFF2-40B4-BE49-F238E27FC236}">
+                <a16:creationId xmlns:a16="http://schemas.microsoft.com/office/drawing/2014/main" id="{9971268F-AE2C-49A0-BF9A-F74BCA8D2484}"/>
+              </a:ext>
+            </a:extLst>
+          </p:cNvPr>
+          <p:cNvPicPr>
+            <a:picLocks noChangeAspect="1"/>
+          </p:cNvPicPr>
+          <p:nvPr/>
+        </p:nvPicPr>
+        <p:blipFill rotWithShape="1">
+          <a:blip r:embed="rId3">
+            <a:clrChange>
+              <a:clrFrom>
+                <a:srgbClr val="FFFFFF"/>
+              </a:clrFrom>
+              <a:clrTo>
+                <a:srgbClr val="FFFFFF">
+                  <a:alpha val="0"/>
+                </a:srgbClr>
+              </a:clrTo>
+            </a:clrChange>
+            <a:extLst>
+              <a:ext uri="{28A0092B-C50C-407E-A947-70E740481C1C}">
+                <a14:useLocalDpi xmlns:a14="http://schemas.microsoft.com/office/drawing/2010/main" val="0"/>
+              </a:ext>
+            </a:extLst>
+          </a:blip>
+          <a:srcRect l="34528" r="51361"/>
+          <a:stretch/>
+        </p:blipFill>
+        <p:spPr>
+          <a:xfrm>
+            <a:off x="3951672" y="579651"/>
+            <a:ext cx="1405108" cy="1659600"/>
+          </a:xfrm>
+          <a:prstGeom prst="rect">
+            <a:avLst/>
+          </a:prstGeom>
+        </p:spPr>
+      </p:pic>
+      <p:pic>
+        <p:nvPicPr>
+          <p:cNvPr id="44" name="圖片 43">
+            <a:extLst>
+              <a:ext uri="{FF2B5EF4-FFF2-40B4-BE49-F238E27FC236}">
+                <a16:creationId xmlns:a16="http://schemas.microsoft.com/office/drawing/2014/main" id="{3C636C70-FE87-448E-B232-CC1EA069B745}"/>
+              </a:ext>
+            </a:extLst>
+          </p:cNvPr>
+          <p:cNvPicPr>
+            <a:picLocks noChangeAspect="1"/>
+          </p:cNvPicPr>
+          <p:nvPr/>
+        </p:nvPicPr>
+        <p:blipFill rotWithShape="1">
+          <a:blip r:embed="rId3">
+            <a:clrChange>
+              <a:clrFrom>
+                <a:srgbClr val="FFFFFF"/>
+              </a:clrFrom>
+              <a:clrTo>
+                <a:srgbClr val="FFFFFF">
+                  <a:alpha val="0"/>
+                </a:srgbClr>
+              </a:clrTo>
+            </a:clrChange>
+            <a:extLst>
+              <a:ext uri="{28A0092B-C50C-407E-A947-70E740481C1C}">
+                <a14:useLocalDpi xmlns:a14="http://schemas.microsoft.com/office/drawing/2010/main" val="0"/>
+              </a:ext>
+            </a:extLst>
+          </a:blip>
+          <a:srcRect l="51010" r="34405"/>
+          <a:stretch/>
+        </p:blipFill>
+        <p:spPr>
+          <a:xfrm>
+            <a:off x="5254692" y="579651"/>
+            <a:ext cx="1452338" cy="1659600"/>
+          </a:xfrm>
+          <a:prstGeom prst="rect">
+            <a:avLst/>
+          </a:prstGeom>
+        </p:spPr>
+      </p:pic>
+      <p:pic>
+        <p:nvPicPr>
+          <p:cNvPr id="45" name="圖片 44">
+            <a:extLst>
+              <a:ext uri="{FF2B5EF4-FFF2-40B4-BE49-F238E27FC236}">
+                <a16:creationId xmlns:a16="http://schemas.microsoft.com/office/drawing/2014/main" id="{4A8CE513-856E-4C18-84FC-A234356D2FA3}"/>
+              </a:ext>
+            </a:extLst>
+          </p:cNvPr>
+          <p:cNvPicPr>
+            <a:picLocks noChangeAspect="1"/>
+          </p:cNvPicPr>
+          <p:nvPr/>
+        </p:nvPicPr>
+        <p:blipFill rotWithShape="1">
+          <a:blip r:embed="rId3">
+            <a:clrChange>
+              <a:clrFrom>
+                <a:srgbClr val="FFFFFF"/>
+              </a:clrFrom>
+              <a:clrTo>
+                <a:srgbClr val="FFFFFF">
+                  <a:alpha val="0"/>
+                </a:srgbClr>
+              </a:clrTo>
+            </a:clrChange>
+            <a:extLst>
+              <a:ext uri="{28A0092B-C50C-407E-A947-70E740481C1C}">
+                <a14:useLocalDpi xmlns:a14="http://schemas.microsoft.com/office/drawing/2010/main" val="0"/>
+              </a:ext>
+            </a:extLst>
+          </a:blip>
+          <a:srcRect l="68086" r="17644"/>
+          <a:stretch/>
+        </p:blipFill>
+        <p:spPr>
+          <a:xfrm>
+            <a:off x="6614862" y="579651"/>
+            <a:ext cx="1420969" cy="1659600"/>
+          </a:xfrm>
+          <a:prstGeom prst="rect">
+            <a:avLst/>
+          </a:prstGeom>
+        </p:spPr>
+      </p:pic>
+      <p:pic>
+        <p:nvPicPr>
+          <p:cNvPr id="46" name="圖片 45">
+            <a:extLst>
+              <a:ext uri="{FF2B5EF4-FFF2-40B4-BE49-F238E27FC236}">
+                <a16:creationId xmlns:a16="http://schemas.microsoft.com/office/drawing/2014/main" id="{9E9363E5-ACF5-48B9-839D-602366EE5B7A}"/>
+              </a:ext>
+            </a:extLst>
+          </p:cNvPr>
+          <p:cNvPicPr>
+            <a:picLocks noChangeAspect="1"/>
+          </p:cNvPicPr>
+          <p:nvPr/>
+        </p:nvPicPr>
+        <p:blipFill rotWithShape="1">
+          <a:blip r:embed="rId23">
+            <a:clrChange>
+              <a:clrFrom>
+                <a:srgbClr val="FFFFFF"/>
+              </a:clrFrom>
+              <a:clrTo>
+                <a:srgbClr val="FFFFFF">
+                  <a:alpha val="0"/>
+                </a:srgbClr>
+              </a:clrTo>
+            </a:clrChange>
+            <a:extLst>
+              <a:ext uri="{28A0092B-C50C-407E-A947-70E740481C1C}">
+                <a14:useLocalDpi xmlns:a14="http://schemas.microsoft.com/office/drawing/2010/main" val="0"/>
+              </a:ext>
+            </a:extLst>
+          </a:blip>
+          <a:srcRect l="17554" r="67362"/>
+          <a:stretch/>
+        </p:blipFill>
+        <p:spPr>
+          <a:xfrm>
+            <a:off x="2627063" y="2734346"/>
+            <a:ext cx="1433497" cy="1584000"/>
+          </a:xfrm>
+          <a:prstGeom prst="rect">
+            <a:avLst/>
+          </a:prstGeom>
+        </p:spPr>
+      </p:pic>
+      <p:pic>
+        <p:nvPicPr>
+          <p:cNvPr id="47" name="圖片 46">
+            <a:extLst>
+              <a:ext uri="{FF2B5EF4-FFF2-40B4-BE49-F238E27FC236}">
+                <a16:creationId xmlns:a16="http://schemas.microsoft.com/office/drawing/2014/main" id="{7CC92E4D-8CB6-4F94-A431-41E0D9EE08E9}"/>
+              </a:ext>
+            </a:extLst>
+          </p:cNvPr>
+          <p:cNvPicPr>
+            <a:picLocks noChangeAspect="1"/>
+          </p:cNvPicPr>
+          <p:nvPr/>
+        </p:nvPicPr>
+        <p:blipFill rotWithShape="1">
+          <a:blip r:embed="rId4">
+            <a:clrChange>
+              <a:clrFrom>
+                <a:srgbClr val="FFFFFF"/>
+              </a:clrFrom>
+              <a:clrTo>
+                <a:srgbClr val="FFFFFF">
+                  <a:alpha val="0"/>
+                </a:srgbClr>
+              </a:clrTo>
+            </a:clrChange>
+            <a:extLst>
+              <a:ext uri="{28A0092B-C50C-407E-A947-70E740481C1C}">
+                <a14:useLocalDpi xmlns:a14="http://schemas.microsoft.com/office/drawing/2010/main" val="0"/>
+              </a:ext>
+            </a:extLst>
+          </a:blip>
+          <a:srcRect l="17483" r="67565"/>
+          <a:stretch/>
+        </p:blipFill>
+        <p:spPr>
+          <a:xfrm>
+            <a:off x="2615632" y="4292025"/>
+            <a:ext cx="1421032" cy="1584000"/>
+          </a:xfrm>
+          <a:prstGeom prst="rect">
+            <a:avLst/>
+          </a:prstGeom>
+        </p:spPr>
+      </p:pic>
+      <p:pic>
+        <p:nvPicPr>
+          <p:cNvPr id="50" name="圖片 49">
+            <a:extLst>
+              <a:ext uri="{FF2B5EF4-FFF2-40B4-BE49-F238E27FC236}">
+                <a16:creationId xmlns:a16="http://schemas.microsoft.com/office/drawing/2014/main" id="{CF0DC5EF-4E4A-4CDE-AC7D-6AAB311CB34A}"/>
+              </a:ext>
+            </a:extLst>
+          </p:cNvPr>
+          <p:cNvPicPr>
+            <a:picLocks noChangeAspect="1"/>
+          </p:cNvPicPr>
+          <p:nvPr/>
+        </p:nvPicPr>
+        <p:blipFill rotWithShape="1">
+          <a:blip r:embed="rId23">
+            <a:clrChange>
+              <a:clrFrom>
+                <a:srgbClr val="FFFFFF"/>
+              </a:clrFrom>
+              <a:clrTo>
+                <a:srgbClr val="FFFFFF">
+                  <a:alpha val="0"/>
+                </a:srgbClr>
+              </a:clrTo>
+            </a:clrChange>
+            <a:extLst>
+              <a:ext uri="{28A0092B-C50C-407E-A947-70E740481C1C}">
+                <a14:useLocalDpi xmlns:a14="http://schemas.microsoft.com/office/drawing/2010/main" val="0"/>
+              </a:ext>
+            </a:extLst>
+          </a:blip>
+          <a:srcRect l="33949" r="50443"/>
+          <a:stretch/>
+        </p:blipFill>
+        <p:spPr>
+          <a:xfrm>
+            <a:off x="3930082" y="2734346"/>
+            <a:ext cx="1483358" cy="1584000"/>
+          </a:xfrm>
+          <a:prstGeom prst="rect">
+            <a:avLst/>
+          </a:prstGeom>
+        </p:spPr>
+      </p:pic>
+      <p:pic>
+        <p:nvPicPr>
+          <p:cNvPr id="51" name="圖片 50">
+            <a:extLst>
+              <a:ext uri="{FF2B5EF4-FFF2-40B4-BE49-F238E27FC236}">
+                <a16:creationId xmlns:a16="http://schemas.microsoft.com/office/drawing/2014/main" id="{CC56BF8D-07A7-4A08-BDA6-08B4A048AE37}"/>
+              </a:ext>
+            </a:extLst>
+          </p:cNvPr>
+          <p:cNvPicPr>
+            <a:picLocks noChangeAspect="1"/>
+          </p:cNvPicPr>
+          <p:nvPr/>
+        </p:nvPicPr>
+        <p:blipFill rotWithShape="1">
+          <a:blip r:embed="rId4">
+            <a:clrChange>
+              <a:clrFrom>
+                <a:srgbClr val="FFFFFF"/>
+              </a:clrFrom>
+              <a:clrTo>
+                <a:srgbClr val="FFFFFF">
+                  <a:alpha val="0"/>
+                </a:srgbClr>
+              </a:clrTo>
+            </a:clrChange>
+            <a:extLst>
+              <a:ext uri="{28A0092B-C50C-407E-A947-70E740481C1C}">
+                <a14:useLocalDpi xmlns:a14="http://schemas.microsoft.com/office/drawing/2010/main" val="0"/>
+              </a:ext>
+            </a:extLst>
+          </a:blip>
+          <a:srcRect l="34009" r="50777"/>
+          <a:stretch/>
+        </p:blipFill>
+        <p:spPr>
+          <a:xfrm>
+            <a:off x="3930082" y="4292025"/>
+            <a:ext cx="1445962" cy="1584000"/>
+          </a:xfrm>
+          <a:prstGeom prst="rect">
+            <a:avLst/>
+          </a:prstGeom>
+        </p:spPr>
+      </p:pic>
+      <p:pic>
+        <p:nvPicPr>
+          <p:cNvPr id="52" name="圖片 51">
+            <a:extLst>
+              <a:ext uri="{FF2B5EF4-FFF2-40B4-BE49-F238E27FC236}">
+                <a16:creationId xmlns:a16="http://schemas.microsoft.com/office/drawing/2014/main" id="{FA15D31F-F97A-4A93-923E-4765732953C4}"/>
+              </a:ext>
+            </a:extLst>
+          </p:cNvPr>
+          <p:cNvPicPr>
+            <a:picLocks noChangeAspect="1"/>
+          </p:cNvPicPr>
+          <p:nvPr/>
+        </p:nvPicPr>
+        <p:blipFill rotWithShape="1">
+          <a:blip r:embed="rId23">
+            <a:clrChange>
+              <a:clrFrom>
+                <a:srgbClr val="FFFFFF"/>
+              </a:clrFrom>
+              <a:clrTo>
+                <a:srgbClr val="FFFFFF">
+                  <a:alpha val="0"/>
+                </a:srgbClr>
+              </a:clrTo>
+            </a:clrChange>
+            <a:extLst>
+              <a:ext uri="{28A0092B-C50C-407E-A947-70E740481C1C}">
+                <a14:useLocalDpi xmlns:a14="http://schemas.microsoft.com/office/drawing/2010/main" val="0"/>
+              </a:ext>
+            </a:extLst>
+          </a:blip>
+          <a:srcRect l="50869" r="34179"/>
+          <a:stretch/>
+        </p:blipFill>
+        <p:spPr>
+          <a:xfrm>
+            <a:off x="5264852" y="2734346"/>
+            <a:ext cx="1421032" cy="1584000"/>
+          </a:xfrm>
+          <a:prstGeom prst="rect">
+            <a:avLst/>
+          </a:prstGeom>
+        </p:spPr>
+      </p:pic>
+      <p:pic>
+        <p:nvPicPr>
+          <p:cNvPr id="53" name="圖片 52">
+            <a:extLst>
+              <a:ext uri="{FF2B5EF4-FFF2-40B4-BE49-F238E27FC236}">
+                <a16:creationId xmlns:a16="http://schemas.microsoft.com/office/drawing/2014/main" id="{53371DB9-76BA-454A-87AF-397AB73D2531}"/>
+              </a:ext>
+            </a:extLst>
+          </p:cNvPr>
+          <p:cNvPicPr>
+            <a:picLocks noChangeAspect="1"/>
+          </p:cNvPicPr>
+          <p:nvPr/>
+        </p:nvPicPr>
+        <p:blipFill rotWithShape="1">
+          <a:blip r:embed="rId4">
+            <a:clrChange>
+              <a:clrFrom>
+                <a:srgbClr val="FFFFFF"/>
+              </a:clrFrom>
+              <a:clrTo>
+                <a:srgbClr val="FFFFFF">
+                  <a:alpha val="0"/>
+                </a:srgbClr>
+              </a:clrTo>
+            </a:clrChange>
+            <a:extLst>
+              <a:ext uri="{28A0092B-C50C-407E-A947-70E740481C1C}">
+                <a14:useLocalDpi xmlns:a14="http://schemas.microsoft.com/office/drawing/2010/main" val="0"/>
+              </a:ext>
+            </a:extLst>
+          </a:blip>
+          <a:srcRect l="50928" r="33989"/>
+          <a:stretch/>
+        </p:blipFill>
+        <p:spPr>
+          <a:xfrm>
+            <a:off x="5264853" y="4292025"/>
+            <a:ext cx="1433497" cy="1584000"/>
+          </a:xfrm>
+          <a:prstGeom prst="rect">
+            <a:avLst/>
+          </a:prstGeom>
+        </p:spPr>
+      </p:pic>
+      <p:pic>
+        <p:nvPicPr>
+          <p:cNvPr id="54" name="圖片 53">
+            <a:extLst>
+              <a:ext uri="{FF2B5EF4-FFF2-40B4-BE49-F238E27FC236}">
+                <a16:creationId xmlns:a16="http://schemas.microsoft.com/office/drawing/2014/main" id="{013D93B5-84DA-4E86-A8DF-ABBABB05A417}"/>
+              </a:ext>
+            </a:extLst>
+          </p:cNvPr>
+          <p:cNvPicPr>
+            <a:picLocks noChangeAspect="1"/>
+          </p:cNvPicPr>
+          <p:nvPr/>
+        </p:nvPicPr>
+        <p:blipFill rotWithShape="1">
+          <a:blip r:embed="rId23">
+            <a:clrChange>
+              <a:clrFrom>
+                <a:srgbClr val="FFFFFF"/>
+              </a:clrFrom>
+              <a:clrTo>
+                <a:srgbClr val="FFFFFF">
+                  <a:alpha val="0"/>
+                </a:srgbClr>
+              </a:clrTo>
+            </a:clrChange>
+            <a:extLst>
+              <a:ext uri="{28A0092B-C50C-407E-A947-70E740481C1C}">
+                <a14:useLocalDpi xmlns:a14="http://schemas.microsoft.com/office/drawing/2010/main" val="0"/>
+              </a:ext>
+            </a:extLst>
+          </a:blip>
+          <a:srcRect l="67525" r="17047"/>
+          <a:stretch/>
+        </p:blipFill>
+        <p:spPr>
+          <a:xfrm>
+            <a:off x="6594542" y="2734346"/>
+            <a:ext cx="1466245" cy="1584000"/>
+          </a:xfrm>
+          <a:prstGeom prst="rect">
+            <a:avLst/>
+          </a:prstGeom>
+        </p:spPr>
+      </p:pic>
+      <p:pic>
+        <p:nvPicPr>
+          <p:cNvPr id="55" name="圖片 54">
+            <a:extLst>
+              <a:ext uri="{FF2B5EF4-FFF2-40B4-BE49-F238E27FC236}">
+                <a16:creationId xmlns:a16="http://schemas.microsoft.com/office/drawing/2014/main" id="{12C550DC-EFC7-4465-A6AB-1EB8C0FCFBD7}"/>
+              </a:ext>
+            </a:extLst>
+          </p:cNvPr>
+          <p:cNvPicPr>
+            <a:picLocks noChangeAspect="1"/>
+          </p:cNvPicPr>
+          <p:nvPr/>
+        </p:nvPicPr>
+        <p:blipFill rotWithShape="1">
+          <a:blip r:embed="rId4">
+            <a:clrChange>
+              <a:clrFrom>
+                <a:srgbClr val="FFFFFF"/>
+              </a:clrFrom>
+              <a:clrTo>
+                <a:srgbClr val="FFFFFF">
+                  <a:alpha val="0"/>
+                </a:srgbClr>
+              </a:clrTo>
+            </a:clrChange>
+            <a:extLst>
+              <a:ext uri="{28A0092B-C50C-407E-A947-70E740481C1C}">
+                <a14:useLocalDpi xmlns:a14="http://schemas.microsoft.com/office/drawing/2010/main" val="0"/>
+              </a:ext>
+            </a:extLst>
+          </a:blip>
+          <a:srcRect l="67585" r="17265"/>
+          <a:stretch/>
+        </p:blipFill>
+        <p:spPr>
+          <a:xfrm>
+            <a:off x="6594543" y="4292025"/>
+            <a:ext cx="1439827" cy="1584000"/>
+          </a:xfrm>
+          <a:prstGeom prst="rect">
+            <a:avLst/>
+          </a:prstGeom>
+        </p:spPr>
+      </p:pic>
+      <p:pic>
+        <p:nvPicPr>
+          <p:cNvPr id="248" name="圖片 247">
+            <a:extLst>
+              <a:ext uri="{FF2B5EF4-FFF2-40B4-BE49-F238E27FC236}">
+                <a16:creationId xmlns:a16="http://schemas.microsoft.com/office/drawing/2014/main" id="{D0F1D35A-8EDB-4C72-BE3C-58B1EB45EEF5}"/>
+              </a:ext>
+            </a:extLst>
+          </p:cNvPr>
+          <p:cNvPicPr>
+            <a:picLocks noChangeAspect="1"/>
+          </p:cNvPicPr>
+          <p:nvPr/>
+        </p:nvPicPr>
+        <p:blipFill rotWithShape="1">
+          <a:blip r:embed="rId23">
+            <a:clrChange>
+              <a:clrFrom>
+                <a:srgbClr val="FFFFFF"/>
+              </a:clrFrom>
+              <a:clrTo>
+                <a:srgbClr val="FFFFFF">
+                  <a:alpha val="0"/>
+                </a:srgbClr>
+              </a:clrTo>
+            </a:clrChange>
+            <a:extLst>
+              <a:ext uri="{28A0092B-C50C-407E-A947-70E740481C1C}">
+                <a14:useLocalDpi xmlns:a14="http://schemas.microsoft.com/office/drawing/2010/main" val="0"/>
+              </a:ext>
+            </a:extLst>
+          </a:blip>
+          <a:srcRect r="84151"/>
+          <a:stretch/>
+        </p:blipFill>
+        <p:spPr>
+          <a:xfrm>
+            <a:off x="1220452" y="2734346"/>
+            <a:ext cx="1506302" cy="1584000"/>
+          </a:xfrm>
+          <a:prstGeom prst="rect">
+            <a:avLst/>
+          </a:prstGeom>
+        </p:spPr>
+      </p:pic>
+      <mc:AlternateContent xmlns:mc="http://schemas.openxmlformats.org/markup-compatibility/2006">
+        <mc:Choice xmlns:a14="http://schemas.microsoft.com/office/drawing/2010/main" Requires="a14">
+          <p:sp>
+            <p:nvSpPr>
+              <p:cNvPr id="260" name="矩形 259">
+                <a:extLst>
+                  <a:ext uri="{FF2B5EF4-FFF2-40B4-BE49-F238E27FC236}">
+                    <a16:creationId xmlns:a16="http://schemas.microsoft.com/office/drawing/2014/main" id="{398344E3-64D8-4CE0-9B3A-57828151AFBC}"/>
+                  </a:ext>
+                </a:extLst>
+              </p:cNvPr>
+              <p:cNvSpPr/>
+              <p:nvPr/>
+            </p:nvSpPr>
+            <p:spPr>
+              <a:xfrm>
+                <a:off x="1494803" y="2910235"/>
+                <a:ext cx="889154" cy="343171"/>
+              </a:xfrm>
+              <a:prstGeom prst="rect">
+                <a:avLst/>
+              </a:prstGeom>
+            </p:spPr>
+            <p:txBody>
+              <a:bodyPr wrap="none">
+                <a:spAutoFit/>
+              </a:bodyPr>
+              <a:lstStyle/>
+              <a:p>
+                <a:pPr/>
+                <a14:m>
+                  <m:oMathPara xmlns:m="http://schemas.openxmlformats.org/officeDocument/2006/math">
+                    <m:oMathParaPr>
+                      <m:jc m:val="centerGroup"/>
+                    </m:oMathParaPr>
+                    <m:oMath xmlns:m="http://schemas.openxmlformats.org/officeDocument/2006/math">
+                      <m:r>
+                        <a:rPr lang="en-US" altLang="zh-TW" sz="1630" i="1">
+                          <a:latin typeface="Cambria Math" panose="02040503050406030204" pitchFamily="18" charset="0"/>
+                        </a:rPr>
+                        <m:t>ℓ=−2</m:t>
+                      </m:r>
+                    </m:oMath>
+                  </m:oMathPara>
+                </a14:m>
+                <a:endParaRPr lang="zh-TW" altLang="en-US" sz="1630" dirty="0">
+                  <a:latin typeface="Times New Roman" panose="02020603050405020304" pitchFamily="18" charset="0"/>
+                  <a:cs typeface="Times New Roman" panose="02020603050405020304" pitchFamily="18" charset="0"/>
+                </a:endParaRPr>
+              </a:p>
+            </p:txBody>
+          </p:sp>
+        </mc:Choice>
+        <mc:Fallback>
+          <p:sp>
+            <p:nvSpPr>
+              <p:cNvPr id="260" name="矩形 259">
+                <a:extLst>
+                  <a:ext uri="{FF2B5EF4-FFF2-40B4-BE49-F238E27FC236}">
+                    <a16:creationId xmlns:a16="http://schemas.microsoft.com/office/drawing/2014/main" id="{398344E3-64D8-4CE0-9B3A-57828151AFBC}"/>
+                  </a:ext>
+                </a:extLst>
+              </p:cNvPr>
+              <p:cNvSpPr>
+                <a:spLocks noRot="1" noChangeAspect="1" noMove="1" noResize="1" noEditPoints="1" noAdjustHandles="1" noChangeArrowheads="1" noChangeShapeType="1" noTextEdit="1"/>
+              </p:cNvSpPr>
+              <p:nvPr/>
+            </p:nvSpPr>
+            <p:spPr>
+              <a:xfrm>
+                <a:off x="1494803" y="2910235"/>
+                <a:ext cx="889154" cy="343171"/>
+              </a:xfrm>
+              <a:prstGeom prst="rect">
+                <a:avLst/>
+              </a:prstGeom>
+              <a:blipFill>
+                <a:blip r:embed="rId24"/>
+                <a:stretch>
+                  <a:fillRect/>
+                </a:stretch>
+              </a:blipFill>
+            </p:spPr>
+            <p:txBody>
+              <a:bodyPr/>
+              <a:lstStyle/>
+              <a:p>
+                <a:r>
+                  <a:rPr lang="zh-TW" altLang="en-US">
+                    <a:noFill/>
+                  </a:rPr>
+                  <a:t> </a:t>
+                </a:r>
+              </a:p>
+            </p:txBody>
+          </p:sp>
+        </mc:Fallback>
+      </mc:AlternateContent>
+      <mc:AlternateContent xmlns:mc="http://schemas.openxmlformats.org/markup-compatibility/2006">
+        <mc:Choice xmlns:a14="http://schemas.microsoft.com/office/drawing/2010/main" Requires="a14">
+          <p:sp>
+            <p:nvSpPr>
+              <p:cNvPr id="261" name="矩形 260">
+                <a:extLst>
+                  <a:ext uri="{FF2B5EF4-FFF2-40B4-BE49-F238E27FC236}">
+                    <a16:creationId xmlns:a16="http://schemas.microsoft.com/office/drawing/2014/main" id="{AC32431E-EE34-4064-A175-F612662C94E9}"/>
+                  </a:ext>
+                </a:extLst>
+              </p:cNvPr>
+              <p:cNvSpPr/>
+              <p:nvPr/>
+            </p:nvSpPr>
+            <p:spPr>
+              <a:xfrm>
+                <a:off x="2938551" y="2910235"/>
+                <a:ext cx="889154" cy="343171"/>
+              </a:xfrm>
+              <a:prstGeom prst="rect">
+                <a:avLst/>
+              </a:prstGeom>
+            </p:spPr>
+            <p:txBody>
+              <a:bodyPr wrap="none">
+                <a:spAutoFit/>
+              </a:bodyPr>
+              <a:lstStyle/>
+              <a:p>
+                <a:pPr/>
+                <a14:m>
+                  <m:oMathPara xmlns:m="http://schemas.openxmlformats.org/officeDocument/2006/math">
+                    <m:oMathParaPr>
+                      <m:jc m:val="centerGroup"/>
+                    </m:oMathParaPr>
+                    <m:oMath xmlns:m="http://schemas.openxmlformats.org/officeDocument/2006/math">
+                      <m:r>
+                        <a:rPr lang="en-US" altLang="zh-TW" sz="1630" i="1">
+                          <a:latin typeface="Cambria Math" panose="02040503050406030204" pitchFamily="18" charset="0"/>
+                        </a:rPr>
+                        <m:t>ℓ=−1</m:t>
+                      </m:r>
+                    </m:oMath>
+                  </m:oMathPara>
+                </a14:m>
+                <a:endParaRPr lang="zh-TW" altLang="en-US" sz="1630" dirty="0">
+                  <a:latin typeface="Times New Roman" panose="02020603050405020304" pitchFamily="18" charset="0"/>
+                  <a:cs typeface="Times New Roman" panose="02020603050405020304" pitchFamily="18" charset="0"/>
+                </a:endParaRPr>
+              </a:p>
+            </p:txBody>
+          </p:sp>
+        </mc:Choice>
+        <mc:Fallback>
+          <p:sp>
+            <p:nvSpPr>
+              <p:cNvPr id="261" name="矩形 260">
+                <a:extLst>
+                  <a:ext uri="{FF2B5EF4-FFF2-40B4-BE49-F238E27FC236}">
+                    <a16:creationId xmlns:a16="http://schemas.microsoft.com/office/drawing/2014/main" id="{AC32431E-EE34-4064-A175-F612662C94E9}"/>
+                  </a:ext>
+                </a:extLst>
+              </p:cNvPr>
+              <p:cNvSpPr>
+                <a:spLocks noRot="1" noChangeAspect="1" noMove="1" noResize="1" noEditPoints="1" noAdjustHandles="1" noChangeArrowheads="1" noChangeShapeType="1" noTextEdit="1"/>
+              </p:cNvSpPr>
+              <p:nvPr/>
+            </p:nvSpPr>
+            <p:spPr>
+              <a:xfrm>
+                <a:off x="2938551" y="2910235"/>
+                <a:ext cx="889154" cy="343171"/>
+              </a:xfrm>
+              <a:prstGeom prst="rect">
+                <a:avLst/>
+              </a:prstGeom>
+              <a:blipFill>
+                <a:blip r:embed="rId25"/>
+                <a:stretch>
+                  <a:fillRect/>
+                </a:stretch>
+              </a:blipFill>
+            </p:spPr>
+            <p:txBody>
+              <a:bodyPr/>
+              <a:lstStyle/>
+              <a:p>
+                <a:r>
+                  <a:rPr lang="zh-TW" altLang="en-US">
+                    <a:noFill/>
+                  </a:rPr>
+                  <a:t> </a:t>
+                </a:r>
+              </a:p>
+            </p:txBody>
+          </p:sp>
+        </mc:Fallback>
+      </mc:AlternateContent>
+      <mc:AlternateContent xmlns:mc="http://schemas.openxmlformats.org/markup-compatibility/2006">
+        <mc:Choice xmlns:a14="http://schemas.microsoft.com/office/drawing/2010/main" Requires="a14">
+          <p:sp>
+            <p:nvSpPr>
+              <p:cNvPr id="262" name="矩形 261">
+                <a:extLst>
+                  <a:ext uri="{FF2B5EF4-FFF2-40B4-BE49-F238E27FC236}">
+                    <a16:creationId xmlns:a16="http://schemas.microsoft.com/office/drawing/2014/main" id="{59045CCB-FC7C-45BF-B766-16DAFAED3F4B}"/>
+                  </a:ext>
+                </a:extLst>
+              </p:cNvPr>
+              <p:cNvSpPr/>
+              <p:nvPr/>
+            </p:nvSpPr>
+            <p:spPr>
+              <a:xfrm>
+                <a:off x="4382299" y="2910235"/>
+                <a:ext cx="733662" cy="343171"/>
+              </a:xfrm>
+              <a:prstGeom prst="rect">
+                <a:avLst/>
+              </a:prstGeom>
+            </p:spPr>
+            <p:txBody>
+              <a:bodyPr wrap="none">
+                <a:spAutoFit/>
+              </a:bodyPr>
+              <a:lstStyle/>
+              <a:p>
+                <a:pPr/>
+                <a14:m>
+                  <m:oMathPara xmlns:m="http://schemas.openxmlformats.org/officeDocument/2006/math">
+                    <m:oMathParaPr>
+                      <m:jc m:val="centerGroup"/>
+                    </m:oMathParaPr>
+                    <m:oMath xmlns:m="http://schemas.openxmlformats.org/officeDocument/2006/math">
+                      <m:r>
+                        <a:rPr lang="en-US" altLang="zh-TW" sz="1630" i="1">
+                          <a:latin typeface="Cambria Math" panose="02040503050406030204" pitchFamily="18" charset="0"/>
+                        </a:rPr>
+                        <m:t>ℓ=0</m:t>
+                      </m:r>
+                    </m:oMath>
+                  </m:oMathPara>
+                </a14:m>
+                <a:endParaRPr lang="zh-TW" altLang="en-US" sz="1630" dirty="0">
+                  <a:latin typeface="Times New Roman" panose="02020603050405020304" pitchFamily="18" charset="0"/>
+                  <a:cs typeface="Times New Roman" panose="02020603050405020304" pitchFamily="18" charset="0"/>
+                </a:endParaRPr>
+              </a:p>
+            </p:txBody>
+          </p:sp>
+        </mc:Choice>
+        <mc:Fallback>
+          <p:sp>
+            <p:nvSpPr>
+              <p:cNvPr id="262" name="矩形 261">
+                <a:extLst>
+                  <a:ext uri="{FF2B5EF4-FFF2-40B4-BE49-F238E27FC236}">
+                    <a16:creationId xmlns:a16="http://schemas.microsoft.com/office/drawing/2014/main" id="{59045CCB-FC7C-45BF-B766-16DAFAED3F4B}"/>
+                  </a:ext>
+                </a:extLst>
+              </p:cNvPr>
+              <p:cNvSpPr>
+                <a:spLocks noRot="1" noChangeAspect="1" noMove="1" noResize="1" noEditPoints="1" noAdjustHandles="1" noChangeArrowheads="1" noChangeShapeType="1" noTextEdit="1"/>
+              </p:cNvSpPr>
+              <p:nvPr/>
+            </p:nvSpPr>
+            <p:spPr>
+              <a:xfrm>
+                <a:off x="4382299" y="2910235"/>
+                <a:ext cx="733662" cy="343171"/>
+              </a:xfrm>
+              <a:prstGeom prst="rect">
+                <a:avLst/>
+              </a:prstGeom>
+              <a:blipFill>
+                <a:blip r:embed="rId26"/>
+                <a:stretch>
+                  <a:fillRect/>
+                </a:stretch>
+              </a:blipFill>
+            </p:spPr>
+            <p:txBody>
+              <a:bodyPr/>
+              <a:lstStyle/>
+              <a:p>
+                <a:r>
+                  <a:rPr lang="zh-TW" altLang="en-US">
+                    <a:noFill/>
+                  </a:rPr>
+                  <a:t> </a:t>
+                </a:r>
+              </a:p>
+            </p:txBody>
+          </p:sp>
+        </mc:Fallback>
+      </mc:AlternateContent>
+      <mc:AlternateContent xmlns:mc="http://schemas.openxmlformats.org/markup-compatibility/2006">
+        <mc:Choice xmlns:a14="http://schemas.microsoft.com/office/drawing/2010/main" Requires="a14">
+          <p:sp>
+            <p:nvSpPr>
+              <p:cNvPr id="263" name="矩形 262">
+                <a:extLst>
+                  <a:ext uri="{FF2B5EF4-FFF2-40B4-BE49-F238E27FC236}">
+                    <a16:creationId xmlns:a16="http://schemas.microsoft.com/office/drawing/2014/main" id="{04B8F826-6F72-4206-963D-2CD5C8B8E93B}"/>
+                  </a:ext>
+                </a:extLst>
+              </p:cNvPr>
+              <p:cNvSpPr/>
+              <p:nvPr/>
+            </p:nvSpPr>
+            <p:spPr>
+              <a:xfrm>
+                <a:off x="5670555" y="2910235"/>
+                <a:ext cx="733662" cy="343171"/>
+              </a:xfrm>
+              <a:prstGeom prst="rect">
+                <a:avLst/>
+              </a:prstGeom>
+            </p:spPr>
+            <p:txBody>
+              <a:bodyPr wrap="none">
+                <a:spAutoFit/>
+              </a:bodyPr>
+              <a:lstStyle/>
+              <a:p>
+                <a:pPr/>
+                <a14:m>
+                  <m:oMathPara xmlns:m="http://schemas.openxmlformats.org/officeDocument/2006/math">
+                    <m:oMathParaPr>
+                      <m:jc m:val="centerGroup"/>
+                    </m:oMathParaPr>
+                    <m:oMath xmlns:m="http://schemas.openxmlformats.org/officeDocument/2006/math">
+                      <m:r>
+                        <a:rPr lang="en-US" altLang="zh-TW" sz="1630" i="1">
+                          <a:latin typeface="Cambria Math" panose="02040503050406030204" pitchFamily="18" charset="0"/>
+                        </a:rPr>
+                        <m:t>ℓ=1</m:t>
+                      </m:r>
+                    </m:oMath>
+                  </m:oMathPara>
+                </a14:m>
+                <a:endParaRPr lang="zh-TW" altLang="en-US" sz="1630" dirty="0">
+                  <a:latin typeface="Times New Roman" panose="02020603050405020304" pitchFamily="18" charset="0"/>
+                  <a:cs typeface="Times New Roman" panose="02020603050405020304" pitchFamily="18" charset="0"/>
+                </a:endParaRPr>
+              </a:p>
+            </p:txBody>
+          </p:sp>
+        </mc:Choice>
+        <mc:Fallback>
+          <p:sp>
+            <p:nvSpPr>
+              <p:cNvPr id="263" name="矩形 262">
+                <a:extLst>
+                  <a:ext uri="{FF2B5EF4-FFF2-40B4-BE49-F238E27FC236}">
+                    <a16:creationId xmlns:a16="http://schemas.microsoft.com/office/drawing/2014/main" id="{04B8F826-6F72-4206-963D-2CD5C8B8E93B}"/>
+                  </a:ext>
+                </a:extLst>
+              </p:cNvPr>
+              <p:cNvSpPr>
+                <a:spLocks noRot="1" noChangeAspect="1" noMove="1" noResize="1" noEditPoints="1" noAdjustHandles="1" noChangeArrowheads="1" noChangeShapeType="1" noTextEdit="1"/>
+              </p:cNvSpPr>
+              <p:nvPr/>
+            </p:nvSpPr>
+            <p:spPr>
+              <a:xfrm>
+                <a:off x="5670555" y="2910235"/>
+                <a:ext cx="733662" cy="343171"/>
+              </a:xfrm>
+              <a:prstGeom prst="rect">
+                <a:avLst/>
+              </a:prstGeom>
+              <a:blipFill>
+                <a:blip r:embed="rId27"/>
+                <a:stretch>
+                  <a:fillRect/>
+                </a:stretch>
+              </a:blipFill>
+            </p:spPr>
+            <p:txBody>
+              <a:bodyPr/>
+              <a:lstStyle/>
+              <a:p>
+                <a:r>
+                  <a:rPr lang="zh-TW" altLang="en-US">
+                    <a:noFill/>
+                  </a:rPr>
+                  <a:t> </a:t>
+                </a:r>
+              </a:p>
+            </p:txBody>
+          </p:sp>
+        </mc:Fallback>
+      </mc:AlternateContent>
+      <mc:AlternateContent xmlns:mc="http://schemas.openxmlformats.org/markup-compatibility/2006">
+        <mc:Choice xmlns:a14="http://schemas.microsoft.com/office/drawing/2010/main" Requires="a14">
+          <p:sp>
+            <p:nvSpPr>
+              <p:cNvPr id="264" name="矩形 263">
+                <a:extLst>
+                  <a:ext uri="{FF2B5EF4-FFF2-40B4-BE49-F238E27FC236}">
+                    <a16:creationId xmlns:a16="http://schemas.microsoft.com/office/drawing/2014/main" id="{E4AEE6D0-356B-42B8-BF92-D04FD5D8291A}"/>
+                  </a:ext>
+                </a:extLst>
+              </p:cNvPr>
+              <p:cNvSpPr/>
+              <p:nvPr/>
+            </p:nvSpPr>
+            <p:spPr>
+              <a:xfrm>
+                <a:off x="6958813" y="2910235"/>
+                <a:ext cx="733662" cy="343171"/>
+              </a:xfrm>
+              <a:prstGeom prst="rect">
+                <a:avLst/>
+              </a:prstGeom>
+            </p:spPr>
+            <p:txBody>
+              <a:bodyPr wrap="none">
+                <a:spAutoFit/>
+              </a:bodyPr>
+              <a:lstStyle/>
+              <a:p>
+                <a:pPr/>
+                <a14:m>
+                  <m:oMathPara xmlns:m="http://schemas.openxmlformats.org/officeDocument/2006/math">
+                    <m:oMathParaPr>
+                      <m:jc m:val="centerGroup"/>
+                    </m:oMathParaPr>
+                    <m:oMath xmlns:m="http://schemas.openxmlformats.org/officeDocument/2006/math">
+                      <m:r>
+                        <a:rPr lang="en-US" altLang="zh-TW" sz="1630" i="1">
+                          <a:latin typeface="Cambria Math" panose="02040503050406030204" pitchFamily="18" charset="0"/>
+                        </a:rPr>
+                        <m:t>ℓ=2</m:t>
+                      </m:r>
+                    </m:oMath>
+                  </m:oMathPara>
+                </a14:m>
+                <a:endParaRPr lang="zh-TW" altLang="en-US" sz="1630" dirty="0">
+                  <a:latin typeface="Times New Roman" panose="02020603050405020304" pitchFamily="18" charset="0"/>
+                  <a:cs typeface="Times New Roman" panose="02020603050405020304" pitchFamily="18" charset="0"/>
+                </a:endParaRPr>
+              </a:p>
+            </p:txBody>
+          </p:sp>
+        </mc:Choice>
+        <mc:Fallback>
+          <p:sp>
+            <p:nvSpPr>
+              <p:cNvPr id="264" name="矩形 263">
+                <a:extLst>
+                  <a:ext uri="{FF2B5EF4-FFF2-40B4-BE49-F238E27FC236}">
+                    <a16:creationId xmlns:a16="http://schemas.microsoft.com/office/drawing/2014/main" id="{E4AEE6D0-356B-42B8-BF92-D04FD5D8291A}"/>
+                  </a:ext>
+                </a:extLst>
+              </p:cNvPr>
+              <p:cNvSpPr>
+                <a:spLocks noRot="1" noChangeAspect="1" noMove="1" noResize="1" noEditPoints="1" noAdjustHandles="1" noChangeArrowheads="1" noChangeShapeType="1" noTextEdit="1"/>
+              </p:cNvSpPr>
+              <p:nvPr/>
+            </p:nvSpPr>
+            <p:spPr>
+              <a:xfrm>
+                <a:off x="6958813" y="2910235"/>
+                <a:ext cx="733662" cy="343171"/>
+              </a:xfrm>
+              <a:prstGeom prst="rect">
+                <a:avLst/>
+              </a:prstGeom>
+              <a:blipFill>
+                <a:blip r:embed="rId28"/>
+                <a:stretch>
+                  <a:fillRect/>
+                </a:stretch>
+              </a:blipFill>
+            </p:spPr>
+            <p:txBody>
+              <a:bodyPr/>
+              <a:lstStyle/>
+              <a:p>
+                <a:r>
+                  <a:rPr lang="zh-TW" altLang="en-US">
+                    <a:noFill/>
+                  </a:rPr>
+                  <a:t> </a:t>
+                </a:r>
+              </a:p>
+            </p:txBody>
+          </p:sp>
+        </mc:Fallback>
+      </mc:AlternateContent>
+      <mc:AlternateContent xmlns:mc="http://schemas.openxmlformats.org/markup-compatibility/2006">
+        <mc:Choice xmlns:a14="http://schemas.microsoft.com/office/drawing/2010/main" Requires="a14">
+          <p:sp>
+            <p:nvSpPr>
+              <p:cNvPr id="254" name="矩形 253">
+                <a:extLst>
+                  <a:ext uri="{FF2B5EF4-FFF2-40B4-BE49-F238E27FC236}">
+                    <a16:creationId xmlns:a16="http://schemas.microsoft.com/office/drawing/2014/main" id="{69EB4EE8-5B4E-4097-A322-784B9C457674}"/>
+                  </a:ext>
+                </a:extLst>
+              </p:cNvPr>
+              <p:cNvSpPr/>
+              <p:nvPr/>
+            </p:nvSpPr>
+            <p:spPr>
+              <a:xfrm>
+                <a:off x="1462444" y="704343"/>
+                <a:ext cx="889154" cy="343171"/>
+              </a:xfrm>
+              <a:prstGeom prst="rect">
+                <a:avLst/>
+              </a:prstGeom>
+            </p:spPr>
+            <p:txBody>
+              <a:bodyPr wrap="none">
+                <a:spAutoFit/>
+              </a:bodyPr>
+              <a:lstStyle/>
+              <a:p>
+                <a:pPr/>
+                <a14:m>
+                  <m:oMathPara xmlns:m="http://schemas.openxmlformats.org/officeDocument/2006/math">
+                    <m:oMathParaPr>
+                      <m:jc m:val="centerGroup"/>
+                    </m:oMathParaPr>
+                    <m:oMath xmlns:m="http://schemas.openxmlformats.org/officeDocument/2006/math">
+                      <m:r>
+                        <a:rPr lang="en-US" altLang="zh-TW" sz="1630" i="1">
+                          <a:latin typeface="Cambria Math" panose="02040503050406030204" pitchFamily="18" charset="0"/>
+                        </a:rPr>
+                        <m:t>ℓ=−1</m:t>
+                      </m:r>
+                    </m:oMath>
+                  </m:oMathPara>
+                </a14:m>
+                <a:endParaRPr lang="zh-TW" altLang="en-US" sz="1630" dirty="0">
+                  <a:latin typeface="Times New Roman" panose="02020603050405020304" pitchFamily="18" charset="0"/>
+                  <a:cs typeface="Times New Roman" panose="02020603050405020304" pitchFamily="18" charset="0"/>
+                </a:endParaRPr>
+              </a:p>
+            </p:txBody>
+          </p:sp>
+        </mc:Choice>
+        <mc:Fallback>
+          <p:sp>
+            <p:nvSpPr>
+              <p:cNvPr id="254" name="矩形 253">
+                <a:extLst>
+                  <a:ext uri="{FF2B5EF4-FFF2-40B4-BE49-F238E27FC236}">
+                    <a16:creationId xmlns:a16="http://schemas.microsoft.com/office/drawing/2014/main" id="{69EB4EE8-5B4E-4097-A322-784B9C457674}"/>
+                  </a:ext>
+                </a:extLst>
+              </p:cNvPr>
+              <p:cNvSpPr>
+                <a:spLocks noRot="1" noChangeAspect="1" noMove="1" noResize="1" noEditPoints="1" noAdjustHandles="1" noChangeArrowheads="1" noChangeShapeType="1" noTextEdit="1"/>
+              </p:cNvSpPr>
+              <p:nvPr/>
+            </p:nvSpPr>
+            <p:spPr>
+              <a:xfrm>
+                <a:off x="1462444" y="704343"/>
+                <a:ext cx="889154" cy="343171"/>
+              </a:xfrm>
+              <a:prstGeom prst="rect">
+                <a:avLst/>
+              </a:prstGeom>
+              <a:blipFill>
+                <a:blip r:embed="rId29"/>
+                <a:stretch>
+                  <a:fillRect/>
+                </a:stretch>
+              </a:blipFill>
+            </p:spPr>
+            <p:txBody>
+              <a:bodyPr/>
+              <a:lstStyle/>
+              <a:p>
+                <a:r>
+                  <a:rPr lang="zh-TW" altLang="en-US">
+                    <a:noFill/>
+                  </a:rPr>
+                  <a:t> </a:t>
+                </a:r>
+              </a:p>
+            </p:txBody>
+          </p:sp>
+        </mc:Fallback>
+      </mc:AlternateContent>
+      <mc:AlternateContent xmlns:mc="http://schemas.openxmlformats.org/markup-compatibility/2006">
+        <mc:Choice xmlns:a14="http://schemas.microsoft.com/office/drawing/2010/main" Requires="a14">
+          <p:sp>
+            <p:nvSpPr>
+              <p:cNvPr id="255" name="矩形 254">
+                <a:extLst>
+                  <a:ext uri="{FF2B5EF4-FFF2-40B4-BE49-F238E27FC236}">
+                    <a16:creationId xmlns:a16="http://schemas.microsoft.com/office/drawing/2014/main" id="{ADB96A3F-6FB2-42D8-9E50-43C201847A7C}"/>
+                  </a:ext>
+                </a:extLst>
+              </p:cNvPr>
+              <p:cNvSpPr/>
+              <p:nvPr/>
+            </p:nvSpPr>
+            <p:spPr>
+              <a:xfrm>
+                <a:off x="2905710" y="704343"/>
+                <a:ext cx="889154" cy="343171"/>
+              </a:xfrm>
+              <a:prstGeom prst="rect">
+                <a:avLst/>
+              </a:prstGeom>
+            </p:spPr>
+            <p:txBody>
+              <a:bodyPr wrap="none">
+                <a:spAutoFit/>
+              </a:bodyPr>
+              <a:lstStyle/>
+              <a:p>
+                <a:pPr/>
+                <a14:m>
+                  <m:oMathPara xmlns:m="http://schemas.openxmlformats.org/officeDocument/2006/math">
+                    <m:oMathParaPr>
+                      <m:jc m:val="centerGroup"/>
+                    </m:oMathParaPr>
+                    <m:oMath xmlns:m="http://schemas.openxmlformats.org/officeDocument/2006/math">
+                      <m:r>
+                        <a:rPr lang="en-US" altLang="zh-TW" sz="1630" i="1">
+                          <a:latin typeface="Cambria Math" panose="02040503050406030204" pitchFamily="18" charset="0"/>
+                        </a:rPr>
+                        <m:t>ℓ=−2</m:t>
+                      </m:r>
+                    </m:oMath>
+                  </m:oMathPara>
+                </a14:m>
+                <a:endParaRPr lang="zh-TW" altLang="en-US" sz="1630" dirty="0">
+                  <a:latin typeface="Times New Roman" panose="02020603050405020304" pitchFamily="18" charset="0"/>
+                  <a:cs typeface="Times New Roman" panose="02020603050405020304" pitchFamily="18" charset="0"/>
+                </a:endParaRPr>
+              </a:p>
+            </p:txBody>
+          </p:sp>
+        </mc:Choice>
+        <mc:Fallback>
+          <p:sp>
+            <p:nvSpPr>
+              <p:cNvPr id="255" name="矩形 254">
+                <a:extLst>
+                  <a:ext uri="{FF2B5EF4-FFF2-40B4-BE49-F238E27FC236}">
+                    <a16:creationId xmlns:a16="http://schemas.microsoft.com/office/drawing/2014/main" id="{ADB96A3F-6FB2-42D8-9E50-43C201847A7C}"/>
+                  </a:ext>
+                </a:extLst>
+              </p:cNvPr>
+              <p:cNvSpPr>
+                <a:spLocks noRot="1" noChangeAspect="1" noMove="1" noResize="1" noEditPoints="1" noAdjustHandles="1" noChangeArrowheads="1" noChangeShapeType="1" noTextEdit="1"/>
+              </p:cNvSpPr>
+              <p:nvPr/>
+            </p:nvSpPr>
+            <p:spPr>
+              <a:xfrm>
+                <a:off x="2905710" y="704343"/>
+                <a:ext cx="889154" cy="343171"/>
+              </a:xfrm>
+              <a:prstGeom prst="rect">
+                <a:avLst/>
+              </a:prstGeom>
+              <a:blipFill>
+                <a:blip r:embed="rId30"/>
+                <a:stretch>
+                  <a:fillRect/>
+                </a:stretch>
+              </a:blipFill>
+            </p:spPr>
+            <p:txBody>
+              <a:bodyPr/>
+              <a:lstStyle/>
+              <a:p>
+                <a:r>
+                  <a:rPr lang="zh-TW" altLang="en-US">
+                    <a:noFill/>
+                  </a:rPr>
+                  <a:t> </a:t>
+                </a:r>
+              </a:p>
+            </p:txBody>
+          </p:sp>
+        </mc:Fallback>
+      </mc:AlternateContent>
+      <mc:AlternateContent xmlns:mc="http://schemas.openxmlformats.org/markup-compatibility/2006">
+        <mc:Choice xmlns:a14="http://schemas.microsoft.com/office/drawing/2010/main" Requires="a14">
+          <p:sp>
+            <p:nvSpPr>
+              <p:cNvPr id="256" name="矩形 255">
+                <a:extLst>
+                  <a:ext uri="{FF2B5EF4-FFF2-40B4-BE49-F238E27FC236}">
+                    <a16:creationId xmlns:a16="http://schemas.microsoft.com/office/drawing/2014/main" id="{2DF06E1D-DE6F-4AC3-B5FB-5ED5DA15B19F}"/>
+                  </a:ext>
+                </a:extLst>
+              </p:cNvPr>
+              <p:cNvSpPr/>
+              <p:nvPr/>
+            </p:nvSpPr>
+            <p:spPr>
+              <a:xfrm>
+                <a:off x="4348976" y="704343"/>
+                <a:ext cx="733662" cy="343171"/>
+              </a:xfrm>
+              <a:prstGeom prst="rect">
+                <a:avLst/>
+              </a:prstGeom>
+            </p:spPr>
+            <p:txBody>
+              <a:bodyPr wrap="none">
+                <a:spAutoFit/>
+              </a:bodyPr>
+              <a:lstStyle/>
+              <a:p>
+                <a:pPr/>
+                <a14:m>
+                  <m:oMathPara xmlns:m="http://schemas.openxmlformats.org/officeDocument/2006/math">
+                    <m:oMathParaPr>
+                      <m:jc m:val="centerGroup"/>
+                    </m:oMathParaPr>
+                    <m:oMath xmlns:m="http://schemas.openxmlformats.org/officeDocument/2006/math">
+                      <m:r>
+                        <a:rPr lang="en-US" altLang="zh-TW" sz="1630" i="1">
+                          <a:latin typeface="Cambria Math" panose="02040503050406030204" pitchFamily="18" charset="0"/>
+                        </a:rPr>
+                        <m:t>ℓ=0</m:t>
+                      </m:r>
+                    </m:oMath>
+                  </m:oMathPara>
+                </a14:m>
+                <a:endParaRPr lang="zh-TW" altLang="en-US" sz="1630" dirty="0">
+                  <a:latin typeface="Times New Roman" panose="02020603050405020304" pitchFamily="18" charset="0"/>
+                  <a:cs typeface="Times New Roman" panose="02020603050405020304" pitchFamily="18" charset="0"/>
+                </a:endParaRPr>
+              </a:p>
+            </p:txBody>
+          </p:sp>
+        </mc:Choice>
+        <mc:Fallback>
+          <p:sp>
+            <p:nvSpPr>
+              <p:cNvPr id="256" name="矩形 255">
+                <a:extLst>
+                  <a:ext uri="{FF2B5EF4-FFF2-40B4-BE49-F238E27FC236}">
+                    <a16:creationId xmlns:a16="http://schemas.microsoft.com/office/drawing/2014/main" id="{2DF06E1D-DE6F-4AC3-B5FB-5ED5DA15B19F}"/>
+                  </a:ext>
+                </a:extLst>
+              </p:cNvPr>
+              <p:cNvSpPr>
+                <a:spLocks noRot="1" noChangeAspect="1" noMove="1" noResize="1" noEditPoints="1" noAdjustHandles="1" noChangeArrowheads="1" noChangeShapeType="1" noTextEdit="1"/>
+              </p:cNvSpPr>
+              <p:nvPr/>
+            </p:nvSpPr>
+            <p:spPr>
+              <a:xfrm>
+                <a:off x="4348976" y="704343"/>
+                <a:ext cx="733662" cy="343171"/>
+              </a:xfrm>
+              <a:prstGeom prst="rect">
+                <a:avLst/>
+              </a:prstGeom>
+              <a:blipFill>
+                <a:blip r:embed="rId31"/>
+                <a:stretch>
+                  <a:fillRect/>
+                </a:stretch>
+              </a:blipFill>
+            </p:spPr>
+            <p:txBody>
+              <a:bodyPr/>
+              <a:lstStyle/>
+              <a:p>
+                <a:r>
+                  <a:rPr lang="zh-TW" altLang="en-US">
+                    <a:noFill/>
+                  </a:rPr>
+                  <a:t> </a:t>
+                </a:r>
+              </a:p>
+            </p:txBody>
+          </p:sp>
+        </mc:Fallback>
+      </mc:AlternateContent>
+      <mc:AlternateContent xmlns:mc="http://schemas.openxmlformats.org/markup-compatibility/2006">
+        <mc:Choice xmlns:a14="http://schemas.microsoft.com/office/drawing/2010/main" Requires="a14">
+          <p:sp>
+            <p:nvSpPr>
+              <p:cNvPr id="257" name="矩形 256">
+                <a:extLst>
+                  <a:ext uri="{FF2B5EF4-FFF2-40B4-BE49-F238E27FC236}">
+                    <a16:creationId xmlns:a16="http://schemas.microsoft.com/office/drawing/2014/main" id="{11730B68-B888-4253-81F5-33C838AA52E1}"/>
+                  </a:ext>
+                </a:extLst>
+              </p:cNvPr>
+              <p:cNvSpPr/>
+              <p:nvPr/>
+            </p:nvSpPr>
+            <p:spPr>
+              <a:xfrm>
+                <a:off x="5636750" y="704343"/>
+                <a:ext cx="733662" cy="343171"/>
+              </a:xfrm>
+              <a:prstGeom prst="rect">
+                <a:avLst/>
+              </a:prstGeom>
+            </p:spPr>
+            <p:txBody>
+              <a:bodyPr wrap="none">
+                <a:spAutoFit/>
+              </a:bodyPr>
+              <a:lstStyle/>
+              <a:p>
+                <a:pPr/>
+                <a14:m>
+                  <m:oMathPara xmlns:m="http://schemas.openxmlformats.org/officeDocument/2006/math">
+                    <m:oMathParaPr>
+                      <m:jc m:val="centerGroup"/>
+                    </m:oMathParaPr>
+                    <m:oMath xmlns:m="http://schemas.openxmlformats.org/officeDocument/2006/math">
+                      <m:r>
+                        <a:rPr lang="en-US" altLang="zh-TW" sz="1630" i="1">
+                          <a:latin typeface="Cambria Math" panose="02040503050406030204" pitchFamily="18" charset="0"/>
+                        </a:rPr>
+                        <m:t>ℓ=1</m:t>
+                      </m:r>
+                    </m:oMath>
+                  </m:oMathPara>
+                </a14:m>
+                <a:endParaRPr lang="zh-TW" altLang="en-US" sz="1630" dirty="0">
+                  <a:latin typeface="Times New Roman" panose="02020603050405020304" pitchFamily="18" charset="0"/>
+                  <a:cs typeface="Times New Roman" panose="02020603050405020304" pitchFamily="18" charset="0"/>
+                </a:endParaRPr>
+              </a:p>
+            </p:txBody>
+          </p:sp>
+        </mc:Choice>
+        <mc:Fallback>
+          <p:sp>
+            <p:nvSpPr>
+              <p:cNvPr id="257" name="矩形 256">
+                <a:extLst>
+                  <a:ext uri="{FF2B5EF4-FFF2-40B4-BE49-F238E27FC236}">
+                    <a16:creationId xmlns:a16="http://schemas.microsoft.com/office/drawing/2014/main" id="{11730B68-B888-4253-81F5-33C838AA52E1}"/>
+                  </a:ext>
+                </a:extLst>
+              </p:cNvPr>
+              <p:cNvSpPr>
+                <a:spLocks noRot="1" noChangeAspect="1" noMove="1" noResize="1" noEditPoints="1" noAdjustHandles="1" noChangeArrowheads="1" noChangeShapeType="1" noTextEdit="1"/>
+              </p:cNvSpPr>
+              <p:nvPr/>
+            </p:nvSpPr>
+            <p:spPr>
+              <a:xfrm>
+                <a:off x="5636750" y="704343"/>
+                <a:ext cx="733662" cy="343171"/>
+              </a:xfrm>
+              <a:prstGeom prst="rect">
+                <a:avLst/>
+              </a:prstGeom>
+              <a:blipFill>
+                <a:blip r:embed="rId32"/>
+                <a:stretch>
+                  <a:fillRect/>
+                </a:stretch>
+              </a:blipFill>
+            </p:spPr>
+            <p:txBody>
+              <a:bodyPr/>
+              <a:lstStyle/>
+              <a:p>
+                <a:r>
+                  <a:rPr lang="zh-TW" altLang="en-US">
+                    <a:noFill/>
+                  </a:rPr>
+                  <a:t> </a:t>
+                </a:r>
+              </a:p>
+            </p:txBody>
+          </p:sp>
+        </mc:Fallback>
+      </mc:AlternateContent>
+      <mc:AlternateContent xmlns:mc="http://schemas.openxmlformats.org/markup-compatibility/2006">
+        <mc:Choice xmlns:a14="http://schemas.microsoft.com/office/drawing/2010/main" Requires="a14">
+          <p:sp>
+            <p:nvSpPr>
+              <p:cNvPr id="258" name="矩形 257">
+                <a:extLst>
+                  <a:ext uri="{FF2B5EF4-FFF2-40B4-BE49-F238E27FC236}">
+                    <a16:creationId xmlns:a16="http://schemas.microsoft.com/office/drawing/2014/main" id="{4E4FAD64-43F0-4BD9-B7AD-6211EF98281C}"/>
+                  </a:ext>
+                </a:extLst>
+              </p:cNvPr>
+              <p:cNvSpPr/>
+              <p:nvPr/>
+            </p:nvSpPr>
+            <p:spPr>
+              <a:xfrm>
+                <a:off x="6924523" y="704343"/>
+                <a:ext cx="733662" cy="343171"/>
+              </a:xfrm>
+              <a:prstGeom prst="rect">
+                <a:avLst/>
+              </a:prstGeom>
+            </p:spPr>
+            <p:txBody>
+              <a:bodyPr wrap="none">
+                <a:spAutoFit/>
+              </a:bodyPr>
+              <a:lstStyle/>
+              <a:p>
+                <a:pPr/>
+                <a14:m>
+                  <m:oMathPara xmlns:m="http://schemas.openxmlformats.org/officeDocument/2006/math">
+                    <m:oMathParaPr>
+                      <m:jc m:val="centerGroup"/>
+                    </m:oMathParaPr>
+                    <m:oMath xmlns:m="http://schemas.openxmlformats.org/officeDocument/2006/math">
+                      <m:r>
+                        <a:rPr lang="en-US" altLang="zh-TW" sz="1630" i="1">
+                          <a:latin typeface="Cambria Math" panose="02040503050406030204" pitchFamily="18" charset="0"/>
+                        </a:rPr>
+                        <m:t>ℓ=2</m:t>
+                      </m:r>
+                    </m:oMath>
+                  </m:oMathPara>
+                </a14:m>
+                <a:endParaRPr lang="zh-TW" altLang="en-US" sz="1630" dirty="0">
+                  <a:latin typeface="Times New Roman" panose="02020603050405020304" pitchFamily="18" charset="0"/>
+                  <a:cs typeface="Times New Roman" panose="02020603050405020304" pitchFamily="18" charset="0"/>
+                </a:endParaRPr>
+              </a:p>
+            </p:txBody>
+          </p:sp>
+        </mc:Choice>
+        <mc:Fallback>
+          <p:sp>
+            <p:nvSpPr>
+              <p:cNvPr id="258" name="矩形 257">
+                <a:extLst>
+                  <a:ext uri="{FF2B5EF4-FFF2-40B4-BE49-F238E27FC236}">
+                    <a16:creationId xmlns:a16="http://schemas.microsoft.com/office/drawing/2014/main" id="{4E4FAD64-43F0-4BD9-B7AD-6211EF98281C}"/>
+                  </a:ext>
+                </a:extLst>
+              </p:cNvPr>
+              <p:cNvSpPr>
+                <a:spLocks noRot="1" noChangeAspect="1" noMove="1" noResize="1" noEditPoints="1" noAdjustHandles="1" noChangeArrowheads="1" noChangeShapeType="1" noTextEdit="1"/>
+              </p:cNvSpPr>
+              <p:nvPr/>
+            </p:nvSpPr>
+            <p:spPr>
+              <a:xfrm>
+                <a:off x="6924523" y="704343"/>
+                <a:ext cx="733662" cy="343171"/>
+              </a:xfrm>
+              <a:prstGeom prst="rect">
+                <a:avLst/>
+              </a:prstGeom>
+              <a:blipFill>
+                <a:blip r:embed="rId33"/>
+                <a:stretch>
+                  <a:fillRect/>
+                </a:stretch>
+              </a:blipFill>
+            </p:spPr>
+            <p:txBody>
+              <a:bodyPr/>
+              <a:lstStyle/>
+              <a:p>
+                <a:r>
+                  <a:rPr lang="zh-TW" altLang="en-US">
+                    <a:noFill/>
+                  </a:rPr>
+                  <a:t> </a:t>
+                </a:r>
+              </a:p>
+            </p:txBody>
+          </p:sp>
+        </mc:Fallback>
+      </mc:AlternateContent>
+      <p:sp>
+        <p:nvSpPr>
+          <p:cNvPr id="56" name="矩形 55">
+            <a:extLst>
+              <a:ext uri="{FF2B5EF4-FFF2-40B4-BE49-F238E27FC236}">
+                <a16:creationId xmlns:a16="http://schemas.microsoft.com/office/drawing/2014/main" id="{797AD572-5775-4288-8939-87CD3B6325A6}"/>
+              </a:ext>
+            </a:extLst>
+          </p:cNvPr>
+          <p:cNvSpPr/>
+          <p:nvPr/>
+        </p:nvSpPr>
+        <p:spPr>
+          <a:xfrm>
+            <a:off x="8040109" y="1947368"/>
+            <a:ext cx="487634" cy="343171"/>
+          </a:xfrm>
+          <a:prstGeom prst="rect">
+            <a:avLst/>
+          </a:prstGeom>
+        </p:spPr>
+        <p:txBody>
+          <a:bodyPr wrap="none">
+            <a:spAutoFit/>
+          </a:bodyPr>
+          <a:lstStyle/>
+          <a:p>
+            <a:r>
+              <a:rPr lang="en-US" altLang="zh-TW" sz="1630" dirty="0">
+                <a:latin typeface="Times New Roman" panose="02020603050405020304" pitchFamily="18" charset="0"/>
+                <a:cs typeface="Times New Roman" panose="02020603050405020304" pitchFamily="18" charset="0"/>
+              </a:rPr>
+              <a:t>a.u.</a:t>
+            </a:r>
+            <a:endParaRPr lang="zh-TW" altLang="en-US" sz="1630" dirty="0">
+              <a:latin typeface="Times New Roman" panose="02020603050405020304" pitchFamily="18" charset="0"/>
+              <a:cs typeface="Times New Roman" panose="02020603050405020304" pitchFamily="18" charset="0"/>
+            </a:endParaRPr>
+          </a:p>
+        </p:txBody>
+      </p:sp>
+      <p:sp>
+        <p:nvSpPr>
+          <p:cNvPr id="57" name="矩形 56">
+            <a:extLst>
+              <a:ext uri="{FF2B5EF4-FFF2-40B4-BE49-F238E27FC236}">
+                <a16:creationId xmlns:a16="http://schemas.microsoft.com/office/drawing/2014/main" id="{7E4C2416-B327-4D68-9A7C-099E8E98D2D4}"/>
+              </a:ext>
+            </a:extLst>
+          </p:cNvPr>
+          <p:cNvSpPr/>
+          <p:nvPr/>
+        </p:nvSpPr>
+        <p:spPr>
+          <a:xfrm>
+            <a:off x="8015538" y="5587213"/>
+            <a:ext cx="487634" cy="343171"/>
+          </a:xfrm>
+          <a:prstGeom prst="rect">
+            <a:avLst/>
+          </a:prstGeom>
+        </p:spPr>
+        <p:txBody>
+          <a:bodyPr wrap="none">
+            <a:spAutoFit/>
+          </a:bodyPr>
+          <a:lstStyle/>
+          <a:p>
+            <a:r>
+              <a:rPr lang="en-US" altLang="zh-TW" sz="1630" dirty="0">
+                <a:latin typeface="Times New Roman" panose="02020603050405020304" pitchFamily="18" charset="0"/>
+                <a:cs typeface="Times New Roman" panose="02020603050405020304" pitchFamily="18" charset="0"/>
+              </a:rPr>
+              <a:t>a.u.</a:t>
+            </a:r>
+            <a:endParaRPr lang="zh-TW" altLang="en-US" sz="1630" dirty="0">
+              <a:latin typeface="Times New Roman" panose="02020603050405020304" pitchFamily="18" charset="0"/>
+              <a:cs typeface="Times New Roman" panose="02020603050405020304" pitchFamily="18" charset="0"/>
+            </a:endParaRPr>
+          </a:p>
+        </p:txBody>
+      </p:sp>
+      <p:pic>
+        <p:nvPicPr>
+          <p:cNvPr id="58" name="圖片 57">
+            <a:extLst>
+              <a:ext uri="{FF2B5EF4-FFF2-40B4-BE49-F238E27FC236}">
+                <a16:creationId xmlns:a16="http://schemas.microsoft.com/office/drawing/2014/main" id="{36B5CFFE-242B-4573-87F4-362200E6CB34}"/>
+              </a:ext>
+            </a:extLst>
+          </p:cNvPr>
+          <p:cNvPicPr>
+            <a:picLocks noChangeAspect="1"/>
+          </p:cNvPicPr>
+          <p:nvPr/>
+        </p:nvPicPr>
+        <p:blipFill rotWithShape="1">
+          <a:blip r:embed="rId34">
+            <a:clrChange>
+              <a:clrFrom>
+                <a:srgbClr val="FFFFFF"/>
+              </a:clrFrom>
+              <a:clrTo>
+                <a:srgbClr val="FFFFFF">
+                  <a:alpha val="0"/>
+                </a:srgbClr>
+              </a:clrTo>
+            </a:clrChange>
+          </a:blip>
+          <a:srcRect r="32321"/>
+          <a:stretch/>
+        </p:blipFill>
+        <p:spPr>
+          <a:xfrm>
+            <a:off x="8044894" y="4414227"/>
+            <a:ext cx="407456" cy="1328804"/>
+          </a:xfrm>
+          <a:prstGeom prst="rect">
+            <a:avLst/>
+          </a:prstGeom>
+        </p:spPr>
+      </p:pic>
+      <p:sp>
+        <p:nvSpPr>
+          <p:cNvPr id="59" name="矩形 58">
+            <a:extLst>
+              <a:ext uri="{FF2B5EF4-FFF2-40B4-BE49-F238E27FC236}">
+                <a16:creationId xmlns:a16="http://schemas.microsoft.com/office/drawing/2014/main" id="{564D86CE-95CE-4311-A6BA-FBC49B431C30}"/>
+              </a:ext>
+            </a:extLst>
+          </p:cNvPr>
+          <p:cNvSpPr/>
+          <p:nvPr/>
+        </p:nvSpPr>
+        <p:spPr>
+          <a:xfrm>
+            <a:off x="8343650" y="639479"/>
+            <a:ext cx="288862" cy="343171"/>
+          </a:xfrm>
+          <a:prstGeom prst="rect">
+            <a:avLst/>
+          </a:prstGeom>
+        </p:spPr>
+        <p:txBody>
+          <a:bodyPr wrap="none">
+            <a:spAutoFit/>
+          </a:bodyPr>
+          <a:lstStyle/>
+          <a:p>
+            <a:r>
+              <a:rPr lang="en-US" altLang="zh-TW" sz="1630" dirty="0">
+                <a:latin typeface="Times New Roman" panose="02020603050405020304" pitchFamily="18" charset="0"/>
+                <a:cs typeface="Times New Roman" panose="02020603050405020304" pitchFamily="18" charset="0"/>
+              </a:rPr>
+              <a:t>1</a:t>
+            </a:r>
+            <a:endParaRPr lang="zh-TW" altLang="en-US" sz="1630" dirty="0">
+              <a:latin typeface="Times New Roman" panose="02020603050405020304" pitchFamily="18" charset="0"/>
+              <a:cs typeface="Times New Roman" panose="02020603050405020304" pitchFamily="18" charset="0"/>
+            </a:endParaRPr>
+          </a:p>
+        </p:txBody>
+      </p:sp>
+      <p:sp>
+        <p:nvSpPr>
+          <p:cNvPr id="60" name="矩形 59">
+            <a:extLst>
+              <a:ext uri="{FF2B5EF4-FFF2-40B4-BE49-F238E27FC236}">
+                <a16:creationId xmlns:a16="http://schemas.microsoft.com/office/drawing/2014/main" id="{A2533813-81CE-4B60-A2C6-2266CF4DE05F}"/>
+              </a:ext>
+            </a:extLst>
+          </p:cNvPr>
+          <p:cNvSpPr/>
+          <p:nvPr/>
+        </p:nvSpPr>
+        <p:spPr>
+          <a:xfrm>
+            <a:off x="8362700" y="1906304"/>
+            <a:ext cx="288862" cy="343171"/>
+          </a:xfrm>
+          <a:prstGeom prst="rect">
+            <a:avLst/>
+          </a:prstGeom>
+        </p:spPr>
+        <p:txBody>
+          <a:bodyPr wrap="none">
+            <a:spAutoFit/>
+          </a:bodyPr>
+          <a:lstStyle/>
+          <a:p>
+            <a:r>
+              <a:rPr lang="en-US" altLang="zh-TW" sz="1630" dirty="0">
+                <a:latin typeface="Times New Roman" panose="02020603050405020304" pitchFamily="18" charset="0"/>
+                <a:cs typeface="Times New Roman" panose="02020603050405020304" pitchFamily="18" charset="0"/>
+              </a:rPr>
+              <a:t>0</a:t>
+            </a:r>
+            <a:endParaRPr lang="zh-TW" altLang="en-US" sz="1630" dirty="0">
+              <a:latin typeface="Times New Roman" panose="02020603050405020304" pitchFamily="18" charset="0"/>
+              <a:cs typeface="Times New Roman" panose="02020603050405020304" pitchFamily="18" charset="0"/>
+            </a:endParaRPr>
+          </a:p>
+        </p:txBody>
+      </p:sp>
+      <p:sp>
+        <p:nvSpPr>
+          <p:cNvPr id="61" name="矩形 60">
+            <a:extLst>
+              <a:ext uri="{FF2B5EF4-FFF2-40B4-BE49-F238E27FC236}">
+                <a16:creationId xmlns:a16="http://schemas.microsoft.com/office/drawing/2014/main" id="{02D3B054-B522-476B-A353-E4CC137E993F}"/>
+              </a:ext>
+            </a:extLst>
+          </p:cNvPr>
+          <p:cNvSpPr/>
+          <p:nvPr/>
+        </p:nvSpPr>
+        <p:spPr>
+          <a:xfrm>
+            <a:off x="8353175" y="4261764"/>
+            <a:ext cx="288862" cy="343171"/>
+          </a:xfrm>
+          <a:prstGeom prst="rect">
+            <a:avLst/>
+          </a:prstGeom>
+        </p:spPr>
+        <p:txBody>
+          <a:bodyPr wrap="none">
+            <a:spAutoFit/>
+          </a:bodyPr>
+          <a:lstStyle/>
+          <a:p>
+            <a:r>
+              <a:rPr lang="en-US" altLang="zh-TW" sz="1630" dirty="0">
+                <a:latin typeface="Times New Roman" panose="02020603050405020304" pitchFamily="18" charset="0"/>
+                <a:cs typeface="Times New Roman" panose="02020603050405020304" pitchFamily="18" charset="0"/>
+              </a:rPr>
+              <a:t>1</a:t>
+            </a:r>
+            <a:endParaRPr lang="zh-TW" altLang="en-US" sz="1630" dirty="0">
+              <a:latin typeface="Times New Roman" panose="02020603050405020304" pitchFamily="18" charset="0"/>
+              <a:cs typeface="Times New Roman" panose="02020603050405020304" pitchFamily="18" charset="0"/>
+            </a:endParaRPr>
+          </a:p>
+        </p:txBody>
+      </p:sp>
+      <p:sp>
+        <p:nvSpPr>
+          <p:cNvPr id="62" name="矩形 61">
+            <a:extLst>
+              <a:ext uri="{FF2B5EF4-FFF2-40B4-BE49-F238E27FC236}">
+                <a16:creationId xmlns:a16="http://schemas.microsoft.com/office/drawing/2014/main" id="{1D433D44-68DB-443E-B327-4157514A705D}"/>
+              </a:ext>
+            </a:extLst>
+          </p:cNvPr>
+          <p:cNvSpPr/>
+          <p:nvPr/>
+        </p:nvSpPr>
+        <p:spPr>
+          <a:xfrm>
+            <a:off x="8372225" y="5500014"/>
+            <a:ext cx="357790" cy="343171"/>
+          </a:xfrm>
+          <a:prstGeom prst="rect">
+            <a:avLst/>
+          </a:prstGeom>
+        </p:spPr>
+        <p:txBody>
+          <a:bodyPr wrap="none">
+            <a:spAutoFit/>
+          </a:bodyPr>
+          <a:lstStyle/>
+          <a:p>
+            <a:r>
+              <a:rPr lang="en-US" altLang="zh-TW" sz="1630" dirty="0">
+                <a:latin typeface="Times New Roman" panose="02020603050405020304" pitchFamily="18" charset="0"/>
+                <a:cs typeface="Times New Roman" panose="02020603050405020304" pitchFamily="18" charset="0"/>
+              </a:rPr>
+              <a:t>-1</a:t>
+            </a:r>
+            <a:endParaRPr lang="zh-TW" altLang="en-US" sz="1630" dirty="0">
+              <a:latin typeface="Times New Roman" panose="02020603050405020304" pitchFamily="18" charset="0"/>
+              <a:cs typeface="Times New Roman" panose="02020603050405020304" pitchFamily="18" charset="0"/>
+            </a:endParaRPr>
+          </a:p>
+        </p:txBody>
+      </p:sp>
     </p:spTree>
     <p:extLst>
       <p:ext uri="{BB962C8B-B14F-4D97-AF65-F5344CB8AC3E}">
